--- a/presentation/GO-Präsi.pptx
+++ b/presentation/GO-Präsi.pptx
@@ -5,26 +5,30 @@
     <p:sldMasterId id="2147483648" r:id="rId1"/>
   </p:sldMasterIdLst>
   <p:notesMasterIdLst>
-    <p:notesMasterId r:id="rId19"/>
+    <p:notesMasterId r:id="rId23"/>
   </p:notesMasterIdLst>
   <p:sldIdLst>
     <p:sldId id="256" r:id="rId2"/>
     <p:sldId id="257" r:id="rId3"/>
     <p:sldId id="258" r:id="rId4"/>
     <p:sldId id="259" r:id="rId5"/>
-    <p:sldId id="262" r:id="rId6"/>
-    <p:sldId id="272" r:id="rId7"/>
-    <p:sldId id="273" r:id="rId8"/>
-    <p:sldId id="266" r:id="rId9"/>
-    <p:sldId id="263" r:id="rId10"/>
-    <p:sldId id="260" r:id="rId11"/>
-    <p:sldId id="264" r:id="rId12"/>
-    <p:sldId id="265" r:id="rId13"/>
-    <p:sldId id="267" r:id="rId14"/>
-    <p:sldId id="268" r:id="rId15"/>
-    <p:sldId id="269" r:id="rId16"/>
-    <p:sldId id="270" r:id="rId17"/>
-    <p:sldId id="271" r:id="rId18"/>
+    <p:sldId id="272" r:id="rId6"/>
+    <p:sldId id="262" r:id="rId7"/>
+    <p:sldId id="274" r:id="rId8"/>
+    <p:sldId id="275" r:id="rId9"/>
+    <p:sldId id="273" r:id="rId10"/>
+    <p:sldId id="276" r:id="rId11"/>
+    <p:sldId id="266" r:id="rId12"/>
+    <p:sldId id="277" r:id="rId13"/>
+    <p:sldId id="263" r:id="rId14"/>
+    <p:sldId id="260" r:id="rId15"/>
+    <p:sldId id="264" r:id="rId16"/>
+    <p:sldId id="265" r:id="rId17"/>
+    <p:sldId id="267" r:id="rId18"/>
+    <p:sldId id="268" r:id="rId19"/>
+    <p:sldId id="269" r:id="rId20"/>
+    <p:sldId id="270" r:id="rId21"/>
+    <p:sldId id="271" r:id="rId22"/>
   </p:sldIdLst>
   <p:sldSz cx="9144000" cy="6858000" type="screen4x3"/>
   <p:notesSz cx="6858000" cy="9144000"/>
@@ -1076,13 +1080,13 @@
       <dgm:prSet presAssocID="{6035F41B-C1D9-48B7-BECE-AC82CF6E464F}" presName="iconRect" presStyleLbl="node1" presStyleIdx="0" presStyleCnt="3"/>
       <dgm:spPr>
         <a:blipFill>
-          <a:blip xmlns:r="http://schemas.openxmlformats.org/officeDocument/2006/relationships">
+          <a:blip xmlns:r="http://schemas.openxmlformats.org/officeDocument/2006/relationships" r:embed="rId1">
             <a:extLst>
               <a:ext uri="{28A0092B-C50C-407E-A947-70E740481C1C}">
                 <a14:useLocalDpi xmlns:a14="http://schemas.microsoft.com/office/drawing/2010/main" val="0"/>
               </a:ext>
               <a:ext uri="{96DAC541-7B7A-43D3-8B79-37D633B846F1}">
-                <asvg:svgBlip xmlns:asvg="http://schemas.microsoft.com/office/drawing/2016/SVG/main" r:embed="rId1"/>
+                <asvg:svgBlip xmlns:asvg="http://schemas.microsoft.com/office/drawing/2016/SVG/main" r:embed="rId2"/>
               </a:ext>
             </a:extLst>
           </a:blip>
@@ -1129,13 +1133,13 @@
       <dgm:prSet presAssocID="{97A36E21-AA6A-4FAC-ADC7-525133752386}" presName="iconRect" presStyleLbl="node1" presStyleIdx="1" presStyleCnt="3"/>
       <dgm:spPr>
         <a:blipFill>
-          <a:blip xmlns:r="http://schemas.openxmlformats.org/officeDocument/2006/relationships">
+          <a:blip xmlns:r="http://schemas.openxmlformats.org/officeDocument/2006/relationships" r:embed="rId3">
             <a:extLst>
               <a:ext uri="{28A0092B-C50C-407E-A947-70E740481C1C}">
                 <a14:useLocalDpi xmlns:a14="http://schemas.microsoft.com/office/drawing/2010/main" val="0"/>
               </a:ext>
               <a:ext uri="{96DAC541-7B7A-43D3-8B79-37D633B846F1}">
-                <asvg:svgBlip xmlns:asvg="http://schemas.microsoft.com/office/drawing/2016/SVG/main" r:embed="rId2"/>
+                <asvg:svgBlip xmlns:asvg="http://schemas.microsoft.com/office/drawing/2016/SVG/main" r:embed="rId4"/>
               </a:ext>
             </a:extLst>
           </a:blip>
@@ -1182,13 +1186,13 @@
       <dgm:prSet presAssocID="{EDB45AFD-6D51-46E1-9941-995569820DEF}" presName="iconRect" presStyleLbl="node1" presStyleIdx="2" presStyleCnt="3"/>
       <dgm:spPr>
         <a:blipFill>
-          <a:blip xmlns:r="http://schemas.openxmlformats.org/officeDocument/2006/relationships">
+          <a:blip xmlns:r="http://schemas.openxmlformats.org/officeDocument/2006/relationships" r:embed="rId5">
             <a:extLst>
               <a:ext uri="{28A0092B-C50C-407E-A947-70E740481C1C}">
                 <a14:useLocalDpi xmlns:a14="http://schemas.microsoft.com/office/drawing/2010/main" val="0"/>
               </a:ext>
               <a:ext uri="{96DAC541-7B7A-43D3-8B79-37D633B846F1}">
-                <asvg:svgBlip xmlns:asvg="http://schemas.microsoft.com/office/drawing/2016/SVG/main" r:embed="rId3"/>
+                <asvg:svgBlip xmlns:asvg="http://schemas.microsoft.com/office/drawing/2016/SVG/main" r:embed="rId6"/>
               </a:ext>
             </a:extLst>
           </a:blip>
@@ -1320,13 +1324,13 @@
           <a:avLst/>
         </a:prstGeom>
         <a:blipFill>
-          <a:blip xmlns:r="http://schemas.openxmlformats.org/officeDocument/2006/relationships">
+          <a:blip xmlns:r="http://schemas.openxmlformats.org/officeDocument/2006/relationships" r:embed="rId1">
             <a:extLst>
               <a:ext uri="{28A0092B-C50C-407E-A947-70E740481C1C}">
                 <a14:useLocalDpi xmlns:a14="http://schemas.microsoft.com/office/drawing/2010/main" val="0"/>
               </a:ext>
               <a:ext uri="{96DAC541-7B7A-43D3-8B79-37D633B846F1}">
-                <asvg:svgBlip xmlns:asvg="http://schemas.microsoft.com/office/drawing/2016/SVG/main" r:embed="rId1"/>
+                <asvg:svgBlip xmlns:asvg="http://schemas.microsoft.com/office/drawing/2016/SVG/main" r:embed="rId2"/>
               </a:ext>
             </a:extLst>
           </a:blip>
@@ -1472,13 +1476,13 @@
           <a:avLst/>
         </a:prstGeom>
         <a:blipFill>
-          <a:blip xmlns:r="http://schemas.openxmlformats.org/officeDocument/2006/relationships">
+          <a:blip xmlns:r="http://schemas.openxmlformats.org/officeDocument/2006/relationships" r:embed="rId3">
             <a:extLst>
               <a:ext uri="{28A0092B-C50C-407E-A947-70E740481C1C}">
                 <a14:useLocalDpi xmlns:a14="http://schemas.microsoft.com/office/drawing/2010/main" val="0"/>
               </a:ext>
               <a:ext uri="{96DAC541-7B7A-43D3-8B79-37D633B846F1}">
-                <asvg:svgBlip xmlns:asvg="http://schemas.microsoft.com/office/drawing/2016/SVG/main" r:embed="rId2"/>
+                <asvg:svgBlip xmlns:asvg="http://schemas.microsoft.com/office/drawing/2016/SVG/main" r:embed="rId4"/>
               </a:ext>
             </a:extLst>
           </a:blip>
@@ -1624,13 +1628,13 @@
           <a:avLst/>
         </a:prstGeom>
         <a:blipFill>
-          <a:blip xmlns:r="http://schemas.openxmlformats.org/officeDocument/2006/relationships">
+          <a:blip xmlns:r="http://schemas.openxmlformats.org/officeDocument/2006/relationships" r:embed="rId5">
             <a:extLst>
               <a:ext uri="{28A0092B-C50C-407E-A947-70E740481C1C}">
                 <a14:useLocalDpi xmlns:a14="http://schemas.microsoft.com/office/drawing/2010/main" val="0"/>
               </a:ext>
               <a:ext uri="{96DAC541-7B7A-43D3-8B79-37D633B846F1}">
-                <asvg:svgBlip xmlns:asvg="http://schemas.microsoft.com/office/drawing/2016/SVG/main" r:embed="rId3"/>
+                <asvg:svgBlip xmlns:asvg="http://schemas.microsoft.com/office/drawing/2016/SVG/main" r:embed="rId6"/>
               </a:ext>
             </a:extLst>
           </a:blip>
@@ -3138,7 +3142,7 @@
           <a:p>
             <a:fld id="{D9EF2C90-E8EE-43CD-8D96-4E8A72565517}" type="datetimeFigureOut">
               <a:rPr lang="de-CH" smtClean="0"/>
-              <a:t>20.04.2026</a:t>
+              <a:t>20.04.26</a:t>
             </a:fld>
             <a:endParaRPr lang="de-CH"/>
           </a:p>
@@ -3297,7 +3301,7 @@
           <a:p>
             <a:fld id="{62945742-DB6B-4CE6-B846-92E01489719F}" type="slidenum">
               <a:rPr lang="de-CH" smtClean="0"/>
-              <a:t>‹Nr.›</a:t>
+              <a:t>‹#›</a:t>
             </a:fld>
             <a:endParaRPr lang="de-CH"/>
           </a:p>
@@ -4131,7 +4135,7 @@
           <a:p>
             <a:fld id="{5BCAD085-E8A6-8845-BD4E-CB4CCA059FC4}" type="datetimeFigureOut">
               <a:rPr lang="en-US" smtClean="0"/>
-              <a:t>4/20/2026</a:t>
+              <a:t>4/20/26</a:t>
             </a:fld>
             <a:endParaRPr lang="en-US"/>
           </a:p>
@@ -4173,7 +4177,7 @@
           <a:p>
             <a:fld id="{C1FF6DA9-008F-8B48-92A6-B652298478BF}" type="slidenum">
               <a:rPr lang="en-US" smtClean="0"/>
-              <a:t>‹Nr.›</a:t>
+              <a:t>‹#›</a:t>
             </a:fld>
             <a:endParaRPr lang="en-US"/>
           </a:p>
@@ -4299,7 +4303,7 @@
           <a:p>
             <a:fld id="{5BCAD085-E8A6-8845-BD4E-CB4CCA059FC4}" type="datetimeFigureOut">
               <a:rPr lang="en-US" smtClean="0"/>
-              <a:t>4/20/2026</a:t>
+              <a:t>4/20/26</a:t>
             </a:fld>
             <a:endParaRPr lang="en-US"/>
           </a:p>
@@ -4341,7 +4345,7 @@
           <a:p>
             <a:fld id="{C1FF6DA9-008F-8B48-92A6-B652298478BF}" type="slidenum">
               <a:rPr lang="en-US" smtClean="0"/>
-              <a:t>‹Nr.›</a:t>
+              <a:t>‹#›</a:t>
             </a:fld>
             <a:endParaRPr lang="en-US"/>
           </a:p>
@@ -4477,7 +4481,7 @@
           <a:p>
             <a:fld id="{5BCAD085-E8A6-8845-BD4E-CB4CCA059FC4}" type="datetimeFigureOut">
               <a:rPr lang="en-US" smtClean="0"/>
-              <a:t>4/20/2026</a:t>
+              <a:t>4/20/26</a:t>
             </a:fld>
             <a:endParaRPr lang="en-US"/>
           </a:p>
@@ -4519,7 +4523,7 @@
           <a:p>
             <a:fld id="{C1FF6DA9-008F-8B48-92A6-B652298478BF}" type="slidenum">
               <a:rPr lang="en-US" smtClean="0"/>
-              <a:t>‹Nr.›</a:t>
+              <a:t>‹#›</a:t>
             </a:fld>
             <a:endParaRPr lang="en-US"/>
           </a:p>
@@ -4645,7 +4649,7 @@
           <a:p>
             <a:fld id="{5BCAD085-E8A6-8845-BD4E-CB4CCA059FC4}" type="datetimeFigureOut">
               <a:rPr lang="en-US" smtClean="0"/>
-              <a:t>4/20/2026</a:t>
+              <a:t>4/20/26</a:t>
             </a:fld>
             <a:endParaRPr lang="en-US"/>
           </a:p>
@@ -4687,7 +4691,7 @@
           <a:p>
             <a:fld id="{C1FF6DA9-008F-8B48-92A6-B652298478BF}" type="slidenum">
               <a:rPr lang="en-US" smtClean="0"/>
-              <a:t>‹Nr.›</a:t>
+              <a:t>‹#›</a:t>
             </a:fld>
             <a:endParaRPr lang="en-US"/>
           </a:p>
@@ -4890,7 +4894,7 @@
           <a:p>
             <a:fld id="{5BCAD085-E8A6-8845-BD4E-CB4CCA059FC4}" type="datetimeFigureOut">
               <a:rPr lang="en-US" smtClean="0"/>
-              <a:t>4/20/2026</a:t>
+              <a:t>4/20/26</a:t>
             </a:fld>
             <a:endParaRPr lang="en-US"/>
           </a:p>
@@ -4932,7 +4936,7 @@
           <a:p>
             <a:fld id="{C1FF6DA9-008F-8B48-92A6-B652298478BF}" type="slidenum">
               <a:rPr lang="en-US" smtClean="0"/>
-              <a:t>‹Nr.›</a:t>
+              <a:t>‹#›</a:t>
             </a:fld>
             <a:endParaRPr lang="en-US"/>
           </a:p>
@@ -5175,7 +5179,7 @@
           <a:p>
             <a:fld id="{5BCAD085-E8A6-8845-BD4E-CB4CCA059FC4}" type="datetimeFigureOut">
               <a:rPr lang="en-US" smtClean="0"/>
-              <a:t>4/20/2026</a:t>
+              <a:t>4/20/26</a:t>
             </a:fld>
             <a:endParaRPr lang="en-US"/>
           </a:p>
@@ -5217,7 +5221,7 @@
           <a:p>
             <a:fld id="{C1FF6DA9-008F-8B48-92A6-B652298478BF}" type="slidenum">
               <a:rPr lang="en-US" smtClean="0"/>
-              <a:t>‹Nr.›</a:t>
+              <a:t>‹#›</a:t>
             </a:fld>
             <a:endParaRPr lang="en-US"/>
           </a:p>
@@ -5594,7 +5598,7 @@
           <a:p>
             <a:fld id="{5BCAD085-E8A6-8845-BD4E-CB4CCA059FC4}" type="datetimeFigureOut">
               <a:rPr lang="en-US" smtClean="0"/>
-              <a:t>4/20/2026</a:t>
+              <a:t>4/20/26</a:t>
             </a:fld>
             <a:endParaRPr lang="en-US"/>
           </a:p>
@@ -5636,7 +5640,7 @@
           <a:p>
             <a:fld id="{C1FF6DA9-008F-8B48-92A6-B652298478BF}" type="slidenum">
               <a:rPr lang="en-US" smtClean="0"/>
-              <a:t>‹Nr.›</a:t>
+              <a:t>‹#›</a:t>
             </a:fld>
             <a:endParaRPr lang="en-US"/>
           </a:p>
@@ -5711,7 +5715,7 @@
           <a:p>
             <a:fld id="{5BCAD085-E8A6-8845-BD4E-CB4CCA059FC4}" type="datetimeFigureOut">
               <a:rPr lang="en-US" smtClean="0"/>
-              <a:t>4/20/2026</a:t>
+              <a:t>4/20/26</a:t>
             </a:fld>
             <a:endParaRPr lang="en-US"/>
           </a:p>
@@ -5753,7 +5757,7 @@
           <a:p>
             <a:fld id="{C1FF6DA9-008F-8B48-92A6-B652298478BF}" type="slidenum">
               <a:rPr lang="en-US" smtClean="0"/>
-              <a:t>‹Nr.›</a:t>
+              <a:t>‹#›</a:t>
             </a:fld>
             <a:endParaRPr lang="en-US"/>
           </a:p>
@@ -5806,7 +5810,7 @@
           <a:p>
             <a:fld id="{5BCAD085-E8A6-8845-BD4E-CB4CCA059FC4}" type="datetimeFigureOut">
               <a:rPr lang="en-US" smtClean="0"/>
-              <a:t>4/20/2026</a:t>
+              <a:t>4/20/26</a:t>
             </a:fld>
             <a:endParaRPr lang="en-US"/>
           </a:p>
@@ -5848,7 +5852,7 @@
           <a:p>
             <a:fld id="{C1FF6DA9-008F-8B48-92A6-B652298478BF}" type="slidenum">
               <a:rPr lang="en-US" smtClean="0"/>
-              <a:t>‹Nr.›</a:t>
+              <a:t>‹#›</a:t>
             </a:fld>
             <a:endParaRPr lang="en-US"/>
           </a:p>
@@ -6081,7 +6085,7 @@
           <a:p>
             <a:fld id="{5BCAD085-E8A6-8845-BD4E-CB4CCA059FC4}" type="datetimeFigureOut">
               <a:rPr lang="en-US" smtClean="0"/>
-              <a:t>4/20/2026</a:t>
+              <a:t>4/20/26</a:t>
             </a:fld>
             <a:endParaRPr lang="en-US"/>
           </a:p>
@@ -6123,7 +6127,7 @@
           <a:p>
             <a:fld id="{C1FF6DA9-008F-8B48-92A6-B652298478BF}" type="slidenum">
               <a:rPr lang="en-US" smtClean="0"/>
-              <a:t>‹Nr.›</a:t>
+              <a:t>‹#›</a:t>
             </a:fld>
             <a:endParaRPr lang="en-US"/>
           </a:p>
@@ -6333,7 +6337,7 @@
           <a:p>
             <a:fld id="{5BCAD085-E8A6-8845-BD4E-CB4CCA059FC4}" type="datetimeFigureOut">
               <a:rPr lang="en-US" smtClean="0"/>
-              <a:t>4/20/2026</a:t>
+              <a:t>4/20/26</a:t>
             </a:fld>
             <a:endParaRPr lang="en-US"/>
           </a:p>
@@ -6375,7 +6379,7 @@
           <a:p>
             <a:fld id="{C1FF6DA9-008F-8B48-92A6-B652298478BF}" type="slidenum">
               <a:rPr lang="en-US" smtClean="0"/>
-              <a:t>‹Nr.›</a:t>
+              <a:t>‹#›</a:t>
             </a:fld>
             <a:endParaRPr lang="en-US"/>
           </a:p>
@@ -6544,7 +6548,7 @@
           <a:p>
             <a:fld id="{5BCAD085-E8A6-8845-BD4E-CB4CCA059FC4}" type="datetimeFigureOut">
               <a:rPr lang="en-US" smtClean="0"/>
-              <a:t>4/20/2026</a:t>
+              <a:t>4/20/26</a:t>
             </a:fld>
             <a:endParaRPr lang="en-US"/>
           </a:p>
@@ -6622,7 +6626,7 @@
           <a:p>
             <a:fld id="{C1FF6DA9-008F-8B48-92A6-B652298478BF}" type="slidenum">
               <a:rPr lang="en-US" smtClean="0"/>
-              <a:t>‹Nr.›</a:t>
+              <a:t>‹#›</a:t>
             </a:fld>
             <a:endParaRPr lang="en-US"/>
           </a:p>
@@ -7528,6 +7532,1904 @@
         <p:cNvPr id="1" name="">
           <a:extLst>
             <a:ext uri="{FF2B5EF4-FFF2-40B4-BE49-F238E27FC236}">
+              <a16:creationId xmlns:a16="http://schemas.microsoft.com/office/drawing/2014/main" id="{1422B429-924E-38BF-0BC7-8AB83FA47097}"/>
+            </a:ext>
+          </a:extLst>
+        </p:cNvPr>
+        <p:cNvGrpSpPr/>
+        <p:nvPr/>
+      </p:nvGrpSpPr>
+      <p:grpSpPr>
+        <a:xfrm>
+          <a:off x="0" y="0"/>
+          <a:ext cx="0" cy="0"/>
+          <a:chOff x="0" y="0"/>
+          <a:chExt cx="0" cy="0"/>
+        </a:xfrm>
+      </p:grpSpPr>
+      <p:sp useBgFill="1">
+        <p:nvSpPr>
+          <p:cNvPr id="2057" name="Rectangle 2056">
+            <a:extLst>
+              <a:ext uri="{FF2B5EF4-FFF2-40B4-BE49-F238E27FC236}">
+                <a16:creationId xmlns:a16="http://schemas.microsoft.com/office/drawing/2014/main" id="{7402BCCD-8498-F895-FB49-3A6814D953FC}"/>
+              </a:ext>
+              <a:ext uri="{C183D7F6-B498-43B3-948B-1728B52AA6E4}">
+                <adec:decorative xmlns:adec="http://schemas.microsoft.com/office/drawing/2017/decorative" val="1"/>
+              </a:ext>
+            </a:extLst>
+          </p:cNvPr>
+          <p:cNvSpPr>
+            <a:spLocks noGrp="1" noRot="1" noChangeAspect="1" noMove="1" noResize="1" noEditPoints="1" noAdjustHandles="1" noChangeArrowheads="1" noChangeShapeType="1" noTextEdit="1"/>
+          </p:cNvSpPr>
+          <p:nvPr>
+            <p:extLst>
+              <p:ext uri="{386F3935-93C4-4BCD-93E2-E3B085C9AB24}">
+                <p16:designElem xmlns:p16="http://schemas.microsoft.com/office/powerpoint/2015/main" val="1"/>
+              </p:ext>
+            </p:extLst>
+          </p:nvPr>
+        </p:nvSpPr>
+        <p:spPr>
+          <a:xfrm>
+            <a:off x="0" y="0"/>
+            <a:ext cx="9143999" cy="6857365"/>
+          </a:xfrm>
+          <a:prstGeom prst="rect">
+            <a:avLst/>
+          </a:prstGeom>
+          <a:ln>
+            <a:noFill/>
+          </a:ln>
+        </p:spPr>
+        <p:style>
+          <a:lnRef idx="2">
+            <a:schemeClr val="accent1">
+              <a:shade val="50000"/>
+            </a:schemeClr>
+          </a:lnRef>
+          <a:fillRef idx="1">
+            <a:schemeClr val="accent1"/>
+          </a:fillRef>
+          <a:effectRef idx="0">
+            <a:schemeClr val="accent1"/>
+          </a:effectRef>
+          <a:fontRef idx="minor">
+            <a:schemeClr val="lt1"/>
+          </a:fontRef>
+        </p:style>
+        <p:txBody>
+          <a:bodyPr rtlCol="0" anchor="ctr"/>
+          <a:lstStyle/>
+          <a:p>
+            <a:pPr algn="ctr"/>
+            <a:endParaRPr lang="en-US"/>
+          </a:p>
+        </p:txBody>
+      </p:sp>
+      <p:sp>
+        <p:nvSpPr>
+          <p:cNvPr id="2" name="Titel 1">
+            <a:extLst>
+              <a:ext uri="{FF2B5EF4-FFF2-40B4-BE49-F238E27FC236}">
+                <a16:creationId xmlns:a16="http://schemas.microsoft.com/office/drawing/2014/main" id="{37AD8B81-93FE-CB35-DFBF-BA8F6C5E60FD}"/>
+              </a:ext>
+            </a:extLst>
+          </p:cNvPr>
+          <p:cNvSpPr>
+            <a:spLocks noGrp="1"/>
+          </p:cNvSpPr>
+          <p:nvPr>
+            <p:ph type="title"/>
+          </p:nvPr>
+        </p:nvSpPr>
+        <p:spPr>
+          <a:xfrm>
+            <a:off x="606478" y="386930"/>
+            <a:ext cx="6927525" cy="1188950"/>
+          </a:xfrm>
+        </p:spPr>
+        <p:txBody>
+          <a:bodyPr anchor="b">
+            <a:normAutofit/>
+          </a:bodyPr>
+          <a:lstStyle/>
+          <a:p>
+            <a:r>
+              <a:rPr lang="de-CH" sz="4700" dirty="0"/>
+              <a:t>Maps &amp; Slices</a:t>
+            </a:r>
+          </a:p>
+        </p:txBody>
+      </p:sp>
+      <p:grpSp>
+        <p:nvGrpSpPr>
+          <p:cNvPr id="2059" name="Group 2058">
+            <a:extLst>
+              <a:ext uri="{FF2B5EF4-FFF2-40B4-BE49-F238E27FC236}">
+                <a16:creationId xmlns:a16="http://schemas.microsoft.com/office/drawing/2014/main" id="{DE216921-7EE9-EFE6-44AD-A3B756E86DC1}"/>
+              </a:ext>
+              <a:ext uri="{C183D7F6-B498-43B3-948B-1728B52AA6E4}">
+                <adec:decorative xmlns:adec="http://schemas.microsoft.com/office/drawing/2017/decorative" val="1"/>
+              </a:ext>
+            </a:extLst>
+          </p:cNvPr>
+          <p:cNvGrpSpPr>
+            <a:grpSpLocks noGrp="1" noUngrp="1" noRot="1" noChangeAspect="1" noMove="1" noResize="1"/>
+          </p:cNvGrpSpPr>
+          <p:nvPr>
+            <p:extLst>
+              <p:ext uri="{386F3935-93C4-4BCD-93E2-E3B085C9AB24}">
+                <p16:designElem xmlns:p16="http://schemas.microsoft.com/office/powerpoint/2015/main" val="1"/>
+              </p:ext>
+            </p:extLst>
+          </p:nvPr>
+        </p:nvGrpSpPr>
+        <p:grpSpPr>
+          <a:xfrm>
+            <a:off x="-1" y="1998368"/>
+            <a:ext cx="8771274" cy="782176"/>
+            <a:chOff x="-2" y="1998368"/>
+            <a:chExt cx="11695083" cy="782176"/>
+          </a:xfrm>
+        </p:grpSpPr>
+        <p:sp>
+          <p:nvSpPr>
+            <p:cNvPr id="2060" name="Rectangle 2059">
+              <a:extLst>
+                <a:ext uri="{FF2B5EF4-FFF2-40B4-BE49-F238E27FC236}">
+                  <a16:creationId xmlns:a16="http://schemas.microsoft.com/office/drawing/2014/main" id="{3835E63B-DABD-FA75-AE20-E2F8F53925E9}"/>
+                </a:ext>
+                <a:ext uri="{C183D7F6-B498-43B3-948B-1728B52AA6E4}">
+                  <adec:decorative xmlns:adec="http://schemas.microsoft.com/office/drawing/2017/decorative" val="1"/>
+                </a:ext>
+              </a:extLst>
+            </p:cNvPr>
+            <p:cNvSpPr/>
+            <p:nvPr>
+              <p:extLst>
+                <p:ext uri="{386F3935-93C4-4BCD-93E2-E3B085C9AB24}">
+                  <p16:designElem xmlns:p16="http://schemas.microsoft.com/office/powerpoint/2015/main" val="1"/>
+                </p:ext>
+              </p:extLst>
+            </p:nvPr>
+          </p:nvSpPr>
+          <p:spPr>
+            <a:xfrm rot="5400000">
+              <a:off x="11228040" y="2313027"/>
+              <a:ext cx="781700" cy="152382"/>
+            </a:xfrm>
+            <a:prstGeom prst="rect">
+              <a:avLst/>
+            </a:prstGeom>
+            <a:solidFill>
+              <a:schemeClr val="accent4"/>
+            </a:solidFill>
+            <a:ln>
+              <a:noFill/>
+            </a:ln>
+          </p:spPr>
+          <p:style>
+            <a:lnRef idx="2">
+              <a:schemeClr val="accent1">
+                <a:shade val="50000"/>
+              </a:schemeClr>
+            </a:lnRef>
+            <a:fillRef idx="1">
+              <a:schemeClr val="accent1"/>
+            </a:fillRef>
+            <a:effectRef idx="0">
+              <a:schemeClr val="accent1"/>
+            </a:effectRef>
+            <a:fontRef idx="minor">
+              <a:schemeClr val="lt1"/>
+            </a:fontRef>
+          </p:style>
+          <p:txBody>
+            <a:bodyPr rtlCol="0" anchor="ctr"/>
+            <a:lstStyle/>
+            <a:p>
+              <a:pPr algn="ctr"/>
+              <a:endParaRPr lang="en-US"/>
+            </a:p>
+          </p:txBody>
+        </p:sp>
+        <p:sp>
+          <p:nvSpPr>
+            <p:cNvPr id="2061" name="Rectangle 2060">
+              <a:extLst>
+                <a:ext uri="{FF2B5EF4-FFF2-40B4-BE49-F238E27FC236}">
+                  <a16:creationId xmlns:a16="http://schemas.microsoft.com/office/drawing/2014/main" id="{3B6EA3F6-276C-754D-03DB-3A255433B2A9}"/>
+                </a:ext>
+                <a:ext uri="{C183D7F6-B498-43B3-948B-1728B52AA6E4}">
+                  <adec:decorative xmlns:adec="http://schemas.microsoft.com/office/drawing/2017/decorative" val="1"/>
+                </a:ext>
+              </a:extLst>
+            </p:cNvPr>
+            <p:cNvSpPr/>
+            <p:nvPr>
+              <p:extLst>
+                <p:ext uri="{386F3935-93C4-4BCD-93E2-E3B085C9AB24}">
+                  <p16:designElem xmlns:p16="http://schemas.microsoft.com/office/powerpoint/2015/main" val="1"/>
+                </p:ext>
+              </p:extLst>
+            </p:nvPr>
+          </p:nvSpPr>
+          <p:spPr>
+            <a:xfrm flipH="1" flipV="1">
+              <a:off x="-2" y="1998845"/>
+              <a:ext cx="11454595" cy="781699"/>
+            </a:xfrm>
+            <a:prstGeom prst="rect">
+              <a:avLst/>
+            </a:prstGeom>
+            <a:solidFill>
+              <a:schemeClr val="accent4"/>
+            </a:solidFill>
+            <a:ln>
+              <a:noFill/>
+            </a:ln>
+          </p:spPr>
+          <p:style>
+            <a:lnRef idx="2">
+              <a:schemeClr val="accent1">
+                <a:shade val="50000"/>
+              </a:schemeClr>
+            </a:lnRef>
+            <a:fillRef idx="1">
+              <a:schemeClr val="accent1"/>
+            </a:fillRef>
+            <a:effectRef idx="0">
+              <a:schemeClr val="accent1"/>
+            </a:effectRef>
+            <a:fontRef idx="minor">
+              <a:schemeClr val="lt1"/>
+            </a:fontRef>
+          </p:style>
+          <p:txBody>
+            <a:bodyPr rtlCol="0" anchor="ctr"/>
+            <a:lstStyle/>
+            <a:p>
+              <a:pPr algn="ctr"/>
+              <a:endParaRPr lang="en-US"/>
+            </a:p>
+          </p:txBody>
+        </p:sp>
+      </p:grpSp>
+      <p:sp>
+        <p:nvSpPr>
+          <p:cNvPr id="2063" name="Rectangle 2062">
+            <a:extLst>
+              <a:ext uri="{FF2B5EF4-FFF2-40B4-BE49-F238E27FC236}">
+                <a16:creationId xmlns:a16="http://schemas.microsoft.com/office/drawing/2014/main" id="{82F5968E-22DD-92BC-BF02-61C6E2E954CC}"/>
+              </a:ext>
+              <a:ext uri="{C183D7F6-B498-43B3-948B-1728B52AA6E4}">
+                <adec:decorative xmlns:adec="http://schemas.microsoft.com/office/drawing/2017/decorative" val="1"/>
+              </a:ext>
+            </a:extLst>
+          </p:cNvPr>
+          <p:cNvSpPr>
+            <a:spLocks noGrp="1" noRot="1" noChangeAspect="1" noMove="1" noResize="1" noEditPoints="1" noAdjustHandles="1" noChangeArrowheads="1" noChangeShapeType="1" noTextEdit="1"/>
+          </p:cNvSpPr>
+          <p:nvPr>
+            <p:extLst>
+              <p:ext uri="{386F3935-93C4-4BCD-93E2-E3B085C9AB24}">
+                <p16:designElem xmlns:p16="http://schemas.microsoft.com/office/powerpoint/2015/main" val="1"/>
+              </p:ext>
+            </p:extLst>
+          </p:nvPr>
+        </p:nvSpPr>
+        <p:spPr>
+          <a:xfrm>
+            <a:off x="0" y="2203079"/>
+            <a:ext cx="8537521" cy="4147845"/>
+          </a:xfrm>
+          <a:prstGeom prst="rect">
+            <a:avLst/>
+          </a:prstGeom>
+          <a:solidFill>
+            <a:schemeClr val="bg1"/>
+          </a:solidFill>
+          <a:ln>
+            <a:noFill/>
+          </a:ln>
+          <a:effectLst>
+            <a:outerShdw blurRad="139700" dist="127000" dir="5400000" algn="t" rotWithShape="0">
+              <a:prstClr val="black">
+                <a:alpha val="15000"/>
+              </a:prstClr>
+            </a:outerShdw>
+          </a:effectLst>
+        </p:spPr>
+        <p:style>
+          <a:lnRef idx="2">
+            <a:schemeClr val="accent1">
+              <a:shade val="50000"/>
+            </a:schemeClr>
+          </a:lnRef>
+          <a:fillRef idx="1">
+            <a:schemeClr val="accent1"/>
+          </a:fillRef>
+          <a:effectRef idx="0">
+            <a:schemeClr val="accent1"/>
+          </a:effectRef>
+          <a:fontRef idx="minor">
+            <a:schemeClr val="lt1"/>
+          </a:fontRef>
+        </p:style>
+        <p:txBody>
+          <a:bodyPr rtlCol="0" anchor="ctr"/>
+          <a:lstStyle/>
+          <a:p>
+            <a:pPr algn="ctr"/>
+            <a:endParaRPr lang="en-US"/>
+          </a:p>
+        </p:txBody>
+      </p:sp>
+      <p:pic>
+        <p:nvPicPr>
+          <p:cNvPr id="5" name="Content Placeholder 4">
+            <a:extLst>
+              <a:ext uri="{FF2B5EF4-FFF2-40B4-BE49-F238E27FC236}">
+                <a16:creationId xmlns:a16="http://schemas.microsoft.com/office/drawing/2014/main" id="{C124BCC5-BC45-8F4A-453A-D063416C41D6}"/>
+              </a:ext>
+            </a:extLst>
+          </p:cNvPr>
+          <p:cNvPicPr>
+            <a:picLocks noGrp="1" noChangeAspect="1"/>
+          </p:cNvPicPr>
+          <p:nvPr>
+            <p:ph idx="1"/>
+          </p:nvPr>
+        </p:nvPicPr>
+        <p:blipFill>
+          <a:blip r:embed="rId2"/>
+          <a:stretch>
+            <a:fillRect/>
+          </a:stretch>
+        </p:blipFill>
+        <p:spPr>
+          <a:xfrm>
+            <a:off x="79103" y="2340989"/>
+            <a:ext cx="7454900" cy="2438400"/>
+          </a:xfrm>
+          <a:prstGeom prst="rect">
+            <a:avLst/>
+          </a:prstGeom>
+        </p:spPr>
+      </p:pic>
+      <p:pic>
+        <p:nvPicPr>
+          <p:cNvPr id="2052" name="Picture 4" descr="Learning Golang in 24 hours | Kislay Verma">
+            <a:extLst>
+              <a:ext uri="{FF2B5EF4-FFF2-40B4-BE49-F238E27FC236}">
+                <a16:creationId xmlns:a16="http://schemas.microsoft.com/office/drawing/2014/main" id="{A49211B5-1149-9CBB-4972-43D7DB5A037F}"/>
+              </a:ext>
+            </a:extLst>
+          </p:cNvPr>
+          <p:cNvPicPr>
+            <a:picLocks noChangeAspect="1" noChangeArrowheads="1"/>
+          </p:cNvPicPr>
+          <p:nvPr/>
+        </p:nvPicPr>
+        <p:blipFill>
+          <a:blip r:embed="rId3">
+            <a:extLst>
+              <a:ext uri="{28A0092B-C50C-407E-A947-70E740481C1C}">
+                <a14:useLocalDpi xmlns:a14="http://schemas.microsoft.com/office/drawing/2010/main" val="0"/>
+              </a:ext>
+            </a:extLst>
+          </a:blip>
+          <a:srcRect/>
+          <a:stretch>
+            <a:fillRect/>
+          </a:stretch>
+        </p:blipFill>
+        <p:spPr bwMode="auto">
+          <a:xfrm>
+            <a:off x="7955280" y="0"/>
+            <a:ext cx="1116418" cy="1369399"/>
+          </a:xfrm>
+          <a:prstGeom prst="rect">
+            <a:avLst/>
+          </a:prstGeom>
+          <a:noFill/>
+          <a:extLst>
+            <a:ext uri="{909E8E84-426E-40DD-AFC4-6F175D3DCCD1}">
+              <a14:hiddenFill xmlns:a14="http://schemas.microsoft.com/office/drawing/2010/main">
+                <a:solidFill>
+                  <a:srgbClr val="FFFFFF"/>
+                </a:solidFill>
+              </a14:hiddenFill>
+            </a:ext>
+          </a:extLst>
+        </p:spPr>
+      </p:pic>
+      <p:pic>
+        <p:nvPicPr>
+          <p:cNvPr id="6" name="Picture 5">
+            <a:extLst>
+              <a:ext uri="{FF2B5EF4-FFF2-40B4-BE49-F238E27FC236}">
+                <a16:creationId xmlns:a16="http://schemas.microsoft.com/office/drawing/2014/main" id="{6B8505F5-DDE7-A0BA-C31D-E4A3E7D20CE4}"/>
+              </a:ext>
+            </a:extLst>
+          </p:cNvPr>
+          <p:cNvPicPr>
+            <a:picLocks noChangeAspect="1"/>
+          </p:cNvPicPr>
+          <p:nvPr/>
+        </p:nvPicPr>
+        <p:blipFill>
+          <a:blip r:embed="rId4"/>
+          <a:stretch>
+            <a:fillRect/>
+          </a:stretch>
+        </p:blipFill>
+        <p:spPr>
+          <a:xfrm>
+            <a:off x="79103" y="5209556"/>
+            <a:ext cx="5346700" cy="711200"/>
+          </a:xfrm>
+          <a:prstGeom prst="rect">
+            <a:avLst/>
+          </a:prstGeom>
+        </p:spPr>
+      </p:pic>
+    </p:spTree>
+    <p:extLst>
+      <p:ext uri="{BB962C8B-B14F-4D97-AF65-F5344CB8AC3E}">
+        <p14:creationId xmlns:p14="http://schemas.microsoft.com/office/powerpoint/2010/main" val="3427786389"/>
+      </p:ext>
+    </p:extLst>
+  </p:cSld>
+  <p:clrMapOvr>
+    <a:masterClrMapping/>
+  </p:clrMapOvr>
+</p:sld>
+</file>
+
+<file path=ppt/slides/slide11.xml><?xml version="1.0" encoding="utf-8"?>
+<p:sld xmlns:a="http://schemas.openxmlformats.org/drawingml/2006/main" xmlns:r="http://schemas.openxmlformats.org/officeDocument/2006/relationships" xmlns:p="http://schemas.openxmlformats.org/presentationml/2006/main">
+  <p:cSld>
+    <p:bg>
+      <p:bgPr>
+        <a:solidFill>
+          <a:schemeClr val="bg1"/>
+        </a:solidFill>
+        <a:effectLst/>
+      </p:bgPr>
+    </p:bg>
+    <p:spTree>
+      <p:nvGrpSpPr>
+        <p:cNvPr id="1" name="">
+          <a:extLst>
+            <a:ext uri="{FF2B5EF4-FFF2-40B4-BE49-F238E27FC236}">
+              <a16:creationId xmlns:a16="http://schemas.microsoft.com/office/drawing/2014/main" id="{889522E0-8191-FC52-5CFD-F2A33A7437F8}"/>
+            </a:ext>
+          </a:extLst>
+        </p:cNvPr>
+        <p:cNvGrpSpPr/>
+        <p:nvPr/>
+      </p:nvGrpSpPr>
+      <p:grpSpPr>
+        <a:xfrm>
+          <a:off x="0" y="0"/>
+          <a:ext cx="0" cy="0"/>
+          <a:chOff x="0" y="0"/>
+          <a:chExt cx="0" cy="0"/>
+        </a:xfrm>
+      </p:grpSpPr>
+      <p:sp useBgFill="1">
+        <p:nvSpPr>
+          <p:cNvPr id="2057" name="Rectangle 2056">
+            <a:extLst>
+              <a:ext uri="{FF2B5EF4-FFF2-40B4-BE49-F238E27FC236}">
+                <a16:creationId xmlns:a16="http://schemas.microsoft.com/office/drawing/2014/main" id="{CE61B5A9-75F8-C90C-7750-AD98FA383187}"/>
+              </a:ext>
+              <a:ext uri="{C183D7F6-B498-43B3-948B-1728B52AA6E4}">
+                <adec:decorative xmlns:adec="http://schemas.microsoft.com/office/drawing/2017/decorative" val="1"/>
+              </a:ext>
+            </a:extLst>
+          </p:cNvPr>
+          <p:cNvSpPr>
+            <a:spLocks noGrp="1" noRot="1" noChangeAspect="1" noMove="1" noResize="1" noEditPoints="1" noAdjustHandles="1" noChangeArrowheads="1" noChangeShapeType="1" noTextEdit="1"/>
+          </p:cNvSpPr>
+          <p:nvPr>
+            <p:extLst>
+              <p:ext uri="{386F3935-93C4-4BCD-93E2-E3B085C9AB24}">
+                <p16:designElem xmlns:p16="http://schemas.microsoft.com/office/powerpoint/2015/main" val="1"/>
+              </p:ext>
+            </p:extLst>
+          </p:nvPr>
+        </p:nvSpPr>
+        <p:spPr>
+          <a:xfrm>
+            <a:off x="0" y="0"/>
+            <a:ext cx="9143999" cy="6857365"/>
+          </a:xfrm>
+          <a:prstGeom prst="rect">
+            <a:avLst/>
+          </a:prstGeom>
+          <a:ln>
+            <a:noFill/>
+          </a:ln>
+        </p:spPr>
+        <p:style>
+          <a:lnRef idx="2">
+            <a:schemeClr val="accent1">
+              <a:shade val="50000"/>
+            </a:schemeClr>
+          </a:lnRef>
+          <a:fillRef idx="1">
+            <a:schemeClr val="accent1"/>
+          </a:fillRef>
+          <a:effectRef idx="0">
+            <a:schemeClr val="accent1"/>
+          </a:effectRef>
+          <a:fontRef idx="minor">
+            <a:schemeClr val="lt1"/>
+          </a:fontRef>
+        </p:style>
+        <p:txBody>
+          <a:bodyPr rtlCol="0" anchor="ctr"/>
+          <a:lstStyle/>
+          <a:p>
+            <a:pPr algn="ctr"/>
+            <a:endParaRPr lang="en-US"/>
+          </a:p>
+        </p:txBody>
+      </p:sp>
+      <p:sp>
+        <p:nvSpPr>
+          <p:cNvPr id="2" name="Titel 1">
+            <a:extLst>
+              <a:ext uri="{FF2B5EF4-FFF2-40B4-BE49-F238E27FC236}">
+                <a16:creationId xmlns:a16="http://schemas.microsoft.com/office/drawing/2014/main" id="{683C65F9-23E4-72A7-787D-29C9770866E9}"/>
+              </a:ext>
+            </a:extLst>
+          </p:cNvPr>
+          <p:cNvSpPr>
+            <a:spLocks noGrp="1"/>
+          </p:cNvSpPr>
+          <p:nvPr>
+            <p:ph type="title"/>
+          </p:nvPr>
+        </p:nvSpPr>
+        <p:spPr>
+          <a:xfrm>
+            <a:off x="606478" y="386930"/>
+            <a:ext cx="6927525" cy="1188950"/>
+          </a:xfrm>
+        </p:spPr>
+        <p:txBody>
+          <a:bodyPr anchor="b">
+            <a:normAutofit/>
+          </a:bodyPr>
+          <a:lstStyle/>
+          <a:p>
+            <a:r>
+              <a:rPr lang="de-CH" sz="4700" dirty="0" err="1"/>
+              <a:t>Defer</a:t>
+            </a:r>
+            <a:endParaRPr lang="de-CH" sz="4700" dirty="0"/>
+          </a:p>
+        </p:txBody>
+      </p:sp>
+      <p:grpSp>
+        <p:nvGrpSpPr>
+          <p:cNvPr id="2059" name="Group 2058">
+            <a:extLst>
+              <a:ext uri="{FF2B5EF4-FFF2-40B4-BE49-F238E27FC236}">
+                <a16:creationId xmlns:a16="http://schemas.microsoft.com/office/drawing/2014/main" id="{86087ACA-52D5-B423-2E52-30CA83D694BB}"/>
+              </a:ext>
+              <a:ext uri="{C183D7F6-B498-43B3-948B-1728B52AA6E4}">
+                <adec:decorative xmlns:adec="http://schemas.microsoft.com/office/drawing/2017/decorative" val="1"/>
+              </a:ext>
+            </a:extLst>
+          </p:cNvPr>
+          <p:cNvGrpSpPr>
+            <a:grpSpLocks noGrp="1" noUngrp="1" noRot="1" noChangeAspect="1" noMove="1" noResize="1"/>
+          </p:cNvGrpSpPr>
+          <p:nvPr>
+            <p:extLst>
+              <p:ext uri="{386F3935-93C4-4BCD-93E2-E3B085C9AB24}">
+                <p16:designElem xmlns:p16="http://schemas.microsoft.com/office/powerpoint/2015/main" val="1"/>
+              </p:ext>
+            </p:extLst>
+          </p:nvPr>
+        </p:nvGrpSpPr>
+        <p:grpSpPr>
+          <a:xfrm>
+            <a:off x="-1" y="1998368"/>
+            <a:ext cx="8771274" cy="782176"/>
+            <a:chOff x="-2" y="1998368"/>
+            <a:chExt cx="11695083" cy="782176"/>
+          </a:xfrm>
+        </p:grpSpPr>
+        <p:sp>
+          <p:nvSpPr>
+            <p:cNvPr id="2060" name="Rectangle 2059">
+              <a:extLst>
+                <a:ext uri="{FF2B5EF4-FFF2-40B4-BE49-F238E27FC236}">
+                  <a16:creationId xmlns:a16="http://schemas.microsoft.com/office/drawing/2014/main" id="{90ACB274-48E1-BDAD-C4BF-691212CFFBE7}"/>
+                </a:ext>
+                <a:ext uri="{C183D7F6-B498-43B3-948B-1728B52AA6E4}">
+                  <adec:decorative xmlns:adec="http://schemas.microsoft.com/office/drawing/2017/decorative" val="1"/>
+                </a:ext>
+              </a:extLst>
+            </p:cNvPr>
+            <p:cNvSpPr/>
+            <p:nvPr>
+              <p:extLst>
+                <p:ext uri="{386F3935-93C4-4BCD-93E2-E3B085C9AB24}">
+                  <p16:designElem xmlns:p16="http://schemas.microsoft.com/office/powerpoint/2015/main" val="1"/>
+                </p:ext>
+              </p:extLst>
+            </p:nvPr>
+          </p:nvSpPr>
+          <p:spPr>
+            <a:xfrm rot="5400000">
+              <a:off x="11228040" y="2313027"/>
+              <a:ext cx="781700" cy="152382"/>
+            </a:xfrm>
+            <a:prstGeom prst="rect">
+              <a:avLst/>
+            </a:prstGeom>
+            <a:solidFill>
+              <a:schemeClr val="accent4"/>
+            </a:solidFill>
+            <a:ln>
+              <a:noFill/>
+            </a:ln>
+          </p:spPr>
+          <p:style>
+            <a:lnRef idx="2">
+              <a:schemeClr val="accent1">
+                <a:shade val="50000"/>
+              </a:schemeClr>
+            </a:lnRef>
+            <a:fillRef idx="1">
+              <a:schemeClr val="accent1"/>
+            </a:fillRef>
+            <a:effectRef idx="0">
+              <a:schemeClr val="accent1"/>
+            </a:effectRef>
+            <a:fontRef idx="minor">
+              <a:schemeClr val="lt1"/>
+            </a:fontRef>
+          </p:style>
+          <p:txBody>
+            <a:bodyPr rtlCol="0" anchor="ctr"/>
+            <a:lstStyle/>
+            <a:p>
+              <a:pPr algn="ctr"/>
+              <a:endParaRPr lang="en-US"/>
+            </a:p>
+          </p:txBody>
+        </p:sp>
+        <p:sp>
+          <p:nvSpPr>
+            <p:cNvPr id="2061" name="Rectangle 2060">
+              <a:extLst>
+                <a:ext uri="{FF2B5EF4-FFF2-40B4-BE49-F238E27FC236}">
+                  <a16:creationId xmlns:a16="http://schemas.microsoft.com/office/drawing/2014/main" id="{B79B482B-1721-F56D-BAB4-794FC03E7594}"/>
+                </a:ext>
+                <a:ext uri="{C183D7F6-B498-43B3-948B-1728B52AA6E4}">
+                  <adec:decorative xmlns:adec="http://schemas.microsoft.com/office/drawing/2017/decorative" val="1"/>
+                </a:ext>
+              </a:extLst>
+            </p:cNvPr>
+            <p:cNvSpPr/>
+            <p:nvPr>
+              <p:extLst>
+                <p:ext uri="{386F3935-93C4-4BCD-93E2-E3B085C9AB24}">
+                  <p16:designElem xmlns:p16="http://schemas.microsoft.com/office/powerpoint/2015/main" val="1"/>
+                </p:ext>
+              </p:extLst>
+            </p:nvPr>
+          </p:nvSpPr>
+          <p:spPr>
+            <a:xfrm flipH="1" flipV="1">
+              <a:off x="-2" y="1998845"/>
+              <a:ext cx="11454595" cy="781699"/>
+            </a:xfrm>
+            <a:prstGeom prst="rect">
+              <a:avLst/>
+            </a:prstGeom>
+            <a:solidFill>
+              <a:schemeClr val="accent4"/>
+            </a:solidFill>
+            <a:ln>
+              <a:noFill/>
+            </a:ln>
+          </p:spPr>
+          <p:style>
+            <a:lnRef idx="2">
+              <a:schemeClr val="accent1">
+                <a:shade val="50000"/>
+              </a:schemeClr>
+            </a:lnRef>
+            <a:fillRef idx="1">
+              <a:schemeClr val="accent1"/>
+            </a:fillRef>
+            <a:effectRef idx="0">
+              <a:schemeClr val="accent1"/>
+            </a:effectRef>
+            <a:fontRef idx="minor">
+              <a:schemeClr val="lt1"/>
+            </a:fontRef>
+          </p:style>
+          <p:txBody>
+            <a:bodyPr rtlCol="0" anchor="ctr"/>
+            <a:lstStyle/>
+            <a:p>
+              <a:pPr algn="ctr"/>
+              <a:endParaRPr lang="en-US"/>
+            </a:p>
+          </p:txBody>
+        </p:sp>
+      </p:grpSp>
+      <p:sp>
+        <p:nvSpPr>
+          <p:cNvPr id="2063" name="Rectangle 2062">
+            <a:extLst>
+              <a:ext uri="{FF2B5EF4-FFF2-40B4-BE49-F238E27FC236}">
+                <a16:creationId xmlns:a16="http://schemas.microsoft.com/office/drawing/2014/main" id="{4F7BE736-E1C7-1E7F-A041-228F6CC252CD}"/>
+              </a:ext>
+              <a:ext uri="{C183D7F6-B498-43B3-948B-1728B52AA6E4}">
+                <adec:decorative xmlns:adec="http://schemas.microsoft.com/office/drawing/2017/decorative" val="1"/>
+              </a:ext>
+            </a:extLst>
+          </p:cNvPr>
+          <p:cNvSpPr>
+            <a:spLocks noGrp="1" noRot="1" noChangeAspect="1" noMove="1" noResize="1" noEditPoints="1" noAdjustHandles="1" noChangeArrowheads="1" noChangeShapeType="1" noTextEdit="1"/>
+          </p:cNvSpPr>
+          <p:nvPr>
+            <p:extLst>
+              <p:ext uri="{386F3935-93C4-4BCD-93E2-E3B085C9AB24}">
+                <p16:designElem xmlns:p16="http://schemas.microsoft.com/office/powerpoint/2015/main" val="1"/>
+              </p:ext>
+            </p:extLst>
+          </p:nvPr>
+        </p:nvSpPr>
+        <p:spPr>
+          <a:xfrm>
+            <a:off x="0" y="2203079"/>
+            <a:ext cx="8537521" cy="4147845"/>
+          </a:xfrm>
+          <a:prstGeom prst="rect">
+            <a:avLst/>
+          </a:prstGeom>
+          <a:solidFill>
+            <a:schemeClr val="bg1"/>
+          </a:solidFill>
+          <a:ln>
+            <a:noFill/>
+          </a:ln>
+          <a:effectLst>
+            <a:outerShdw blurRad="139700" dist="127000" dir="5400000" algn="t" rotWithShape="0">
+              <a:prstClr val="black">
+                <a:alpha val="15000"/>
+              </a:prstClr>
+            </a:outerShdw>
+          </a:effectLst>
+        </p:spPr>
+        <p:style>
+          <a:lnRef idx="2">
+            <a:schemeClr val="accent1">
+              <a:shade val="50000"/>
+            </a:schemeClr>
+          </a:lnRef>
+          <a:fillRef idx="1">
+            <a:schemeClr val="accent1"/>
+          </a:fillRef>
+          <a:effectRef idx="0">
+            <a:schemeClr val="accent1"/>
+          </a:effectRef>
+          <a:fontRef idx="minor">
+            <a:schemeClr val="lt1"/>
+          </a:fontRef>
+        </p:style>
+        <p:txBody>
+          <a:bodyPr rtlCol="0" anchor="ctr"/>
+          <a:lstStyle/>
+          <a:p>
+            <a:pPr algn="ctr"/>
+            <a:endParaRPr lang="en-US"/>
+          </a:p>
+        </p:txBody>
+      </p:sp>
+      <p:sp>
+        <p:nvSpPr>
+          <p:cNvPr id="4" name="Inhaltsplatzhalter 3">
+            <a:extLst>
+              <a:ext uri="{FF2B5EF4-FFF2-40B4-BE49-F238E27FC236}">
+                <a16:creationId xmlns:a16="http://schemas.microsoft.com/office/drawing/2014/main" id="{B42A37F2-725F-EE4C-0349-7ACC77A14898}"/>
+              </a:ext>
+            </a:extLst>
+          </p:cNvPr>
+          <p:cNvSpPr>
+            <a:spLocks noGrp="1"/>
+          </p:cNvSpPr>
+          <p:nvPr>
+            <p:ph idx="1"/>
+          </p:nvPr>
+        </p:nvSpPr>
+        <p:spPr>
+          <a:xfrm>
+            <a:off x="595245" y="2599509"/>
+            <a:ext cx="7607751" cy="3435531"/>
+          </a:xfrm>
+        </p:spPr>
+        <p:txBody>
+          <a:bodyPr anchor="ctr">
+            <a:normAutofit/>
+          </a:bodyPr>
+          <a:lstStyle/>
+          <a:p>
+            <a:pPr marL="0" indent="0">
+              <a:buNone/>
+            </a:pPr>
+            <a:r>
+              <a:rPr lang="de-CH" sz="2100" dirty="0"/>
+              <a:t>Merkmale und Eigenschaften: </a:t>
+            </a:r>
+            <a:r>
+              <a:rPr lang="de-CH" sz="2100" dirty="0">
+                <a:solidFill>
+                  <a:srgbClr val="FF0000"/>
+                </a:solidFill>
+              </a:rPr>
+              <a:t>//TODO</a:t>
+            </a:r>
+          </a:p>
+          <a:p>
+            <a:pPr marL="0" indent="0">
+              <a:buNone/>
+            </a:pPr>
+            <a:endParaRPr lang="de-CH" sz="2100" dirty="0"/>
+          </a:p>
+        </p:txBody>
+      </p:sp>
+      <p:pic>
+        <p:nvPicPr>
+          <p:cNvPr id="2052" name="Picture 4" descr="Learning Golang in 24 hours | Kislay Verma">
+            <a:extLst>
+              <a:ext uri="{FF2B5EF4-FFF2-40B4-BE49-F238E27FC236}">
+                <a16:creationId xmlns:a16="http://schemas.microsoft.com/office/drawing/2014/main" id="{93ACEFFB-55DA-C70D-7416-8C168851D159}"/>
+              </a:ext>
+            </a:extLst>
+          </p:cNvPr>
+          <p:cNvPicPr>
+            <a:picLocks noChangeAspect="1" noChangeArrowheads="1"/>
+          </p:cNvPicPr>
+          <p:nvPr/>
+        </p:nvPicPr>
+        <p:blipFill>
+          <a:blip r:embed="rId2">
+            <a:extLst>
+              <a:ext uri="{28A0092B-C50C-407E-A947-70E740481C1C}">
+                <a14:useLocalDpi xmlns:a14="http://schemas.microsoft.com/office/drawing/2010/main" val="0"/>
+              </a:ext>
+            </a:extLst>
+          </a:blip>
+          <a:srcRect/>
+          <a:stretch>
+            <a:fillRect/>
+          </a:stretch>
+        </p:blipFill>
+        <p:spPr bwMode="auto">
+          <a:xfrm>
+            <a:off x="7955280" y="0"/>
+            <a:ext cx="1116418" cy="1369399"/>
+          </a:xfrm>
+          <a:prstGeom prst="rect">
+            <a:avLst/>
+          </a:prstGeom>
+          <a:noFill/>
+          <a:extLst>
+            <a:ext uri="{909E8E84-426E-40DD-AFC4-6F175D3DCCD1}">
+              <a14:hiddenFill xmlns:a14="http://schemas.microsoft.com/office/drawing/2010/main">
+                <a:solidFill>
+                  <a:srgbClr val="FFFFFF"/>
+                </a:solidFill>
+              </a14:hiddenFill>
+            </a:ext>
+          </a:extLst>
+        </p:spPr>
+      </p:pic>
+    </p:spTree>
+    <p:extLst>
+      <p:ext uri="{BB962C8B-B14F-4D97-AF65-F5344CB8AC3E}">
+        <p14:creationId xmlns:p14="http://schemas.microsoft.com/office/powerpoint/2010/main" val="728387432"/>
+      </p:ext>
+    </p:extLst>
+  </p:cSld>
+  <p:clrMapOvr>
+    <a:masterClrMapping/>
+  </p:clrMapOvr>
+</p:sld>
+</file>
+
+<file path=ppt/slides/slide12.xml><?xml version="1.0" encoding="utf-8"?>
+<p:sld xmlns:a="http://schemas.openxmlformats.org/drawingml/2006/main" xmlns:r="http://schemas.openxmlformats.org/officeDocument/2006/relationships" xmlns:p="http://schemas.openxmlformats.org/presentationml/2006/main">
+  <p:cSld>
+    <p:bg>
+      <p:bgPr>
+        <a:solidFill>
+          <a:schemeClr val="bg1"/>
+        </a:solidFill>
+        <a:effectLst/>
+      </p:bgPr>
+    </p:bg>
+    <p:spTree>
+      <p:nvGrpSpPr>
+        <p:cNvPr id="1" name="">
+          <a:extLst>
+            <a:ext uri="{FF2B5EF4-FFF2-40B4-BE49-F238E27FC236}">
+              <a16:creationId xmlns:a16="http://schemas.microsoft.com/office/drawing/2014/main" id="{AB735D0D-3500-92D8-9CA7-A390F04639E3}"/>
+            </a:ext>
+          </a:extLst>
+        </p:cNvPr>
+        <p:cNvGrpSpPr/>
+        <p:nvPr/>
+      </p:nvGrpSpPr>
+      <p:grpSpPr>
+        <a:xfrm>
+          <a:off x="0" y="0"/>
+          <a:ext cx="0" cy="0"/>
+          <a:chOff x="0" y="0"/>
+          <a:chExt cx="0" cy="0"/>
+        </a:xfrm>
+      </p:grpSpPr>
+      <p:sp useBgFill="1">
+        <p:nvSpPr>
+          <p:cNvPr id="2057" name="Rectangle 2056">
+            <a:extLst>
+              <a:ext uri="{FF2B5EF4-FFF2-40B4-BE49-F238E27FC236}">
+                <a16:creationId xmlns:a16="http://schemas.microsoft.com/office/drawing/2014/main" id="{149620E1-A17C-BEE6-87C6-9D9D48DBD944}"/>
+              </a:ext>
+              <a:ext uri="{C183D7F6-B498-43B3-948B-1728B52AA6E4}">
+                <adec:decorative xmlns:adec="http://schemas.microsoft.com/office/drawing/2017/decorative" val="1"/>
+              </a:ext>
+            </a:extLst>
+          </p:cNvPr>
+          <p:cNvSpPr>
+            <a:spLocks noGrp="1" noRot="1" noChangeAspect="1" noMove="1" noResize="1" noEditPoints="1" noAdjustHandles="1" noChangeArrowheads="1" noChangeShapeType="1" noTextEdit="1"/>
+          </p:cNvSpPr>
+          <p:nvPr>
+            <p:extLst>
+              <p:ext uri="{386F3935-93C4-4BCD-93E2-E3B085C9AB24}">
+                <p16:designElem xmlns:p16="http://schemas.microsoft.com/office/powerpoint/2015/main" val="1"/>
+              </p:ext>
+            </p:extLst>
+          </p:nvPr>
+        </p:nvSpPr>
+        <p:spPr>
+          <a:xfrm>
+            <a:off x="0" y="0"/>
+            <a:ext cx="9143999" cy="6857365"/>
+          </a:xfrm>
+          <a:prstGeom prst="rect">
+            <a:avLst/>
+          </a:prstGeom>
+          <a:ln>
+            <a:noFill/>
+          </a:ln>
+        </p:spPr>
+        <p:style>
+          <a:lnRef idx="2">
+            <a:schemeClr val="accent1">
+              <a:shade val="50000"/>
+            </a:schemeClr>
+          </a:lnRef>
+          <a:fillRef idx="1">
+            <a:schemeClr val="accent1"/>
+          </a:fillRef>
+          <a:effectRef idx="0">
+            <a:schemeClr val="accent1"/>
+          </a:effectRef>
+          <a:fontRef idx="minor">
+            <a:schemeClr val="lt1"/>
+          </a:fontRef>
+        </p:style>
+        <p:txBody>
+          <a:bodyPr rtlCol="0" anchor="ctr"/>
+          <a:lstStyle/>
+          <a:p>
+            <a:pPr algn="ctr"/>
+            <a:endParaRPr lang="en-US"/>
+          </a:p>
+        </p:txBody>
+      </p:sp>
+      <p:sp>
+        <p:nvSpPr>
+          <p:cNvPr id="2" name="Titel 1">
+            <a:extLst>
+              <a:ext uri="{FF2B5EF4-FFF2-40B4-BE49-F238E27FC236}">
+                <a16:creationId xmlns:a16="http://schemas.microsoft.com/office/drawing/2014/main" id="{5E219417-E0B8-329D-FC97-A52B37EB92F3}"/>
+              </a:ext>
+            </a:extLst>
+          </p:cNvPr>
+          <p:cNvSpPr>
+            <a:spLocks noGrp="1"/>
+          </p:cNvSpPr>
+          <p:nvPr>
+            <p:ph type="title"/>
+          </p:nvPr>
+        </p:nvSpPr>
+        <p:spPr>
+          <a:xfrm>
+            <a:off x="606478" y="386930"/>
+            <a:ext cx="6927525" cy="1188950"/>
+          </a:xfrm>
+        </p:spPr>
+        <p:txBody>
+          <a:bodyPr anchor="b">
+            <a:normAutofit/>
+          </a:bodyPr>
+          <a:lstStyle/>
+          <a:p>
+            <a:r>
+              <a:rPr lang="de-CH" sz="4700" dirty="0" err="1"/>
+              <a:t>Defer</a:t>
+            </a:r>
+            <a:endParaRPr lang="de-CH" sz="4700" dirty="0"/>
+          </a:p>
+        </p:txBody>
+      </p:sp>
+      <p:grpSp>
+        <p:nvGrpSpPr>
+          <p:cNvPr id="2059" name="Group 2058">
+            <a:extLst>
+              <a:ext uri="{FF2B5EF4-FFF2-40B4-BE49-F238E27FC236}">
+                <a16:creationId xmlns:a16="http://schemas.microsoft.com/office/drawing/2014/main" id="{A2F6E770-59D2-8336-021A-F8A4C5443C03}"/>
+              </a:ext>
+              <a:ext uri="{C183D7F6-B498-43B3-948B-1728B52AA6E4}">
+                <adec:decorative xmlns:adec="http://schemas.microsoft.com/office/drawing/2017/decorative" val="1"/>
+              </a:ext>
+            </a:extLst>
+          </p:cNvPr>
+          <p:cNvGrpSpPr>
+            <a:grpSpLocks noGrp="1" noUngrp="1" noRot="1" noChangeAspect="1" noMove="1" noResize="1"/>
+          </p:cNvGrpSpPr>
+          <p:nvPr>
+            <p:extLst>
+              <p:ext uri="{386F3935-93C4-4BCD-93E2-E3B085C9AB24}">
+                <p16:designElem xmlns:p16="http://schemas.microsoft.com/office/powerpoint/2015/main" val="1"/>
+              </p:ext>
+            </p:extLst>
+          </p:nvPr>
+        </p:nvGrpSpPr>
+        <p:grpSpPr>
+          <a:xfrm>
+            <a:off x="-1" y="1998368"/>
+            <a:ext cx="8771274" cy="782176"/>
+            <a:chOff x="-2" y="1998368"/>
+            <a:chExt cx="11695083" cy="782176"/>
+          </a:xfrm>
+        </p:grpSpPr>
+        <p:sp>
+          <p:nvSpPr>
+            <p:cNvPr id="2060" name="Rectangle 2059">
+              <a:extLst>
+                <a:ext uri="{FF2B5EF4-FFF2-40B4-BE49-F238E27FC236}">
+                  <a16:creationId xmlns:a16="http://schemas.microsoft.com/office/drawing/2014/main" id="{97B7A88A-1DE8-5590-FFED-368310B4AFF6}"/>
+                </a:ext>
+                <a:ext uri="{C183D7F6-B498-43B3-948B-1728B52AA6E4}">
+                  <adec:decorative xmlns:adec="http://schemas.microsoft.com/office/drawing/2017/decorative" val="1"/>
+                </a:ext>
+              </a:extLst>
+            </p:cNvPr>
+            <p:cNvSpPr/>
+            <p:nvPr>
+              <p:extLst>
+                <p:ext uri="{386F3935-93C4-4BCD-93E2-E3B085C9AB24}">
+                  <p16:designElem xmlns:p16="http://schemas.microsoft.com/office/powerpoint/2015/main" val="1"/>
+                </p:ext>
+              </p:extLst>
+            </p:nvPr>
+          </p:nvSpPr>
+          <p:spPr>
+            <a:xfrm rot="5400000">
+              <a:off x="11228040" y="2313027"/>
+              <a:ext cx="781700" cy="152382"/>
+            </a:xfrm>
+            <a:prstGeom prst="rect">
+              <a:avLst/>
+            </a:prstGeom>
+            <a:solidFill>
+              <a:schemeClr val="accent4"/>
+            </a:solidFill>
+            <a:ln>
+              <a:noFill/>
+            </a:ln>
+          </p:spPr>
+          <p:style>
+            <a:lnRef idx="2">
+              <a:schemeClr val="accent1">
+                <a:shade val="50000"/>
+              </a:schemeClr>
+            </a:lnRef>
+            <a:fillRef idx="1">
+              <a:schemeClr val="accent1"/>
+            </a:fillRef>
+            <a:effectRef idx="0">
+              <a:schemeClr val="accent1"/>
+            </a:effectRef>
+            <a:fontRef idx="minor">
+              <a:schemeClr val="lt1"/>
+            </a:fontRef>
+          </p:style>
+          <p:txBody>
+            <a:bodyPr rtlCol="0" anchor="ctr"/>
+            <a:lstStyle/>
+            <a:p>
+              <a:pPr algn="ctr"/>
+              <a:endParaRPr lang="en-US"/>
+            </a:p>
+          </p:txBody>
+        </p:sp>
+        <p:sp>
+          <p:nvSpPr>
+            <p:cNvPr id="2061" name="Rectangle 2060">
+              <a:extLst>
+                <a:ext uri="{FF2B5EF4-FFF2-40B4-BE49-F238E27FC236}">
+                  <a16:creationId xmlns:a16="http://schemas.microsoft.com/office/drawing/2014/main" id="{F1ACC8FC-B501-831B-F3D3-1431E0A6144A}"/>
+                </a:ext>
+                <a:ext uri="{C183D7F6-B498-43B3-948B-1728B52AA6E4}">
+                  <adec:decorative xmlns:adec="http://schemas.microsoft.com/office/drawing/2017/decorative" val="1"/>
+                </a:ext>
+              </a:extLst>
+            </p:cNvPr>
+            <p:cNvSpPr/>
+            <p:nvPr>
+              <p:extLst>
+                <p:ext uri="{386F3935-93C4-4BCD-93E2-E3B085C9AB24}">
+                  <p16:designElem xmlns:p16="http://schemas.microsoft.com/office/powerpoint/2015/main" val="1"/>
+                </p:ext>
+              </p:extLst>
+            </p:nvPr>
+          </p:nvSpPr>
+          <p:spPr>
+            <a:xfrm flipH="1" flipV="1">
+              <a:off x="-2" y="1998845"/>
+              <a:ext cx="11454595" cy="781699"/>
+            </a:xfrm>
+            <a:prstGeom prst="rect">
+              <a:avLst/>
+            </a:prstGeom>
+            <a:solidFill>
+              <a:schemeClr val="accent4"/>
+            </a:solidFill>
+            <a:ln>
+              <a:noFill/>
+            </a:ln>
+          </p:spPr>
+          <p:style>
+            <a:lnRef idx="2">
+              <a:schemeClr val="accent1">
+                <a:shade val="50000"/>
+              </a:schemeClr>
+            </a:lnRef>
+            <a:fillRef idx="1">
+              <a:schemeClr val="accent1"/>
+            </a:fillRef>
+            <a:effectRef idx="0">
+              <a:schemeClr val="accent1"/>
+            </a:effectRef>
+            <a:fontRef idx="minor">
+              <a:schemeClr val="lt1"/>
+            </a:fontRef>
+          </p:style>
+          <p:txBody>
+            <a:bodyPr rtlCol="0" anchor="ctr"/>
+            <a:lstStyle/>
+            <a:p>
+              <a:pPr algn="ctr"/>
+              <a:endParaRPr lang="en-US"/>
+            </a:p>
+          </p:txBody>
+        </p:sp>
+      </p:grpSp>
+      <p:sp>
+        <p:nvSpPr>
+          <p:cNvPr id="2063" name="Rectangle 2062">
+            <a:extLst>
+              <a:ext uri="{FF2B5EF4-FFF2-40B4-BE49-F238E27FC236}">
+                <a16:creationId xmlns:a16="http://schemas.microsoft.com/office/drawing/2014/main" id="{B6EF0438-00E3-F7FF-0E1F-7B41972B94FE}"/>
+              </a:ext>
+              <a:ext uri="{C183D7F6-B498-43B3-948B-1728B52AA6E4}">
+                <adec:decorative xmlns:adec="http://schemas.microsoft.com/office/drawing/2017/decorative" val="1"/>
+              </a:ext>
+            </a:extLst>
+          </p:cNvPr>
+          <p:cNvSpPr>
+            <a:spLocks noGrp="1" noRot="1" noChangeAspect="1" noMove="1" noResize="1" noEditPoints="1" noAdjustHandles="1" noChangeArrowheads="1" noChangeShapeType="1" noTextEdit="1"/>
+          </p:cNvSpPr>
+          <p:nvPr>
+            <p:extLst>
+              <p:ext uri="{386F3935-93C4-4BCD-93E2-E3B085C9AB24}">
+                <p16:designElem xmlns:p16="http://schemas.microsoft.com/office/powerpoint/2015/main" val="1"/>
+              </p:ext>
+            </p:extLst>
+          </p:nvPr>
+        </p:nvSpPr>
+        <p:spPr>
+          <a:xfrm>
+            <a:off x="0" y="2203079"/>
+            <a:ext cx="8537521" cy="4147845"/>
+          </a:xfrm>
+          <a:prstGeom prst="rect">
+            <a:avLst/>
+          </a:prstGeom>
+          <a:solidFill>
+            <a:schemeClr val="bg1"/>
+          </a:solidFill>
+          <a:ln>
+            <a:noFill/>
+          </a:ln>
+          <a:effectLst>
+            <a:outerShdw blurRad="139700" dist="127000" dir="5400000" algn="t" rotWithShape="0">
+              <a:prstClr val="black">
+                <a:alpha val="15000"/>
+              </a:prstClr>
+            </a:outerShdw>
+          </a:effectLst>
+        </p:spPr>
+        <p:style>
+          <a:lnRef idx="2">
+            <a:schemeClr val="accent1">
+              <a:shade val="50000"/>
+            </a:schemeClr>
+          </a:lnRef>
+          <a:fillRef idx="1">
+            <a:schemeClr val="accent1"/>
+          </a:fillRef>
+          <a:effectRef idx="0">
+            <a:schemeClr val="accent1"/>
+          </a:effectRef>
+          <a:fontRef idx="minor">
+            <a:schemeClr val="lt1"/>
+          </a:fontRef>
+        </p:style>
+        <p:txBody>
+          <a:bodyPr rtlCol="0" anchor="ctr"/>
+          <a:lstStyle/>
+          <a:p>
+            <a:pPr algn="ctr"/>
+            <a:endParaRPr lang="en-US"/>
+          </a:p>
+        </p:txBody>
+      </p:sp>
+      <p:pic>
+        <p:nvPicPr>
+          <p:cNvPr id="3" name="Content Placeholder 2">
+            <a:extLst>
+              <a:ext uri="{FF2B5EF4-FFF2-40B4-BE49-F238E27FC236}">
+                <a16:creationId xmlns:a16="http://schemas.microsoft.com/office/drawing/2014/main" id="{11E4153D-CC79-2D54-85ED-7456CE6A3A55}"/>
+              </a:ext>
+            </a:extLst>
+          </p:cNvPr>
+          <p:cNvPicPr>
+            <a:picLocks noGrp="1" noChangeAspect="1"/>
+          </p:cNvPicPr>
+          <p:nvPr>
+            <p:ph idx="1"/>
+          </p:nvPr>
+        </p:nvPicPr>
+        <p:blipFill>
+          <a:blip r:embed="rId2"/>
+          <a:stretch>
+            <a:fillRect/>
+          </a:stretch>
+        </p:blipFill>
+        <p:spPr>
+          <a:xfrm>
+            <a:off x="116031" y="2203079"/>
+            <a:ext cx="4905674" cy="3094855"/>
+          </a:xfrm>
+          <a:prstGeom prst="rect">
+            <a:avLst/>
+          </a:prstGeom>
+        </p:spPr>
+      </p:pic>
+      <p:pic>
+        <p:nvPicPr>
+          <p:cNvPr id="2052" name="Picture 4" descr="Learning Golang in 24 hours | Kislay Verma">
+            <a:extLst>
+              <a:ext uri="{FF2B5EF4-FFF2-40B4-BE49-F238E27FC236}">
+                <a16:creationId xmlns:a16="http://schemas.microsoft.com/office/drawing/2014/main" id="{6A3920E8-3C61-EEED-1E8C-7B41D6241BD1}"/>
+              </a:ext>
+            </a:extLst>
+          </p:cNvPr>
+          <p:cNvPicPr>
+            <a:picLocks noChangeAspect="1" noChangeArrowheads="1"/>
+          </p:cNvPicPr>
+          <p:nvPr/>
+        </p:nvPicPr>
+        <p:blipFill>
+          <a:blip r:embed="rId3">
+            <a:extLst>
+              <a:ext uri="{28A0092B-C50C-407E-A947-70E740481C1C}">
+                <a14:useLocalDpi xmlns:a14="http://schemas.microsoft.com/office/drawing/2010/main" val="0"/>
+              </a:ext>
+            </a:extLst>
+          </a:blip>
+          <a:srcRect/>
+          <a:stretch>
+            <a:fillRect/>
+          </a:stretch>
+        </p:blipFill>
+        <p:spPr bwMode="auto">
+          <a:xfrm>
+            <a:off x="7955280" y="0"/>
+            <a:ext cx="1116418" cy="1369399"/>
+          </a:xfrm>
+          <a:prstGeom prst="rect">
+            <a:avLst/>
+          </a:prstGeom>
+          <a:noFill/>
+          <a:extLst>
+            <a:ext uri="{909E8E84-426E-40DD-AFC4-6F175D3DCCD1}">
+              <a14:hiddenFill xmlns:a14="http://schemas.microsoft.com/office/drawing/2010/main">
+                <a:solidFill>
+                  <a:srgbClr val="FFFFFF"/>
+                </a:solidFill>
+              </a14:hiddenFill>
+            </a:ext>
+          </a:extLst>
+        </p:spPr>
+      </p:pic>
+      <p:pic>
+        <p:nvPicPr>
+          <p:cNvPr id="5" name="Picture 4">
+            <a:extLst>
+              <a:ext uri="{FF2B5EF4-FFF2-40B4-BE49-F238E27FC236}">
+                <a16:creationId xmlns:a16="http://schemas.microsoft.com/office/drawing/2014/main" id="{6D4025F1-8E4C-480F-7ECF-06BF90FCA909}"/>
+              </a:ext>
+            </a:extLst>
+          </p:cNvPr>
+          <p:cNvPicPr>
+            <a:picLocks noChangeAspect="1"/>
+          </p:cNvPicPr>
+          <p:nvPr/>
+        </p:nvPicPr>
+        <p:blipFill>
+          <a:blip r:embed="rId4"/>
+          <a:stretch>
+            <a:fillRect/>
+          </a:stretch>
+        </p:blipFill>
+        <p:spPr>
+          <a:xfrm>
+            <a:off x="5137736" y="3574725"/>
+            <a:ext cx="3652591" cy="1604002"/>
+          </a:xfrm>
+          <a:prstGeom prst="rect">
+            <a:avLst/>
+          </a:prstGeom>
+        </p:spPr>
+      </p:pic>
+    </p:spTree>
+    <p:extLst>
+      <p:ext uri="{BB962C8B-B14F-4D97-AF65-F5344CB8AC3E}">
+        <p14:creationId xmlns:p14="http://schemas.microsoft.com/office/powerpoint/2010/main" val="1101989760"/>
+      </p:ext>
+    </p:extLst>
+  </p:cSld>
+  <p:clrMapOvr>
+    <a:masterClrMapping/>
+  </p:clrMapOvr>
+</p:sld>
+</file>
+
+<file path=ppt/slides/slide13.xml><?xml version="1.0" encoding="utf-8"?>
+<p:sld xmlns:a="http://schemas.openxmlformats.org/drawingml/2006/main" xmlns:r="http://schemas.openxmlformats.org/officeDocument/2006/relationships" xmlns:p="http://schemas.openxmlformats.org/presentationml/2006/main">
+  <p:cSld>
+    <p:bg>
+      <p:bgPr>
+        <a:solidFill>
+          <a:schemeClr val="bg1"/>
+        </a:solidFill>
+        <a:effectLst/>
+      </p:bgPr>
+    </p:bg>
+    <p:spTree>
+      <p:nvGrpSpPr>
+        <p:cNvPr id="1" name="">
+          <a:extLst>
+            <a:ext uri="{FF2B5EF4-FFF2-40B4-BE49-F238E27FC236}">
+              <a16:creationId xmlns:a16="http://schemas.microsoft.com/office/drawing/2014/main" id="{20083E05-8DA5-F060-89D7-20656CB60847}"/>
+            </a:ext>
+          </a:extLst>
+        </p:cNvPr>
+        <p:cNvGrpSpPr/>
+        <p:nvPr/>
+      </p:nvGrpSpPr>
+      <p:grpSpPr>
+        <a:xfrm>
+          <a:off x="0" y="0"/>
+          <a:ext cx="0" cy="0"/>
+          <a:chOff x="0" y="0"/>
+          <a:chExt cx="0" cy="0"/>
+        </a:xfrm>
+      </p:grpSpPr>
+      <p:sp useBgFill="1">
+        <p:nvSpPr>
+          <p:cNvPr id="2057" name="Rectangle 2056">
+            <a:extLst>
+              <a:ext uri="{FF2B5EF4-FFF2-40B4-BE49-F238E27FC236}">
+                <a16:creationId xmlns:a16="http://schemas.microsoft.com/office/drawing/2014/main" id="{7E68462F-040C-2519-41D1-B8764D7DFB83}"/>
+              </a:ext>
+              <a:ext uri="{C183D7F6-B498-43B3-948B-1728B52AA6E4}">
+                <adec:decorative xmlns:adec="http://schemas.microsoft.com/office/drawing/2017/decorative" val="1"/>
+              </a:ext>
+            </a:extLst>
+          </p:cNvPr>
+          <p:cNvSpPr>
+            <a:spLocks noGrp="1" noRot="1" noChangeAspect="1" noMove="1" noResize="1" noEditPoints="1" noAdjustHandles="1" noChangeArrowheads="1" noChangeShapeType="1" noTextEdit="1"/>
+          </p:cNvSpPr>
+          <p:nvPr>
+            <p:extLst>
+              <p:ext uri="{386F3935-93C4-4BCD-93E2-E3B085C9AB24}">
+                <p16:designElem xmlns:p16="http://schemas.microsoft.com/office/powerpoint/2015/main" val="1"/>
+              </p:ext>
+            </p:extLst>
+          </p:nvPr>
+        </p:nvSpPr>
+        <p:spPr>
+          <a:xfrm>
+            <a:off x="0" y="0"/>
+            <a:ext cx="9143999" cy="6857365"/>
+          </a:xfrm>
+          <a:prstGeom prst="rect">
+            <a:avLst/>
+          </a:prstGeom>
+          <a:ln>
+            <a:noFill/>
+          </a:ln>
+        </p:spPr>
+        <p:style>
+          <a:lnRef idx="2">
+            <a:schemeClr val="accent1">
+              <a:shade val="50000"/>
+            </a:schemeClr>
+          </a:lnRef>
+          <a:fillRef idx="1">
+            <a:schemeClr val="accent1"/>
+          </a:fillRef>
+          <a:effectRef idx="0">
+            <a:schemeClr val="accent1"/>
+          </a:effectRef>
+          <a:fontRef idx="minor">
+            <a:schemeClr val="lt1"/>
+          </a:fontRef>
+        </p:style>
+        <p:txBody>
+          <a:bodyPr rtlCol="0" anchor="ctr"/>
+          <a:lstStyle/>
+          <a:p>
+            <a:pPr algn="ctr"/>
+            <a:endParaRPr lang="en-US"/>
+          </a:p>
+        </p:txBody>
+      </p:sp>
+      <p:sp>
+        <p:nvSpPr>
+          <p:cNvPr id="2" name="Titel 1">
+            <a:extLst>
+              <a:ext uri="{FF2B5EF4-FFF2-40B4-BE49-F238E27FC236}">
+                <a16:creationId xmlns:a16="http://schemas.microsoft.com/office/drawing/2014/main" id="{60BAE5CC-D4E8-DBEC-F3E7-E04078AA7525}"/>
+              </a:ext>
+            </a:extLst>
+          </p:cNvPr>
+          <p:cNvSpPr>
+            <a:spLocks noGrp="1"/>
+          </p:cNvSpPr>
+          <p:nvPr>
+            <p:ph type="title"/>
+          </p:nvPr>
+        </p:nvSpPr>
+        <p:spPr>
+          <a:xfrm>
+            <a:off x="606478" y="386930"/>
+            <a:ext cx="6927525" cy="1188950"/>
+          </a:xfrm>
+        </p:spPr>
+        <p:txBody>
+          <a:bodyPr anchor="b">
+            <a:normAutofit fontScale="90000"/>
+          </a:bodyPr>
+          <a:lstStyle/>
+          <a:p>
+            <a:r>
+              <a:rPr lang="de-CH" sz="4700" dirty="0" err="1"/>
+              <a:t>Structural</a:t>
+            </a:r>
+            <a:r>
+              <a:rPr lang="de-CH" sz="4700" dirty="0"/>
+              <a:t> &amp; Nominal </a:t>
+            </a:r>
+            <a:r>
+              <a:rPr lang="de-CH" sz="4700" dirty="0" err="1"/>
+              <a:t>Typing</a:t>
+            </a:r>
+            <a:endParaRPr lang="de-CH" sz="4700" dirty="0"/>
+          </a:p>
+        </p:txBody>
+      </p:sp>
+      <p:grpSp>
+        <p:nvGrpSpPr>
+          <p:cNvPr id="2059" name="Group 2058">
+            <a:extLst>
+              <a:ext uri="{FF2B5EF4-FFF2-40B4-BE49-F238E27FC236}">
+                <a16:creationId xmlns:a16="http://schemas.microsoft.com/office/drawing/2014/main" id="{98ACF4CF-7998-811A-227C-5EBE8C223C7F}"/>
+              </a:ext>
+              <a:ext uri="{C183D7F6-B498-43B3-948B-1728B52AA6E4}">
+                <adec:decorative xmlns:adec="http://schemas.microsoft.com/office/drawing/2017/decorative" val="1"/>
+              </a:ext>
+            </a:extLst>
+          </p:cNvPr>
+          <p:cNvGrpSpPr>
+            <a:grpSpLocks noGrp="1" noUngrp="1" noRot="1" noChangeAspect="1" noMove="1" noResize="1"/>
+          </p:cNvGrpSpPr>
+          <p:nvPr>
+            <p:extLst>
+              <p:ext uri="{386F3935-93C4-4BCD-93E2-E3B085C9AB24}">
+                <p16:designElem xmlns:p16="http://schemas.microsoft.com/office/powerpoint/2015/main" val="1"/>
+              </p:ext>
+            </p:extLst>
+          </p:nvPr>
+        </p:nvGrpSpPr>
+        <p:grpSpPr>
+          <a:xfrm>
+            <a:off x="-1" y="1998368"/>
+            <a:ext cx="8771274" cy="782176"/>
+            <a:chOff x="-2" y="1998368"/>
+            <a:chExt cx="11695083" cy="782176"/>
+          </a:xfrm>
+        </p:grpSpPr>
+        <p:sp>
+          <p:nvSpPr>
+            <p:cNvPr id="2060" name="Rectangle 2059">
+              <a:extLst>
+                <a:ext uri="{FF2B5EF4-FFF2-40B4-BE49-F238E27FC236}">
+                  <a16:creationId xmlns:a16="http://schemas.microsoft.com/office/drawing/2014/main" id="{BD93F3F9-CED9-38C3-8F87-1ED11BB186F2}"/>
+                </a:ext>
+                <a:ext uri="{C183D7F6-B498-43B3-948B-1728B52AA6E4}">
+                  <adec:decorative xmlns:adec="http://schemas.microsoft.com/office/drawing/2017/decorative" val="1"/>
+                </a:ext>
+              </a:extLst>
+            </p:cNvPr>
+            <p:cNvSpPr/>
+            <p:nvPr>
+              <p:extLst>
+                <p:ext uri="{386F3935-93C4-4BCD-93E2-E3B085C9AB24}">
+                  <p16:designElem xmlns:p16="http://schemas.microsoft.com/office/powerpoint/2015/main" val="1"/>
+                </p:ext>
+              </p:extLst>
+            </p:nvPr>
+          </p:nvSpPr>
+          <p:spPr>
+            <a:xfrm rot="5400000">
+              <a:off x="11228040" y="2313027"/>
+              <a:ext cx="781700" cy="152382"/>
+            </a:xfrm>
+            <a:prstGeom prst="rect">
+              <a:avLst/>
+            </a:prstGeom>
+            <a:solidFill>
+              <a:schemeClr val="accent4"/>
+            </a:solidFill>
+            <a:ln>
+              <a:noFill/>
+            </a:ln>
+          </p:spPr>
+          <p:style>
+            <a:lnRef idx="2">
+              <a:schemeClr val="accent1">
+                <a:shade val="50000"/>
+              </a:schemeClr>
+            </a:lnRef>
+            <a:fillRef idx="1">
+              <a:schemeClr val="accent1"/>
+            </a:fillRef>
+            <a:effectRef idx="0">
+              <a:schemeClr val="accent1"/>
+            </a:effectRef>
+            <a:fontRef idx="minor">
+              <a:schemeClr val="lt1"/>
+            </a:fontRef>
+          </p:style>
+          <p:txBody>
+            <a:bodyPr rtlCol="0" anchor="ctr"/>
+            <a:lstStyle/>
+            <a:p>
+              <a:pPr algn="ctr"/>
+              <a:endParaRPr lang="en-US"/>
+            </a:p>
+          </p:txBody>
+        </p:sp>
+        <p:sp>
+          <p:nvSpPr>
+            <p:cNvPr id="2061" name="Rectangle 2060">
+              <a:extLst>
+                <a:ext uri="{FF2B5EF4-FFF2-40B4-BE49-F238E27FC236}">
+                  <a16:creationId xmlns:a16="http://schemas.microsoft.com/office/drawing/2014/main" id="{6532D027-F793-7D84-6972-C6637034235E}"/>
+                </a:ext>
+                <a:ext uri="{C183D7F6-B498-43B3-948B-1728B52AA6E4}">
+                  <adec:decorative xmlns:adec="http://schemas.microsoft.com/office/drawing/2017/decorative" val="1"/>
+                </a:ext>
+              </a:extLst>
+            </p:cNvPr>
+            <p:cNvSpPr/>
+            <p:nvPr>
+              <p:extLst>
+                <p:ext uri="{386F3935-93C4-4BCD-93E2-E3B085C9AB24}">
+                  <p16:designElem xmlns:p16="http://schemas.microsoft.com/office/powerpoint/2015/main" val="1"/>
+                </p:ext>
+              </p:extLst>
+            </p:nvPr>
+          </p:nvSpPr>
+          <p:spPr>
+            <a:xfrm flipH="1" flipV="1">
+              <a:off x="-2" y="1998845"/>
+              <a:ext cx="11454595" cy="781699"/>
+            </a:xfrm>
+            <a:prstGeom prst="rect">
+              <a:avLst/>
+            </a:prstGeom>
+            <a:solidFill>
+              <a:schemeClr val="accent4"/>
+            </a:solidFill>
+            <a:ln>
+              <a:noFill/>
+            </a:ln>
+          </p:spPr>
+          <p:style>
+            <a:lnRef idx="2">
+              <a:schemeClr val="accent1">
+                <a:shade val="50000"/>
+              </a:schemeClr>
+            </a:lnRef>
+            <a:fillRef idx="1">
+              <a:schemeClr val="accent1"/>
+            </a:fillRef>
+            <a:effectRef idx="0">
+              <a:schemeClr val="accent1"/>
+            </a:effectRef>
+            <a:fontRef idx="minor">
+              <a:schemeClr val="lt1"/>
+            </a:fontRef>
+          </p:style>
+          <p:txBody>
+            <a:bodyPr rtlCol="0" anchor="ctr"/>
+            <a:lstStyle/>
+            <a:p>
+              <a:pPr algn="ctr"/>
+              <a:endParaRPr lang="en-US"/>
+            </a:p>
+          </p:txBody>
+        </p:sp>
+      </p:grpSp>
+      <p:sp>
+        <p:nvSpPr>
+          <p:cNvPr id="2063" name="Rectangle 2062">
+            <a:extLst>
+              <a:ext uri="{FF2B5EF4-FFF2-40B4-BE49-F238E27FC236}">
+                <a16:creationId xmlns:a16="http://schemas.microsoft.com/office/drawing/2014/main" id="{98419B50-645B-3496-56B6-147C308C10CA}"/>
+              </a:ext>
+              <a:ext uri="{C183D7F6-B498-43B3-948B-1728B52AA6E4}">
+                <adec:decorative xmlns:adec="http://schemas.microsoft.com/office/drawing/2017/decorative" val="1"/>
+              </a:ext>
+            </a:extLst>
+          </p:cNvPr>
+          <p:cNvSpPr>
+            <a:spLocks noGrp="1" noRot="1" noChangeAspect="1" noMove="1" noResize="1" noEditPoints="1" noAdjustHandles="1" noChangeArrowheads="1" noChangeShapeType="1" noTextEdit="1"/>
+          </p:cNvSpPr>
+          <p:nvPr>
+            <p:extLst>
+              <p:ext uri="{386F3935-93C4-4BCD-93E2-E3B085C9AB24}">
+                <p16:designElem xmlns:p16="http://schemas.microsoft.com/office/powerpoint/2015/main" val="1"/>
+              </p:ext>
+            </p:extLst>
+          </p:nvPr>
+        </p:nvSpPr>
+        <p:spPr>
+          <a:xfrm>
+            <a:off x="0" y="2203079"/>
+            <a:ext cx="8537521" cy="4147845"/>
+          </a:xfrm>
+          <a:prstGeom prst="rect">
+            <a:avLst/>
+          </a:prstGeom>
+          <a:solidFill>
+            <a:schemeClr val="bg1"/>
+          </a:solidFill>
+          <a:ln>
+            <a:noFill/>
+          </a:ln>
+          <a:effectLst>
+            <a:outerShdw blurRad="139700" dist="127000" dir="5400000" algn="t" rotWithShape="0">
+              <a:prstClr val="black">
+                <a:alpha val="15000"/>
+              </a:prstClr>
+            </a:outerShdw>
+          </a:effectLst>
+        </p:spPr>
+        <p:style>
+          <a:lnRef idx="2">
+            <a:schemeClr val="accent1">
+              <a:shade val="50000"/>
+            </a:schemeClr>
+          </a:lnRef>
+          <a:fillRef idx="1">
+            <a:schemeClr val="accent1"/>
+          </a:fillRef>
+          <a:effectRef idx="0">
+            <a:schemeClr val="accent1"/>
+          </a:effectRef>
+          <a:fontRef idx="minor">
+            <a:schemeClr val="lt1"/>
+          </a:fontRef>
+        </p:style>
+        <p:txBody>
+          <a:bodyPr rtlCol="0" anchor="ctr"/>
+          <a:lstStyle/>
+          <a:p>
+            <a:pPr algn="ctr"/>
+            <a:endParaRPr lang="en-US"/>
+          </a:p>
+        </p:txBody>
+      </p:sp>
+      <p:sp>
+        <p:nvSpPr>
+          <p:cNvPr id="4" name="Inhaltsplatzhalter 3">
+            <a:extLst>
+              <a:ext uri="{FF2B5EF4-FFF2-40B4-BE49-F238E27FC236}">
+                <a16:creationId xmlns:a16="http://schemas.microsoft.com/office/drawing/2014/main" id="{70B92D9D-B315-E6F6-5AEC-A878DDE27E8D}"/>
+              </a:ext>
+            </a:extLst>
+          </p:cNvPr>
+          <p:cNvSpPr>
+            <a:spLocks noGrp="1"/>
+          </p:cNvSpPr>
+          <p:nvPr>
+            <p:ph idx="1"/>
+          </p:nvPr>
+        </p:nvSpPr>
+        <p:spPr>
+          <a:xfrm>
+            <a:off x="595245" y="2599509"/>
+            <a:ext cx="7607751" cy="3435531"/>
+          </a:xfrm>
+        </p:spPr>
+        <p:txBody>
+          <a:bodyPr anchor="ctr">
+            <a:normAutofit/>
+          </a:bodyPr>
+          <a:lstStyle/>
+          <a:p>
+            <a:r>
+              <a:rPr lang="de-CH" sz="2100" dirty="0" err="1"/>
+              <a:t>Asdf</a:t>
+            </a:r>
+            <a:endParaRPr lang="de-CH" sz="2100" dirty="0"/>
+          </a:p>
+          <a:p>
+            <a:r>
+              <a:rPr lang="de-CH" sz="2100" dirty="0" err="1"/>
+              <a:t>Asdf</a:t>
+            </a:r>
+            <a:endParaRPr lang="de-CH" sz="2100" dirty="0"/>
+          </a:p>
+          <a:p>
+            <a:r>
+              <a:rPr lang="de-CH" sz="2100" dirty="0" err="1"/>
+              <a:t>Asdf</a:t>
+            </a:r>
+            <a:endParaRPr lang="de-CH" sz="2100" dirty="0"/>
+          </a:p>
+          <a:p>
+            <a:r>
+              <a:rPr lang="de-CH" sz="2100" dirty="0" err="1"/>
+              <a:t>Asdff</a:t>
+            </a:r>
+            <a:endParaRPr lang="de-CH" sz="2100" dirty="0"/>
+          </a:p>
+          <a:p>
+            <a:r>
+              <a:rPr lang="de-CH" sz="2100" dirty="0" err="1"/>
+              <a:t>Asdf</a:t>
+            </a:r>
+            <a:endParaRPr lang="de-CH" sz="2100" dirty="0"/>
+          </a:p>
+          <a:p>
+            <a:r>
+              <a:rPr lang="de-CH" sz="2100" dirty="0" err="1"/>
+              <a:t>adsf</a:t>
+            </a:r>
+            <a:endParaRPr lang="de-CH" sz="2100" dirty="0"/>
+          </a:p>
+        </p:txBody>
+      </p:sp>
+      <p:pic>
+        <p:nvPicPr>
+          <p:cNvPr id="2052" name="Picture 4" descr="Learning Golang in 24 hours | Kislay Verma">
+            <a:extLst>
+              <a:ext uri="{FF2B5EF4-FFF2-40B4-BE49-F238E27FC236}">
+                <a16:creationId xmlns:a16="http://schemas.microsoft.com/office/drawing/2014/main" id="{EFDAC631-A1D3-6140-E10F-83087B1F2D8E}"/>
+              </a:ext>
+            </a:extLst>
+          </p:cNvPr>
+          <p:cNvPicPr>
+            <a:picLocks noChangeAspect="1" noChangeArrowheads="1"/>
+          </p:cNvPicPr>
+          <p:nvPr/>
+        </p:nvPicPr>
+        <p:blipFill>
+          <a:blip r:embed="rId2">
+            <a:extLst>
+              <a:ext uri="{28A0092B-C50C-407E-A947-70E740481C1C}">
+                <a14:useLocalDpi xmlns:a14="http://schemas.microsoft.com/office/drawing/2010/main" val="0"/>
+              </a:ext>
+            </a:extLst>
+          </a:blip>
+          <a:srcRect/>
+          <a:stretch>
+            <a:fillRect/>
+          </a:stretch>
+        </p:blipFill>
+        <p:spPr bwMode="auto">
+          <a:xfrm>
+            <a:off x="7955280" y="0"/>
+            <a:ext cx="1116418" cy="1369399"/>
+          </a:xfrm>
+          <a:prstGeom prst="rect">
+            <a:avLst/>
+          </a:prstGeom>
+          <a:noFill/>
+          <a:extLst>
+            <a:ext uri="{909E8E84-426E-40DD-AFC4-6F175D3DCCD1}">
+              <a14:hiddenFill xmlns:a14="http://schemas.microsoft.com/office/drawing/2010/main">
+                <a:solidFill>
+                  <a:srgbClr val="FFFFFF"/>
+                </a:solidFill>
+              </a14:hiddenFill>
+            </a:ext>
+          </a:extLst>
+        </p:spPr>
+      </p:pic>
+    </p:spTree>
+    <p:extLst>
+      <p:ext uri="{BB962C8B-B14F-4D97-AF65-F5344CB8AC3E}">
+        <p14:creationId xmlns:p14="http://schemas.microsoft.com/office/powerpoint/2010/main" val="1537264246"/>
+      </p:ext>
+    </p:extLst>
+  </p:cSld>
+  <p:clrMapOvr>
+    <a:masterClrMapping/>
+  </p:clrMapOvr>
+</p:sld>
+</file>
+
+<file path=ppt/slides/slide14.xml><?xml version="1.0" encoding="utf-8"?>
+<p:sld xmlns:a="http://schemas.openxmlformats.org/drawingml/2006/main" xmlns:r="http://schemas.openxmlformats.org/officeDocument/2006/relationships" xmlns:p="http://schemas.openxmlformats.org/presentationml/2006/main">
+  <p:cSld>
+    <p:bg>
+      <p:bgPr>
+        <a:solidFill>
+          <a:schemeClr val="bg1"/>
+        </a:solidFill>
+        <a:effectLst/>
+      </p:bgPr>
+    </p:bg>
+    <p:spTree>
+      <p:nvGrpSpPr>
+        <p:cNvPr id="1" name="">
+          <a:extLst>
+            <a:ext uri="{FF2B5EF4-FFF2-40B4-BE49-F238E27FC236}">
               <a16:creationId xmlns:a16="http://schemas.microsoft.com/office/drawing/2014/main" id="{9F14EC63-7B37-7EFA-7CE0-8413C94EB4D1}"/>
             </a:ext>
           </a:extLst>
@@ -7997,7 +9899,7 @@
 </p:sld>
 </file>
 
-<file path=ppt/slides/slide11.xml><?xml version="1.0" encoding="utf-8"?>
+<file path=ppt/slides/slide15.xml><?xml version="1.0" encoding="utf-8"?>
 <p:sld xmlns:a="http://schemas.openxmlformats.org/drawingml/2006/main" xmlns:r="http://schemas.openxmlformats.org/officeDocument/2006/relationships" xmlns:p="http://schemas.openxmlformats.org/presentationml/2006/main">
   <p:cSld>
     <p:bg>
@@ -8478,7 +10380,7 @@
 </p:sld>
 </file>
 
-<file path=ppt/slides/slide12.xml><?xml version="1.0" encoding="utf-8"?>
+<file path=ppt/slides/slide16.xml><?xml version="1.0" encoding="utf-8"?>
 <p:sld xmlns:a="http://schemas.openxmlformats.org/drawingml/2006/main" xmlns:r="http://schemas.openxmlformats.org/officeDocument/2006/relationships" xmlns:p="http://schemas.openxmlformats.org/presentationml/2006/main">
   <p:cSld>
     <p:bg>
@@ -8959,7 +10861,7 @@
 </p:sld>
 </file>
 
-<file path=ppt/slides/slide13.xml><?xml version="1.0" encoding="utf-8"?>
+<file path=ppt/slides/slide17.xml><?xml version="1.0" encoding="utf-8"?>
 <p:sld xmlns:a="http://schemas.openxmlformats.org/drawingml/2006/main" xmlns:r="http://schemas.openxmlformats.org/officeDocument/2006/relationships" xmlns:p="http://schemas.openxmlformats.org/presentationml/2006/main">
   <p:cSld>
     <p:bg>
@@ -9243,7 +11145,7 @@
 </p:sld>
 </file>
 
-<file path=ppt/slides/slide14.xml><?xml version="1.0" encoding="utf-8"?>
+<file path=ppt/slides/slide18.xml><?xml version="1.0" encoding="utf-8"?>
 <p:sld xmlns:a="http://schemas.openxmlformats.org/drawingml/2006/main" xmlns:r="http://schemas.openxmlformats.org/officeDocument/2006/relationships" xmlns:p="http://schemas.openxmlformats.org/presentationml/2006/main">
   <p:cSld>
     <p:bg>
@@ -9724,7 +11626,7 @@
 </p:sld>
 </file>
 
-<file path=ppt/slides/slide15.xml><?xml version="1.0" encoding="utf-8"?>
+<file path=ppt/slides/slide19.xml><?xml version="1.0" encoding="utf-8"?>
 <p:sld xmlns:a="http://schemas.openxmlformats.org/drawingml/2006/main" xmlns:r="http://schemas.openxmlformats.org/officeDocument/2006/relationships" xmlns:p="http://schemas.openxmlformats.org/presentationml/2006/main">
   <p:cSld>
     <p:bg>
@@ -10210,7 +12112,530 @@
 </p:sld>
 </file>
 
-<file path=ppt/slides/slide16.xml><?xml version="1.0" encoding="utf-8"?>
+<file path=ppt/slides/slide2.xml><?xml version="1.0" encoding="utf-8"?>
+<p:sld xmlns:a="http://schemas.openxmlformats.org/drawingml/2006/main" xmlns:r="http://schemas.openxmlformats.org/officeDocument/2006/relationships" xmlns:p="http://schemas.openxmlformats.org/presentationml/2006/main">
+  <p:cSld>
+    <p:bg>
+      <p:bgPr>
+        <a:solidFill>
+          <a:schemeClr val="bg1"/>
+        </a:solidFill>
+        <a:effectLst/>
+      </p:bgPr>
+    </p:bg>
+    <p:spTree>
+      <p:nvGrpSpPr>
+        <p:cNvPr id="1" name=""/>
+        <p:cNvGrpSpPr/>
+        <p:nvPr/>
+      </p:nvGrpSpPr>
+      <p:grpSpPr>
+        <a:xfrm>
+          <a:off x="0" y="0"/>
+          <a:ext cx="0" cy="0"/>
+          <a:chOff x="0" y="0"/>
+          <a:chExt cx="0" cy="0"/>
+        </a:xfrm>
+      </p:grpSpPr>
+      <p:sp useBgFill="1">
+        <p:nvSpPr>
+          <p:cNvPr id="2068" name="Rectangle 2067">
+            <a:extLst>
+              <a:ext uri="{FF2B5EF4-FFF2-40B4-BE49-F238E27FC236}">
+                <a16:creationId xmlns:a16="http://schemas.microsoft.com/office/drawing/2014/main" id="{3AD318CC-E2A8-4E27-9548-A047A78999B1}"/>
+              </a:ext>
+              <a:ext uri="{C183D7F6-B498-43B3-948B-1728B52AA6E4}">
+                <adec:decorative xmlns:adec="http://schemas.microsoft.com/office/drawing/2017/decorative" val="1"/>
+              </a:ext>
+            </a:extLst>
+          </p:cNvPr>
+          <p:cNvSpPr>
+            <a:spLocks noGrp="1" noRot="1" noChangeAspect="1" noMove="1" noResize="1" noEditPoints="1" noAdjustHandles="1" noChangeArrowheads="1" noChangeShapeType="1" noTextEdit="1"/>
+          </p:cNvSpPr>
+          <p:nvPr>
+            <p:extLst>
+              <p:ext uri="{386F3935-93C4-4BCD-93E2-E3B085C9AB24}">
+                <p16:designElem xmlns:p16="http://schemas.microsoft.com/office/powerpoint/2015/main" val="1"/>
+              </p:ext>
+            </p:extLst>
+          </p:nvPr>
+        </p:nvSpPr>
+        <p:spPr>
+          <a:xfrm>
+            <a:off x="0" y="0"/>
+            <a:ext cx="9143999" cy="6857365"/>
+          </a:xfrm>
+          <a:prstGeom prst="rect">
+            <a:avLst/>
+          </a:prstGeom>
+          <a:ln>
+            <a:noFill/>
+          </a:ln>
+        </p:spPr>
+        <p:style>
+          <a:lnRef idx="2">
+            <a:schemeClr val="accent1">
+              <a:shade val="50000"/>
+            </a:schemeClr>
+          </a:lnRef>
+          <a:fillRef idx="1">
+            <a:schemeClr val="accent1"/>
+          </a:fillRef>
+          <a:effectRef idx="0">
+            <a:schemeClr val="accent1"/>
+          </a:effectRef>
+          <a:fontRef idx="minor">
+            <a:schemeClr val="lt1"/>
+          </a:fontRef>
+        </p:style>
+        <p:txBody>
+          <a:bodyPr rtlCol="0" anchor="ctr"/>
+          <a:lstStyle/>
+          <a:p>
+            <a:pPr algn="ctr"/>
+            <a:endParaRPr lang="en-US"/>
+          </a:p>
+        </p:txBody>
+      </p:sp>
+      <p:sp>
+        <p:nvSpPr>
+          <p:cNvPr id="2" name="Titel 1">
+            <a:extLst>
+              <a:ext uri="{FF2B5EF4-FFF2-40B4-BE49-F238E27FC236}">
+                <a16:creationId xmlns:a16="http://schemas.microsoft.com/office/drawing/2014/main" id="{710A1EB6-AD89-4B38-B328-726CF9C21286}"/>
+              </a:ext>
+            </a:extLst>
+          </p:cNvPr>
+          <p:cNvSpPr>
+            <a:spLocks noGrp="1"/>
+          </p:cNvSpPr>
+          <p:nvPr>
+            <p:ph type="title"/>
+          </p:nvPr>
+        </p:nvSpPr>
+        <p:spPr>
+          <a:xfrm>
+            <a:off x="483798" y="1463040"/>
+            <a:ext cx="2847230" cy="2690949"/>
+          </a:xfrm>
+        </p:spPr>
+        <p:txBody>
+          <a:bodyPr anchor="t">
+            <a:normAutofit/>
+          </a:bodyPr>
+          <a:lstStyle/>
+          <a:p>
+            <a:r>
+              <a:rPr lang="de-CH" sz="4200"/>
+              <a:t>Vision</a:t>
+            </a:r>
+          </a:p>
+        </p:txBody>
+      </p:sp>
+      <p:grpSp>
+        <p:nvGrpSpPr>
+          <p:cNvPr id="2070" name="Group 2069">
+            <a:extLst>
+              <a:ext uri="{FF2B5EF4-FFF2-40B4-BE49-F238E27FC236}">
+                <a16:creationId xmlns:a16="http://schemas.microsoft.com/office/drawing/2014/main" id="{B14B560F-9DD7-4302-A60B-EBD3EF59B073}"/>
+              </a:ext>
+              <a:ext uri="{C183D7F6-B498-43B3-948B-1728B52AA6E4}">
+                <adec:decorative xmlns:adec="http://schemas.microsoft.com/office/drawing/2017/decorative" val="1"/>
+              </a:ext>
+            </a:extLst>
+          </p:cNvPr>
+          <p:cNvGrpSpPr>
+            <a:grpSpLocks noGrp="1" noUngrp="1" noRot="1" noChangeAspect="1" noMove="1" noResize="1"/>
+          </p:cNvGrpSpPr>
+          <p:nvPr>
+            <p:extLst>
+              <p:ext uri="{386F3935-93C4-4BCD-93E2-E3B085C9AB24}">
+                <p16:designElem xmlns:p16="http://schemas.microsoft.com/office/powerpoint/2015/main" val="1"/>
+              </p:ext>
+            </p:extLst>
+          </p:nvPr>
+        </p:nvGrpSpPr>
+        <p:grpSpPr>
+          <a:xfrm>
+            <a:off x="157250" y="4415246"/>
+            <a:ext cx="8986749" cy="2087795"/>
+            <a:chOff x="143163" y="5763486"/>
+            <a:chExt cx="11982332" cy="739555"/>
+          </a:xfrm>
+        </p:grpSpPr>
+        <p:sp>
+          <p:nvSpPr>
+            <p:cNvPr id="2071" name="Rectangle 2070">
+              <a:extLst>
+                <a:ext uri="{FF2B5EF4-FFF2-40B4-BE49-F238E27FC236}">
+                  <a16:creationId xmlns:a16="http://schemas.microsoft.com/office/drawing/2014/main" id="{3A9A4357-BD1D-4622-A4FE-766E6AB8DE84}"/>
+                </a:ext>
+                <a:ext uri="{C183D7F6-B498-43B3-948B-1728B52AA6E4}">
+                  <adec:decorative xmlns:adec="http://schemas.microsoft.com/office/drawing/2017/decorative" val="1"/>
+                </a:ext>
+              </a:extLst>
+            </p:cNvPr>
+            <p:cNvSpPr/>
+            <p:nvPr>
+              <p:extLst>
+                <p:ext uri="{386F3935-93C4-4BCD-93E2-E3B085C9AB24}">
+                  <p16:designElem xmlns:p16="http://schemas.microsoft.com/office/powerpoint/2015/main" val="1"/>
+                </p:ext>
+              </p:extLst>
+            </p:nvPr>
+          </p:nvSpPr>
+          <p:spPr>
+            <a:xfrm flipH="1" flipV="1">
+              <a:off x="357444" y="5763486"/>
+              <a:ext cx="11768051" cy="739555"/>
+            </a:xfrm>
+            <a:prstGeom prst="rect">
+              <a:avLst/>
+            </a:prstGeom>
+            <a:solidFill>
+              <a:schemeClr val="accent4"/>
+            </a:solidFill>
+            <a:ln>
+              <a:noFill/>
+            </a:ln>
+          </p:spPr>
+          <p:style>
+            <a:lnRef idx="2">
+              <a:schemeClr val="accent1">
+                <a:shade val="50000"/>
+              </a:schemeClr>
+            </a:lnRef>
+            <a:fillRef idx="1">
+              <a:schemeClr val="accent1"/>
+            </a:fillRef>
+            <a:effectRef idx="0">
+              <a:schemeClr val="accent1"/>
+            </a:effectRef>
+            <a:fontRef idx="minor">
+              <a:schemeClr val="lt1"/>
+            </a:fontRef>
+          </p:style>
+          <p:txBody>
+            <a:bodyPr rtlCol="0" anchor="ctr"/>
+            <a:lstStyle/>
+            <a:p>
+              <a:pPr algn="ctr"/>
+              <a:endParaRPr lang="en-US"/>
+            </a:p>
+          </p:txBody>
+        </p:sp>
+        <p:cxnSp>
+          <p:nvCxnSpPr>
+            <p:cNvPr id="2072" name="Straight Connector 2071">
+              <a:extLst>
+                <a:ext uri="{FF2B5EF4-FFF2-40B4-BE49-F238E27FC236}">
+                  <a16:creationId xmlns:a16="http://schemas.microsoft.com/office/drawing/2014/main" id="{C21D6966-343E-49AC-A026-D2497E0C3CA1}"/>
+                </a:ext>
+                <a:ext uri="{C183D7F6-B498-43B3-948B-1728B52AA6E4}">
+                  <adec:decorative xmlns:adec="http://schemas.microsoft.com/office/drawing/2017/decorative" val="1"/>
+                </a:ext>
+              </a:extLst>
+            </p:cNvPr>
+            <p:cNvCxnSpPr>
+              <a:cxnSpLocks/>
+            </p:cNvCxnSpPr>
+            <p:nvPr>
+              <p:extLst>
+                <p:ext uri="{386F3935-93C4-4BCD-93E2-E3B085C9AB24}">
+                  <p16:designElem xmlns:p16="http://schemas.microsoft.com/office/powerpoint/2015/main" val="1"/>
+                </p:ext>
+              </p:extLst>
+            </p:nvPr>
+          </p:nvCxnSpPr>
+          <p:spPr>
+            <a:xfrm flipH="1">
+              <a:off x="143163" y="5763486"/>
+              <a:ext cx="1" cy="739555"/>
+            </a:xfrm>
+            <a:prstGeom prst="line">
+              <a:avLst/>
+            </a:prstGeom>
+            <a:ln w="177800">
+              <a:solidFill>
+                <a:schemeClr val="accent4"/>
+              </a:solidFill>
+            </a:ln>
+          </p:spPr>
+          <p:style>
+            <a:lnRef idx="1">
+              <a:schemeClr val="accent1"/>
+            </a:lnRef>
+            <a:fillRef idx="0">
+              <a:schemeClr val="accent1"/>
+            </a:fillRef>
+            <a:effectRef idx="0">
+              <a:schemeClr val="accent1"/>
+            </a:effectRef>
+            <a:fontRef idx="minor">
+              <a:schemeClr val="tx1"/>
+            </a:fontRef>
+          </p:style>
+        </p:cxnSp>
+      </p:grpSp>
+      <p:sp>
+        <p:nvSpPr>
+          <p:cNvPr id="2074" name="Rectangle 2073">
+            <a:extLst>
+              <a:ext uri="{FF2B5EF4-FFF2-40B4-BE49-F238E27FC236}">
+                <a16:creationId xmlns:a16="http://schemas.microsoft.com/office/drawing/2014/main" id="{2C1BBA94-3F40-40AA-8BB9-E69E25E537C1}"/>
+              </a:ext>
+              <a:ext uri="{C183D7F6-B498-43B3-948B-1728B52AA6E4}">
+                <adec:decorative xmlns:adec="http://schemas.microsoft.com/office/drawing/2017/decorative" val="1"/>
+              </a:ext>
+            </a:extLst>
+          </p:cNvPr>
+          <p:cNvSpPr>
+            <a:spLocks noGrp="1" noRot="1" noChangeAspect="1" noMove="1" noResize="1" noEditPoints="1" noAdjustHandles="1" noChangeArrowheads="1" noChangeShapeType="1" noTextEdit="1"/>
+          </p:cNvSpPr>
+          <p:nvPr>
+            <p:extLst>
+              <p:ext uri="{386F3935-93C4-4BCD-93E2-E3B085C9AB24}">
+                <p16:designElem xmlns:p16="http://schemas.microsoft.com/office/powerpoint/2015/main" val="1"/>
+              </p:ext>
+            </p:extLst>
+          </p:nvPr>
+        </p:nvSpPr>
+        <p:spPr>
+          <a:xfrm>
+            <a:off x="3850279" y="587829"/>
+            <a:ext cx="4878975" cy="5682342"/>
+          </a:xfrm>
+          <a:prstGeom prst="rect">
+            <a:avLst/>
+          </a:prstGeom>
+          <a:solidFill>
+            <a:schemeClr val="bg1"/>
+          </a:solidFill>
+          <a:ln>
+            <a:noFill/>
+          </a:ln>
+          <a:effectLst>
+            <a:outerShdw blurRad="139700" dist="127000" dir="5400000" algn="t" rotWithShape="0">
+              <a:prstClr val="black">
+                <a:alpha val="15000"/>
+              </a:prstClr>
+            </a:outerShdw>
+          </a:effectLst>
+        </p:spPr>
+        <p:style>
+          <a:lnRef idx="2">
+            <a:schemeClr val="accent1">
+              <a:shade val="50000"/>
+            </a:schemeClr>
+          </a:lnRef>
+          <a:fillRef idx="1">
+            <a:schemeClr val="accent1"/>
+          </a:fillRef>
+          <a:effectRef idx="0">
+            <a:schemeClr val="accent1"/>
+          </a:effectRef>
+          <a:fontRef idx="minor">
+            <a:schemeClr val="lt1"/>
+          </a:fontRef>
+        </p:style>
+        <p:txBody>
+          <a:bodyPr rtlCol="0" anchor="ctr"/>
+          <a:lstStyle/>
+          <a:p>
+            <a:pPr algn="ctr"/>
+            <a:endParaRPr lang="en-US"/>
+          </a:p>
+        </p:txBody>
+      </p:sp>
+      <p:sp>
+        <p:nvSpPr>
+          <p:cNvPr id="4" name="Inhaltsplatzhalter 3">
+            <a:extLst>
+              <a:ext uri="{FF2B5EF4-FFF2-40B4-BE49-F238E27FC236}">
+                <a16:creationId xmlns:a16="http://schemas.microsoft.com/office/drawing/2014/main" id="{3EDAB6A7-60DE-D475-B6EF-B1A6D39349F1}"/>
+              </a:ext>
+            </a:extLst>
+          </p:cNvPr>
+          <p:cNvSpPr>
+            <a:spLocks noGrp="1"/>
+          </p:cNvSpPr>
+          <p:nvPr>
+            <p:ph idx="1"/>
+          </p:nvPr>
+        </p:nvSpPr>
+        <p:spPr>
+          <a:xfrm>
+            <a:off x="4242163" y="1463039"/>
+            <a:ext cx="4245132" cy="4300447"/>
+          </a:xfrm>
+        </p:spPr>
+        <p:txBody>
+          <a:bodyPr anchor="t">
+            <a:normAutofit/>
+          </a:bodyPr>
+          <a:lstStyle/>
+          <a:p>
+            <a:pPr marL="0" indent="0">
+              <a:buNone/>
+            </a:pPr>
+            <a:r>
+              <a:rPr lang="de-CH" sz="1900" b="1" dirty="0"/>
+              <a:t>Kernidee</a:t>
+            </a:r>
+          </a:p>
+          <a:p>
+            <a:pPr>
+              <a:buFont typeface="Wingdings" panose="05000000000000000000" pitchFamily="2" charset="2"/>
+              <a:buChar char="Ø"/>
+            </a:pPr>
+            <a:r>
+              <a:rPr lang="de-CH" sz="1900" dirty="0"/>
+              <a:t>Grosse Systeme bei Google wurden immer komplexer, </a:t>
+            </a:r>
+            <a:r>
+              <a:rPr lang="de-CH" sz="1900" dirty="0" err="1"/>
+              <a:t>Builds</a:t>
+            </a:r>
+            <a:r>
+              <a:rPr lang="de-CH" sz="1900" dirty="0"/>
+              <a:t> dauerten lange und viele Sprachen waren zu kompliziert oder zu ineffizient </a:t>
+            </a:r>
+            <a:r>
+              <a:rPr lang="de-CH" sz="1900" dirty="0">
+                <a:sym typeface="Wingdings" panose="05000000000000000000" pitchFamily="2" charset="2"/>
+              </a:rPr>
+              <a:t> </a:t>
+            </a:r>
+            <a:r>
+              <a:rPr lang="de-CH" sz="1900" b="1" dirty="0">
+                <a:sym typeface="Wingdings" panose="05000000000000000000" pitchFamily="2" charset="2"/>
+              </a:rPr>
+              <a:t>Go sollte die Mitte treffen</a:t>
+            </a:r>
+            <a:endParaRPr lang="de-CH" sz="1900" dirty="0"/>
+          </a:p>
+          <a:p>
+            <a:pPr marL="0" indent="0">
+              <a:buNone/>
+            </a:pPr>
+            <a:r>
+              <a:rPr lang="de-CH" sz="1900" b="1" dirty="0"/>
+              <a:t>Die wichtigsten Prinzipien der Go-Vision</a:t>
+            </a:r>
+          </a:p>
+          <a:p>
+            <a:pPr>
+              <a:buFont typeface="Wingdings" panose="05000000000000000000" pitchFamily="2" charset="2"/>
+              <a:buChar char="Ø"/>
+            </a:pPr>
+            <a:r>
+              <a:rPr lang="de-CH" sz="1900" dirty="0"/>
+              <a:t>Einfachheit über alles</a:t>
+            </a:r>
+          </a:p>
+          <a:p>
+            <a:pPr>
+              <a:buFont typeface="Wingdings" panose="05000000000000000000" pitchFamily="2" charset="2"/>
+              <a:buChar char="Ø"/>
+            </a:pPr>
+            <a:r>
+              <a:rPr lang="de-CH" sz="1900" dirty="0"/>
+              <a:t>Schnelligkeit</a:t>
+            </a:r>
+          </a:p>
+          <a:p>
+            <a:pPr>
+              <a:buFont typeface="Wingdings" panose="05000000000000000000" pitchFamily="2" charset="2"/>
+              <a:buChar char="Ø"/>
+            </a:pPr>
+            <a:r>
+              <a:rPr lang="de-CH" sz="1900" dirty="0"/>
+              <a:t>Eingebaute Nebenläufigkeit</a:t>
+            </a:r>
+          </a:p>
+          <a:p>
+            <a:pPr>
+              <a:buFont typeface="Wingdings" panose="05000000000000000000" pitchFamily="2" charset="2"/>
+              <a:buChar char="Ø"/>
+            </a:pPr>
+            <a:r>
+              <a:rPr lang="de-CH" sz="1900" dirty="0"/>
+              <a:t>Starke Standardbibliothek</a:t>
+            </a:r>
+          </a:p>
+          <a:p>
+            <a:pPr>
+              <a:buFont typeface="Wingdings" panose="05000000000000000000" pitchFamily="2" charset="2"/>
+              <a:buChar char="Ø"/>
+            </a:pPr>
+            <a:r>
+              <a:rPr lang="de-CH" sz="1900" dirty="0"/>
+              <a:t>Klare Struktur für Teams</a:t>
+            </a:r>
+          </a:p>
+        </p:txBody>
+      </p:sp>
+      <p:pic>
+        <p:nvPicPr>
+          <p:cNvPr id="2052" name="Picture 4" descr="Learning Golang in 24 hours | Kislay Verma">
+            <a:extLst>
+              <a:ext uri="{FF2B5EF4-FFF2-40B4-BE49-F238E27FC236}">
+                <a16:creationId xmlns:a16="http://schemas.microsoft.com/office/drawing/2014/main" id="{E5CF7752-C6D5-F45E-36E9-7DBD67F25235}"/>
+              </a:ext>
+            </a:extLst>
+          </p:cNvPr>
+          <p:cNvPicPr>
+            <a:picLocks noChangeAspect="1" noChangeArrowheads="1"/>
+          </p:cNvPicPr>
+          <p:nvPr/>
+        </p:nvPicPr>
+        <p:blipFill>
+          <a:blip r:embed="rId3">
+            <a:extLst>
+              <a:ext uri="{28A0092B-C50C-407E-A947-70E740481C1C}">
+                <a14:useLocalDpi xmlns:a14="http://schemas.microsoft.com/office/drawing/2010/main" val="0"/>
+              </a:ext>
+            </a:extLst>
+          </a:blip>
+          <a:srcRect/>
+          <a:stretch>
+            <a:fillRect/>
+          </a:stretch>
+        </p:blipFill>
+        <p:spPr bwMode="auto">
+          <a:xfrm>
+            <a:off x="7955280" y="0"/>
+            <a:ext cx="1116418" cy="1369399"/>
+          </a:xfrm>
+          <a:prstGeom prst="rect">
+            <a:avLst/>
+          </a:prstGeom>
+          <a:noFill/>
+          <a:extLst>
+            <a:ext uri="{909E8E84-426E-40DD-AFC4-6F175D3DCCD1}">
+              <a14:hiddenFill xmlns:a14="http://schemas.microsoft.com/office/drawing/2010/main">
+                <a:solidFill>
+                  <a:srgbClr val="FFFFFF"/>
+                </a:solidFill>
+              </a14:hiddenFill>
+            </a:ext>
+          </a:extLst>
+        </p:spPr>
+      </p:pic>
+    </p:spTree>
+    <p:extLst>
+      <p:ext uri="{BB962C8B-B14F-4D97-AF65-F5344CB8AC3E}">
+        <p14:creationId xmlns:p14="http://schemas.microsoft.com/office/powerpoint/2010/main" val="848672094"/>
+      </p:ext>
+    </p:extLst>
+  </p:cSld>
+  <p:clrMapOvr>
+    <a:masterClrMapping/>
+  </p:clrMapOvr>
+</p:sld>
+</file>
+
+<file path=ppt/slides/slide20.xml><?xml version="1.0" encoding="utf-8"?>
 <p:sld xmlns:a="http://schemas.openxmlformats.org/drawingml/2006/main" xmlns:r="http://schemas.openxmlformats.org/officeDocument/2006/relationships" xmlns:p="http://schemas.openxmlformats.org/presentationml/2006/main">
   <p:cSld>
     <p:bg>
@@ -10691,7 +13116,7 @@
 </p:sld>
 </file>
 
-<file path=ppt/slides/slide17.xml><?xml version="1.0" encoding="utf-8"?>
+<file path=ppt/slides/slide21.xml><?xml version="1.0" encoding="utf-8"?>
 <p:sld xmlns:a="http://schemas.openxmlformats.org/drawingml/2006/main" xmlns:r="http://schemas.openxmlformats.org/officeDocument/2006/relationships" xmlns:p="http://schemas.openxmlformats.org/presentationml/2006/main">
   <p:cSld>
     <p:bg>
@@ -11098,13 +13523,13 @@
           <p:nvPr/>
         </p:nvPicPr>
         <p:blipFill>
-          <a:blip>
+          <a:blip r:embed="rId3">
             <a:extLst>
               <a:ext uri="{28A0092B-C50C-407E-A947-70E740481C1C}">
                 <a14:useLocalDpi xmlns:a14="http://schemas.microsoft.com/office/drawing/2010/main" val="0"/>
               </a:ext>
               <a:ext uri="{96DAC541-7B7A-43D3-8B79-37D633B846F1}">
-                <asvg:svgBlip xmlns:asvg="http://schemas.microsoft.com/office/drawing/2016/SVG/main" r:embed="rId3"/>
+                <asvg:svgBlip xmlns:asvg="http://schemas.microsoft.com/office/drawing/2016/SVG/main" r:embed="rId4"/>
               </a:ext>
             </a:extLst>
           </a:blip>
@@ -11126,529 +13551,6 @@
     <p:extLst>
       <p:ext uri="{BB962C8B-B14F-4D97-AF65-F5344CB8AC3E}">
         <p14:creationId xmlns:p14="http://schemas.microsoft.com/office/powerpoint/2010/main" val="2803096092"/>
-      </p:ext>
-    </p:extLst>
-  </p:cSld>
-  <p:clrMapOvr>
-    <a:masterClrMapping/>
-  </p:clrMapOvr>
-</p:sld>
-</file>
-
-<file path=ppt/slides/slide2.xml><?xml version="1.0" encoding="utf-8"?>
-<p:sld xmlns:a="http://schemas.openxmlformats.org/drawingml/2006/main" xmlns:r="http://schemas.openxmlformats.org/officeDocument/2006/relationships" xmlns:p="http://schemas.openxmlformats.org/presentationml/2006/main">
-  <p:cSld>
-    <p:bg>
-      <p:bgPr>
-        <a:solidFill>
-          <a:schemeClr val="bg1"/>
-        </a:solidFill>
-        <a:effectLst/>
-      </p:bgPr>
-    </p:bg>
-    <p:spTree>
-      <p:nvGrpSpPr>
-        <p:cNvPr id="1" name=""/>
-        <p:cNvGrpSpPr/>
-        <p:nvPr/>
-      </p:nvGrpSpPr>
-      <p:grpSpPr>
-        <a:xfrm>
-          <a:off x="0" y="0"/>
-          <a:ext cx="0" cy="0"/>
-          <a:chOff x="0" y="0"/>
-          <a:chExt cx="0" cy="0"/>
-        </a:xfrm>
-      </p:grpSpPr>
-      <p:sp useBgFill="1">
-        <p:nvSpPr>
-          <p:cNvPr id="2068" name="Rectangle 2067">
-            <a:extLst>
-              <a:ext uri="{FF2B5EF4-FFF2-40B4-BE49-F238E27FC236}">
-                <a16:creationId xmlns:a16="http://schemas.microsoft.com/office/drawing/2014/main" id="{3AD318CC-E2A8-4E27-9548-A047A78999B1}"/>
-              </a:ext>
-              <a:ext uri="{C183D7F6-B498-43B3-948B-1728B52AA6E4}">
-                <adec:decorative xmlns:adec="http://schemas.microsoft.com/office/drawing/2017/decorative" val="1"/>
-              </a:ext>
-            </a:extLst>
-          </p:cNvPr>
-          <p:cNvSpPr>
-            <a:spLocks noGrp="1" noRot="1" noChangeAspect="1" noMove="1" noResize="1" noEditPoints="1" noAdjustHandles="1" noChangeArrowheads="1" noChangeShapeType="1" noTextEdit="1"/>
-          </p:cNvSpPr>
-          <p:nvPr>
-            <p:extLst>
-              <p:ext uri="{386F3935-93C4-4BCD-93E2-E3B085C9AB24}">
-                <p16:designElem xmlns:p16="http://schemas.microsoft.com/office/powerpoint/2015/main" val="1"/>
-              </p:ext>
-            </p:extLst>
-          </p:nvPr>
-        </p:nvSpPr>
-        <p:spPr>
-          <a:xfrm>
-            <a:off x="0" y="0"/>
-            <a:ext cx="9143999" cy="6857365"/>
-          </a:xfrm>
-          <a:prstGeom prst="rect">
-            <a:avLst/>
-          </a:prstGeom>
-          <a:ln>
-            <a:noFill/>
-          </a:ln>
-        </p:spPr>
-        <p:style>
-          <a:lnRef idx="2">
-            <a:schemeClr val="accent1">
-              <a:shade val="50000"/>
-            </a:schemeClr>
-          </a:lnRef>
-          <a:fillRef idx="1">
-            <a:schemeClr val="accent1"/>
-          </a:fillRef>
-          <a:effectRef idx="0">
-            <a:schemeClr val="accent1"/>
-          </a:effectRef>
-          <a:fontRef idx="minor">
-            <a:schemeClr val="lt1"/>
-          </a:fontRef>
-        </p:style>
-        <p:txBody>
-          <a:bodyPr rtlCol="0" anchor="ctr"/>
-          <a:lstStyle/>
-          <a:p>
-            <a:pPr algn="ctr"/>
-            <a:endParaRPr lang="en-US"/>
-          </a:p>
-        </p:txBody>
-      </p:sp>
-      <p:sp>
-        <p:nvSpPr>
-          <p:cNvPr id="2" name="Titel 1">
-            <a:extLst>
-              <a:ext uri="{FF2B5EF4-FFF2-40B4-BE49-F238E27FC236}">
-                <a16:creationId xmlns:a16="http://schemas.microsoft.com/office/drawing/2014/main" id="{710A1EB6-AD89-4B38-B328-726CF9C21286}"/>
-              </a:ext>
-            </a:extLst>
-          </p:cNvPr>
-          <p:cNvSpPr>
-            <a:spLocks noGrp="1"/>
-          </p:cNvSpPr>
-          <p:nvPr>
-            <p:ph type="title"/>
-          </p:nvPr>
-        </p:nvSpPr>
-        <p:spPr>
-          <a:xfrm>
-            <a:off x="483798" y="1463040"/>
-            <a:ext cx="2847230" cy="2690949"/>
-          </a:xfrm>
-        </p:spPr>
-        <p:txBody>
-          <a:bodyPr anchor="t">
-            <a:normAutofit/>
-          </a:bodyPr>
-          <a:lstStyle/>
-          <a:p>
-            <a:r>
-              <a:rPr lang="de-CH" sz="4200"/>
-              <a:t>Vision</a:t>
-            </a:r>
-          </a:p>
-        </p:txBody>
-      </p:sp>
-      <p:grpSp>
-        <p:nvGrpSpPr>
-          <p:cNvPr id="2070" name="Group 2069">
-            <a:extLst>
-              <a:ext uri="{FF2B5EF4-FFF2-40B4-BE49-F238E27FC236}">
-                <a16:creationId xmlns:a16="http://schemas.microsoft.com/office/drawing/2014/main" id="{B14B560F-9DD7-4302-A60B-EBD3EF59B073}"/>
-              </a:ext>
-              <a:ext uri="{C183D7F6-B498-43B3-948B-1728B52AA6E4}">
-                <adec:decorative xmlns:adec="http://schemas.microsoft.com/office/drawing/2017/decorative" val="1"/>
-              </a:ext>
-            </a:extLst>
-          </p:cNvPr>
-          <p:cNvGrpSpPr>
-            <a:grpSpLocks noGrp="1" noUngrp="1" noRot="1" noChangeAspect="1" noMove="1" noResize="1"/>
-          </p:cNvGrpSpPr>
-          <p:nvPr>
-            <p:extLst>
-              <p:ext uri="{386F3935-93C4-4BCD-93E2-E3B085C9AB24}">
-                <p16:designElem xmlns:p16="http://schemas.microsoft.com/office/powerpoint/2015/main" val="1"/>
-              </p:ext>
-            </p:extLst>
-          </p:nvPr>
-        </p:nvGrpSpPr>
-        <p:grpSpPr>
-          <a:xfrm>
-            <a:off x="157250" y="4415246"/>
-            <a:ext cx="8986749" cy="2087795"/>
-            <a:chOff x="143163" y="5763486"/>
-            <a:chExt cx="11982332" cy="739555"/>
-          </a:xfrm>
-        </p:grpSpPr>
-        <p:sp>
-          <p:nvSpPr>
-            <p:cNvPr id="2071" name="Rectangle 2070">
-              <a:extLst>
-                <a:ext uri="{FF2B5EF4-FFF2-40B4-BE49-F238E27FC236}">
-                  <a16:creationId xmlns:a16="http://schemas.microsoft.com/office/drawing/2014/main" id="{3A9A4357-BD1D-4622-A4FE-766E6AB8DE84}"/>
-                </a:ext>
-                <a:ext uri="{C183D7F6-B498-43B3-948B-1728B52AA6E4}">
-                  <adec:decorative xmlns:adec="http://schemas.microsoft.com/office/drawing/2017/decorative" val="1"/>
-                </a:ext>
-              </a:extLst>
-            </p:cNvPr>
-            <p:cNvSpPr/>
-            <p:nvPr>
-              <p:extLst>
-                <p:ext uri="{386F3935-93C4-4BCD-93E2-E3B085C9AB24}">
-                  <p16:designElem xmlns:p16="http://schemas.microsoft.com/office/powerpoint/2015/main" val="1"/>
-                </p:ext>
-              </p:extLst>
-            </p:nvPr>
-          </p:nvSpPr>
-          <p:spPr>
-            <a:xfrm flipH="1" flipV="1">
-              <a:off x="357444" y="5763486"/>
-              <a:ext cx="11768051" cy="739555"/>
-            </a:xfrm>
-            <a:prstGeom prst="rect">
-              <a:avLst/>
-            </a:prstGeom>
-            <a:solidFill>
-              <a:schemeClr val="accent4"/>
-            </a:solidFill>
-            <a:ln>
-              <a:noFill/>
-            </a:ln>
-          </p:spPr>
-          <p:style>
-            <a:lnRef idx="2">
-              <a:schemeClr val="accent1">
-                <a:shade val="50000"/>
-              </a:schemeClr>
-            </a:lnRef>
-            <a:fillRef idx="1">
-              <a:schemeClr val="accent1"/>
-            </a:fillRef>
-            <a:effectRef idx="0">
-              <a:schemeClr val="accent1"/>
-            </a:effectRef>
-            <a:fontRef idx="minor">
-              <a:schemeClr val="lt1"/>
-            </a:fontRef>
-          </p:style>
-          <p:txBody>
-            <a:bodyPr rtlCol="0" anchor="ctr"/>
-            <a:lstStyle/>
-            <a:p>
-              <a:pPr algn="ctr"/>
-              <a:endParaRPr lang="en-US"/>
-            </a:p>
-          </p:txBody>
-        </p:sp>
-        <p:cxnSp>
-          <p:nvCxnSpPr>
-            <p:cNvPr id="2072" name="Straight Connector 2071">
-              <a:extLst>
-                <a:ext uri="{FF2B5EF4-FFF2-40B4-BE49-F238E27FC236}">
-                  <a16:creationId xmlns:a16="http://schemas.microsoft.com/office/drawing/2014/main" id="{C21D6966-343E-49AC-A026-D2497E0C3CA1}"/>
-                </a:ext>
-                <a:ext uri="{C183D7F6-B498-43B3-948B-1728B52AA6E4}">
-                  <adec:decorative xmlns:adec="http://schemas.microsoft.com/office/drawing/2017/decorative" val="1"/>
-                </a:ext>
-              </a:extLst>
-            </p:cNvPr>
-            <p:cNvCxnSpPr>
-              <a:cxnSpLocks/>
-            </p:cNvCxnSpPr>
-            <p:nvPr>
-              <p:extLst>
-                <p:ext uri="{386F3935-93C4-4BCD-93E2-E3B085C9AB24}">
-                  <p16:designElem xmlns:p16="http://schemas.microsoft.com/office/powerpoint/2015/main" val="1"/>
-                </p:ext>
-              </p:extLst>
-            </p:nvPr>
-          </p:nvCxnSpPr>
-          <p:spPr>
-            <a:xfrm flipH="1">
-              <a:off x="143163" y="5763486"/>
-              <a:ext cx="1" cy="739555"/>
-            </a:xfrm>
-            <a:prstGeom prst="line">
-              <a:avLst/>
-            </a:prstGeom>
-            <a:ln w="177800">
-              <a:solidFill>
-                <a:schemeClr val="accent4"/>
-              </a:solidFill>
-            </a:ln>
-          </p:spPr>
-          <p:style>
-            <a:lnRef idx="1">
-              <a:schemeClr val="accent1"/>
-            </a:lnRef>
-            <a:fillRef idx="0">
-              <a:schemeClr val="accent1"/>
-            </a:fillRef>
-            <a:effectRef idx="0">
-              <a:schemeClr val="accent1"/>
-            </a:effectRef>
-            <a:fontRef idx="minor">
-              <a:schemeClr val="tx1"/>
-            </a:fontRef>
-          </p:style>
-        </p:cxnSp>
-      </p:grpSp>
-      <p:sp>
-        <p:nvSpPr>
-          <p:cNvPr id="2074" name="Rectangle 2073">
-            <a:extLst>
-              <a:ext uri="{FF2B5EF4-FFF2-40B4-BE49-F238E27FC236}">
-                <a16:creationId xmlns:a16="http://schemas.microsoft.com/office/drawing/2014/main" id="{2C1BBA94-3F40-40AA-8BB9-E69E25E537C1}"/>
-              </a:ext>
-              <a:ext uri="{C183D7F6-B498-43B3-948B-1728B52AA6E4}">
-                <adec:decorative xmlns:adec="http://schemas.microsoft.com/office/drawing/2017/decorative" val="1"/>
-              </a:ext>
-            </a:extLst>
-          </p:cNvPr>
-          <p:cNvSpPr>
-            <a:spLocks noGrp="1" noRot="1" noChangeAspect="1" noMove="1" noResize="1" noEditPoints="1" noAdjustHandles="1" noChangeArrowheads="1" noChangeShapeType="1" noTextEdit="1"/>
-          </p:cNvSpPr>
-          <p:nvPr>
-            <p:extLst>
-              <p:ext uri="{386F3935-93C4-4BCD-93E2-E3B085C9AB24}">
-                <p16:designElem xmlns:p16="http://schemas.microsoft.com/office/powerpoint/2015/main" val="1"/>
-              </p:ext>
-            </p:extLst>
-          </p:nvPr>
-        </p:nvSpPr>
-        <p:spPr>
-          <a:xfrm>
-            <a:off x="3850279" y="587829"/>
-            <a:ext cx="4878975" cy="5682342"/>
-          </a:xfrm>
-          <a:prstGeom prst="rect">
-            <a:avLst/>
-          </a:prstGeom>
-          <a:solidFill>
-            <a:schemeClr val="bg1"/>
-          </a:solidFill>
-          <a:ln>
-            <a:noFill/>
-          </a:ln>
-          <a:effectLst>
-            <a:outerShdw blurRad="139700" dist="127000" dir="5400000" algn="t" rotWithShape="0">
-              <a:prstClr val="black">
-                <a:alpha val="15000"/>
-              </a:prstClr>
-            </a:outerShdw>
-          </a:effectLst>
-        </p:spPr>
-        <p:style>
-          <a:lnRef idx="2">
-            <a:schemeClr val="accent1">
-              <a:shade val="50000"/>
-            </a:schemeClr>
-          </a:lnRef>
-          <a:fillRef idx="1">
-            <a:schemeClr val="accent1"/>
-          </a:fillRef>
-          <a:effectRef idx="0">
-            <a:schemeClr val="accent1"/>
-          </a:effectRef>
-          <a:fontRef idx="minor">
-            <a:schemeClr val="lt1"/>
-          </a:fontRef>
-        </p:style>
-        <p:txBody>
-          <a:bodyPr rtlCol="0" anchor="ctr"/>
-          <a:lstStyle/>
-          <a:p>
-            <a:pPr algn="ctr"/>
-            <a:endParaRPr lang="en-US"/>
-          </a:p>
-        </p:txBody>
-      </p:sp>
-      <p:sp>
-        <p:nvSpPr>
-          <p:cNvPr id="4" name="Inhaltsplatzhalter 3">
-            <a:extLst>
-              <a:ext uri="{FF2B5EF4-FFF2-40B4-BE49-F238E27FC236}">
-                <a16:creationId xmlns:a16="http://schemas.microsoft.com/office/drawing/2014/main" id="{3EDAB6A7-60DE-D475-B6EF-B1A6D39349F1}"/>
-              </a:ext>
-            </a:extLst>
-          </p:cNvPr>
-          <p:cNvSpPr>
-            <a:spLocks noGrp="1"/>
-          </p:cNvSpPr>
-          <p:nvPr>
-            <p:ph idx="1"/>
-          </p:nvPr>
-        </p:nvSpPr>
-        <p:spPr>
-          <a:xfrm>
-            <a:off x="4242163" y="1463039"/>
-            <a:ext cx="4245132" cy="4300447"/>
-          </a:xfrm>
-        </p:spPr>
-        <p:txBody>
-          <a:bodyPr anchor="t">
-            <a:normAutofit/>
-          </a:bodyPr>
-          <a:lstStyle/>
-          <a:p>
-            <a:pPr marL="0" indent="0">
-              <a:buNone/>
-            </a:pPr>
-            <a:r>
-              <a:rPr lang="de-CH" sz="1900" b="1" dirty="0"/>
-              <a:t>Kernidee</a:t>
-            </a:r>
-          </a:p>
-          <a:p>
-            <a:pPr>
-              <a:buFont typeface="Wingdings" panose="05000000000000000000" pitchFamily="2" charset="2"/>
-              <a:buChar char="Ø"/>
-            </a:pPr>
-            <a:r>
-              <a:rPr lang="de-CH" sz="1900" dirty="0"/>
-              <a:t>Grosse Systeme bei Google wurden immer komplexer, </a:t>
-            </a:r>
-            <a:r>
-              <a:rPr lang="de-CH" sz="1900" dirty="0" err="1"/>
-              <a:t>Builds</a:t>
-            </a:r>
-            <a:r>
-              <a:rPr lang="de-CH" sz="1900" dirty="0"/>
-              <a:t> dauerten lange und viele Sprachen waren zu kompliziert oder zu ineffizient </a:t>
-            </a:r>
-            <a:r>
-              <a:rPr lang="de-CH" sz="1900" dirty="0">
-                <a:sym typeface="Wingdings" panose="05000000000000000000" pitchFamily="2" charset="2"/>
-              </a:rPr>
-              <a:t> </a:t>
-            </a:r>
-            <a:r>
-              <a:rPr lang="de-CH" sz="1900" b="1" dirty="0">
-                <a:sym typeface="Wingdings" panose="05000000000000000000" pitchFamily="2" charset="2"/>
-              </a:rPr>
-              <a:t>Go sollte die Mitte treffen</a:t>
-            </a:r>
-            <a:endParaRPr lang="de-CH" sz="1900" dirty="0"/>
-          </a:p>
-          <a:p>
-            <a:pPr marL="0" indent="0">
-              <a:buNone/>
-            </a:pPr>
-            <a:r>
-              <a:rPr lang="de-CH" sz="1900" b="1" dirty="0"/>
-              <a:t>Die wichtigsten Prinzipien der Go-Vision</a:t>
-            </a:r>
-          </a:p>
-          <a:p>
-            <a:pPr>
-              <a:buFont typeface="Wingdings" panose="05000000000000000000" pitchFamily="2" charset="2"/>
-              <a:buChar char="Ø"/>
-            </a:pPr>
-            <a:r>
-              <a:rPr lang="de-CH" sz="1900" dirty="0"/>
-              <a:t>Einfachheit über alles</a:t>
-            </a:r>
-          </a:p>
-          <a:p>
-            <a:pPr>
-              <a:buFont typeface="Wingdings" panose="05000000000000000000" pitchFamily="2" charset="2"/>
-              <a:buChar char="Ø"/>
-            </a:pPr>
-            <a:r>
-              <a:rPr lang="de-CH" sz="1900" dirty="0"/>
-              <a:t>Schnelligkeit</a:t>
-            </a:r>
-          </a:p>
-          <a:p>
-            <a:pPr>
-              <a:buFont typeface="Wingdings" panose="05000000000000000000" pitchFamily="2" charset="2"/>
-              <a:buChar char="Ø"/>
-            </a:pPr>
-            <a:r>
-              <a:rPr lang="de-CH" sz="1900" dirty="0"/>
-              <a:t>Eingebaute Nebenläufigkeit</a:t>
-            </a:r>
-          </a:p>
-          <a:p>
-            <a:pPr>
-              <a:buFont typeface="Wingdings" panose="05000000000000000000" pitchFamily="2" charset="2"/>
-              <a:buChar char="Ø"/>
-            </a:pPr>
-            <a:r>
-              <a:rPr lang="de-CH" sz="1900" dirty="0"/>
-              <a:t>Starke Standardbibliothek</a:t>
-            </a:r>
-          </a:p>
-          <a:p>
-            <a:pPr>
-              <a:buFont typeface="Wingdings" panose="05000000000000000000" pitchFamily="2" charset="2"/>
-              <a:buChar char="Ø"/>
-            </a:pPr>
-            <a:r>
-              <a:rPr lang="de-CH" sz="1900" dirty="0"/>
-              <a:t>Klare Struktur für Teams</a:t>
-            </a:r>
-          </a:p>
-        </p:txBody>
-      </p:sp>
-      <p:pic>
-        <p:nvPicPr>
-          <p:cNvPr id="2052" name="Picture 4" descr="Learning Golang in 24 hours | Kislay Verma">
-            <a:extLst>
-              <a:ext uri="{FF2B5EF4-FFF2-40B4-BE49-F238E27FC236}">
-                <a16:creationId xmlns:a16="http://schemas.microsoft.com/office/drawing/2014/main" id="{E5CF7752-C6D5-F45E-36E9-7DBD67F25235}"/>
-              </a:ext>
-            </a:extLst>
-          </p:cNvPr>
-          <p:cNvPicPr>
-            <a:picLocks noChangeAspect="1" noChangeArrowheads="1"/>
-          </p:cNvPicPr>
-          <p:nvPr/>
-        </p:nvPicPr>
-        <p:blipFill>
-          <a:blip r:embed="rId3">
-            <a:extLst>
-              <a:ext uri="{28A0092B-C50C-407E-A947-70E740481C1C}">
-                <a14:useLocalDpi xmlns:a14="http://schemas.microsoft.com/office/drawing/2010/main" val="0"/>
-              </a:ext>
-            </a:extLst>
-          </a:blip>
-          <a:srcRect/>
-          <a:stretch>
-            <a:fillRect/>
-          </a:stretch>
-        </p:blipFill>
-        <p:spPr bwMode="auto">
-          <a:xfrm>
-            <a:off x="7955280" y="0"/>
-            <a:ext cx="1116418" cy="1369399"/>
-          </a:xfrm>
-          <a:prstGeom prst="rect">
-            <a:avLst/>
-          </a:prstGeom>
-          <a:noFill/>
-          <a:extLst>
-            <a:ext uri="{909E8E84-426E-40DD-AFC4-6F175D3DCCD1}">
-              <a14:hiddenFill xmlns:a14="http://schemas.microsoft.com/office/drawing/2010/main">
-                <a:solidFill>
-                  <a:srgbClr val="FFFFFF"/>
-                </a:solidFill>
-              </a14:hiddenFill>
-            </a:ext>
-          </a:extLst>
-        </p:spPr>
-      </p:pic>
-    </p:spTree>
-    <p:extLst>
-      <p:ext uri="{BB962C8B-B14F-4D97-AF65-F5344CB8AC3E}">
-        <p14:creationId xmlns:p14="http://schemas.microsoft.com/office/powerpoint/2010/main" val="848672094"/>
       </p:ext>
     </p:extLst>
   </p:cSld>
@@ -12692,6 +14594,543 @@
         <p:cNvPr id="1" name="">
           <a:extLst>
             <a:ext uri="{FF2B5EF4-FFF2-40B4-BE49-F238E27FC236}">
+              <a16:creationId xmlns:a16="http://schemas.microsoft.com/office/drawing/2014/main" id="{C0FF49C7-044B-4325-B149-D8FFB22C8B14}"/>
+            </a:ext>
+          </a:extLst>
+        </p:cNvPr>
+        <p:cNvGrpSpPr/>
+        <p:nvPr/>
+      </p:nvGrpSpPr>
+      <p:grpSpPr>
+        <a:xfrm>
+          <a:off x="0" y="0"/>
+          <a:ext cx="0" cy="0"/>
+          <a:chOff x="0" y="0"/>
+          <a:chExt cx="0" cy="0"/>
+        </a:xfrm>
+      </p:grpSpPr>
+      <p:sp useBgFill="1">
+        <p:nvSpPr>
+          <p:cNvPr id="2057" name="Rectangle 2056">
+            <a:extLst>
+              <a:ext uri="{FF2B5EF4-FFF2-40B4-BE49-F238E27FC236}">
+                <a16:creationId xmlns:a16="http://schemas.microsoft.com/office/drawing/2014/main" id="{D7E04227-2EA1-17D7-48E3-EB08C2A9495F}"/>
+              </a:ext>
+              <a:ext uri="{C183D7F6-B498-43B3-948B-1728B52AA6E4}">
+                <adec:decorative xmlns:adec="http://schemas.microsoft.com/office/drawing/2017/decorative" val="1"/>
+              </a:ext>
+            </a:extLst>
+          </p:cNvPr>
+          <p:cNvSpPr>
+            <a:spLocks noGrp="1" noRot="1" noChangeAspect="1" noMove="1" noResize="1" noEditPoints="1" noAdjustHandles="1" noChangeArrowheads="1" noChangeShapeType="1" noTextEdit="1"/>
+          </p:cNvSpPr>
+          <p:nvPr>
+            <p:extLst>
+              <p:ext uri="{386F3935-93C4-4BCD-93E2-E3B085C9AB24}">
+                <p16:designElem xmlns:p16="http://schemas.microsoft.com/office/powerpoint/2015/main" val="1"/>
+              </p:ext>
+            </p:extLst>
+          </p:nvPr>
+        </p:nvSpPr>
+        <p:spPr>
+          <a:xfrm>
+            <a:off x="0" y="0"/>
+            <a:ext cx="9143999" cy="6857365"/>
+          </a:xfrm>
+          <a:prstGeom prst="rect">
+            <a:avLst/>
+          </a:prstGeom>
+          <a:ln>
+            <a:noFill/>
+          </a:ln>
+        </p:spPr>
+        <p:style>
+          <a:lnRef idx="2">
+            <a:schemeClr val="accent1">
+              <a:shade val="50000"/>
+            </a:schemeClr>
+          </a:lnRef>
+          <a:fillRef idx="1">
+            <a:schemeClr val="accent1"/>
+          </a:fillRef>
+          <a:effectRef idx="0">
+            <a:schemeClr val="accent1"/>
+          </a:effectRef>
+          <a:fontRef idx="minor">
+            <a:schemeClr val="lt1"/>
+          </a:fontRef>
+        </p:style>
+        <p:txBody>
+          <a:bodyPr rtlCol="0" anchor="ctr"/>
+          <a:lstStyle/>
+          <a:p>
+            <a:pPr algn="ctr"/>
+            <a:endParaRPr lang="en-US"/>
+          </a:p>
+        </p:txBody>
+      </p:sp>
+      <p:sp>
+        <p:nvSpPr>
+          <p:cNvPr id="2" name="Titel 1">
+            <a:extLst>
+              <a:ext uri="{FF2B5EF4-FFF2-40B4-BE49-F238E27FC236}">
+                <a16:creationId xmlns:a16="http://schemas.microsoft.com/office/drawing/2014/main" id="{21EF691E-7601-7B3D-DE6D-69771A40FEB1}"/>
+              </a:ext>
+            </a:extLst>
+          </p:cNvPr>
+          <p:cNvSpPr>
+            <a:spLocks noGrp="1"/>
+          </p:cNvSpPr>
+          <p:nvPr>
+            <p:ph type="title"/>
+          </p:nvPr>
+        </p:nvSpPr>
+        <p:spPr>
+          <a:xfrm>
+            <a:off x="606478" y="386930"/>
+            <a:ext cx="6927525" cy="1188950"/>
+          </a:xfrm>
+        </p:spPr>
+        <p:txBody>
+          <a:bodyPr anchor="b">
+            <a:normAutofit fontScale="90000"/>
+          </a:bodyPr>
+          <a:lstStyle/>
+          <a:p>
+            <a:r>
+              <a:rPr lang="de-CH" sz="4700" dirty="0"/>
+              <a:t>Generelle Informationen über GO</a:t>
+            </a:r>
+          </a:p>
+        </p:txBody>
+      </p:sp>
+      <p:grpSp>
+        <p:nvGrpSpPr>
+          <p:cNvPr id="2059" name="Group 2058">
+            <a:extLst>
+              <a:ext uri="{FF2B5EF4-FFF2-40B4-BE49-F238E27FC236}">
+                <a16:creationId xmlns:a16="http://schemas.microsoft.com/office/drawing/2014/main" id="{A88AB482-A563-54DE-A864-4F37FC97845C}"/>
+              </a:ext>
+              <a:ext uri="{C183D7F6-B498-43B3-948B-1728B52AA6E4}">
+                <adec:decorative xmlns:adec="http://schemas.microsoft.com/office/drawing/2017/decorative" val="1"/>
+              </a:ext>
+            </a:extLst>
+          </p:cNvPr>
+          <p:cNvGrpSpPr>
+            <a:grpSpLocks noGrp="1" noUngrp="1" noRot="1" noChangeAspect="1" noMove="1" noResize="1"/>
+          </p:cNvGrpSpPr>
+          <p:nvPr>
+            <p:extLst>
+              <p:ext uri="{386F3935-93C4-4BCD-93E2-E3B085C9AB24}">
+                <p16:designElem xmlns:p16="http://schemas.microsoft.com/office/powerpoint/2015/main" val="1"/>
+              </p:ext>
+            </p:extLst>
+          </p:nvPr>
+        </p:nvGrpSpPr>
+        <p:grpSpPr>
+          <a:xfrm>
+            <a:off x="-1" y="1998368"/>
+            <a:ext cx="8771274" cy="782176"/>
+            <a:chOff x="-2" y="1998368"/>
+            <a:chExt cx="11695083" cy="782176"/>
+          </a:xfrm>
+        </p:grpSpPr>
+        <p:sp>
+          <p:nvSpPr>
+            <p:cNvPr id="2060" name="Rectangle 2059">
+              <a:extLst>
+                <a:ext uri="{FF2B5EF4-FFF2-40B4-BE49-F238E27FC236}">
+                  <a16:creationId xmlns:a16="http://schemas.microsoft.com/office/drawing/2014/main" id="{471116CF-D4D7-3A2A-0790-875C7C6AFCB5}"/>
+                </a:ext>
+                <a:ext uri="{C183D7F6-B498-43B3-948B-1728B52AA6E4}">
+                  <adec:decorative xmlns:adec="http://schemas.microsoft.com/office/drawing/2017/decorative" val="1"/>
+                </a:ext>
+              </a:extLst>
+            </p:cNvPr>
+            <p:cNvSpPr/>
+            <p:nvPr>
+              <p:extLst>
+                <p:ext uri="{386F3935-93C4-4BCD-93E2-E3B085C9AB24}">
+                  <p16:designElem xmlns:p16="http://schemas.microsoft.com/office/powerpoint/2015/main" val="1"/>
+                </p:ext>
+              </p:extLst>
+            </p:nvPr>
+          </p:nvSpPr>
+          <p:spPr>
+            <a:xfrm rot="5400000">
+              <a:off x="11228040" y="2313027"/>
+              <a:ext cx="781700" cy="152382"/>
+            </a:xfrm>
+            <a:prstGeom prst="rect">
+              <a:avLst/>
+            </a:prstGeom>
+            <a:solidFill>
+              <a:schemeClr val="accent4"/>
+            </a:solidFill>
+            <a:ln>
+              <a:noFill/>
+            </a:ln>
+          </p:spPr>
+          <p:style>
+            <a:lnRef idx="2">
+              <a:schemeClr val="accent1">
+                <a:shade val="50000"/>
+              </a:schemeClr>
+            </a:lnRef>
+            <a:fillRef idx="1">
+              <a:schemeClr val="accent1"/>
+            </a:fillRef>
+            <a:effectRef idx="0">
+              <a:schemeClr val="accent1"/>
+            </a:effectRef>
+            <a:fontRef idx="minor">
+              <a:schemeClr val="lt1"/>
+            </a:fontRef>
+          </p:style>
+          <p:txBody>
+            <a:bodyPr rtlCol="0" anchor="ctr"/>
+            <a:lstStyle/>
+            <a:p>
+              <a:pPr algn="ctr"/>
+              <a:endParaRPr lang="en-US"/>
+            </a:p>
+          </p:txBody>
+        </p:sp>
+        <p:sp>
+          <p:nvSpPr>
+            <p:cNvPr id="2061" name="Rectangle 2060">
+              <a:extLst>
+                <a:ext uri="{FF2B5EF4-FFF2-40B4-BE49-F238E27FC236}">
+                  <a16:creationId xmlns:a16="http://schemas.microsoft.com/office/drawing/2014/main" id="{73D23E8E-AD90-CF43-001D-66F7A31237BB}"/>
+                </a:ext>
+                <a:ext uri="{C183D7F6-B498-43B3-948B-1728B52AA6E4}">
+                  <adec:decorative xmlns:adec="http://schemas.microsoft.com/office/drawing/2017/decorative" val="1"/>
+                </a:ext>
+              </a:extLst>
+            </p:cNvPr>
+            <p:cNvSpPr/>
+            <p:nvPr>
+              <p:extLst>
+                <p:ext uri="{386F3935-93C4-4BCD-93E2-E3B085C9AB24}">
+                  <p16:designElem xmlns:p16="http://schemas.microsoft.com/office/powerpoint/2015/main" val="1"/>
+                </p:ext>
+              </p:extLst>
+            </p:nvPr>
+          </p:nvSpPr>
+          <p:spPr>
+            <a:xfrm flipH="1" flipV="1">
+              <a:off x="-2" y="1998845"/>
+              <a:ext cx="11454595" cy="781699"/>
+            </a:xfrm>
+            <a:prstGeom prst="rect">
+              <a:avLst/>
+            </a:prstGeom>
+            <a:solidFill>
+              <a:schemeClr val="accent4"/>
+            </a:solidFill>
+            <a:ln>
+              <a:noFill/>
+            </a:ln>
+          </p:spPr>
+          <p:style>
+            <a:lnRef idx="2">
+              <a:schemeClr val="accent1">
+                <a:shade val="50000"/>
+              </a:schemeClr>
+            </a:lnRef>
+            <a:fillRef idx="1">
+              <a:schemeClr val="accent1"/>
+            </a:fillRef>
+            <a:effectRef idx="0">
+              <a:schemeClr val="accent1"/>
+            </a:effectRef>
+            <a:fontRef idx="minor">
+              <a:schemeClr val="lt1"/>
+            </a:fontRef>
+          </p:style>
+          <p:txBody>
+            <a:bodyPr rtlCol="0" anchor="ctr"/>
+            <a:lstStyle/>
+            <a:p>
+              <a:pPr algn="ctr"/>
+              <a:endParaRPr lang="en-US"/>
+            </a:p>
+          </p:txBody>
+        </p:sp>
+      </p:grpSp>
+      <p:sp>
+        <p:nvSpPr>
+          <p:cNvPr id="2063" name="Rectangle 2062">
+            <a:extLst>
+              <a:ext uri="{FF2B5EF4-FFF2-40B4-BE49-F238E27FC236}">
+                <a16:creationId xmlns:a16="http://schemas.microsoft.com/office/drawing/2014/main" id="{28BE3988-8893-96B4-F410-07CB72484F04}"/>
+              </a:ext>
+              <a:ext uri="{C183D7F6-B498-43B3-948B-1728B52AA6E4}">
+                <adec:decorative xmlns:adec="http://schemas.microsoft.com/office/drawing/2017/decorative" val="1"/>
+              </a:ext>
+            </a:extLst>
+          </p:cNvPr>
+          <p:cNvSpPr>
+            <a:spLocks noGrp="1" noRot="1" noChangeAspect="1" noMove="1" noResize="1" noEditPoints="1" noAdjustHandles="1" noChangeArrowheads="1" noChangeShapeType="1" noTextEdit="1"/>
+          </p:cNvSpPr>
+          <p:nvPr>
+            <p:extLst>
+              <p:ext uri="{386F3935-93C4-4BCD-93E2-E3B085C9AB24}">
+                <p16:designElem xmlns:p16="http://schemas.microsoft.com/office/powerpoint/2015/main" val="1"/>
+              </p:ext>
+            </p:extLst>
+          </p:nvPr>
+        </p:nvSpPr>
+        <p:spPr>
+          <a:xfrm>
+            <a:off x="0" y="2203079"/>
+            <a:ext cx="8537521" cy="4147845"/>
+          </a:xfrm>
+          <a:prstGeom prst="rect">
+            <a:avLst/>
+          </a:prstGeom>
+          <a:solidFill>
+            <a:schemeClr val="bg1"/>
+          </a:solidFill>
+          <a:ln>
+            <a:noFill/>
+          </a:ln>
+          <a:effectLst>
+            <a:outerShdw blurRad="139700" dist="127000" dir="5400000" algn="t" rotWithShape="0">
+              <a:prstClr val="black">
+                <a:alpha val="15000"/>
+              </a:prstClr>
+            </a:outerShdw>
+          </a:effectLst>
+        </p:spPr>
+        <p:style>
+          <a:lnRef idx="2">
+            <a:schemeClr val="accent1">
+              <a:shade val="50000"/>
+            </a:schemeClr>
+          </a:lnRef>
+          <a:fillRef idx="1">
+            <a:schemeClr val="accent1"/>
+          </a:fillRef>
+          <a:effectRef idx="0">
+            <a:schemeClr val="accent1"/>
+          </a:effectRef>
+          <a:fontRef idx="minor">
+            <a:schemeClr val="lt1"/>
+          </a:fontRef>
+        </p:style>
+        <p:txBody>
+          <a:bodyPr rtlCol="0" anchor="ctr"/>
+          <a:lstStyle/>
+          <a:p>
+            <a:pPr algn="ctr"/>
+            <a:endParaRPr lang="en-US"/>
+          </a:p>
+        </p:txBody>
+      </p:sp>
+      <p:sp>
+        <p:nvSpPr>
+          <p:cNvPr id="4" name="Inhaltsplatzhalter 3">
+            <a:extLst>
+              <a:ext uri="{FF2B5EF4-FFF2-40B4-BE49-F238E27FC236}">
+                <a16:creationId xmlns:a16="http://schemas.microsoft.com/office/drawing/2014/main" id="{FCE3B4D2-4E3C-8ABE-9FC6-D6F559C6013A}"/>
+              </a:ext>
+            </a:extLst>
+          </p:cNvPr>
+          <p:cNvSpPr>
+            <a:spLocks noGrp="1"/>
+          </p:cNvSpPr>
+          <p:nvPr>
+            <p:ph idx="1"/>
+          </p:nvPr>
+        </p:nvSpPr>
+        <p:spPr>
+          <a:xfrm>
+            <a:off x="595245" y="2599509"/>
+            <a:ext cx="7607751" cy="3435531"/>
+          </a:xfrm>
+        </p:spPr>
+        <p:txBody>
+          <a:bodyPr anchor="ctr">
+            <a:normAutofit/>
+          </a:bodyPr>
+          <a:lstStyle/>
+          <a:p>
+            <a:pPr marL="0" indent="0">
+              <a:buNone/>
+            </a:pPr>
+            <a:r>
+              <a:rPr lang="de-CH" sz="2100" b="1" dirty="0"/>
+              <a:t>Paradigmen</a:t>
+            </a:r>
+            <a:r>
+              <a:rPr lang="de-CH" sz="2100" dirty="0"/>
+              <a:t> </a:t>
+            </a:r>
+            <a:r>
+              <a:rPr lang="de-CH" sz="2100" dirty="0">
+                <a:sym typeface="Wingdings" panose="05000000000000000000" pitchFamily="2" charset="2"/>
+              </a:rPr>
+              <a:t> Nebenläufig, imperativ, strukturiert, modular, objektorientiert, generisch</a:t>
+            </a:r>
+            <a:endParaRPr lang="de-CH" sz="2100" dirty="0"/>
+          </a:p>
+          <a:p>
+            <a:pPr marL="0" indent="0">
+              <a:buNone/>
+            </a:pPr>
+            <a:r>
+              <a:rPr lang="de-CH" sz="2100" b="1" dirty="0"/>
+              <a:t>Typisierung</a:t>
+            </a:r>
+            <a:r>
+              <a:rPr lang="de-CH" sz="2100" dirty="0"/>
+              <a:t> </a:t>
+            </a:r>
+            <a:r>
+              <a:rPr lang="de-CH" sz="2100" dirty="0">
+                <a:sym typeface="Wingdings" panose="05000000000000000000" pitchFamily="2" charset="2"/>
+              </a:rPr>
+              <a:t> stark, statisch</a:t>
+            </a:r>
+            <a:endParaRPr lang="de-CH" sz="2100" dirty="0"/>
+          </a:p>
+          <a:p>
+            <a:pPr marL="0" indent="0">
+              <a:buNone/>
+            </a:pPr>
+            <a:r>
+              <a:rPr lang="de-CH" sz="2100" dirty="0"/>
+              <a:t>Hat im vergleich zu anderen Sprachen, weniger Schlüsselwörter</a:t>
+            </a:r>
+          </a:p>
+          <a:p>
+            <a:pPr marL="0" indent="0">
+              <a:buNone/>
+            </a:pPr>
+            <a:r>
+              <a:rPr lang="de-CH" sz="2100" dirty="0"/>
+              <a:t>GO besitzt einen eigenen </a:t>
+            </a:r>
+            <a:r>
+              <a:rPr lang="de-CH" sz="2100" dirty="0" err="1"/>
+              <a:t>Garbage</a:t>
+            </a:r>
+            <a:r>
+              <a:rPr lang="de-CH" sz="2100" dirty="0"/>
+              <a:t> </a:t>
+            </a:r>
+            <a:r>
+              <a:rPr lang="de-CH" sz="2100" dirty="0" err="1"/>
+              <a:t>Collector</a:t>
+            </a:r>
+            <a:endParaRPr lang="de-CH" sz="2100" dirty="0"/>
+          </a:p>
+          <a:p>
+            <a:pPr marL="0" indent="0">
+              <a:buNone/>
+            </a:pPr>
+            <a:r>
+              <a:rPr lang="de-CH" sz="2100" dirty="0"/>
+              <a:t>GO verwendet Zeige, verzichtet jedoch auf Zeigerarithmetik</a:t>
+            </a:r>
+          </a:p>
+          <a:p>
+            <a:pPr marL="0" indent="0">
+              <a:buNone/>
+            </a:pPr>
+            <a:r>
+              <a:rPr lang="de-CH" sz="2100" dirty="0"/>
+              <a:t>GO ist eine kompilierte Sprache</a:t>
+            </a:r>
+          </a:p>
+          <a:p>
+            <a:pPr marL="0" indent="0">
+              <a:buNone/>
+            </a:pPr>
+            <a:r>
+              <a:rPr lang="de-CH" sz="2100" dirty="0"/>
+              <a:t>GO-Syntax ist orientiert an C </a:t>
+            </a:r>
+          </a:p>
+        </p:txBody>
+      </p:sp>
+      <p:pic>
+        <p:nvPicPr>
+          <p:cNvPr id="2052" name="Picture 4" descr="Learning Golang in 24 hours | Kislay Verma">
+            <a:extLst>
+              <a:ext uri="{FF2B5EF4-FFF2-40B4-BE49-F238E27FC236}">
+                <a16:creationId xmlns:a16="http://schemas.microsoft.com/office/drawing/2014/main" id="{852A9056-E285-9A88-90CE-F25A783FEEFE}"/>
+              </a:ext>
+            </a:extLst>
+          </p:cNvPr>
+          <p:cNvPicPr>
+            <a:picLocks noChangeAspect="1" noChangeArrowheads="1"/>
+          </p:cNvPicPr>
+          <p:nvPr/>
+        </p:nvPicPr>
+        <p:blipFill>
+          <a:blip r:embed="rId2">
+            <a:extLst>
+              <a:ext uri="{28A0092B-C50C-407E-A947-70E740481C1C}">
+                <a14:useLocalDpi xmlns:a14="http://schemas.microsoft.com/office/drawing/2010/main" val="0"/>
+              </a:ext>
+            </a:extLst>
+          </a:blip>
+          <a:srcRect/>
+          <a:stretch>
+            <a:fillRect/>
+          </a:stretch>
+        </p:blipFill>
+        <p:spPr bwMode="auto">
+          <a:xfrm>
+            <a:off x="7955280" y="0"/>
+            <a:ext cx="1116418" cy="1369399"/>
+          </a:xfrm>
+          <a:prstGeom prst="rect">
+            <a:avLst/>
+          </a:prstGeom>
+          <a:noFill/>
+          <a:extLst>
+            <a:ext uri="{909E8E84-426E-40DD-AFC4-6F175D3DCCD1}">
+              <a14:hiddenFill xmlns:a14="http://schemas.microsoft.com/office/drawing/2010/main">
+                <a:solidFill>
+                  <a:srgbClr val="FFFFFF"/>
+                </a:solidFill>
+              </a14:hiddenFill>
+            </a:ext>
+          </a:extLst>
+        </p:spPr>
+      </p:pic>
+    </p:spTree>
+    <p:extLst>
+      <p:ext uri="{BB962C8B-B14F-4D97-AF65-F5344CB8AC3E}">
+        <p14:creationId xmlns:p14="http://schemas.microsoft.com/office/powerpoint/2010/main" val="3668533263"/>
+      </p:ext>
+    </p:extLst>
+  </p:cSld>
+  <p:clrMapOvr>
+    <a:masterClrMapping/>
+  </p:clrMapOvr>
+</p:sld>
+</file>
+
+<file path=ppt/slides/slide6.xml><?xml version="1.0" encoding="utf-8"?>
+<p:sld xmlns:a="http://schemas.openxmlformats.org/drawingml/2006/main" xmlns:r="http://schemas.openxmlformats.org/officeDocument/2006/relationships" xmlns:p="http://schemas.openxmlformats.org/presentationml/2006/main">
+  <p:cSld>
+    <p:bg>
+      <p:bgPr>
+        <a:solidFill>
+          <a:schemeClr val="bg1"/>
+        </a:solidFill>
+        <a:effectLst/>
+      </p:bgPr>
+    </p:bg>
+    <p:spTree>
+      <p:nvGrpSpPr>
+        <p:cNvPr id="1" name="">
+          <a:extLst>
+            <a:ext uri="{FF2B5EF4-FFF2-40B4-BE49-F238E27FC236}">
               <a16:creationId xmlns:a16="http://schemas.microsoft.com/office/drawing/2014/main" id="{BBE05C74-0309-E9FD-5BB5-9CD218AB3872}"/>
             </a:ext>
           </a:extLst>
@@ -13054,45 +15493,26 @@
           </a:bodyPr>
           <a:lstStyle/>
           <a:p>
-            <a:r>
-              <a:rPr lang="de-CH" sz="2100" dirty="0" err="1"/>
-              <a:t>Asdf</a:t>
-            </a:r>
-            <a:endParaRPr lang="de-CH" sz="2100" dirty="0"/>
-          </a:p>
-          <a:p>
-            <a:r>
-              <a:rPr lang="de-CH" sz="2100" dirty="0" err="1"/>
-              <a:t>Asdf</a:t>
-            </a:r>
-            <a:endParaRPr lang="de-CH" sz="2100" dirty="0"/>
-          </a:p>
-          <a:p>
-            <a:r>
-              <a:rPr lang="de-CH" sz="2100" dirty="0" err="1"/>
-              <a:t>Asdf</a:t>
-            </a:r>
-            <a:endParaRPr lang="de-CH" sz="2100" dirty="0"/>
-          </a:p>
-          <a:p>
-            <a:r>
-              <a:rPr lang="de-CH" sz="2100" dirty="0" err="1"/>
-              <a:t>Asdff</a:t>
-            </a:r>
-            <a:endParaRPr lang="de-CH" sz="2100" dirty="0"/>
-          </a:p>
-          <a:p>
-            <a:r>
-              <a:rPr lang="de-CH" sz="2100" dirty="0" err="1"/>
-              <a:t>Asdf</a:t>
-            </a:r>
-            <a:endParaRPr lang="de-CH" sz="2100" dirty="0"/>
-          </a:p>
-          <a:p>
-            <a:r>
-              <a:rPr lang="de-CH" sz="2100" dirty="0" err="1"/>
-              <a:t>adsf</a:t>
-            </a:r>
+            <a:pPr marL="0" indent="0">
+              <a:buNone/>
+            </a:pPr>
+            <a:r>
+              <a:rPr lang="de-CH" sz="2100" dirty="0"/>
+              <a:t>Merkmale und Eigenschaften: </a:t>
+            </a:r>
+            <a:r>
+              <a:rPr lang="de-CH" sz="2100" dirty="0">
+                <a:solidFill>
+                  <a:srgbClr val="FF0000"/>
+                </a:solidFill>
+              </a:rPr>
+              <a:t>//TODO</a:t>
+            </a:r>
+          </a:p>
+          <a:p>
+            <a:pPr marL="0" indent="0">
+              <a:buNone/>
+            </a:pPr>
             <a:endParaRPr lang="de-CH" sz="2100" dirty="0"/>
           </a:p>
         </p:txBody>
@@ -13157,7 +15577,7 @@
 </p:sld>
 </file>
 
-<file path=ppt/slides/slide6.xml><?xml version="1.0" encoding="utf-8"?>
+<file path=ppt/slides/slide7.xml><?xml version="1.0" encoding="utf-8"?>
 <p:sld xmlns:a="http://schemas.openxmlformats.org/drawingml/2006/main" xmlns:r="http://schemas.openxmlformats.org/officeDocument/2006/relationships" xmlns:p="http://schemas.openxmlformats.org/presentationml/2006/main">
   <p:cSld>
     <p:bg>
@@ -13173,7 +15593,7 @@
         <p:cNvPr id="1" name="">
           <a:extLst>
             <a:ext uri="{FF2B5EF4-FFF2-40B4-BE49-F238E27FC236}">
-              <a16:creationId xmlns:a16="http://schemas.microsoft.com/office/drawing/2014/main" id="{C0FF49C7-044B-4325-B149-D8FFB22C8B14}"/>
+              <a16:creationId xmlns:a16="http://schemas.microsoft.com/office/drawing/2014/main" id="{EC78D543-1B73-D639-FAA6-42714CB7B191}"/>
             </a:ext>
           </a:extLst>
         </p:cNvPr>
@@ -13193,7 +15613,7 @@
           <p:cNvPr id="2057" name="Rectangle 2056">
             <a:extLst>
               <a:ext uri="{FF2B5EF4-FFF2-40B4-BE49-F238E27FC236}">
-                <a16:creationId xmlns:a16="http://schemas.microsoft.com/office/drawing/2014/main" id="{D7E04227-2EA1-17D7-48E3-EB08C2A9495F}"/>
+                <a16:creationId xmlns:a16="http://schemas.microsoft.com/office/drawing/2014/main" id="{29B502B7-FAC5-C183-885D-9E7277EA5DEE}"/>
               </a:ext>
               <a:ext uri="{C183D7F6-B498-43B3-948B-1728B52AA6E4}">
                 <adec:decorative xmlns:adec="http://schemas.microsoft.com/office/drawing/2017/decorative" val="1"/>
@@ -13253,7 +15673,7 @@
           <p:cNvPr id="2" name="Titel 1">
             <a:extLst>
               <a:ext uri="{FF2B5EF4-FFF2-40B4-BE49-F238E27FC236}">
-                <a16:creationId xmlns:a16="http://schemas.microsoft.com/office/drawing/2014/main" id="{21EF691E-7601-7B3D-DE6D-69771A40FEB1}"/>
+                <a16:creationId xmlns:a16="http://schemas.microsoft.com/office/drawing/2014/main" id="{0685D4AD-4EB9-1927-E4E8-4DB9BDBC0BBA}"/>
               </a:ext>
             </a:extLst>
           </p:cNvPr>
@@ -13272,13 +15692,13 @@
         </p:spPr>
         <p:txBody>
           <a:bodyPr anchor="b">
-            <a:normAutofit fontScale="90000"/>
+            <a:normAutofit/>
           </a:bodyPr>
           <a:lstStyle/>
           <a:p>
             <a:r>
               <a:rPr lang="de-CH" sz="4700" dirty="0"/>
-              <a:t>Generelle Informationen über GO</a:t>
+              <a:t>Slices</a:t>
             </a:r>
           </a:p>
         </p:txBody>
@@ -13288,7 +15708,7 @@
           <p:cNvPr id="2059" name="Group 2058">
             <a:extLst>
               <a:ext uri="{FF2B5EF4-FFF2-40B4-BE49-F238E27FC236}">
-                <a16:creationId xmlns:a16="http://schemas.microsoft.com/office/drawing/2014/main" id="{A88AB482-A563-54DE-A864-4F37FC97845C}"/>
+                <a16:creationId xmlns:a16="http://schemas.microsoft.com/office/drawing/2014/main" id="{ECD0484A-5766-2252-A1E2-7CD41CA5861F}"/>
               </a:ext>
               <a:ext uri="{C183D7F6-B498-43B3-948B-1728B52AA6E4}">
                 <adec:decorative xmlns:adec="http://schemas.microsoft.com/office/drawing/2017/decorative" val="1"/>
@@ -13319,7 +15739,7 @@
             <p:cNvPr id="2060" name="Rectangle 2059">
               <a:extLst>
                 <a:ext uri="{FF2B5EF4-FFF2-40B4-BE49-F238E27FC236}">
-                  <a16:creationId xmlns:a16="http://schemas.microsoft.com/office/drawing/2014/main" id="{471116CF-D4D7-3A2A-0790-875C7C6AFCB5}"/>
+                  <a16:creationId xmlns:a16="http://schemas.microsoft.com/office/drawing/2014/main" id="{2CBDDB0A-4BC0-2A1A-5D10-08399940F676}"/>
                 </a:ext>
                 <a:ext uri="{C183D7F6-B498-43B3-948B-1728B52AA6E4}">
                   <adec:decorative xmlns:adec="http://schemas.microsoft.com/office/drawing/2017/decorative" val="1"/>
@@ -13380,7 +15800,7 @@
             <p:cNvPr id="2061" name="Rectangle 2060">
               <a:extLst>
                 <a:ext uri="{FF2B5EF4-FFF2-40B4-BE49-F238E27FC236}">
-                  <a16:creationId xmlns:a16="http://schemas.microsoft.com/office/drawing/2014/main" id="{73D23E8E-AD90-CF43-001D-66F7A31237BB}"/>
+                  <a16:creationId xmlns:a16="http://schemas.microsoft.com/office/drawing/2014/main" id="{BF185093-B2A6-0358-ECF8-334D403B37E1}"/>
                 </a:ext>
                 <a:ext uri="{C183D7F6-B498-43B3-948B-1728B52AA6E4}">
                   <adec:decorative xmlns:adec="http://schemas.microsoft.com/office/drawing/2017/decorative" val="1"/>
@@ -13442,7 +15862,7 @@
           <p:cNvPr id="2063" name="Rectangle 2062">
             <a:extLst>
               <a:ext uri="{FF2B5EF4-FFF2-40B4-BE49-F238E27FC236}">
-                <a16:creationId xmlns:a16="http://schemas.microsoft.com/office/drawing/2014/main" id="{28BE3988-8893-96B4-F410-07CB72484F04}"/>
+                <a16:creationId xmlns:a16="http://schemas.microsoft.com/office/drawing/2014/main" id="{E8CA0CC6-6A0D-55AE-C37D-6E8140065D03}"/>
               </a:ext>
               <a:ext uri="{C183D7F6-B498-43B3-948B-1728B52AA6E4}">
                 <adec:decorative xmlns:adec="http://schemas.microsoft.com/office/drawing/2017/decorative" val="1"/>
@@ -13512,7 +15932,7 @@
           <p:cNvPr id="4" name="Inhaltsplatzhalter 3">
             <a:extLst>
               <a:ext uri="{FF2B5EF4-FFF2-40B4-BE49-F238E27FC236}">
-                <a16:creationId xmlns:a16="http://schemas.microsoft.com/office/drawing/2014/main" id="{FCE3B4D2-4E3C-8ABE-9FC6-D6F559C6013A}"/>
+                <a16:creationId xmlns:a16="http://schemas.microsoft.com/office/drawing/2014/main" id="{6E6DD077-AE13-4352-E0B1-56182DF63006}"/>
               </a:ext>
             </a:extLst>
           </p:cNvPr>
@@ -13538,99 +15958,13 @@
             <a:pPr marL="0" indent="0">
               <a:buNone/>
             </a:pPr>
-            <a:r>
-              <a:rPr lang="de-CH" sz="2100" b="1" dirty="0"/>
-              <a:t>Paradigmen</a:t>
-            </a:r>
-            <a:r>
-              <a:rPr lang="de-CH" sz="2100" dirty="0"/>
-              <a:t> </a:t>
-            </a:r>
-            <a:r>
-              <a:rPr lang="de-CH" sz="2100" dirty="0">
-                <a:sym typeface="Wingdings" panose="05000000000000000000" pitchFamily="2" charset="2"/>
-              </a:rPr>
-              <a:t> Nebenläufig, imperativ, strukturiert, modular, objektorientiert, generisch</a:t>
-            </a:r>
             <a:endParaRPr lang="de-CH" sz="2100" dirty="0"/>
           </a:p>
           <a:p>
             <a:pPr marL="0" indent="0">
               <a:buNone/>
             </a:pPr>
-            <a:r>
-              <a:rPr lang="de-CH" sz="2100" b="1" dirty="0"/>
-              <a:t>Typisierung</a:t>
-            </a:r>
-            <a:r>
-              <a:rPr lang="de-CH" sz="2100" dirty="0"/>
-              <a:t> </a:t>
-            </a:r>
-            <a:r>
-              <a:rPr lang="de-CH" sz="2100" dirty="0">
-                <a:sym typeface="Wingdings" panose="05000000000000000000" pitchFamily="2" charset="2"/>
-              </a:rPr>
-              <a:t> stark, statisch</a:t>
-            </a:r>
             <a:endParaRPr lang="de-CH" sz="2100" dirty="0"/>
-          </a:p>
-          <a:p>
-            <a:pPr marL="0" indent="0">
-              <a:buNone/>
-            </a:pPr>
-            <a:r>
-              <a:rPr lang="de-CH" sz="2100" dirty="0"/>
-              <a:t>Hat im vergleich zu anderen Sprachen, weniger Schlüsselwörter</a:t>
-            </a:r>
-          </a:p>
-          <a:p>
-            <a:pPr marL="0" indent="0">
-              <a:buNone/>
-            </a:pPr>
-            <a:r>
-              <a:rPr lang="de-CH" sz="2100" dirty="0"/>
-              <a:t>GO besitzt einen eigenen </a:t>
-            </a:r>
-            <a:r>
-              <a:rPr lang="de-CH" sz="2100" dirty="0" err="1"/>
-              <a:t>Garbage</a:t>
-            </a:r>
-            <a:r>
-              <a:rPr lang="de-CH" sz="2100" dirty="0"/>
-              <a:t> </a:t>
-            </a:r>
-            <a:r>
-              <a:rPr lang="de-CH" sz="2100" dirty="0" err="1"/>
-              <a:t>Collector</a:t>
-            </a:r>
-            <a:endParaRPr lang="de-CH" sz="2100" dirty="0"/>
-          </a:p>
-          <a:p>
-            <a:pPr marL="0" indent="0">
-              <a:buNone/>
-            </a:pPr>
-            <a:r>
-              <a:rPr lang="de-CH" sz="2100" dirty="0"/>
-              <a:t>GO verwendet Zeige, verzichtet jedoch auf Zeigerarithmetik</a:t>
-            </a:r>
-          </a:p>
-          <a:p>
-            <a:pPr marL="0" indent="0">
-              <a:buNone/>
-            </a:pPr>
-            <a:r>
-              <a:rPr lang="de-CH" sz="2100" dirty="0"/>
-              <a:t>GO ist eine kompilierte Sprache</a:t>
-            </a:r>
-          </a:p>
-          <a:p>
-            <a:pPr marL="0" indent="0">
-              <a:buNone/>
-            </a:pPr>
-            <a:r>
-              <a:rPr lang="de-CH" sz="2100" dirty="0"/>
-              <a:t>GO-Syntax ist orientiert an C </a:t>
-            </a:r>
           </a:p>
         </p:txBody>
       </p:sp>
@@ -13639,7 +15973,7 @@
           <p:cNvPr id="2052" name="Picture 4" descr="Learning Golang in 24 hours | Kislay Verma">
             <a:extLst>
               <a:ext uri="{FF2B5EF4-FFF2-40B4-BE49-F238E27FC236}">
-                <a16:creationId xmlns:a16="http://schemas.microsoft.com/office/drawing/2014/main" id="{852A9056-E285-9A88-90CE-F25A783FEEFE}"/>
+                <a16:creationId xmlns:a16="http://schemas.microsoft.com/office/drawing/2014/main" id="{CD77FB0C-D2BF-9BCE-3643-633B0779339C}"/>
               </a:ext>
             </a:extLst>
           </p:cNvPr>
@@ -13681,10 +16015,70 @@
           </a:extLst>
         </p:spPr>
       </p:pic>
+      <p:pic>
+        <p:nvPicPr>
+          <p:cNvPr id="5" name="Picture 4">
+            <a:extLst>
+              <a:ext uri="{FF2B5EF4-FFF2-40B4-BE49-F238E27FC236}">
+                <a16:creationId xmlns:a16="http://schemas.microsoft.com/office/drawing/2014/main" id="{12411320-3E89-3CDB-854E-E4BC5AE85146}"/>
+              </a:ext>
+            </a:extLst>
+          </p:cNvPr>
+          <p:cNvPicPr>
+            <a:picLocks noChangeAspect="1"/>
+          </p:cNvPicPr>
+          <p:nvPr/>
+        </p:nvPicPr>
+        <p:blipFill>
+          <a:blip r:embed="rId3"/>
+          <a:stretch>
+            <a:fillRect/>
+          </a:stretch>
+        </p:blipFill>
+        <p:spPr>
+          <a:xfrm>
+            <a:off x="42154" y="2276028"/>
+            <a:ext cx="2933700" cy="1854200"/>
+          </a:xfrm>
+          <a:prstGeom prst="rect">
+            <a:avLst/>
+          </a:prstGeom>
+        </p:spPr>
+      </p:pic>
+      <p:pic>
+        <p:nvPicPr>
+          <p:cNvPr id="6" name="Picture 5">
+            <a:extLst>
+              <a:ext uri="{FF2B5EF4-FFF2-40B4-BE49-F238E27FC236}">
+                <a16:creationId xmlns:a16="http://schemas.microsoft.com/office/drawing/2014/main" id="{6EB39361-9FB8-9405-37B9-04ACE8A33125}"/>
+              </a:ext>
+            </a:extLst>
+          </p:cNvPr>
+          <p:cNvPicPr>
+            <a:picLocks noChangeAspect="1"/>
+          </p:cNvPicPr>
+          <p:nvPr/>
+        </p:nvPicPr>
+        <p:blipFill>
+          <a:blip r:embed="rId4"/>
+          <a:stretch>
+            <a:fillRect/>
+          </a:stretch>
+        </p:blipFill>
+        <p:spPr>
+          <a:xfrm>
+            <a:off x="42154" y="4453709"/>
+            <a:ext cx="7772400" cy="1518865"/>
+          </a:xfrm>
+          <a:prstGeom prst="rect">
+            <a:avLst/>
+          </a:prstGeom>
+        </p:spPr>
+      </p:pic>
     </p:spTree>
     <p:extLst>
       <p:ext uri="{BB962C8B-B14F-4D97-AF65-F5344CB8AC3E}">
-        <p14:creationId xmlns:p14="http://schemas.microsoft.com/office/powerpoint/2010/main" val="3668533263"/>
+        <p14:creationId xmlns:p14="http://schemas.microsoft.com/office/powerpoint/2010/main" val="3128220194"/>
       </p:ext>
     </p:extLst>
   </p:cSld>
@@ -13694,7 +16088,518 @@
 </p:sld>
 </file>
 
-<file path=ppt/slides/slide7.xml><?xml version="1.0" encoding="utf-8"?>
+<file path=ppt/slides/slide8.xml><?xml version="1.0" encoding="utf-8"?>
+<p:sld xmlns:a="http://schemas.openxmlformats.org/drawingml/2006/main" xmlns:r="http://schemas.openxmlformats.org/officeDocument/2006/relationships" xmlns:p="http://schemas.openxmlformats.org/presentationml/2006/main">
+  <p:cSld>
+    <p:bg>
+      <p:bgPr>
+        <a:solidFill>
+          <a:schemeClr val="bg1"/>
+        </a:solidFill>
+        <a:effectLst/>
+      </p:bgPr>
+    </p:bg>
+    <p:spTree>
+      <p:nvGrpSpPr>
+        <p:cNvPr id="1" name="">
+          <a:extLst>
+            <a:ext uri="{FF2B5EF4-FFF2-40B4-BE49-F238E27FC236}">
+              <a16:creationId xmlns:a16="http://schemas.microsoft.com/office/drawing/2014/main" id="{BFFE4694-D9CE-A364-83A6-D76FCB06F2D9}"/>
+            </a:ext>
+          </a:extLst>
+        </p:cNvPr>
+        <p:cNvGrpSpPr/>
+        <p:nvPr/>
+      </p:nvGrpSpPr>
+      <p:grpSpPr>
+        <a:xfrm>
+          <a:off x="0" y="0"/>
+          <a:ext cx="0" cy="0"/>
+          <a:chOff x="0" y="0"/>
+          <a:chExt cx="0" cy="0"/>
+        </a:xfrm>
+      </p:grpSpPr>
+      <p:sp useBgFill="1">
+        <p:nvSpPr>
+          <p:cNvPr id="2057" name="Rectangle 2056">
+            <a:extLst>
+              <a:ext uri="{FF2B5EF4-FFF2-40B4-BE49-F238E27FC236}">
+                <a16:creationId xmlns:a16="http://schemas.microsoft.com/office/drawing/2014/main" id="{0D2DB63F-D481-4678-5A91-C3661658E014}"/>
+              </a:ext>
+              <a:ext uri="{C183D7F6-B498-43B3-948B-1728B52AA6E4}">
+                <adec:decorative xmlns:adec="http://schemas.microsoft.com/office/drawing/2017/decorative" val="1"/>
+              </a:ext>
+            </a:extLst>
+          </p:cNvPr>
+          <p:cNvSpPr>
+            <a:spLocks noGrp="1" noRot="1" noChangeAspect="1" noMove="1" noResize="1" noEditPoints="1" noAdjustHandles="1" noChangeArrowheads="1" noChangeShapeType="1" noTextEdit="1"/>
+          </p:cNvSpPr>
+          <p:nvPr>
+            <p:extLst>
+              <p:ext uri="{386F3935-93C4-4BCD-93E2-E3B085C9AB24}">
+                <p16:designElem xmlns:p16="http://schemas.microsoft.com/office/powerpoint/2015/main" val="1"/>
+              </p:ext>
+            </p:extLst>
+          </p:nvPr>
+        </p:nvSpPr>
+        <p:spPr>
+          <a:xfrm>
+            <a:off x="0" y="0"/>
+            <a:ext cx="9143999" cy="6857365"/>
+          </a:xfrm>
+          <a:prstGeom prst="rect">
+            <a:avLst/>
+          </a:prstGeom>
+          <a:ln>
+            <a:noFill/>
+          </a:ln>
+        </p:spPr>
+        <p:style>
+          <a:lnRef idx="2">
+            <a:schemeClr val="accent1">
+              <a:shade val="50000"/>
+            </a:schemeClr>
+          </a:lnRef>
+          <a:fillRef idx="1">
+            <a:schemeClr val="accent1"/>
+          </a:fillRef>
+          <a:effectRef idx="0">
+            <a:schemeClr val="accent1"/>
+          </a:effectRef>
+          <a:fontRef idx="minor">
+            <a:schemeClr val="lt1"/>
+          </a:fontRef>
+        </p:style>
+        <p:txBody>
+          <a:bodyPr rtlCol="0" anchor="ctr"/>
+          <a:lstStyle/>
+          <a:p>
+            <a:pPr algn="ctr"/>
+            <a:endParaRPr lang="en-US"/>
+          </a:p>
+        </p:txBody>
+      </p:sp>
+      <p:sp>
+        <p:nvSpPr>
+          <p:cNvPr id="2" name="Titel 1">
+            <a:extLst>
+              <a:ext uri="{FF2B5EF4-FFF2-40B4-BE49-F238E27FC236}">
+                <a16:creationId xmlns:a16="http://schemas.microsoft.com/office/drawing/2014/main" id="{76892B36-AF86-174C-D23E-B5E323304000}"/>
+              </a:ext>
+            </a:extLst>
+          </p:cNvPr>
+          <p:cNvSpPr>
+            <a:spLocks noGrp="1"/>
+          </p:cNvSpPr>
+          <p:nvPr>
+            <p:ph type="title"/>
+          </p:nvPr>
+        </p:nvSpPr>
+        <p:spPr>
+          <a:xfrm>
+            <a:off x="606478" y="386930"/>
+            <a:ext cx="6927525" cy="1188950"/>
+          </a:xfrm>
+        </p:spPr>
+        <p:txBody>
+          <a:bodyPr anchor="b">
+            <a:normAutofit/>
+          </a:bodyPr>
+          <a:lstStyle/>
+          <a:p>
+            <a:r>
+              <a:rPr lang="de-CH" sz="4700" dirty="0"/>
+              <a:t>Slices</a:t>
+            </a:r>
+          </a:p>
+        </p:txBody>
+      </p:sp>
+      <p:grpSp>
+        <p:nvGrpSpPr>
+          <p:cNvPr id="2059" name="Group 2058">
+            <a:extLst>
+              <a:ext uri="{FF2B5EF4-FFF2-40B4-BE49-F238E27FC236}">
+                <a16:creationId xmlns:a16="http://schemas.microsoft.com/office/drawing/2014/main" id="{1EDF3C6D-0600-A74E-7B01-96B3491F8C3F}"/>
+              </a:ext>
+              <a:ext uri="{C183D7F6-B498-43B3-948B-1728B52AA6E4}">
+                <adec:decorative xmlns:adec="http://schemas.microsoft.com/office/drawing/2017/decorative" val="1"/>
+              </a:ext>
+            </a:extLst>
+          </p:cNvPr>
+          <p:cNvGrpSpPr>
+            <a:grpSpLocks noGrp="1" noUngrp="1" noRot="1" noChangeAspect="1" noMove="1" noResize="1"/>
+          </p:cNvGrpSpPr>
+          <p:nvPr>
+            <p:extLst>
+              <p:ext uri="{386F3935-93C4-4BCD-93E2-E3B085C9AB24}">
+                <p16:designElem xmlns:p16="http://schemas.microsoft.com/office/powerpoint/2015/main" val="1"/>
+              </p:ext>
+            </p:extLst>
+          </p:nvPr>
+        </p:nvGrpSpPr>
+        <p:grpSpPr>
+          <a:xfrm>
+            <a:off x="-1" y="1998368"/>
+            <a:ext cx="8771274" cy="782176"/>
+            <a:chOff x="-2" y="1998368"/>
+            <a:chExt cx="11695083" cy="782176"/>
+          </a:xfrm>
+        </p:grpSpPr>
+        <p:sp>
+          <p:nvSpPr>
+            <p:cNvPr id="2060" name="Rectangle 2059">
+              <a:extLst>
+                <a:ext uri="{FF2B5EF4-FFF2-40B4-BE49-F238E27FC236}">
+                  <a16:creationId xmlns:a16="http://schemas.microsoft.com/office/drawing/2014/main" id="{E9962B36-F7D3-7F68-6D32-86A6C3953156}"/>
+                </a:ext>
+                <a:ext uri="{C183D7F6-B498-43B3-948B-1728B52AA6E4}">
+                  <adec:decorative xmlns:adec="http://schemas.microsoft.com/office/drawing/2017/decorative" val="1"/>
+                </a:ext>
+              </a:extLst>
+            </p:cNvPr>
+            <p:cNvSpPr/>
+            <p:nvPr>
+              <p:extLst>
+                <p:ext uri="{386F3935-93C4-4BCD-93E2-E3B085C9AB24}">
+                  <p16:designElem xmlns:p16="http://schemas.microsoft.com/office/powerpoint/2015/main" val="1"/>
+                </p:ext>
+              </p:extLst>
+            </p:nvPr>
+          </p:nvSpPr>
+          <p:spPr>
+            <a:xfrm rot="5400000">
+              <a:off x="11228040" y="2313027"/>
+              <a:ext cx="781700" cy="152382"/>
+            </a:xfrm>
+            <a:prstGeom prst="rect">
+              <a:avLst/>
+            </a:prstGeom>
+            <a:solidFill>
+              <a:schemeClr val="accent4"/>
+            </a:solidFill>
+            <a:ln>
+              <a:noFill/>
+            </a:ln>
+          </p:spPr>
+          <p:style>
+            <a:lnRef idx="2">
+              <a:schemeClr val="accent1">
+                <a:shade val="50000"/>
+              </a:schemeClr>
+            </a:lnRef>
+            <a:fillRef idx="1">
+              <a:schemeClr val="accent1"/>
+            </a:fillRef>
+            <a:effectRef idx="0">
+              <a:schemeClr val="accent1"/>
+            </a:effectRef>
+            <a:fontRef idx="minor">
+              <a:schemeClr val="lt1"/>
+            </a:fontRef>
+          </p:style>
+          <p:txBody>
+            <a:bodyPr rtlCol="0" anchor="ctr"/>
+            <a:lstStyle/>
+            <a:p>
+              <a:pPr algn="ctr"/>
+              <a:endParaRPr lang="en-US"/>
+            </a:p>
+          </p:txBody>
+        </p:sp>
+        <p:sp>
+          <p:nvSpPr>
+            <p:cNvPr id="2061" name="Rectangle 2060">
+              <a:extLst>
+                <a:ext uri="{FF2B5EF4-FFF2-40B4-BE49-F238E27FC236}">
+                  <a16:creationId xmlns:a16="http://schemas.microsoft.com/office/drawing/2014/main" id="{2C4B7899-8BBA-6598-2861-A78EB70B090E}"/>
+                </a:ext>
+                <a:ext uri="{C183D7F6-B498-43B3-948B-1728B52AA6E4}">
+                  <adec:decorative xmlns:adec="http://schemas.microsoft.com/office/drawing/2017/decorative" val="1"/>
+                </a:ext>
+              </a:extLst>
+            </p:cNvPr>
+            <p:cNvSpPr/>
+            <p:nvPr>
+              <p:extLst>
+                <p:ext uri="{386F3935-93C4-4BCD-93E2-E3B085C9AB24}">
+                  <p16:designElem xmlns:p16="http://schemas.microsoft.com/office/powerpoint/2015/main" val="1"/>
+                </p:ext>
+              </p:extLst>
+            </p:nvPr>
+          </p:nvSpPr>
+          <p:spPr>
+            <a:xfrm flipH="1" flipV="1">
+              <a:off x="-2" y="1998845"/>
+              <a:ext cx="11454595" cy="781699"/>
+            </a:xfrm>
+            <a:prstGeom prst="rect">
+              <a:avLst/>
+            </a:prstGeom>
+            <a:solidFill>
+              <a:schemeClr val="accent4"/>
+            </a:solidFill>
+            <a:ln>
+              <a:noFill/>
+            </a:ln>
+          </p:spPr>
+          <p:style>
+            <a:lnRef idx="2">
+              <a:schemeClr val="accent1">
+                <a:shade val="50000"/>
+              </a:schemeClr>
+            </a:lnRef>
+            <a:fillRef idx="1">
+              <a:schemeClr val="accent1"/>
+            </a:fillRef>
+            <a:effectRef idx="0">
+              <a:schemeClr val="accent1"/>
+            </a:effectRef>
+            <a:fontRef idx="minor">
+              <a:schemeClr val="lt1"/>
+            </a:fontRef>
+          </p:style>
+          <p:txBody>
+            <a:bodyPr rtlCol="0" anchor="ctr"/>
+            <a:lstStyle/>
+            <a:p>
+              <a:pPr algn="ctr"/>
+              <a:endParaRPr lang="en-US"/>
+            </a:p>
+          </p:txBody>
+        </p:sp>
+      </p:grpSp>
+      <p:sp>
+        <p:nvSpPr>
+          <p:cNvPr id="2063" name="Rectangle 2062">
+            <a:extLst>
+              <a:ext uri="{FF2B5EF4-FFF2-40B4-BE49-F238E27FC236}">
+                <a16:creationId xmlns:a16="http://schemas.microsoft.com/office/drawing/2014/main" id="{6FB8E22F-506C-158A-01A5-A53E43EF92AA}"/>
+              </a:ext>
+              <a:ext uri="{C183D7F6-B498-43B3-948B-1728B52AA6E4}">
+                <adec:decorative xmlns:adec="http://schemas.microsoft.com/office/drawing/2017/decorative" val="1"/>
+              </a:ext>
+            </a:extLst>
+          </p:cNvPr>
+          <p:cNvSpPr>
+            <a:spLocks noGrp="1" noRot="1" noChangeAspect="1" noMove="1" noResize="1" noEditPoints="1" noAdjustHandles="1" noChangeArrowheads="1" noChangeShapeType="1" noTextEdit="1"/>
+          </p:cNvSpPr>
+          <p:nvPr>
+            <p:extLst>
+              <p:ext uri="{386F3935-93C4-4BCD-93E2-E3B085C9AB24}">
+                <p16:designElem xmlns:p16="http://schemas.microsoft.com/office/powerpoint/2015/main" val="1"/>
+              </p:ext>
+            </p:extLst>
+          </p:nvPr>
+        </p:nvSpPr>
+        <p:spPr>
+          <a:xfrm>
+            <a:off x="0" y="2203079"/>
+            <a:ext cx="8537521" cy="4147845"/>
+          </a:xfrm>
+          <a:prstGeom prst="rect">
+            <a:avLst/>
+          </a:prstGeom>
+          <a:solidFill>
+            <a:schemeClr val="bg1"/>
+          </a:solidFill>
+          <a:ln>
+            <a:noFill/>
+          </a:ln>
+          <a:effectLst>
+            <a:outerShdw blurRad="139700" dist="127000" dir="5400000" algn="t" rotWithShape="0">
+              <a:prstClr val="black">
+                <a:alpha val="15000"/>
+              </a:prstClr>
+            </a:outerShdw>
+          </a:effectLst>
+        </p:spPr>
+        <p:style>
+          <a:lnRef idx="2">
+            <a:schemeClr val="accent1">
+              <a:shade val="50000"/>
+            </a:schemeClr>
+          </a:lnRef>
+          <a:fillRef idx="1">
+            <a:schemeClr val="accent1"/>
+          </a:fillRef>
+          <a:effectRef idx="0">
+            <a:schemeClr val="accent1"/>
+          </a:effectRef>
+          <a:fontRef idx="minor">
+            <a:schemeClr val="lt1"/>
+          </a:fontRef>
+        </p:style>
+        <p:txBody>
+          <a:bodyPr rtlCol="0" anchor="ctr"/>
+          <a:lstStyle/>
+          <a:p>
+            <a:pPr algn="ctr"/>
+            <a:endParaRPr lang="en-US"/>
+          </a:p>
+        </p:txBody>
+      </p:sp>
+      <p:sp>
+        <p:nvSpPr>
+          <p:cNvPr id="4" name="Inhaltsplatzhalter 3">
+            <a:extLst>
+              <a:ext uri="{FF2B5EF4-FFF2-40B4-BE49-F238E27FC236}">
+                <a16:creationId xmlns:a16="http://schemas.microsoft.com/office/drawing/2014/main" id="{6579E59D-7F2D-FA25-B927-01F2EDD96005}"/>
+              </a:ext>
+            </a:extLst>
+          </p:cNvPr>
+          <p:cNvSpPr>
+            <a:spLocks noGrp="1"/>
+          </p:cNvSpPr>
+          <p:nvPr>
+            <p:ph idx="1"/>
+          </p:nvPr>
+        </p:nvSpPr>
+        <p:spPr>
+          <a:xfrm>
+            <a:off x="595245" y="2599509"/>
+            <a:ext cx="7607751" cy="3435531"/>
+          </a:xfrm>
+        </p:spPr>
+        <p:txBody>
+          <a:bodyPr anchor="ctr">
+            <a:normAutofit/>
+          </a:bodyPr>
+          <a:lstStyle/>
+          <a:p>
+            <a:pPr marL="0" indent="0">
+              <a:buNone/>
+            </a:pPr>
+            <a:endParaRPr lang="de-CH" sz="2100" dirty="0"/>
+          </a:p>
+          <a:p>
+            <a:pPr marL="0" indent="0">
+              <a:buNone/>
+            </a:pPr>
+            <a:endParaRPr lang="de-CH" sz="2100" dirty="0"/>
+          </a:p>
+        </p:txBody>
+      </p:sp>
+      <p:pic>
+        <p:nvPicPr>
+          <p:cNvPr id="2052" name="Picture 4" descr="Learning Golang in 24 hours | Kislay Verma">
+            <a:extLst>
+              <a:ext uri="{FF2B5EF4-FFF2-40B4-BE49-F238E27FC236}">
+                <a16:creationId xmlns:a16="http://schemas.microsoft.com/office/drawing/2014/main" id="{993BDDE9-BFF5-812E-829A-712407642FF0}"/>
+              </a:ext>
+            </a:extLst>
+          </p:cNvPr>
+          <p:cNvPicPr>
+            <a:picLocks noChangeAspect="1" noChangeArrowheads="1"/>
+          </p:cNvPicPr>
+          <p:nvPr/>
+        </p:nvPicPr>
+        <p:blipFill>
+          <a:blip r:embed="rId2">
+            <a:extLst>
+              <a:ext uri="{28A0092B-C50C-407E-A947-70E740481C1C}">
+                <a14:useLocalDpi xmlns:a14="http://schemas.microsoft.com/office/drawing/2010/main" val="0"/>
+              </a:ext>
+            </a:extLst>
+          </a:blip>
+          <a:srcRect/>
+          <a:stretch>
+            <a:fillRect/>
+          </a:stretch>
+        </p:blipFill>
+        <p:spPr bwMode="auto">
+          <a:xfrm>
+            <a:off x="7955280" y="0"/>
+            <a:ext cx="1116418" cy="1369399"/>
+          </a:xfrm>
+          <a:prstGeom prst="rect">
+            <a:avLst/>
+          </a:prstGeom>
+          <a:noFill/>
+          <a:extLst>
+            <a:ext uri="{909E8E84-426E-40DD-AFC4-6F175D3DCCD1}">
+              <a14:hiddenFill xmlns:a14="http://schemas.microsoft.com/office/drawing/2010/main">
+                <a:solidFill>
+                  <a:srgbClr val="FFFFFF"/>
+                </a:solidFill>
+              </a14:hiddenFill>
+            </a:ext>
+          </a:extLst>
+        </p:spPr>
+      </p:pic>
+      <p:pic>
+        <p:nvPicPr>
+          <p:cNvPr id="3" name="Picture 2">
+            <a:extLst>
+              <a:ext uri="{FF2B5EF4-FFF2-40B4-BE49-F238E27FC236}">
+                <a16:creationId xmlns:a16="http://schemas.microsoft.com/office/drawing/2014/main" id="{0A3CDC37-967B-421D-220F-14A494098AE5}"/>
+              </a:ext>
+            </a:extLst>
+          </p:cNvPr>
+          <p:cNvPicPr>
+            <a:picLocks noChangeAspect="1"/>
+          </p:cNvPicPr>
+          <p:nvPr/>
+        </p:nvPicPr>
+        <p:blipFill>
+          <a:blip r:embed="rId3"/>
+          <a:stretch>
+            <a:fillRect/>
+          </a:stretch>
+        </p:blipFill>
+        <p:spPr>
+          <a:xfrm>
+            <a:off x="42154" y="2283625"/>
+            <a:ext cx="7772400" cy="2386455"/>
+          </a:xfrm>
+          <a:prstGeom prst="rect">
+            <a:avLst/>
+          </a:prstGeom>
+        </p:spPr>
+      </p:pic>
+      <p:pic>
+        <p:nvPicPr>
+          <p:cNvPr id="7" name="Picture 6">
+            <a:extLst>
+              <a:ext uri="{FF2B5EF4-FFF2-40B4-BE49-F238E27FC236}">
+                <a16:creationId xmlns:a16="http://schemas.microsoft.com/office/drawing/2014/main" id="{BD1BDB24-D229-1715-913B-3A5D0447DD53}"/>
+              </a:ext>
+            </a:extLst>
+          </p:cNvPr>
+          <p:cNvPicPr>
+            <a:picLocks noChangeAspect="1"/>
+          </p:cNvPicPr>
+          <p:nvPr/>
+        </p:nvPicPr>
+        <p:blipFill>
+          <a:blip r:embed="rId4"/>
+          <a:stretch>
+            <a:fillRect/>
+          </a:stretch>
+        </p:blipFill>
+        <p:spPr>
+          <a:xfrm>
+            <a:off x="79053" y="5032774"/>
+            <a:ext cx="4216400" cy="1206500"/>
+          </a:xfrm>
+          <a:prstGeom prst="rect">
+            <a:avLst/>
+          </a:prstGeom>
+        </p:spPr>
+      </p:pic>
+    </p:spTree>
+    <p:extLst>
+      <p:ext uri="{BB962C8B-B14F-4D97-AF65-F5344CB8AC3E}">
+        <p14:creationId xmlns:p14="http://schemas.microsoft.com/office/powerpoint/2010/main" val="275335176"/>
+      </p:ext>
+    </p:extLst>
+  </p:cSld>
+  <p:clrMapOvr>
+    <a:masterClrMapping/>
+  </p:clrMapOvr>
+</p:sld>
+</file>
+
+<file path=ppt/slides/slide9.xml><?xml version="1.0" encoding="utf-8"?>
 <p:sld xmlns:a="http://schemas.openxmlformats.org/drawingml/2006/main" xmlns:r="http://schemas.openxmlformats.org/officeDocument/2006/relationships" xmlns:p="http://schemas.openxmlformats.org/presentationml/2006/main">
   <p:cSld>
     <p:bg>
@@ -14072,46 +16977,21 @@
           </a:bodyPr>
           <a:lstStyle/>
           <a:p>
-            <a:r>
-              <a:rPr lang="de-CH" sz="2100" dirty="0" err="1"/>
-              <a:t>Asdf</a:t>
-            </a:r>
-            <a:endParaRPr lang="de-CH" sz="2100" dirty="0"/>
-          </a:p>
-          <a:p>
-            <a:r>
-              <a:rPr lang="de-CH" sz="2100" dirty="0" err="1"/>
-              <a:t>Asdf</a:t>
-            </a:r>
-            <a:endParaRPr lang="de-CH" sz="2100" dirty="0"/>
-          </a:p>
-          <a:p>
-            <a:r>
-              <a:rPr lang="de-CH" sz="2100" dirty="0" err="1"/>
-              <a:t>Asdf</a:t>
-            </a:r>
-            <a:endParaRPr lang="de-CH" sz="2100" dirty="0"/>
-          </a:p>
-          <a:p>
-            <a:r>
-              <a:rPr lang="de-CH" sz="2100" dirty="0" err="1"/>
-              <a:t>Asdff</a:t>
-            </a:r>
-            <a:endParaRPr lang="de-CH" sz="2100" dirty="0"/>
-          </a:p>
-          <a:p>
-            <a:r>
-              <a:rPr lang="de-CH" sz="2100" dirty="0" err="1"/>
-              <a:t>Asdf</a:t>
-            </a:r>
-            <a:endParaRPr lang="de-CH" sz="2100" dirty="0"/>
-          </a:p>
-          <a:p>
-            <a:r>
-              <a:rPr lang="de-CH" sz="2100" dirty="0" err="1"/>
-              <a:t>adsf</a:t>
-            </a:r>
-            <a:endParaRPr lang="de-CH" sz="2100" dirty="0"/>
+            <a:pPr marL="0" indent="0">
+              <a:buNone/>
+            </a:pPr>
+            <a:r>
+              <a:rPr lang="de-CH" sz="2100" dirty="0"/>
+              <a:t>Merkmale und Eigenschaften: </a:t>
+            </a:r>
+            <a:r>
+              <a:rPr lang="de-CH" sz="2100" dirty="0">
+                <a:solidFill>
+                  <a:srgbClr val="FF0000"/>
+                </a:solidFill>
+              </a:rPr>
+              <a:t>//TODO</a:t>
+            </a:r>
           </a:p>
         </p:txBody>
       </p:sp>
@@ -14166,978 +17046,6 @@
     <p:extLst>
       <p:ext uri="{BB962C8B-B14F-4D97-AF65-F5344CB8AC3E}">
         <p14:creationId xmlns:p14="http://schemas.microsoft.com/office/powerpoint/2010/main" val="1655206865"/>
-      </p:ext>
-    </p:extLst>
-  </p:cSld>
-  <p:clrMapOvr>
-    <a:masterClrMapping/>
-  </p:clrMapOvr>
-</p:sld>
-</file>
-
-<file path=ppt/slides/slide8.xml><?xml version="1.0" encoding="utf-8"?>
-<p:sld xmlns:a="http://schemas.openxmlformats.org/drawingml/2006/main" xmlns:r="http://schemas.openxmlformats.org/officeDocument/2006/relationships" xmlns:p="http://schemas.openxmlformats.org/presentationml/2006/main">
-  <p:cSld>
-    <p:bg>
-      <p:bgPr>
-        <a:solidFill>
-          <a:schemeClr val="bg1"/>
-        </a:solidFill>
-        <a:effectLst/>
-      </p:bgPr>
-    </p:bg>
-    <p:spTree>
-      <p:nvGrpSpPr>
-        <p:cNvPr id="1" name="">
-          <a:extLst>
-            <a:ext uri="{FF2B5EF4-FFF2-40B4-BE49-F238E27FC236}">
-              <a16:creationId xmlns:a16="http://schemas.microsoft.com/office/drawing/2014/main" id="{889522E0-8191-FC52-5CFD-F2A33A7437F8}"/>
-            </a:ext>
-          </a:extLst>
-        </p:cNvPr>
-        <p:cNvGrpSpPr/>
-        <p:nvPr/>
-      </p:nvGrpSpPr>
-      <p:grpSpPr>
-        <a:xfrm>
-          <a:off x="0" y="0"/>
-          <a:ext cx="0" cy="0"/>
-          <a:chOff x="0" y="0"/>
-          <a:chExt cx="0" cy="0"/>
-        </a:xfrm>
-      </p:grpSpPr>
-      <p:sp useBgFill="1">
-        <p:nvSpPr>
-          <p:cNvPr id="2057" name="Rectangle 2056">
-            <a:extLst>
-              <a:ext uri="{FF2B5EF4-FFF2-40B4-BE49-F238E27FC236}">
-                <a16:creationId xmlns:a16="http://schemas.microsoft.com/office/drawing/2014/main" id="{CE61B5A9-75F8-C90C-7750-AD98FA383187}"/>
-              </a:ext>
-              <a:ext uri="{C183D7F6-B498-43B3-948B-1728B52AA6E4}">
-                <adec:decorative xmlns:adec="http://schemas.microsoft.com/office/drawing/2017/decorative" val="1"/>
-              </a:ext>
-            </a:extLst>
-          </p:cNvPr>
-          <p:cNvSpPr>
-            <a:spLocks noGrp="1" noRot="1" noChangeAspect="1" noMove="1" noResize="1" noEditPoints="1" noAdjustHandles="1" noChangeArrowheads="1" noChangeShapeType="1" noTextEdit="1"/>
-          </p:cNvSpPr>
-          <p:nvPr>
-            <p:extLst>
-              <p:ext uri="{386F3935-93C4-4BCD-93E2-E3B085C9AB24}">
-                <p16:designElem xmlns:p16="http://schemas.microsoft.com/office/powerpoint/2015/main" val="1"/>
-              </p:ext>
-            </p:extLst>
-          </p:nvPr>
-        </p:nvSpPr>
-        <p:spPr>
-          <a:xfrm>
-            <a:off x="0" y="0"/>
-            <a:ext cx="9143999" cy="6857365"/>
-          </a:xfrm>
-          <a:prstGeom prst="rect">
-            <a:avLst/>
-          </a:prstGeom>
-          <a:ln>
-            <a:noFill/>
-          </a:ln>
-        </p:spPr>
-        <p:style>
-          <a:lnRef idx="2">
-            <a:schemeClr val="accent1">
-              <a:shade val="50000"/>
-            </a:schemeClr>
-          </a:lnRef>
-          <a:fillRef idx="1">
-            <a:schemeClr val="accent1"/>
-          </a:fillRef>
-          <a:effectRef idx="0">
-            <a:schemeClr val="accent1"/>
-          </a:effectRef>
-          <a:fontRef idx="minor">
-            <a:schemeClr val="lt1"/>
-          </a:fontRef>
-        </p:style>
-        <p:txBody>
-          <a:bodyPr rtlCol="0" anchor="ctr"/>
-          <a:lstStyle/>
-          <a:p>
-            <a:pPr algn="ctr"/>
-            <a:endParaRPr lang="en-US"/>
-          </a:p>
-        </p:txBody>
-      </p:sp>
-      <p:sp>
-        <p:nvSpPr>
-          <p:cNvPr id="2" name="Titel 1">
-            <a:extLst>
-              <a:ext uri="{FF2B5EF4-FFF2-40B4-BE49-F238E27FC236}">
-                <a16:creationId xmlns:a16="http://schemas.microsoft.com/office/drawing/2014/main" id="{683C65F9-23E4-72A7-787D-29C9770866E9}"/>
-              </a:ext>
-            </a:extLst>
-          </p:cNvPr>
-          <p:cNvSpPr>
-            <a:spLocks noGrp="1"/>
-          </p:cNvSpPr>
-          <p:nvPr>
-            <p:ph type="title"/>
-          </p:nvPr>
-        </p:nvSpPr>
-        <p:spPr>
-          <a:xfrm>
-            <a:off x="606478" y="386930"/>
-            <a:ext cx="6927525" cy="1188950"/>
-          </a:xfrm>
-        </p:spPr>
-        <p:txBody>
-          <a:bodyPr anchor="b">
-            <a:normAutofit/>
-          </a:bodyPr>
-          <a:lstStyle/>
-          <a:p>
-            <a:r>
-              <a:rPr lang="de-CH" sz="4700" dirty="0" err="1"/>
-              <a:t>Defer</a:t>
-            </a:r>
-            <a:endParaRPr lang="de-CH" sz="4700" dirty="0"/>
-          </a:p>
-        </p:txBody>
-      </p:sp>
-      <p:grpSp>
-        <p:nvGrpSpPr>
-          <p:cNvPr id="2059" name="Group 2058">
-            <a:extLst>
-              <a:ext uri="{FF2B5EF4-FFF2-40B4-BE49-F238E27FC236}">
-                <a16:creationId xmlns:a16="http://schemas.microsoft.com/office/drawing/2014/main" id="{86087ACA-52D5-B423-2E52-30CA83D694BB}"/>
-              </a:ext>
-              <a:ext uri="{C183D7F6-B498-43B3-948B-1728B52AA6E4}">
-                <adec:decorative xmlns:adec="http://schemas.microsoft.com/office/drawing/2017/decorative" val="1"/>
-              </a:ext>
-            </a:extLst>
-          </p:cNvPr>
-          <p:cNvGrpSpPr>
-            <a:grpSpLocks noGrp="1" noUngrp="1" noRot="1" noChangeAspect="1" noMove="1" noResize="1"/>
-          </p:cNvGrpSpPr>
-          <p:nvPr>
-            <p:extLst>
-              <p:ext uri="{386F3935-93C4-4BCD-93E2-E3B085C9AB24}">
-                <p16:designElem xmlns:p16="http://schemas.microsoft.com/office/powerpoint/2015/main" val="1"/>
-              </p:ext>
-            </p:extLst>
-          </p:nvPr>
-        </p:nvGrpSpPr>
-        <p:grpSpPr>
-          <a:xfrm>
-            <a:off x="-1" y="1998368"/>
-            <a:ext cx="8771274" cy="782176"/>
-            <a:chOff x="-2" y="1998368"/>
-            <a:chExt cx="11695083" cy="782176"/>
-          </a:xfrm>
-        </p:grpSpPr>
-        <p:sp>
-          <p:nvSpPr>
-            <p:cNvPr id="2060" name="Rectangle 2059">
-              <a:extLst>
-                <a:ext uri="{FF2B5EF4-FFF2-40B4-BE49-F238E27FC236}">
-                  <a16:creationId xmlns:a16="http://schemas.microsoft.com/office/drawing/2014/main" id="{90ACB274-48E1-BDAD-C4BF-691212CFFBE7}"/>
-                </a:ext>
-                <a:ext uri="{C183D7F6-B498-43B3-948B-1728B52AA6E4}">
-                  <adec:decorative xmlns:adec="http://schemas.microsoft.com/office/drawing/2017/decorative" val="1"/>
-                </a:ext>
-              </a:extLst>
-            </p:cNvPr>
-            <p:cNvSpPr/>
-            <p:nvPr>
-              <p:extLst>
-                <p:ext uri="{386F3935-93C4-4BCD-93E2-E3B085C9AB24}">
-                  <p16:designElem xmlns:p16="http://schemas.microsoft.com/office/powerpoint/2015/main" val="1"/>
-                </p:ext>
-              </p:extLst>
-            </p:nvPr>
-          </p:nvSpPr>
-          <p:spPr>
-            <a:xfrm rot="5400000">
-              <a:off x="11228040" y="2313027"/>
-              <a:ext cx="781700" cy="152382"/>
-            </a:xfrm>
-            <a:prstGeom prst="rect">
-              <a:avLst/>
-            </a:prstGeom>
-            <a:solidFill>
-              <a:schemeClr val="accent4"/>
-            </a:solidFill>
-            <a:ln>
-              <a:noFill/>
-            </a:ln>
-          </p:spPr>
-          <p:style>
-            <a:lnRef idx="2">
-              <a:schemeClr val="accent1">
-                <a:shade val="50000"/>
-              </a:schemeClr>
-            </a:lnRef>
-            <a:fillRef idx="1">
-              <a:schemeClr val="accent1"/>
-            </a:fillRef>
-            <a:effectRef idx="0">
-              <a:schemeClr val="accent1"/>
-            </a:effectRef>
-            <a:fontRef idx="minor">
-              <a:schemeClr val="lt1"/>
-            </a:fontRef>
-          </p:style>
-          <p:txBody>
-            <a:bodyPr rtlCol="0" anchor="ctr"/>
-            <a:lstStyle/>
-            <a:p>
-              <a:pPr algn="ctr"/>
-              <a:endParaRPr lang="en-US"/>
-            </a:p>
-          </p:txBody>
-        </p:sp>
-        <p:sp>
-          <p:nvSpPr>
-            <p:cNvPr id="2061" name="Rectangle 2060">
-              <a:extLst>
-                <a:ext uri="{FF2B5EF4-FFF2-40B4-BE49-F238E27FC236}">
-                  <a16:creationId xmlns:a16="http://schemas.microsoft.com/office/drawing/2014/main" id="{B79B482B-1721-F56D-BAB4-794FC03E7594}"/>
-                </a:ext>
-                <a:ext uri="{C183D7F6-B498-43B3-948B-1728B52AA6E4}">
-                  <adec:decorative xmlns:adec="http://schemas.microsoft.com/office/drawing/2017/decorative" val="1"/>
-                </a:ext>
-              </a:extLst>
-            </p:cNvPr>
-            <p:cNvSpPr/>
-            <p:nvPr>
-              <p:extLst>
-                <p:ext uri="{386F3935-93C4-4BCD-93E2-E3B085C9AB24}">
-                  <p16:designElem xmlns:p16="http://schemas.microsoft.com/office/powerpoint/2015/main" val="1"/>
-                </p:ext>
-              </p:extLst>
-            </p:nvPr>
-          </p:nvSpPr>
-          <p:spPr>
-            <a:xfrm flipH="1" flipV="1">
-              <a:off x="-2" y="1998845"/>
-              <a:ext cx="11454595" cy="781699"/>
-            </a:xfrm>
-            <a:prstGeom prst="rect">
-              <a:avLst/>
-            </a:prstGeom>
-            <a:solidFill>
-              <a:schemeClr val="accent4"/>
-            </a:solidFill>
-            <a:ln>
-              <a:noFill/>
-            </a:ln>
-          </p:spPr>
-          <p:style>
-            <a:lnRef idx="2">
-              <a:schemeClr val="accent1">
-                <a:shade val="50000"/>
-              </a:schemeClr>
-            </a:lnRef>
-            <a:fillRef idx="1">
-              <a:schemeClr val="accent1"/>
-            </a:fillRef>
-            <a:effectRef idx="0">
-              <a:schemeClr val="accent1"/>
-            </a:effectRef>
-            <a:fontRef idx="minor">
-              <a:schemeClr val="lt1"/>
-            </a:fontRef>
-          </p:style>
-          <p:txBody>
-            <a:bodyPr rtlCol="0" anchor="ctr"/>
-            <a:lstStyle/>
-            <a:p>
-              <a:pPr algn="ctr"/>
-              <a:endParaRPr lang="en-US"/>
-            </a:p>
-          </p:txBody>
-        </p:sp>
-      </p:grpSp>
-      <p:sp>
-        <p:nvSpPr>
-          <p:cNvPr id="2063" name="Rectangle 2062">
-            <a:extLst>
-              <a:ext uri="{FF2B5EF4-FFF2-40B4-BE49-F238E27FC236}">
-                <a16:creationId xmlns:a16="http://schemas.microsoft.com/office/drawing/2014/main" id="{4F7BE736-E1C7-1E7F-A041-228F6CC252CD}"/>
-              </a:ext>
-              <a:ext uri="{C183D7F6-B498-43B3-948B-1728B52AA6E4}">
-                <adec:decorative xmlns:adec="http://schemas.microsoft.com/office/drawing/2017/decorative" val="1"/>
-              </a:ext>
-            </a:extLst>
-          </p:cNvPr>
-          <p:cNvSpPr>
-            <a:spLocks noGrp="1" noRot="1" noChangeAspect="1" noMove="1" noResize="1" noEditPoints="1" noAdjustHandles="1" noChangeArrowheads="1" noChangeShapeType="1" noTextEdit="1"/>
-          </p:cNvSpPr>
-          <p:nvPr>
-            <p:extLst>
-              <p:ext uri="{386F3935-93C4-4BCD-93E2-E3B085C9AB24}">
-                <p16:designElem xmlns:p16="http://schemas.microsoft.com/office/powerpoint/2015/main" val="1"/>
-              </p:ext>
-            </p:extLst>
-          </p:nvPr>
-        </p:nvSpPr>
-        <p:spPr>
-          <a:xfrm>
-            <a:off x="0" y="2203079"/>
-            <a:ext cx="8537521" cy="4147845"/>
-          </a:xfrm>
-          <a:prstGeom prst="rect">
-            <a:avLst/>
-          </a:prstGeom>
-          <a:solidFill>
-            <a:schemeClr val="bg1"/>
-          </a:solidFill>
-          <a:ln>
-            <a:noFill/>
-          </a:ln>
-          <a:effectLst>
-            <a:outerShdw blurRad="139700" dist="127000" dir="5400000" algn="t" rotWithShape="0">
-              <a:prstClr val="black">
-                <a:alpha val="15000"/>
-              </a:prstClr>
-            </a:outerShdw>
-          </a:effectLst>
-        </p:spPr>
-        <p:style>
-          <a:lnRef idx="2">
-            <a:schemeClr val="accent1">
-              <a:shade val="50000"/>
-            </a:schemeClr>
-          </a:lnRef>
-          <a:fillRef idx="1">
-            <a:schemeClr val="accent1"/>
-          </a:fillRef>
-          <a:effectRef idx="0">
-            <a:schemeClr val="accent1"/>
-          </a:effectRef>
-          <a:fontRef idx="minor">
-            <a:schemeClr val="lt1"/>
-          </a:fontRef>
-        </p:style>
-        <p:txBody>
-          <a:bodyPr rtlCol="0" anchor="ctr"/>
-          <a:lstStyle/>
-          <a:p>
-            <a:pPr algn="ctr"/>
-            <a:endParaRPr lang="en-US"/>
-          </a:p>
-        </p:txBody>
-      </p:sp>
-      <p:sp>
-        <p:nvSpPr>
-          <p:cNvPr id="4" name="Inhaltsplatzhalter 3">
-            <a:extLst>
-              <a:ext uri="{FF2B5EF4-FFF2-40B4-BE49-F238E27FC236}">
-                <a16:creationId xmlns:a16="http://schemas.microsoft.com/office/drawing/2014/main" id="{B42A37F2-725F-EE4C-0349-7ACC77A14898}"/>
-              </a:ext>
-            </a:extLst>
-          </p:cNvPr>
-          <p:cNvSpPr>
-            <a:spLocks noGrp="1"/>
-          </p:cNvSpPr>
-          <p:nvPr>
-            <p:ph idx="1"/>
-          </p:nvPr>
-        </p:nvSpPr>
-        <p:spPr>
-          <a:xfrm>
-            <a:off x="595245" y="2599509"/>
-            <a:ext cx="7607751" cy="3435531"/>
-          </a:xfrm>
-        </p:spPr>
-        <p:txBody>
-          <a:bodyPr anchor="ctr">
-            <a:normAutofit/>
-          </a:bodyPr>
-          <a:lstStyle/>
-          <a:p>
-            <a:r>
-              <a:rPr lang="de-CH" sz="2100" dirty="0" err="1"/>
-              <a:t>Asdf</a:t>
-            </a:r>
-            <a:endParaRPr lang="de-CH" sz="2100" dirty="0"/>
-          </a:p>
-          <a:p>
-            <a:r>
-              <a:rPr lang="de-CH" sz="2100" dirty="0" err="1"/>
-              <a:t>Asdf</a:t>
-            </a:r>
-            <a:endParaRPr lang="de-CH" sz="2100" dirty="0"/>
-          </a:p>
-          <a:p>
-            <a:r>
-              <a:rPr lang="de-CH" sz="2100" dirty="0" err="1"/>
-              <a:t>Asdf</a:t>
-            </a:r>
-            <a:endParaRPr lang="de-CH" sz="2100" dirty="0"/>
-          </a:p>
-          <a:p>
-            <a:r>
-              <a:rPr lang="de-CH" sz="2100" dirty="0" err="1"/>
-              <a:t>Asdff</a:t>
-            </a:r>
-            <a:endParaRPr lang="de-CH" sz="2100" dirty="0"/>
-          </a:p>
-          <a:p>
-            <a:r>
-              <a:rPr lang="de-CH" sz="2100" dirty="0" err="1"/>
-              <a:t>Asdf</a:t>
-            </a:r>
-            <a:endParaRPr lang="de-CH" sz="2100" dirty="0"/>
-          </a:p>
-          <a:p>
-            <a:r>
-              <a:rPr lang="de-CH" sz="2100" dirty="0" err="1"/>
-              <a:t>adsf</a:t>
-            </a:r>
-            <a:endParaRPr lang="de-CH" sz="2100" dirty="0"/>
-          </a:p>
-        </p:txBody>
-      </p:sp>
-      <p:pic>
-        <p:nvPicPr>
-          <p:cNvPr id="2052" name="Picture 4" descr="Learning Golang in 24 hours | Kislay Verma">
-            <a:extLst>
-              <a:ext uri="{FF2B5EF4-FFF2-40B4-BE49-F238E27FC236}">
-                <a16:creationId xmlns:a16="http://schemas.microsoft.com/office/drawing/2014/main" id="{93ACEFFB-55DA-C70D-7416-8C168851D159}"/>
-              </a:ext>
-            </a:extLst>
-          </p:cNvPr>
-          <p:cNvPicPr>
-            <a:picLocks noChangeAspect="1" noChangeArrowheads="1"/>
-          </p:cNvPicPr>
-          <p:nvPr/>
-        </p:nvPicPr>
-        <p:blipFill>
-          <a:blip r:embed="rId2">
-            <a:extLst>
-              <a:ext uri="{28A0092B-C50C-407E-A947-70E740481C1C}">
-                <a14:useLocalDpi xmlns:a14="http://schemas.microsoft.com/office/drawing/2010/main" val="0"/>
-              </a:ext>
-            </a:extLst>
-          </a:blip>
-          <a:srcRect/>
-          <a:stretch>
-            <a:fillRect/>
-          </a:stretch>
-        </p:blipFill>
-        <p:spPr bwMode="auto">
-          <a:xfrm>
-            <a:off x="7955280" y="0"/>
-            <a:ext cx="1116418" cy="1369399"/>
-          </a:xfrm>
-          <a:prstGeom prst="rect">
-            <a:avLst/>
-          </a:prstGeom>
-          <a:noFill/>
-          <a:extLst>
-            <a:ext uri="{909E8E84-426E-40DD-AFC4-6F175D3DCCD1}">
-              <a14:hiddenFill xmlns:a14="http://schemas.microsoft.com/office/drawing/2010/main">
-                <a:solidFill>
-                  <a:srgbClr val="FFFFFF"/>
-                </a:solidFill>
-              </a14:hiddenFill>
-            </a:ext>
-          </a:extLst>
-        </p:spPr>
-      </p:pic>
-    </p:spTree>
-    <p:extLst>
-      <p:ext uri="{BB962C8B-B14F-4D97-AF65-F5344CB8AC3E}">
-        <p14:creationId xmlns:p14="http://schemas.microsoft.com/office/powerpoint/2010/main" val="728387432"/>
-      </p:ext>
-    </p:extLst>
-  </p:cSld>
-  <p:clrMapOvr>
-    <a:masterClrMapping/>
-  </p:clrMapOvr>
-</p:sld>
-</file>
-
-<file path=ppt/slides/slide9.xml><?xml version="1.0" encoding="utf-8"?>
-<p:sld xmlns:a="http://schemas.openxmlformats.org/drawingml/2006/main" xmlns:r="http://schemas.openxmlformats.org/officeDocument/2006/relationships" xmlns:p="http://schemas.openxmlformats.org/presentationml/2006/main">
-  <p:cSld>
-    <p:bg>
-      <p:bgPr>
-        <a:solidFill>
-          <a:schemeClr val="bg1"/>
-        </a:solidFill>
-        <a:effectLst/>
-      </p:bgPr>
-    </p:bg>
-    <p:spTree>
-      <p:nvGrpSpPr>
-        <p:cNvPr id="1" name="">
-          <a:extLst>
-            <a:ext uri="{FF2B5EF4-FFF2-40B4-BE49-F238E27FC236}">
-              <a16:creationId xmlns:a16="http://schemas.microsoft.com/office/drawing/2014/main" id="{20083E05-8DA5-F060-89D7-20656CB60847}"/>
-            </a:ext>
-          </a:extLst>
-        </p:cNvPr>
-        <p:cNvGrpSpPr/>
-        <p:nvPr/>
-      </p:nvGrpSpPr>
-      <p:grpSpPr>
-        <a:xfrm>
-          <a:off x="0" y="0"/>
-          <a:ext cx="0" cy="0"/>
-          <a:chOff x="0" y="0"/>
-          <a:chExt cx="0" cy="0"/>
-        </a:xfrm>
-      </p:grpSpPr>
-      <p:sp useBgFill="1">
-        <p:nvSpPr>
-          <p:cNvPr id="2057" name="Rectangle 2056">
-            <a:extLst>
-              <a:ext uri="{FF2B5EF4-FFF2-40B4-BE49-F238E27FC236}">
-                <a16:creationId xmlns:a16="http://schemas.microsoft.com/office/drawing/2014/main" id="{7E68462F-040C-2519-41D1-B8764D7DFB83}"/>
-              </a:ext>
-              <a:ext uri="{C183D7F6-B498-43B3-948B-1728B52AA6E4}">
-                <adec:decorative xmlns:adec="http://schemas.microsoft.com/office/drawing/2017/decorative" val="1"/>
-              </a:ext>
-            </a:extLst>
-          </p:cNvPr>
-          <p:cNvSpPr>
-            <a:spLocks noGrp="1" noRot="1" noChangeAspect="1" noMove="1" noResize="1" noEditPoints="1" noAdjustHandles="1" noChangeArrowheads="1" noChangeShapeType="1" noTextEdit="1"/>
-          </p:cNvSpPr>
-          <p:nvPr>
-            <p:extLst>
-              <p:ext uri="{386F3935-93C4-4BCD-93E2-E3B085C9AB24}">
-                <p16:designElem xmlns:p16="http://schemas.microsoft.com/office/powerpoint/2015/main" val="1"/>
-              </p:ext>
-            </p:extLst>
-          </p:nvPr>
-        </p:nvSpPr>
-        <p:spPr>
-          <a:xfrm>
-            <a:off x="0" y="0"/>
-            <a:ext cx="9143999" cy="6857365"/>
-          </a:xfrm>
-          <a:prstGeom prst="rect">
-            <a:avLst/>
-          </a:prstGeom>
-          <a:ln>
-            <a:noFill/>
-          </a:ln>
-        </p:spPr>
-        <p:style>
-          <a:lnRef idx="2">
-            <a:schemeClr val="accent1">
-              <a:shade val="50000"/>
-            </a:schemeClr>
-          </a:lnRef>
-          <a:fillRef idx="1">
-            <a:schemeClr val="accent1"/>
-          </a:fillRef>
-          <a:effectRef idx="0">
-            <a:schemeClr val="accent1"/>
-          </a:effectRef>
-          <a:fontRef idx="minor">
-            <a:schemeClr val="lt1"/>
-          </a:fontRef>
-        </p:style>
-        <p:txBody>
-          <a:bodyPr rtlCol="0" anchor="ctr"/>
-          <a:lstStyle/>
-          <a:p>
-            <a:pPr algn="ctr"/>
-            <a:endParaRPr lang="en-US"/>
-          </a:p>
-        </p:txBody>
-      </p:sp>
-      <p:sp>
-        <p:nvSpPr>
-          <p:cNvPr id="2" name="Titel 1">
-            <a:extLst>
-              <a:ext uri="{FF2B5EF4-FFF2-40B4-BE49-F238E27FC236}">
-                <a16:creationId xmlns:a16="http://schemas.microsoft.com/office/drawing/2014/main" id="{60BAE5CC-D4E8-DBEC-F3E7-E04078AA7525}"/>
-              </a:ext>
-            </a:extLst>
-          </p:cNvPr>
-          <p:cNvSpPr>
-            <a:spLocks noGrp="1"/>
-          </p:cNvSpPr>
-          <p:nvPr>
-            <p:ph type="title"/>
-          </p:nvPr>
-        </p:nvSpPr>
-        <p:spPr>
-          <a:xfrm>
-            <a:off x="606478" y="386930"/>
-            <a:ext cx="6927525" cy="1188950"/>
-          </a:xfrm>
-        </p:spPr>
-        <p:txBody>
-          <a:bodyPr anchor="b">
-            <a:normAutofit fontScale="90000"/>
-          </a:bodyPr>
-          <a:lstStyle/>
-          <a:p>
-            <a:r>
-              <a:rPr lang="de-CH" sz="4700" dirty="0" err="1"/>
-              <a:t>Structural</a:t>
-            </a:r>
-            <a:r>
-              <a:rPr lang="de-CH" sz="4700" dirty="0"/>
-              <a:t> &amp; Nominal </a:t>
-            </a:r>
-            <a:r>
-              <a:rPr lang="de-CH" sz="4700" dirty="0" err="1"/>
-              <a:t>Typing</a:t>
-            </a:r>
-            <a:endParaRPr lang="de-CH" sz="4700" dirty="0"/>
-          </a:p>
-        </p:txBody>
-      </p:sp>
-      <p:grpSp>
-        <p:nvGrpSpPr>
-          <p:cNvPr id="2059" name="Group 2058">
-            <a:extLst>
-              <a:ext uri="{FF2B5EF4-FFF2-40B4-BE49-F238E27FC236}">
-                <a16:creationId xmlns:a16="http://schemas.microsoft.com/office/drawing/2014/main" id="{98ACF4CF-7998-811A-227C-5EBE8C223C7F}"/>
-              </a:ext>
-              <a:ext uri="{C183D7F6-B498-43B3-948B-1728B52AA6E4}">
-                <adec:decorative xmlns:adec="http://schemas.microsoft.com/office/drawing/2017/decorative" val="1"/>
-              </a:ext>
-            </a:extLst>
-          </p:cNvPr>
-          <p:cNvGrpSpPr>
-            <a:grpSpLocks noGrp="1" noUngrp="1" noRot="1" noChangeAspect="1" noMove="1" noResize="1"/>
-          </p:cNvGrpSpPr>
-          <p:nvPr>
-            <p:extLst>
-              <p:ext uri="{386F3935-93C4-4BCD-93E2-E3B085C9AB24}">
-                <p16:designElem xmlns:p16="http://schemas.microsoft.com/office/powerpoint/2015/main" val="1"/>
-              </p:ext>
-            </p:extLst>
-          </p:nvPr>
-        </p:nvGrpSpPr>
-        <p:grpSpPr>
-          <a:xfrm>
-            <a:off x="-1" y="1998368"/>
-            <a:ext cx="8771274" cy="782176"/>
-            <a:chOff x="-2" y="1998368"/>
-            <a:chExt cx="11695083" cy="782176"/>
-          </a:xfrm>
-        </p:grpSpPr>
-        <p:sp>
-          <p:nvSpPr>
-            <p:cNvPr id="2060" name="Rectangle 2059">
-              <a:extLst>
-                <a:ext uri="{FF2B5EF4-FFF2-40B4-BE49-F238E27FC236}">
-                  <a16:creationId xmlns:a16="http://schemas.microsoft.com/office/drawing/2014/main" id="{BD93F3F9-CED9-38C3-8F87-1ED11BB186F2}"/>
-                </a:ext>
-                <a:ext uri="{C183D7F6-B498-43B3-948B-1728B52AA6E4}">
-                  <adec:decorative xmlns:adec="http://schemas.microsoft.com/office/drawing/2017/decorative" val="1"/>
-                </a:ext>
-              </a:extLst>
-            </p:cNvPr>
-            <p:cNvSpPr/>
-            <p:nvPr>
-              <p:extLst>
-                <p:ext uri="{386F3935-93C4-4BCD-93E2-E3B085C9AB24}">
-                  <p16:designElem xmlns:p16="http://schemas.microsoft.com/office/powerpoint/2015/main" val="1"/>
-                </p:ext>
-              </p:extLst>
-            </p:nvPr>
-          </p:nvSpPr>
-          <p:spPr>
-            <a:xfrm rot="5400000">
-              <a:off x="11228040" y="2313027"/>
-              <a:ext cx="781700" cy="152382"/>
-            </a:xfrm>
-            <a:prstGeom prst="rect">
-              <a:avLst/>
-            </a:prstGeom>
-            <a:solidFill>
-              <a:schemeClr val="accent4"/>
-            </a:solidFill>
-            <a:ln>
-              <a:noFill/>
-            </a:ln>
-          </p:spPr>
-          <p:style>
-            <a:lnRef idx="2">
-              <a:schemeClr val="accent1">
-                <a:shade val="50000"/>
-              </a:schemeClr>
-            </a:lnRef>
-            <a:fillRef idx="1">
-              <a:schemeClr val="accent1"/>
-            </a:fillRef>
-            <a:effectRef idx="0">
-              <a:schemeClr val="accent1"/>
-            </a:effectRef>
-            <a:fontRef idx="minor">
-              <a:schemeClr val="lt1"/>
-            </a:fontRef>
-          </p:style>
-          <p:txBody>
-            <a:bodyPr rtlCol="0" anchor="ctr"/>
-            <a:lstStyle/>
-            <a:p>
-              <a:pPr algn="ctr"/>
-              <a:endParaRPr lang="en-US"/>
-            </a:p>
-          </p:txBody>
-        </p:sp>
-        <p:sp>
-          <p:nvSpPr>
-            <p:cNvPr id="2061" name="Rectangle 2060">
-              <a:extLst>
-                <a:ext uri="{FF2B5EF4-FFF2-40B4-BE49-F238E27FC236}">
-                  <a16:creationId xmlns:a16="http://schemas.microsoft.com/office/drawing/2014/main" id="{6532D027-F793-7D84-6972-C6637034235E}"/>
-                </a:ext>
-                <a:ext uri="{C183D7F6-B498-43B3-948B-1728B52AA6E4}">
-                  <adec:decorative xmlns:adec="http://schemas.microsoft.com/office/drawing/2017/decorative" val="1"/>
-                </a:ext>
-              </a:extLst>
-            </p:cNvPr>
-            <p:cNvSpPr/>
-            <p:nvPr>
-              <p:extLst>
-                <p:ext uri="{386F3935-93C4-4BCD-93E2-E3B085C9AB24}">
-                  <p16:designElem xmlns:p16="http://schemas.microsoft.com/office/powerpoint/2015/main" val="1"/>
-                </p:ext>
-              </p:extLst>
-            </p:nvPr>
-          </p:nvSpPr>
-          <p:spPr>
-            <a:xfrm flipH="1" flipV="1">
-              <a:off x="-2" y="1998845"/>
-              <a:ext cx="11454595" cy="781699"/>
-            </a:xfrm>
-            <a:prstGeom prst="rect">
-              <a:avLst/>
-            </a:prstGeom>
-            <a:solidFill>
-              <a:schemeClr val="accent4"/>
-            </a:solidFill>
-            <a:ln>
-              <a:noFill/>
-            </a:ln>
-          </p:spPr>
-          <p:style>
-            <a:lnRef idx="2">
-              <a:schemeClr val="accent1">
-                <a:shade val="50000"/>
-              </a:schemeClr>
-            </a:lnRef>
-            <a:fillRef idx="1">
-              <a:schemeClr val="accent1"/>
-            </a:fillRef>
-            <a:effectRef idx="0">
-              <a:schemeClr val="accent1"/>
-            </a:effectRef>
-            <a:fontRef idx="minor">
-              <a:schemeClr val="lt1"/>
-            </a:fontRef>
-          </p:style>
-          <p:txBody>
-            <a:bodyPr rtlCol="0" anchor="ctr"/>
-            <a:lstStyle/>
-            <a:p>
-              <a:pPr algn="ctr"/>
-              <a:endParaRPr lang="en-US"/>
-            </a:p>
-          </p:txBody>
-        </p:sp>
-      </p:grpSp>
-      <p:sp>
-        <p:nvSpPr>
-          <p:cNvPr id="2063" name="Rectangle 2062">
-            <a:extLst>
-              <a:ext uri="{FF2B5EF4-FFF2-40B4-BE49-F238E27FC236}">
-                <a16:creationId xmlns:a16="http://schemas.microsoft.com/office/drawing/2014/main" id="{98419B50-645B-3496-56B6-147C308C10CA}"/>
-              </a:ext>
-              <a:ext uri="{C183D7F6-B498-43B3-948B-1728B52AA6E4}">
-                <adec:decorative xmlns:adec="http://schemas.microsoft.com/office/drawing/2017/decorative" val="1"/>
-              </a:ext>
-            </a:extLst>
-          </p:cNvPr>
-          <p:cNvSpPr>
-            <a:spLocks noGrp="1" noRot="1" noChangeAspect="1" noMove="1" noResize="1" noEditPoints="1" noAdjustHandles="1" noChangeArrowheads="1" noChangeShapeType="1" noTextEdit="1"/>
-          </p:cNvSpPr>
-          <p:nvPr>
-            <p:extLst>
-              <p:ext uri="{386F3935-93C4-4BCD-93E2-E3B085C9AB24}">
-                <p16:designElem xmlns:p16="http://schemas.microsoft.com/office/powerpoint/2015/main" val="1"/>
-              </p:ext>
-            </p:extLst>
-          </p:nvPr>
-        </p:nvSpPr>
-        <p:spPr>
-          <a:xfrm>
-            <a:off x="0" y="2203079"/>
-            <a:ext cx="8537521" cy="4147845"/>
-          </a:xfrm>
-          <a:prstGeom prst="rect">
-            <a:avLst/>
-          </a:prstGeom>
-          <a:solidFill>
-            <a:schemeClr val="bg1"/>
-          </a:solidFill>
-          <a:ln>
-            <a:noFill/>
-          </a:ln>
-          <a:effectLst>
-            <a:outerShdw blurRad="139700" dist="127000" dir="5400000" algn="t" rotWithShape="0">
-              <a:prstClr val="black">
-                <a:alpha val="15000"/>
-              </a:prstClr>
-            </a:outerShdw>
-          </a:effectLst>
-        </p:spPr>
-        <p:style>
-          <a:lnRef idx="2">
-            <a:schemeClr val="accent1">
-              <a:shade val="50000"/>
-            </a:schemeClr>
-          </a:lnRef>
-          <a:fillRef idx="1">
-            <a:schemeClr val="accent1"/>
-          </a:fillRef>
-          <a:effectRef idx="0">
-            <a:schemeClr val="accent1"/>
-          </a:effectRef>
-          <a:fontRef idx="minor">
-            <a:schemeClr val="lt1"/>
-          </a:fontRef>
-        </p:style>
-        <p:txBody>
-          <a:bodyPr rtlCol="0" anchor="ctr"/>
-          <a:lstStyle/>
-          <a:p>
-            <a:pPr algn="ctr"/>
-            <a:endParaRPr lang="en-US"/>
-          </a:p>
-        </p:txBody>
-      </p:sp>
-      <p:sp>
-        <p:nvSpPr>
-          <p:cNvPr id="4" name="Inhaltsplatzhalter 3">
-            <a:extLst>
-              <a:ext uri="{FF2B5EF4-FFF2-40B4-BE49-F238E27FC236}">
-                <a16:creationId xmlns:a16="http://schemas.microsoft.com/office/drawing/2014/main" id="{70B92D9D-B315-E6F6-5AEC-A878DDE27E8D}"/>
-              </a:ext>
-            </a:extLst>
-          </p:cNvPr>
-          <p:cNvSpPr>
-            <a:spLocks noGrp="1"/>
-          </p:cNvSpPr>
-          <p:nvPr>
-            <p:ph idx="1"/>
-          </p:nvPr>
-        </p:nvSpPr>
-        <p:spPr>
-          <a:xfrm>
-            <a:off x="595245" y="2599509"/>
-            <a:ext cx="7607751" cy="3435531"/>
-          </a:xfrm>
-        </p:spPr>
-        <p:txBody>
-          <a:bodyPr anchor="ctr">
-            <a:normAutofit/>
-          </a:bodyPr>
-          <a:lstStyle/>
-          <a:p>
-            <a:r>
-              <a:rPr lang="de-CH" sz="2100" dirty="0" err="1"/>
-              <a:t>Asdf</a:t>
-            </a:r>
-            <a:endParaRPr lang="de-CH" sz="2100" dirty="0"/>
-          </a:p>
-          <a:p>
-            <a:r>
-              <a:rPr lang="de-CH" sz="2100" dirty="0" err="1"/>
-              <a:t>Asdf</a:t>
-            </a:r>
-            <a:endParaRPr lang="de-CH" sz="2100" dirty="0"/>
-          </a:p>
-          <a:p>
-            <a:r>
-              <a:rPr lang="de-CH" sz="2100" dirty="0" err="1"/>
-              <a:t>Asdf</a:t>
-            </a:r>
-            <a:endParaRPr lang="de-CH" sz="2100" dirty="0"/>
-          </a:p>
-          <a:p>
-            <a:r>
-              <a:rPr lang="de-CH" sz="2100" dirty="0" err="1"/>
-              <a:t>Asdff</a:t>
-            </a:r>
-            <a:endParaRPr lang="de-CH" sz="2100" dirty="0"/>
-          </a:p>
-          <a:p>
-            <a:r>
-              <a:rPr lang="de-CH" sz="2100" dirty="0" err="1"/>
-              <a:t>Asdf</a:t>
-            </a:r>
-            <a:endParaRPr lang="de-CH" sz="2100" dirty="0"/>
-          </a:p>
-          <a:p>
-            <a:r>
-              <a:rPr lang="de-CH" sz="2100" dirty="0" err="1"/>
-              <a:t>adsf</a:t>
-            </a:r>
-            <a:endParaRPr lang="de-CH" sz="2100" dirty="0"/>
-          </a:p>
-        </p:txBody>
-      </p:sp>
-      <p:pic>
-        <p:nvPicPr>
-          <p:cNvPr id="2052" name="Picture 4" descr="Learning Golang in 24 hours | Kislay Verma">
-            <a:extLst>
-              <a:ext uri="{FF2B5EF4-FFF2-40B4-BE49-F238E27FC236}">
-                <a16:creationId xmlns:a16="http://schemas.microsoft.com/office/drawing/2014/main" id="{EFDAC631-A1D3-6140-E10F-83087B1F2D8E}"/>
-              </a:ext>
-            </a:extLst>
-          </p:cNvPr>
-          <p:cNvPicPr>
-            <a:picLocks noChangeAspect="1" noChangeArrowheads="1"/>
-          </p:cNvPicPr>
-          <p:nvPr/>
-        </p:nvPicPr>
-        <p:blipFill>
-          <a:blip r:embed="rId2">
-            <a:extLst>
-              <a:ext uri="{28A0092B-C50C-407E-A947-70E740481C1C}">
-                <a14:useLocalDpi xmlns:a14="http://schemas.microsoft.com/office/drawing/2010/main" val="0"/>
-              </a:ext>
-            </a:extLst>
-          </a:blip>
-          <a:srcRect/>
-          <a:stretch>
-            <a:fillRect/>
-          </a:stretch>
-        </p:blipFill>
-        <p:spPr bwMode="auto">
-          <a:xfrm>
-            <a:off x="7955280" y="0"/>
-            <a:ext cx="1116418" cy="1369399"/>
-          </a:xfrm>
-          <a:prstGeom prst="rect">
-            <a:avLst/>
-          </a:prstGeom>
-          <a:noFill/>
-          <a:extLst>
-            <a:ext uri="{909E8E84-426E-40DD-AFC4-6F175D3DCCD1}">
-              <a14:hiddenFill xmlns:a14="http://schemas.microsoft.com/office/drawing/2010/main">
-                <a:solidFill>
-                  <a:srgbClr val="FFFFFF"/>
-                </a:solidFill>
-              </a14:hiddenFill>
-            </a:ext>
-          </a:extLst>
-        </p:spPr>
-      </p:pic>
-    </p:spTree>
-    <p:extLst>
-      <p:ext uri="{BB962C8B-B14F-4D97-AF65-F5344CB8AC3E}">
-        <p14:creationId xmlns:p14="http://schemas.microsoft.com/office/powerpoint/2010/main" val="1537264246"/>
       </p:ext>
     </p:extLst>
   </p:cSld>

--- a/presentation/GO-Präsi.pptx
+++ b/presentation/GO-Präsi.pptx
@@ -952,10 +952,10 @@
         <a:lstStyle/>
         <a:p>
           <a:r>
-            <a:rPr lang="de-CH"/>
-            <a:t>Fibunacci Berechnung</a:t>
+            <a:rPr lang="de-CH" dirty="0"/>
+            <a:t>Fibonacci Berechnung</a:t>
           </a:r>
-          <a:endParaRPr lang="en-US"/>
+          <a:endParaRPr lang="en-US" dirty="0"/>
         </a:p>
       </dgm:t>
     </dgm:pt>
@@ -1026,14 +1026,14 @@
         <a:lstStyle/>
         <a:p>
           <a:r>
-            <a:rPr lang="de-CH"/>
+            <a:rPr lang="de-CH" dirty="0"/>
             <a:t>Sonst noch etwas </a:t>
           </a:r>
           <a:r>
-            <a:rPr lang="de-CH" b="1"/>
+            <a:rPr lang="de-CH" b="1" dirty="0"/>
             <a:t>//TODO</a:t>
           </a:r>
-          <a:endParaRPr lang="en-US"/>
+          <a:endParaRPr lang="en-US" dirty="0"/>
         </a:p>
       </dgm:t>
     </dgm:pt>
@@ -1080,13 +1080,13 @@
       <dgm:prSet presAssocID="{6035F41B-C1D9-48B7-BECE-AC82CF6E464F}" presName="iconRect" presStyleLbl="node1" presStyleIdx="0" presStyleCnt="3"/>
       <dgm:spPr>
         <a:blipFill>
-          <a:blip xmlns:r="http://schemas.openxmlformats.org/officeDocument/2006/relationships" r:embed="rId1">
+          <a:blip xmlns:r="http://schemas.openxmlformats.org/officeDocument/2006/relationships">
             <a:extLst>
               <a:ext uri="{28A0092B-C50C-407E-A947-70E740481C1C}">
                 <a14:useLocalDpi xmlns:a14="http://schemas.microsoft.com/office/drawing/2010/main" val="0"/>
               </a:ext>
               <a:ext uri="{96DAC541-7B7A-43D3-8B79-37D633B846F1}">
-                <asvg:svgBlip xmlns:asvg="http://schemas.microsoft.com/office/drawing/2016/SVG/main" r:embed="rId2"/>
+                <asvg:svgBlip xmlns:asvg="http://schemas.microsoft.com/office/drawing/2016/SVG/main" r:embed="rId1"/>
               </a:ext>
             </a:extLst>
           </a:blip>
@@ -1133,13 +1133,13 @@
       <dgm:prSet presAssocID="{97A36E21-AA6A-4FAC-ADC7-525133752386}" presName="iconRect" presStyleLbl="node1" presStyleIdx="1" presStyleCnt="3"/>
       <dgm:spPr>
         <a:blipFill>
-          <a:blip xmlns:r="http://schemas.openxmlformats.org/officeDocument/2006/relationships" r:embed="rId3">
+          <a:blip xmlns:r="http://schemas.openxmlformats.org/officeDocument/2006/relationships">
             <a:extLst>
               <a:ext uri="{28A0092B-C50C-407E-A947-70E740481C1C}">
                 <a14:useLocalDpi xmlns:a14="http://schemas.microsoft.com/office/drawing/2010/main" val="0"/>
               </a:ext>
               <a:ext uri="{96DAC541-7B7A-43D3-8B79-37D633B846F1}">
-                <asvg:svgBlip xmlns:asvg="http://schemas.microsoft.com/office/drawing/2016/SVG/main" r:embed="rId4"/>
+                <asvg:svgBlip xmlns:asvg="http://schemas.microsoft.com/office/drawing/2016/SVG/main" r:embed="rId2"/>
               </a:ext>
             </a:extLst>
           </a:blip>
@@ -1186,13 +1186,13 @@
       <dgm:prSet presAssocID="{EDB45AFD-6D51-46E1-9941-995569820DEF}" presName="iconRect" presStyleLbl="node1" presStyleIdx="2" presStyleCnt="3"/>
       <dgm:spPr>
         <a:blipFill>
-          <a:blip xmlns:r="http://schemas.openxmlformats.org/officeDocument/2006/relationships" r:embed="rId5">
+          <a:blip xmlns:r="http://schemas.openxmlformats.org/officeDocument/2006/relationships">
             <a:extLst>
               <a:ext uri="{28A0092B-C50C-407E-A947-70E740481C1C}">
                 <a14:useLocalDpi xmlns:a14="http://schemas.microsoft.com/office/drawing/2010/main" val="0"/>
               </a:ext>
               <a:ext uri="{96DAC541-7B7A-43D3-8B79-37D633B846F1}">
-                <asvg:svgBlip xmlns:asvg="http://schemas.microsoft.com/office/drawing/2016/SVG/main" r:embed="rId6"/>
+                <asvg:svgBlip xmlns:asvg="http://schemas.microsoft.com/office/drawing/2016/SVG/main" r:embed="rId3"/>
               </a:ext>
             </a:extLst>
           </a:blip>
@@ -1324,13 +1324,13 @@
           <a:avLst/>
         </a:prstGeom>
         <a:blipFill>
-          <a:blip xmlns:r="http://schemas.openxmlformats.org/officeDocument/2006/relationships" r:embed="rId1">
+          <a:blip xmlns:r="http://schemas.openxmlformats.org/officeDocument/2006/relationships">
             <a:extLst>
               <a:ext uri="{28A0092B-C50C-407E-A947-70E740481C1C}">
                 <a14:useLocalDpi xmlns:a14="http://schemas.microsoft.com/office/drawing/2010/main" val="0"/>
               </a:ext>
               <a:ext uri="{96DAC541-7B7A-43D3-8B79-37D633B846F1}">
-                <asvg:svgBlip xmlns:asvg="http://schemas.microsoft.com/office/drawing/2016/SVG/main" r:embed="rId2"/>
+                <asvg:svgBlip xmlns:asvg="http://schemas.microsoft.com/office/drawing/2016/SVG/main" r:embed="rId1"/>
               </a:ext>
             </a:extLst>
           </a:blip>
@@ -1409,10 +1409,10 @@
             <a:buNone/>
           </a:pPr>
           <a:r>
-            <a:rPr lang="de-CH" sz="2500" kern="1200"/>
-            <a:t>Fibunacci Berechnung</a:t>
+            <a:rPr lang="de-CH" sz="2500" kern="1200" dirty="0"/>
+            <a:t>Fibonacci Berechnung</a:t>
           </a:r>
-          <a:endParaRPr lang="en-US" sz="2500" kern="1200"/>
+          <a:endParaRPr lang="en-US" sz="2500" kern="1200" dirty="0"/>
         </a:p>
       </dsp:txBody>
       <dsp:txXfrm>
@@ -1476,13 +1476,13 @@
           <a:avLst/>
         </a:prstGeom>
         <a:blipFill>
-          <a:blip xmlns:r="http://schemas.openxmlformats.org/officeDocument/2006/relationships" r:embed="rId3">
+          <a:blip xmlns:r="http://schemas.openxmlformats.org/officeDocument/2006/relationships">
             <a:extLst>
               <a:ext uri="{28A0092B-C50C-407E-A947-70E740481C1C}">
                 <a14:useLocalDpi xmlns:a14="http://schemas.microsoft.com/office/drawing/2010/main" val="0"/>
               </a:ext>
               <a:ext uri="{96DAC541-7B7A-43D3-8B79-37D633B846F1}">
-                <asvg:svgBlip xmlns:asvg="http://schemas.microsoft.com/office/drawing/2016/SVG/main" r:embed="rId4"/>
+                <asvg:svgBlip xmlns:asvg="http://schemas.microsoft.com/office/drawing/2016/SVG/main" r:embed="rId2"/>
               </a:ext>
             </a:extLst>
           </a:blip>
@@ -1628,13 +1628,13 @@
           <a:avLst/>
         </a:prstGeom>
         <a:blipFill>
-          <a:blip xmlns:r="http://schemas.openxmlformats.org/officeDocument/2006/relationships" r:embed="rId5">
+          <a:blip xmlns:r="http://schemas.openxmlformats.org/officeDocument/2006/relationships">
             <a:extLst>
               <a:ext uri="{28A0092B-C50C-407E-A947-70E740481C1C}">
                 <a14:useLocalDpi xmlns:a14="http://schemas.microsoft.com/office/drawing/2010/main" val="0"/>
               </a:ext>
               <a:ext uri="{96DAC541-7B7A-43D3-8B79-37D633B846F1}">
-                <asvg:svgBlip xmlns:asvg="http://schemas.microsoft.com/office/drawing/2016/SVG/main" r:embed="rId6"/>
+                <asvg:svgBlip xmlns:asvg="http://schemas.microsoft.com/office/drawing/2016/SVG/main" r:embed="rId3"/>
               </a:ext>
             </a:extLst>
           </a:blip>
@@ -1713,14 +1713,14 @@
             <a:buNone/>
           </a:pPr>
           <a:r>
-            <a:rPr lang="de-CH" sz="2500" kern="1200"/>
+            <a:rPr lang="de-CH" sz="2500" kern="1200" dirty="0"/>
             <a:t>Sonst noch etwas </a:t>
           </a:r>
           <a:r>
-            <a:rPr lang="de-CH" sz="2500" b="1" kern="1200"/>
+            <a:rPr lang="de-CH" sz="2500" b="1" kern="1200" dirty="0"/>
             <a:t>//TODO</a:t>
           </a:r>
-          <a:endParaRPr lang="en-US" sz="2500" kern="1200"/>
+          <a:endParaRPr lang="en-US" sz="2500" kern="1200" dirty="0"/>
         </a:p>
       </dsp:txBody>
       <dsp:txXfrm>
@@ -3142,7 +3142,7 @@
           <a:p>
             <a:fld id="{D9EF2C90-E8EE-43CD-8D96-4E8A72565517}" type="datetimeFigureOut">
               <a:rPr lang="de-CH" smtClean="0"/>
-              <a:t>20.04.26</a:t>
+              <a:t>17.05.26</a:t>
             </a:fld>
             <a:endParaRPr lang="de-CH"/>
           </a:p>
@@ -4135,7 +4135,7 @@
           <a:p>
             <a:fld id="{5BCAD085-E8A6-8845-BD4E-CB4CCA059FC4}" type="datetimeFigureOut">
               <a:rPr lang="en-US" smtClean="0"/>
-              <a:t>4/20/26</a:t>
+              <a:t>5/17/26</a:t>
             </a:fld>
             <a:endParaRPr lang="en-US"/>
           </a:p>
@@ -4303,7 +4303,7 @@
           <a:p>
             <a:fld id="{5BCAD085-E8A6-8845-BD4E-CB4CCA059FC4}" type="datetimeFigureOut">
               <a:rPr lang="en-US" smtClean="0"/>
-              <a:t>4/20/26</a:t>
+              <a:t>5/17/26</a:t>
             </a:fld>
             <a:endParaRPr lang="en-US"/>
           </a:p>
@@ -4481,7 +4481,7 @@
           <a:p>
             <a:fld id="{5BCAD085-E8A6-8845-BD4E-CB4CCA059FC4}" type="datetimeFigureOut">
               <a:rPr lang="en-US" smtClean="0"/>
-              <a:t>4/20/26</a:t>
+              <a:t>5/17/26</a:t>
             </a:fld>
             <a:endParaRPr lang="en-US"/>
           </a:p>
@@ -4649,7 +4649,7 @@
           <a:p>
             <a:fld id="{5BCAD085-E8A6-8845-BD4E-CB4CCA059FC4}" type="datetimeFigureOut">
               <a:rPr lang="en-US" smtClean="0"/>
-              <a:t>4/20/26</a:t>
+              <a:t>5/17/26</a:t>
             </a:fld>
             <a:endParaRPr lang="en-US"/>
           </a:p>
@@ -4894,7 +4894,7 @@
           <a:p>
             <a:fld id="{5BCAD085-E8A6-8845-BD4E-CB4CCA059FC4}" type="datetimeFigureOut">
               <a:rPr lang="en-US" smtClean="0"/>
-              <a:t>4/20/26</a:t>
+              <a:t>5/17/26</a:t>
             </a:fld>
             <a:endParaRPr lang="en-US"/>
           </a:p>
@@ -5179,7 +5179,7 @@
           <a:p>
             <a:fld id="{5BCAD085-E8A6-8845-BD4E-CB4CCA059FC4}" type="datetimeFigureOut">
               <a:rPr lang="en-US" smtClean="0"/>
-              <a:t>4/20/26</a:t>
+              <a:t>5/17/26</a:t>
             </a:fld>
             <a:endParaRPr lang="en-US"/>
           </a:p>
@@ -5598,7 +5598,7 @@
           <a:p>
             <a:fld id="{5BCAD085-E8A6-8845-BD4E-CB4CCA059FC4}" type="datetimeFigureOut">
               <a:rPr lang="en-US" smtClean="0"/>
-              <a:t>4/20/26</a:t>
+              <a:t>5/17/26</a:t>
             </a:fld>
             <a:endParaRPr lang="en-US"/>
           </a:p>
@@ -5715,7 +5715,7 @@
           <a:p>
             <a:fld id="{5BCAD085-E8A6-8845-BD4E-CB4CCA059FC4}" type="datetimeFigureOut">
               <a:rPr lang="en-US" smtClean="0"/>
-              <a:t>4/20/26</a:t>
+              <a:t>5/17/26</a:t>
             </a:fld>
             <a:endParaRPr lang="en-US"/>
           </a:p>
@@ -5810,7 +5810,7 @@
           <a:p>
             <a:fld id="{5BCAD085-E8A6-8845-BD4E-CB4CCA059FC4}" type="datetimeFigureOut">
               <a:rPr lang="en-US" smtClean="0"/>
-              <a:t>4/20/26</a:t>
+              <a:t>5/17/26</a:t>
             </a:fld>
             <a:endParaRPr lang="en-US"/>
           </a:p>
@@ -6085,7 +6085,7 @@
           <a:p>
             <a:fld id="{5BCAD085-E8A6-8845-BD4E-CB4CCA059FC4}" type="datetimeFigureOut">
               <a:rPr lang="en-US" smtClean="0"/>
-              <a:t>4/20/26</a:t>
+              <a:t>5/17/26</a:t>
             </a:fld>
             <a:endParaRPr lang="en-US"/>
           </a:p>
@@ -6337,7 +6337,7 @@
           <a:p>
             <a:fld id="{5BCAD085-E8A6-8845-BD4E-CB4CCA059FC4}" type="datetimeFigureOut">
               <a:rPr lang="en-US" smtClean="0"/>
-              <a:t>4/20/26</a:t>
+              <a:t>5/17/26</a:t>
             </a:fld>
             <a:endParaRPr lang="en-US"/>
           </a:p>
@@ -6548,7 +6548,7 @@
           <a:p>
             <a:fld id="{5BCAD085-E8A6-8845-BD4E-CB4CCA059FC4}" type="datetimeFigureOut">
               <a:rPr lang="en-US" smtClean="0"/>
-              <a:t>4/20/26</a:t>
+              <a:t>5/17/26</a:t>
             </a:fld>
             <a:endParaRPr lang="en-US"/>
           </a:p>
@@ -11117,7 +11117,7 @@
             <p:ph idx="1"/>
             <p:extLst>
               <p:ext uri="{D42A27DB-BD31-4B8C-83A1-F6EECF244321}">
-                <p14:modId xmlns:p14="http://schemas.microsoft.com/office/powerpoint/2010/main" val="523476174"/>
+                <p14:modId xmlns:p14="http://schemas.microsoft.com/office/powerpoint/2010/main" val="3513972904"/>
               </p:ext>
             </p:extLst>
           </p:nvPr>
@@ -11657,66 +11657,6 @@
           <a:chExt cx="0" cy="0"/>
         </a:xfrm>
       </p:grpSpPr>
-      <p:sp useBgFill="1">
-        <p:nvSpPr>
-          <p:cNvPr id="2057" name="Rectangle 2056">
-            <a:extLst>
-              <a:ext uri="{FF2B5EF4-FFF2-40B4-BE49-F238E27FC236}">
-                <a16:creationId xmlns:a16="http://schemas.microsoft.com/office/drawing/2014/main" id="{C7AD028B-0DE6-4655-4449-0324DC52E647}"/>
-              </a:ext>
-              <a:ext uri="{C183D7F6-B498-43B3-948B-1728B52AA6E4}">
-                <adec:decorative xmlns:adec="http://schemas.microsoft.com/office/drawing/2017/decorative" val="1"/>
-              </a:ext>
-            </a:extLst>
-          </p:cNvPr>
-          <p:cNvSpPr>
-            <a:spLocks noGrp="1" noRot="1" noChangeAspect="1" noMove="1" noResize="1" noEditPoints="1" noAdjustHandles="1" noChangeArrowheads="1" noChangeShapeType="1" noTextEdit="1"/>
-          </p:cNvSpPr>
-          <p:nvPr>
-            <p:extLst>
-              <p:ext uri="{386F3935-93C4-4BCD-93E2-E3B085C9AB24}">
-                <p16:designElem xmlns:p16="http://schemas.microsoft.com/office/powerpoint/2015/main" val="1"/>
-              </p:ext>
-            </p:extLst>
-          </p:nvPr>
-        </p:nvSpPr>
-        <p:spPr>
-          <a:xfrm>
-            <a:off x="0" y="0"/>
-            <a:ext cx="9143999" cy="6857365"/>
-          </a:xfrm>
-          <a:prstGeom prst="rect">
-            <a:avLst/>
-          </a:prstGeom>
-          <a:ln>
-            <a:noFill/>
-          </a:ln>
-        </p:spPr>
-        <p:style>
-          <a:lnRef idx="2">
-            <a:schemeClr val="accent1">
-              <a:shade val="50000"/>
-            </a:schemeClr>
-          </a:lnRef>
-          <a:fillRef idx="1">
-            <a:schemeClr val="accent1"/>
-          </a:fillRef>
-          <a:effectRef idx="0">
-            <a:schemeClr val="accent1"/>
-          </a:effectRef>
-          <a:fontRef idx="minor">
-            <a:schemeClr val="lt1"/>
-          </a:fontRef>
-        </p:style>
-        <p:txBody>
-          <a:bodyPr rtlCol="0" anchor="ctr"/>
-          <a:lstStyle/>
-          <a:p>
-            <a:pPr algn="ctr"/>
-            <a:endParaRPr lang="en-US"/>
-          </a:p>
-        </p:txBody>
-      </p:sp>
       <p:sp>
         <p:nvSpPr>
           <p:cNvPr id="2" name="Titel 1">
@@ -11733,12 +11673,7 @@
             <p:ph type="title"/>
           </p:nvPr>
         </p:nvSpPr>
-        <p:spPr>
-          <a:xfrm>
-            <a:off x="606478" y="386930"/>
-            <a:ext cx="6927525" cy="1188950"/>
-          </a:xfrm>
-        </p:spPr>
+        <p:spPr/>
         <p:txBody>
           <a:bodyPr anchor="b">
             <a:normAutofit/>
@@ -11757,236 +11692,12 @@
           </a:p>
         </p:txBody>
       </p:sp>
-      <p:grpSp>
-        <p:nvGrpSpPr>
-          <p:cNvPr id="2059" name="Group 2058">
+      <p:sp>
+        <p:nvSpPr>
+          <p:cNvPr id="6" name="Text Placeholder 5">
             <a:extLst>
               <a:ext uri="{FF2B5EF4-FFF2-40B4-BE49-F238E27FC236}">
-                <a16:creationId xmlns:a16="http://schemas.microsoft.com/office/drawing/2014/main" id="{4439EE9D-8E0B-610A-F85E-D481F9E9EA5E}"/>
-              </a:ext>
-              <a:ext uri="{C183D7F6-B498-43B3-948B-1728B52AA6E4}">
-                <adec:decorative xmlns:adec="http://schemas.microsoft.com/office/drawing/2017/decorative" val="1"/>
-              </a:ext>
-            </a:extLst>
-          </p:cNvPr>
-          <p:cNvGrpSpPr>
-            <a:grpSpLocks noGrp="1" noUngrp="1" noRot="1" noChangeAspect="1" noMove="1" noResize="1"/>
-          </p:cNvGrpSpPr>
-          <p:nvPr>
-            <p:extLst>
-              <p:ext uri="{386F3935-93C4-4BCD-93E2-E3B085C9AB24}">
-                <p16:designElem xmlns:p16="http://schemas.microsoft.com/office/powerpoint/2015/main" val="1"/>
-              </p:ext>
-            </p:extLst>
-          </p:nvPr>
-        </p:nvGrpSpPr>
-        <p:grpSpPr>
-          <a:xfrm>
-            <a:off x="-1" y="1998368"/>
-            <a:ext cx="8771274" cy="782176"/>
-            <a:chOff x="-2" y="1998368"/>
-            <a:chExt cx="11695083" cy="782176"/>
-          </a:xfrm>
-        </p:grpSpPr>
-        <p:sp>
-          <p:nvSpPr>
-            <p:cNvPr id="2060" name="Rectangle 2059">
-              <a:extLst>
-                <a:ext uri="{FF2B5EF4-FFF2-40B4-BE49-F238E27FC236}">
-                  <a16:creationId xmlns:a16="http://schemas.microsoft.com/office/drawing/2014/main" id="{1CA8A5FA-28B6-8A62-8433-FAE860EEE5FD}"/>
-                </a:ext>
-                <a:ext uri="{C183D7F6-B498-43B3-948B-1728B52AA6E4}">
-                  <adec:decorative xmlns:adec="http://schemas.microsoft.com/office/drawing/2017/decorative" val="1"/>
-                </a:ext>
-              </a:extLst>
-            </p:cNvPr>
-            <p:cNvSpPr/>
-            <p:nvPr>
-              <p:extLst>
-                <p:ext uri="{386F3935-93C4-4BCD-93E2-E3B085C9AB24}">
-                  <p16:designElem xmlns:p16="http://schemas.microsoft.com/office/powerpoint/2015/main" val="1"/>
-                </p:ext>
-              </p:extLst>
-            </p:nvPr>
-          </p:nvSpPr>
-          <p:spPr>
-            <a:xfrm rot="5400000">
-              <a:off x="11228040" y="2313027"/>
-              <a:ext cx="781700" cy="152382"/>
-            </a:xfrm>
-            <a:prstGeom prst="rect">
-              <a:avLst/>
-            </a:prstGeom>
-            <a:solidFill>
-              <a:schemeClr val="accent4"/>
-            </a:solidFill>
-            <a:ln>
-              <a:noFill/>
-            </a:ln>
-          </p:spPr>
-          <p:style>
-            <a:lnRef idx="2">
-              <a:schemeClr val="accent1">
-                <a:shade val="50000"/>
-              </a:schemeClr>
-            </a:lnRef>
-            <a:fillRef idx="1">
-              <a:schemeClr val="accent1"/>
-            </a:fillRef>
-            <a:effectRef idx="0">
-              <a:schemeClr val="accent1"/>
-            </a:effectRef>
-            <a:fontRef idx="minor">
-              <a:schemeClr val="lt1"/>
-            </a:fontRef>
-          </p:style>
-          <p:txBody>
-            <a:bodyPr rtlCol="0" anchor="ctr"/>
-            <a:lstStyle/>
-            <a:p>
-              <a:pPr algn="ctr"/>
-              <a:endParaRPr lang="en-US"/>
-            </a:p>
-          </p:txBody>
-        </p:sp>
-        <p:sp>
-          <p:nvSpPr>
-            <p:cNvPr id="2061" name="Rectangle 2060">
-              <a:extLst>
-                <a:ext uri="{FF2B5EF4-FFF2-40B4-BE49-F238E27FC236}">
-                  <a16:creationId xmlns:a16="http://schemas.microsoft.com/office/drawing/2014/main" id="{242DCB8D-5B8C-5DD2-9693-48A76CBDC303}"/>
-                </a:ext>
-                <a:ext uri="{C183D7F6-B498-43B3-948B-1728B52AA6E4}">
-                  <adec:decorative xmlns:adec="http://schemas.microsoft.com/office/drawing/2017/decorative" val="1"/>
-                </a:ext>
-              </a:extLst>
-            </p:cNvPr>
-            <p:cNvSpPr/>
-            <p:nvPr>
-              <p:extLst>
-                <p:ext uri="{386F3935-93C4-4BCD-93E2-E3B085C9AB24}">
-                  <p16:designElem xmlns:p16="http://schemas.microsoft.com/office/powerpoint/2015/main" val="1"/>
-                </p:ext>
-              </p:extLst>
-            </p:nvPr>
-          </p:nvSpPr>
-          <p:spPr>
-            <a:xfrm flipH="1" flipV="1">
-              <a:off x="-2" y="1998845"/>
-              <a:ext cx="11454595" cy="781699"/>
-            </a:xfrm>
-            <a:prstGeom prst="rect">
-              <a:avLst/>
-            </a:prstGeom>
-            <a:solidFill>
-              <a:schemeClr val="accent4"/>
-            </a:solidFill>
-            <a:ln>
-              <a:noFill/>
-            </a:ln>
-          </p:spPr>
-          <p:style>
-            <a:lnRef idx="2">
-              <a:schemeClr val="accent1">
-                <a:shade val="50000"/>
-              </a:schemeClr>
-            </a:lnRef>
-            <a:fillRef idx="1">
-              <a:schemeClr val="accent1"/>
-            </a:fillRef>
-            <a:effectRef idx="0">
-              <a:schemeClr val="accent1"/>
-            </a:effectRef>
-            <a:fontRef idx="minor">
-              <a:schemeClr val="lt1"/>
-            </a:fontRef>
-          </p:style>
-          <p:txBody>
-            <a:bodyPr rtlCol="0" anchor="ctr"/>
-            <a:lstStyle/>
-            <a:p>
-              <a:pPr algn="ctr"/>
-              <a:endParaRPr lang="en-US"/>
-            </a:p>
-          </p:txBody>
-        </p:sp>
-      </p:grpSp>
-      <p:sp>
-        <p:nvSpPr>
-          <p:cNvPr id="2063" name="Rectangle 2062">
-            <a:extLst>
-              <a:ext uri="{FF2B5EF4-FFF2-40B4-BE49-F238E27FC236}">
-                <a16:creationId xmlns:a16="http://schemas.microsoft.com/office/drawing/2014/main" id="{81A2D4CE-C62A-A4F7-D31C-6F4AB1C37300}"/>
-              </a:ext>
-              <a:ext uri="{C183D7F6-B498-43B3-948B-1728B52AA6E4}">
-                <adec:decorative xmlns:adec="http://schemas.microsoft.com/office/drawing/2017/decorative" val="1"/>
-              </a:ext>
-            </a:extLst>
-          </p:cNvPr>
-          <p:cNvSpPr>
-            <a:spLocks noGrp="1" noRot="1" noChangeAspect="1" noMove="1" noResize="1" noEditPoints="1" noAdjustHandles="1" noChangeArrowheads="1" noChangeShapeType="1" noTextEdit="1"/>
-          </p:cNvSpPr>
-          <p:nvPr>
-            <p:extLst>
-              <p:ext uri="{386F3935-93C4-4BCD-93E2-E3B085C9AB24}">
-                <p16:designElem xmlns:p16="http://schemas.microsoft.com/office/powerpoint/2015/main" val="1"/>
-              </p:ext>
-            </p:extLst>
-          </p:nvPr>
-        </p:nvSpPr>
-        <p:spPr>
-          <a:xfrm>
-            <a:off x="0" y="2203079"/>
-            <a:ext cx="8537521" cy="4147845"/>
-          </a:xfrm>
-          <a:prstGeom prst="rect">
-            <a:avLst/>
-          </a:prstGeom>
-          <a:solidFill>
-            <a:schemeClr val="bg1"/>
-          </a:solidFill>
-          <a:ln>
-            <a:noFill/>
-          </a:ln>
-          <a:effectLst>
-            <a:outerShdw blurRad="139700" dist="127000" dir="5400000" algn="t" rotWithShape="0">
-              <a:prstClr val="black">
-                <a:alpha val="15000"/>
-              </a:prstClr>
-            </a:outerShdw>
-          </a:effectLst>
-        </p:spPr>
-        <p:style>
-          <a:lnRef idx="2">
-            <a:schemeClr val="accent1">
-              <a:shade val="50000"/>
-            </a:schemeClr>
-          </a:lnRef>
-          <a:fillRef idx="1">
-            <a:schemeClr val="accent1"/>
-          </a:fillRef>
-          <a:effectRef idx="0">
-            <a:schemeClr val="accent1"/>
-          </a:effectRef>
-          <a:fontRef idx="minor">
-            <a:schemeClr val="lt1"/>
-          </a:fontRef>
-        </p:style>
-        <p:txBody>
-          <a:bodyPr rtlCol="0" anchor="ctr"/>
-          <a:lstStyle/>
-          <a:p>
-            <a:pPr algn="ctr"/>
-            <a:endParaRPr lang="en-US"/>
-          </a:p>
-        </p:txBody>
-      </p:sp>
-      <p:sp>
-        <p:nvSpPr>
-          <p:cNvPr id="4" name="Inhaltsplatzhalter 3">
-            <a:extLst>
-              <a:ext uri="{FF2B5EF4-FFF2-40B4-BE49-F238E27FC236}">
-                <a16:creationId xmlns:a16="http://schemas.microsoft.com/office/drawing/2014/main" id="{20CD47EE-ED76-A6AA-34BF-511933842ED2}"/>
+                <a16:creationId xmlns:a16="http://schemas.microsoft.com/office/drawing/2014/main" id="{68865A8F-F0F0-704E-9665-D65342E3A085}"/>
               </a:ext>
             </a:extLst>
           </p:cNvPr>
@@ -11994,61 +11705,75 @@
             <a:spLocks noGrp="1"/>
           </p:cNvSpPr>
           <p:nvPr>
-            <p:ph idx="1"/>
+            <p:ph type="body" idx="1"/>
           </p:nvPr>
         </p:nvSpPr>
-        <p:spPr>
-          <a:xfrm>
-            <a:off x="595245" y="2599509"/>
-            <a:ext cx="7607751" cy="3435531"/>
-          </a:xfrm>
-        </p:spPr>
+        <p:spPr/>
         <p:txBody>
-          <a:bodyPr anchor="ctr">
-            <a:normAutofit/>
-          </a:bodyPr>
+          <a:bodyPr/>
           <a:lstStyle/>
           <a:p>
             <a:r>
-              <a:rPr lang="de-CH" sz="2100" dirty="0" err="1"/>
-              <a:t>Asdf</a:t>
-            </a:r>
-            <a:endParaRPr lang="de-CH" sz="2100" dirty="0"/>
-          </a:p>
-          <a:p>
-            <a:r>
-              <a:rPr lang="de-CH" sz="2100" dirty="0" err="1"/>
-              <a:t>Asdf</a:t>
-            </a:r>
-            <a:endParaRPr lang="de-CH" sz="2100" dirty="0"/>
-          </a:p>
-          <a:p>
-            <a:r>
-              <a:rPr lang="de-CH" sz="2100" dirty="0" err="1"/>
-              <a:t>Asdf</a:t>
-            </a:r>
-            <a:endParaRPr lang="de-CH" sz="2100" dirty="0"/>
-          </a:p>
-          <a:p>
-            <a:r>
-              <a:rPr lang="de-CH" sz="2100" dirty="0" err="1"/>
-              <a:t>Asdff</a:t>
-            </a:r>
-            <a:endParaRPr lang="de-CH" sz="2100" dirty="0"/>
-          </a:p>
-          <a:p>
-            <a:r>
-              <a:rPr lang="de-CH" sz="2100" dirty="0" err="1"/>
-              <a:t>Asdf</a:t>
-            </a:r>
-            <a:endParaRPr lang="de-CH" sz="2100" dirty="0"/>
-          </a:p>
-          <a:p>
-            <a:r>
-              <a:rPr lang="de-CH" sz="2100" dirty="0" err="1"/>
-              <a:t>adsf</a:t>
-            </a:r>
-            <a:endParaRPr lang="de-CH" sz="2100" dirty="0"/>
+              <a:rPr lang="en-CH" dirty="0"/>
+              <a:t>Pro</a:t>
+            </a:r>
+          </a:p>
+        </p:txBody>
+      </p:sp>
+      <p:sp>
+        <p:nvSpPr>
+          <p:cNvPr id="7" name="Text Placeholder 6">
+            <a:extLst>
+              <a:ext uri="{FF2B5EF4-FFF2-40B4-BE49-F238E27FC236}">
+                <a16:creationId xmlns:a16="http://schemas.microsoft.com/office/drawing/2014/main" id="{3DAEC164-A65A-F030-E1D6-617BB6AD1BC4}"/>
+              </a:ext>
+            </a:extLst>
+          </p:cNvPr>
+          <p:cNvSpPr>
+            <a:spLocks noGrp="1"/>
+          </p:cNvSpPr>
+          <p:nvPr>
+            <p:ph type="body" sz="quarter" idx="3"/>
+          </p:nvPr>
+        </p:nvSpPr>
+        <p:spPr/>
+        <p:txBody>
+          <a:bodyPr/>
+          <a:lstStyle/>
+          <a:p>
+            <a:r>
+              <a:rPr lang="en-CH" dirty="0"/>
+              <a:t>Contra</a:t>
+            </a:r>
+          </a:p>
+        </p:txBody>
+      </p:sp>
+      <p:sp>
+        <p:nvSpPr>
+          <p:cNvPr id="8" name="Content Placeholder 7">
+            <a:extLst>
+              <a:ext uri="{FF2B5EF4-FFF2-40B4-BE49-F238E27FC236}">
+                <a16:creationId xmlns:a16="http://schemas.microsoft.com/office/drawing/2014/main" id="{9D60C277-CA40-15A3-9478-F60F666B1FA6}"/>
+              </a:ext>
+            </a:extLst>
+          </p:cNvPr>
+          <p:cNvSpPr>
+            <a:spLocks noGrp="1"/>
+          </p:cNvSpPr>
+          <p:nvPr>
+            <p:ph sz="quarter" idx="4"/>
+          </p:nvPr>
+        </p:nvSpPr>
+        <p:spPr/>
+        <p:txBody>
+          <a:bodyPr/>
+          <a:lstStyle/>
+          <a:p>
+            <a:r>
+              <a:rPr lang="en-CH"/>
+              <a:t>Keine Features wie map, filter in der nativen Syntax macht den Code langatmig</a:t>
+            </a:r>
+            <a:endParaRPr lang="en-CH" dirty="0"/>
           </a:p>
         </p:txBody>
       </p:sp>
@@ -12099,6 +11824,191 @@
           </a:extLst>
         </p:spPr>
       </p:pic>
+      <p:sp>
+        <p:nvSpPr>
+          <p:cNvPr id="9" name="Content Placeholder 7">
+            <a:extLst>
+              <a:ext uri="{FF2B5EF4-FFF2-40B4-BE49-F238E27FC236}">
+                <a16:creationId xmlns:a16="http://schemas.microsoft.com/office/drawing/2014/main" id="{E5FCBCC9-8DB1-9133-24B1-C4870492C0A7}"/>
+              </a:ext>
+            </a:extLst>
+          </p:cNvPr>
+          <p:cNvSpPr txBox="1">
+            <a:spLocks/>
+          </p:cNvSpPr>
+          <p:nvPr/>
+        </p:nvSpPr>
+        <p:spPr>
+          <a:xfrm>
+            <a:off x="455613" y="2292350"/>
+            <a:ext cx="4041775" cy="3951288"/>
+          </a:xfrm>
+          <a:prstGeom prst="rect">
+            <a:avLst/>
+          </a:prstGeom>
+        </p:spPr>
+        <p:txBody>
+          <a:bodyPr vert="horz" lIns="91440" tIns="45720" rIns="91440" bIns="45720" rtlCol="0">
+            <a:normAutofit/>
+          </a:bodyPr>
+          <a:lstStyle>
+            <a:lvl1pPr marL="342900" indent="-342900" algn="l" defTabSz="457200" rtl="0" eaLnBrk="1" latinLnBrk="0" hangingPunct="1">
+              <a:spcBef>
+                <a:spcPct val="20000"/>
+              </a:spcBef>
+              <a:buFont typeface="Arial"/>
+              <a:buChar char="•"/>
+              <a:defRPr sz="2400" kern="1200">
+                <a:solidFill>
+                  <a:schemeClr val="tx1"/>
+                </a:solidFill>
+                <a:latin typeface="+mn-lt"/>
+                <a:ea typeface="+mn-ea"/>
+                <a:cs typeface="+mn-cs"/>
+              </a:defRPr>
+            </a:lvl1pPr>
+            <a:lvl2pPr marL="742950" indent="-285750" algn="l" defTabSz="457200" rtl="0" eaLnBrk="1" latinLnBrk="0" hangingPunct="1">
+              <a:spcBef>
+                <a:spcPct val="20000"/>
+              </a:spcBef>
+              <a:buFont typeface="Arial"/>
+              <a:buChar char="–"/>
+              <a:defRPr sz="2000" kern="1200">
+                <a:solidFill>
+                  <a:schemeClr val="tx1"/>
+                </a:solidFill>
+                <a:latin typeface="+mn-lt"/>
+                <a:ea typeface="+mn-ea"/>
+                <a:cs typeface="+mn-cs"/>
+              </a:defRPr>
+            </a:lvl2pPr>
+            <a:lvl3pPr marL="1143000" indent="-228600" algn="l" defTabSz="457200" rtl="0" eaLnBrk="1" latinLnBrk="0" hangingPunct="1">
+              <a:spcBef>
+                <a:spcPct val="20000"/>
+              </a:spcBef>
+              <a:buFont typeface="Arial"/>
+              <a:buChar char="•"/>
+              <a:defRPr sz="1800" kern="1200">
+                <a:solidFill>
+                  <a:schemeClr val="tx1"/>
+                </a:solidFill>
+                <a:latin typeface="+mn-lt"/>
+                <a:ea typeface="+mn-ea"/>
+                <a:cs typeface="+mn-cs"/>
+              </a:defRPr>
+            </a:lvl3pPr>
+            <a:lvl4pPr marL="1600200" indent="-228600" algn="l" defTabSz="457200" rtl="0" eaLnBrk="1" latinLnBrk="0" hangingPunct="1">
+              <a:spcBef>
+                <a:spcPct val="20000"/>
+              </a:spcBef>
+              <a:buFont typeface="Arial"/>
+              <a:buChar char="–"/>
+              <a:defRPr sz="1600" kern="1200">
+                <a:solidFill>
+                  <a:schemeClr val="tx1"/>
+                </a:solidFill>
+                <a:latin typeface="+mn-lt"/>
+                <a:ea typeface="+mn-ea"/>
+                <a:cs typeface="+mn-cs"/>
+              </a:defRPr>
+            </a:lvl4pPr>
+            <a:lvl5pPr marL="2057400" indent="-228600" algn="l" defTabSz="457200" rtl="0" eaLnBrk="1" latinLnBrk="0" hangingPunct="1">
+              <a:spcBef>
+                <a:spcPct val="20000"/>
+              </a:spcBef>
+              <a:buFont typeface="Arial"/>
+              <a:buChar char="»"/>
+              <a:defRPr sz="1600" kern="1200">
+                <a:solidFill>
+                  <a:schemeClr val="tx1"/>
+                </a:solidFill>
+                <a:latin typeface="+mn-lt"/>
+                <a:ea typeface="+mn-ea"/>
+                <a:cs typeface="+mn-cs"/>
+              </a:defRPr>
+            </a:lvl5pPr>
+            <a:lvl6pPr marL="2514600" indent="-228600" algn="l" defTabSz="457200" rtl="0" eaLnBrk="1" latinLnBrk="0" hangingPunct="1">
+              <a:spcBef>
+                <a:spcPct val="20000"/>
+              </a:spcBef>
+              <a:buFont typeface="Arial"/>
+              <a:buChar char="•"/>
+              <a:defRPr sz="1600" kern="1200">
+                <a:solidFill>
+                  <a:schemeClr val="tx1"/>
+                </a:solidFill>
+                <a:latin typeface="+mn-lt"/>
+                <a:ea typeface="+mn-ea"/>
+                <a:cs typeface="+mn-cs"/>
+              </a:defRPr>
+            </a:lvl6pPr>
+            <a:lvl7pPr marL="2971800" indent="-228600" algn="l" defTabSz="457200" rtl="0" eaLnBrk="1" latinLnBrk="0" hangingPunct="1">
+              <a:spcBef>
+                <a:spcPct val="20000"/>
+              </a:spcBef>
+              <a:buFont typeface="Arial"/>
+              <a:buChar char="•"/>
+              <a:defRPr sz="1600" kern="1200">
+                <a:solidFill>
+                  <a:schemeClr val="tx1"/>
+                </a:solidFill>
+                <a:latin typeface="+mn-lt"/>
+                <a:ea typeface="+mn-ea"/>
+                <a:cs typeface="+mn-cs"/>
+              </a:defRPr>
+            </a:lvl7pPr>
+            <a:lvl8pPr marL="3429000" indent="-228600" algn="l" defTabSz="457200" rtl="0" eaLnBrk="1" latinLnBrk="0" hangingPunct="1">
+              <a:spcBef>
+                <a:spcPct val="20000"/>
+              </a:spcBef>
+              <a:buFont typeface="Arial"/>
+              <a:buChar char="•"/>
+              <a:defRPr sz="1600" kern="1200">
+                <a:solidFill>
+                  <a:schemeClr val="tx1"/>
+                </a:solidFill>
+                <a:latin typeface="+mn-lt"/>
+                <a:ea typeface="+mn-ea"/>
+                <a:cs typeface="+mn-cs"/>
+              </a:defRPr>
+            </a:lvl8pPr>
+            <a:lvl9pPr marL="3886200" indent="-228600" algn="l" defTabSz="457200" rtl="0" eaLnBrk="1" latinLnBrk="0" hangingPunct="1">
+              <a:spcBef>
+                <a:spcPct val="20000"/>
+              </a:spcBef>
+              <a:buFont typeface="Arial"/>
+              <a:buChar char="•"/>
+              <a:defRPr sz="1600" kern="1200">
+                <a:solidFill>
+                  <a:schemeClr val="tx1"/>
+                </a:solidFill>
+                <a:latin typeface="+mn-lt"/>
+                <a:ea typeface="+mn-ea"/>
+                <a:cs typeface="+mn-cs"/>
+              </a:defRPr>
+            </a:lvl9pPr>
+          </a:lstStyle>
+          <a:p>
+            <a:r>
+              <a:rPr lang="de-CH" dirty="0"/>
+              <a:t>Minimalismus und Schnelligkeit</a:t>
+            </a:r>
+          </a:p>
+          <a:p>
+            <a:r>
+              <a:rPr lang="de-CH" dirty="0" err="1"/>
+              <a:t>Concurrency</a:t>
+            </a:r>
+            <a:r>
+              <a:rPr lang="de-CH" dirty="0"/>
+              <a:t> leicht gemacht</a:t>
+            </a:r>
+          </a:p>
+          <a:p>
+            <a:endParaRPr lang="en-CH" dirty="0"/>
+          </a:p>
+        </p:txBody>
+      </p:sp>
     </p:spTree>
     <p:extLst>
       <p:ext uri="{BB962C8B-B14F-4D97-AF65-F5344CB8AC3E}">
@@ -12561,16 +12471,6 @@
             <a:r>
               <a:rPr lang="de-CH" sz="1900" dirty="0"/>
               <a:t>Starke Standardbibliothek</a:t>
-            </a:r>
-          </a:p>
-          <a:p>
-            <a:pPr>
-              <a:buFont typeface="Wingdings" panose="05000000000000000000" pitchFamily="2" charset="2"/>
-              <a:buChar char="Ø"/>
-            </a:pPr>
-            <a:r>
-              <a:rPr lang="de-CH" sz="1900" dirty="0"/>
-              <a:t>Klare Struktur für Teams</a:t>
             </a:r>
           </a:p>
         </p:txBody>
@@ -13523,13 +13423,13 @@
           <p:nvPr/>
         </p:nvPicPr>
         <p:blipFill>
-          <a:blip r:embed="rId3">
+          <a:blip>
             <a:extLst>
               <a:ext uri="{28A0092B-C50C-407E-A947-70E740481C1C}">
                 <a14:useLocalDpi xmlns:a14="http://schemas.microsoft.com/office/drawing/2010/main" val="0"/>
               </a:ext>
               <a:ext uri="{96DAC541-7B7A-43D3-8B79-37D633B846F1}">
-                <asvg:svgBlip xmlns:asvg="http://schemas.microsoft.com/office/drawing/2016/SVG/main" r:embed="rId4"/>
+                <asvg:svgBlip xmlns:asvg="http://schemas.microsoft.com/office/drawing/2016/SVG/main" r:embed="rId3"/>
               </a:ext>
             </a:extLst>
           </a:blip>
@@ -17688,4 +17588,10 @@
     </a:ext>
   </a:extLst>
 </a:theme>
+</file>
+
+<file path=docMetadata/LabelInfo.xml><?xml version="1.0" encoding="utf-8"?>
+<clbl:labelList xmlns:clbl="http://schemas.microsoft.com/office/2020/mipLabelMetadata">
+  <clbl:label id="{2e1fccfb-80ca-4fe1-a574-1516544edb53}" enabled="1" method="Standard" siteId="{364e5b87-c1c7-420d-9bee-c35d19b557a1}" contentBits="0" removed="0"/>
+</clbl:labelList>
 </file>
--- a/presentation/GO-Präsi.pptx
+++ b/presentation/GO-Präsi.pptx
@@ -2481,10 +2481,10 @@
         <a:lstStyle/>
         <a:p>
           <a:r>
-            <a:rPr lang="de-CH"/>
+            <a:rPr lang="de-CH" dirty="0"/>
             <a:t>Typ wird über Struktur / Methoden erkannt</a:t>
           </a:r>
-          <a:endParaRPr lang="en-US"/>
+          <a:endParaRPr lang="en-US" dirty="0"/>
         </a:p>
       </dgm:t>
     </dgm:pt>
@@ -3118,9 +3118,9 @@
     <dgm:cxn modelId="{AE86C032-8682-4BF1-BB68-6ADD0BB41A54}" type="presOf" srcId="{1AB3C50A-FCBF-4AEF-8D4D-858CFA132352}" destId="{983E5E44-A04E-4C45-A005-9093A3A3B4CB}" srcOrd="0" destOrd="0" presId="urn:microsoft.com/office/officeart/2008/layout/LinedList"/>
     <dgm:cxn modelId="{9F6C3140-939F-4D3D-B0B7-B516E250A006}" type="presOf" srcId="{34C133A9-4E63-474C-93DD-32EDE76F4D16}" destId="{E478383E-DAE8-4801-A304-9A3B4EF375BF}" srcOrd="0" destOrd="0" presId="urn:microsoft.com/office/officeart/2008/layout/LinedList"/>
     <dgm:cxn modelId="{88749E44-69B6-44A7-84E1-1FCE1F2B1FA3}" srcId="{A53334CF-783B-42FC-B557-FFF66E2E05D2}" destId="{CC8160C3-CBEA-4B2C-A4FC-ADB710CB47EF}" srcOrd="1" destOrd="0" parTransId="{6C195E6E-746B-4A1A-B6A2-0D8E1F3C96F3}" sibTransId="{03BB51D0-D42A-486F-91B9-A792572A8A53}"/>
-    <dgm:cxn modelId="{FC356D67-8C98-4512-9C59-5C82B1CE4E88}" srcId="{0FEA5DDF-8CA7-4CF6-8462-91985CBA858E}" destId="{00FCB9CF-8E88-4656-B329-0EF4CD576DB1}" srcOrd="1" destOrd="0" parTransId="{9CC6512F-47BA-481F-A700-1714B90A213B}" sibTransId="{2426879B-88A3-42A4-8EDF-1BA13727DBB9}"/>
     <dgm:cxn modelId="{73FD3553-7C9A-4430-B54F-6EEDA45EBDF9}" type="presOf" srcId="{CC8160C3-CBEA-4B2C-A4FC-ADB710CB47EF}" destId="{53FC0197-4AFD-407F-8768-2842A6B8D732}" srcOrd="0" destOrd="0" presId="urn:microsoft.com/office/officeart/2008/layout/LinedList"/>
     <dgm:cxn modelId="{F43D4F56-65EA-49BB-849E-6F31E2BDE7F9}" type="presOf" srcId="{6D31FA9B-5825-44D6-A7B7-A7E13CF76391}" destId="{9A6315B2-11EA-415B-AEF6-96A923313A4F}" srcOrd="0" destOrd="0" presId="urn:microsoft.com/office/officeart/2008/layout/LinedList"/>
+    <dgm:cxn modelId="{FC356D67-8C98-4512-9C59-5C82B1CE4E88}" srcId="{0FEA5DDF-8CA7-4CF6-8462-91985CBA858E}" destId="{00FCB9CF-8E88-4656-B329-0EF4CD576DB1}" srcOrd="1" destOrd="0" parTransId="{9CC6512F-47BA-481F-A700-1714B90A213B}" sibTransId="{2426879B-88A3-42A4-8EDF-1BA13727DBB9}"/>
     <dgm:cxn modelId="{C5292181-7D3D-42D3-9D04-BE4E6F830736}" srcId="{0FEA5DDF-8CA7-4CF6-8462-91985CBA858E}" destId="{34C133A9-4E63-474C-93DD-32EDE76F4D16}" srcOrd="0" destOrd="0" parTransId="{1997A60F-C4B1-47EF-89EF-A6A6777F3A3D}" sibTransId="{4B2380FF-F43D-4B58-9915-DF12CA02B093}"/>
     <dgm:cxn modelId="{71545983-048A-44B1-B54D-4D6E803E9FD3}" srcId="{94581A3B-ABA8-42E0-9F65-99AE66091771}" destId="{0FEA5DDF-8CA7-4CF6-8462-91985CBA858E}" srcOrd="0" destOrd="0" parTransId="{3A254884-79B9-4FED-893D-1A4FCEBD01A6}" sibTransId="{75CDBFEE-6D15-45F7-8507-73DA1B0A12EC}"/>
     <dgm:cxn modelId="{C0EEDA90-DFDB-4338-B792-6668EFAB71DD}" type="presOf" srcId="{424F5155-6842-428C-8550-8AF1A35C714E}" destId="{2DEF67C1-3561-45C4-A1E3-82FE8B53EBE0}" srcOrd="0" destOrd="0" presId="urn:microsoft.com/office/officeart/2008/layout/LinedList"/>
@@ -4269,11 +4269,11 @@
     <dgm:cxn modelId="{6E0EDF32-D016-4BF3-812B-5934D4D47E86}" srcId="{51ADB69E-CEEF-44BF-B03A-EB79CD9E8062}" destId="{BC4AB904-5D13-426C-89D9-40D36AE51705}" srcOrd="4" destOrd="0" parTransId="{280B05C2-E5AF-456A-BE28-4991504969A6}" sibTransId="{49D1F00D-37F1-439F-ADFF-6F9663F5E7E7}"/>
     <dgm:cxn modelId="{80845E34-250A-4AB4-BE3E-D84544F5203D}" type="presOf" srcId="{44DC462A-0AC9-4248-A8AA-10B02822AAED}" destId="{4F178F7E-E77E-4653-9CB2-309E78EB0CD7}" srcOrd="0" destOrd="0" presId="urn:microsoft.com/office/officeart/2008/layout/LinedList"/>
     <dgm:cxn modelId="{5C1C6D40-C7E6-40C5-AA08-2545D93119F2}" type="presOf" srcId="{F5C01579-7F57-4979-A7F0-69FC1B3A98FC}" destId="{55A47832-5E60-409E-927E-D470B0ACEFC1}" srcOrd="0" destOrd="0" presId="urn:microsoft.com/office/officeart/2008/layout/LinedList"/>
+    <dgm:cxn modelId="{4B4B9D53-D3B2-49CA-835A-749A3CC976F2}" type="presOf" srcId="{32600481-437B-4F55-AD2F-74639178C1B2}" destId="{1483427B-D1AE-476D-B17F-92275D42378B}" srcOrd="0" destOrd="0" presId="urn:microsoft.com/office/officeart/2008/layout/LinedList"/>
+    <dgm:cxn modelId="{AE15B853-8753-40C4-8D0C-0FD4B2ECA1C9}" srcId="{51ADB69E-CEEF-44BF-B03A-EB79CD9E8062}" destId="{BC531E73-28AB-48EC-A683-6689A3A9F2E5}" srcOrd="3" destOrd="0" parTransId="{58229E09-91CB-4695-B79F-40352661C885}" sibTransId="{ABC83B8E-F8CA-416C-AD4F-302D0C50E9E1}"/>
     <dgm:cxn modelId="{40C6FC62-E4DD-4E15-A468-AF1D42FD8E4D}" srcId="{51ADB69E-CEEF-44BF-B03A-EB79CD9E8062}" destId="{2FD59555-E9ED-4235-8884-22DE78453B97}" srcOrd="2" destOrd="0" parTransId="{CDB05BB7-CBF1-4A2B-ACFB-6E9AE7429FE2}" sibTransId="{351019C0-5EFD-4D89-905D-87785A34320C}"/>
     <dgm:cxn modelId="{2218B76A-0FDD-4388-B3EE-A23B117172D0}" type="presOf" srcId="{7CA9E791-5EAA-44E6-BF77-78B5E304431C}" destId="{711FA85E-2EA5-4AC4-AB5F-520E841BC4CF}" srcOrd="0" destOrd="0" presId="urn:microsoft.com/office/officeart/2008/layout/LinedList"/>
     <dgm:cxn modelId="{FBB1F26E-B37A-44BD-8F43-FED90C4ADC9D}" srcId="{51ADB69E-CEEF-44BF-B03A-EB79CD9E8062}" destId="{5567816E-A4CC-4260-B4D8-5B271B459497}" srcOrd="1" destOrd="0" parTransId="{61D58984-0199-4010-B407-C31DA36D102E}" sibTransId="{339B5629-E286-4296-8D70-05CC90E2A637}"/>
-    <dgm:cxn modelId="{4B4B9D53-D3B2-49CA-835A-749A3CC976F2}" type="presOf" srcId="{32600481-437B-4F55-AD2F-74639178C1B2}" destId="{1483427B-D1AE-476D-B17F-92275D42378B}" srcOrd="0" destOrd="0" presId="urn:microsoft.com/office/officeart/2008/layout/LinedList"/>
-    <dgm:cxn modelId="{AE15B853-8753-40C4-8D0C-0FD4B2ECA1C9}" srcId="{51ADB69E-CEEF-44BF-B03A-EB79CD9E8062}" destId="{BC531E73-28AB-48EC-A683-6689A3A9F2E5}" srcOrd="3" destOrd="0" parTransId="{58229E09-91CB-4695-B79F-40352661C885}" sibTransId="{ABC83B8E-F8CA-416C-AD4F-302D0C50E9E1}"/>
     <dgm:cxn modelId="{A83C7876-5493-426E-BE7D-603439AA657F}" type="presOf" srcId="{2FD59555-E9ED-4235-8884-22DE78453B97}" destId="{7EB087D0-006C-4F5A-981C-F7DEBC3A3B82}" srcOrd="0" destOrd="0" presId="urn:microsoft.com/office/officeart/2008/layout/LinedList"/>
     <dgm:cxn modelId="{75BC2A7A-6F7A-4AF3-AEAC-81E93D417B61}" srcId="{1F197BB0-DC43-462E-A2C0-15EF4FC38EDE}" destId="{51ADB69E-CEEF-44BF-B03A-EB79CD9E8062}" srcOrd="2" destOrd="0" parTransId="{59381924-B3E3-4C94-B1AF-92710EF8B717}" sibTransId="{7FFF01D8-DFA5-4FB3-86B1-9F93E448664D}"/>
     <dgm:cxn modelId="{C04A617B-3783-4CC0-B13B-78B74796C23F}" srcId="{B225895E-D4C5-4180-A1B7-0E99C9B8EB4F}" destId="{1B011FFA-D01F-4553-A34C-B812C48BF077}" srcOrd="3" destOrd="0" parTransId="{760CD6D8-8390-4F94-A776-9F9DEFF52FD6}" sibTransId="{01A5218A-3C5B-4A44-91EF-BA9AB4F839B7}"/>
@@ -4912,10 +4912,10 @@
             <a:buNone/>
           </a:pPr>
           <a:r>
-            <a:rPr lang="de-CH" sz="1500" kern="1200"/>
+            <a:rPr lang="de-CH" sz="1500" kern="1200" dirty="0"/>
             <a:t>Typ wird über Struktur / Methoden erkannt</a:t>
           </a:r>
-          <a:endParaRPr lang="en-US" sz="1500" kern="1200"/>
+          <a:endParaRPr lang="en-US" sz="1500" kern="1200" dirty="0"/>
         </a:p>
       </dsp:txBody>
       <dsp:txXfrm>
@@ -12728,7 +12728,7 @@
           <a:p>
             <a:fld id="{D9EF2C90-E8EE-43CD-8D96-4E8A72565517}" type="datetimeFigureOut">
               <a:rPr lang="de-CH" smtClean="0"/>
-              <a:t>18.05.2026</a:t>
+              <a:t>19.05.26</a:t>
             </a:fld>
             <a:endParaRPr lang="de-CH"/>
           </a:p>
@@ -12887,7 +12887,7 @@
           <a:p>
             <a:fld id="{62945742-DB6B-4CE6-B846-92E01489719F}" type="slidenum">
               <a:rPr lang="de-CH" smtClean="0"/>
-              <a:t>‹Nr.›</a:t>
+              <a:t>‹#›</a:t>
             </a:fld>
             <a:endParaRPr lang="de-CH"/>
           </a:p>
@@ -13805,7 +13805,7 @@
           <a:p>
             <a:fld id="{5BCAD085-E8A6-8845-BD4E-CB4CCA059FC4}" type="datetimeFigureOut">
               <a:rPr lang="en-US" smtClean="0"/>
-              <a:t>5/18/2026</a:t>
+              <a:t>5/19/26</a:t>
             </a:fld>
             <a:endParaRPr lang="en-US"/>
           </a:p>
@@ -13847,7 +13847,7 @@
           <a:p>
             <a:fld id="{C1FF6DA9-008F-8B48-92A6-B652298478BF}" type="slidenum">
               <a:rPr lang="en-US" smtClean="0"/>
-              <a:t>‹Nr.›</a:t>
+              <a:t>‹#›</a:t>
             </a:fld>
             <a:endParaRPr lang="en-US"/>
           </a:p>
@@ -13973,7 +13973,7 @@
           <a:p>
             <a:fld id="{5BCAD085-E8A6-8845-BD4E-CB4CCA059FC4}" type="datetimeFigureOut">
               <a:rPr lang="en-US" smtClean="0"/>
-              <a:t>5/18/2026</a:t>
+              <a:t>5/19/26</a:t>
             </a:fld>
             <a:endParaRPr lang="en-US"/>
           </a:p>
@@ -14015,7 +14015,7 @@
           <a:p>
             <a:fld id="{C1FF6DA9-008F-8B48-92A6-B652298478BF}" type="slidenum">
               <a:rPr lang="en-US" smtClean="0"/>
-              <a:t>‹Nr.›</a:t>
+              <a:t>‹#›</a:t>
             </a:fld>
             <a:endParaRPr lang="en-US"/>
           </a:p>
@@ -14151,7 +14151,7 @@
           <a:p>
             <a:fld id="{5BCAD085-E8A6-8845-BD4E-CB4CCA059FC4}" type="datetimeFigureOut">
               <a:rPr lang="en-US" smtClean="0"/>
-              <a:t>5/18/2026</a:t>
+              <a:t>5/19/26</a:t>
             </a:fld>
             <a:endParaRPr lang="en-US"/>
           </a:p>
@@ -14193,7 +14193,7 @@
           <a:p>
             <a:fld id="{C1FF6DA9-008F-8B48-92A6-B652298478BF}" type="slidenum">
               <a:rPr lang="en-US" smtClean="0"/>
-              <a:t>‹Nr.›</a:t>
+              <a:t>‹#›</a:t>
             </a:fld>
             <a:endParaRPr lang="en-US"/>
           </a:p>
@@ -14319,7 +14319,7 @@
           <a:p>
             <a:fld id="{5BCAD085-E8A6-8845-BD4E-CB4CCA059FC4}" type="datetimeFigureOut">
               <a:rPr lang="en-US" smtClean="0"/>
-              <a:t>5/18/2026</a:t>
+              <a:t>5/19/26</a:t>
             </a:fld>
             <a:endParaRPr lang="en-US"/>
           </a:p>
@@ -14361,7 +14361,7 @@
           <a:p>
             <a:fld id="{C1FF6DA9-008F-8B48-92A6-B652298478BF}" type="slidenum">
               <a:rPr lang="en-US" smtClean="0"/>
-              <a:t>‹Nr.›</a:t>
+              <a:t>‹#›</a:t>
             </a:fld>
             <a:endParaRPr lang="en-US"/>
           </a:p>
@@ -14564,7 +14564,7 @@
           <a:p>
             <a:fld id="{5BCAD085-E8A6-8845-BD4E-CB4CCA059FC4}" type="datetimeFigureOut">
               <a:rPr lang="en-US" smtClean="0"/>
-              <a:t>5/18/2026</a:t>
+              <a:t>5/19/26</a:t>
             </a:fld>
             <a:endParaRPr lang="en-US"/>
           </a:p>
@@ -14606,7 +14606,7 @@
           <a:p>
             <a:fld id="{C1FF6DA9-008F-8B48-92A6-B652298478BF}" type="slidenum">
               <a:rPr lang="en-US" smtClean="0"/>
-              <a:t>‹Nr.›</a:t>
+              <a:t>‹#›</a:t>
             </a:fld>
             <a:endParaRPr lang="en-US"/>
           </a:p>
@@ -14849,7 +14849,7 @@
           <a:p>
             <a:fld id="{5BCAD085-E8A6-8845-BD4E-CB4CCA059FC4}" type="datetimeFigureOut">
               <a:rPr lang="en-US" smtClean="0"/>
-              <a:t>5/18/2026</a:t>
+              <a:t>5/19/26</a:t>
             </a:fld>
             <a:endParaRPr lang="en-US"/>
           </a:p>
@@ -14891,7 +14891,7 @@
           <a:p>
             <a:fld id="{C1FF6DA9-008F-8B48-92A6-B652298478BF}" type="slidenum">
               <a:rPr lang="en-US" smtClean="0"/>
-              <a:t>‹Nr.›</a:t>
+              <a:t>‹#›</a:t>
             </a:fld>
             <a:endParaRPr lang="en-US"/>
           </a:p>
@@ -15268,7 +15268,7 @@
           <a:p>
             <a:fld id="{5BCAD085-E8A6-8845-BD4E-CB4CCA059FC4}" type="datetimeFigureOut">
               <a:rPr lang="en-US" smtClean="0"/>
-              <a:t>5/18/2026</a:t>
+              <a:t>5/19/26</a:t>
             </a:fld>
             <a:endParaRPr lang="en-US"/>
           </a:p>
@@ -15310,7 +15310,7 @@
           <a:p>
             <a:fld id="{C1FF6DA9-008F-8B48-92A6-B652298478BF}" type="slidenum">
               <a:rPr lang="en-US" smtClean="0"/>
-              <a:t>‹Nr.›</a:t>
+              <a:t>‹#›</a:t>
             </a:fld>
             <a:endParaRPr lang="en-US"/>
           </a:p>
@@ -15385,7 +15385,7 @@
           <a:p>
             <a:fld id="{5BCAD085-E8A6-8845-BD4E-CB4CCA059FC4}" type="datetimeFigureOut">
               <a:rPr lang="en-US" smtClean="0"/>
-              <a:t>5/18/2026</a:t>
+              <a:t>5/19/26</a:t>
             </a:fld>
             <a:endParaRPr lang="en-US"/>
           </a:p>
@@ -15427,7 +15427,7 @@
           <a:p>
             <a:fld id="{C1FF6DA9-008F-8B48-92A6-B652298478BF}" type="slidenum">
               <a:rPr lang="en-US" smtClean="0"/>
-              <a:t>‹Nr.›</a:t>
+              <a:t>‹#›</a:t>
             </a:fld>
             <a:endParaRPr lang="en-US"/>
           </a:p>
@@ -15480,7 +15480,7 @@
           <a:p>
             <a:fld id="{5BCAD085-E8A6-8845-BD4E-CB4CCA059FC4}" type="datetimeFigureOut">
               <a:rPr lang="en-US" smtClean="0"/>
-              <a:t>5/18/2026</a:t>
+              <a:t>5/19/26</a:t>
             </a:fld>
             <a:endParaRPr lang="en-US"/>
           </a:p>
@@ -15522,7 +15522,7 @@
           <a:p>
             <a:fld id="{C1FF6DA9-008F-8B48-92A6-B652298478BF}" type="slidenum">
               <a:rPr lang="en-US" smtClean="0"/>
-              <a:t>‹Nr.›</a:t>
+              <a:t>‹#›</a:t>
             </a:fld>
             <a:endParaRPr lang="en-US"/>
           </a:p>
@@ -15755,7 +15755,7 @@
           <a:p>
             <a:fld id="{5BCAD085-E8A6-8845-BD4E-CB4CCA059FC4}" type="datetimeFigureOut">
               <a:rPr lang="en-US" smtClean="0"/>
-              <a:t>5/18/2026</a:t>
+              <a:t>5/19/26</a:t>
             </a:fld>
             <a:endParaRPr lang="en-US"/>
           </a:p>
@@ -15797,7 +15797,7 @@
           <a:p>
             <a:fld id="{C1FF6DA9-008F-8B48-92A6-B652298478BF}" type="slidenum">
               <a:rPr lang="en-US" smtClean="0"/>
-              <a:t>‹Nr.›</a:t>
+              <a:t>‹#›</a:t>
             </a:fld>
             <a:endParaRPr lang="en-US"/>
           </a:p>
@@ -16007,7 +16007,7 @@
           <a:p>
             <a:fld id="{5BCAD085-E8A6-8845-BD4E-CB4CCA059FC4}" type="datetimeFigureOut">
               <a:rPr lang="en-US" smtClean="0"/>
-              <a:t>5/18/2026</a:t>
+              <a:t>5/19/26</a:t>
             </a:fld>
             <a:endParaRPr lang="en-US"/>
           </a:p>
@@ -16049,7 +16049,7 @@
           <a:p>
             <a:fld id="{C1FF6DA9-008F-8B48-92A6-B652298478BF}" type="slidenum">
               <a:rPr lang="en-US" smtClean="0"/>
-              <a:t>‹Nr.›</a:t>
+              <a:t>‹#›</a:t>
             </a:fld>
             <a:endParaRPr lang="en-US"/>
           </a:p>
@@ -16218,7 +16218,7 @@
           <a:p>
             <a:fld id="{5BCAD085-E8A6-8845-BD4E-CB4CCA059FC4}" type="datetimeFigureOut">
               <a:rPr lang="en-US" smtClean="0"/>
-              <a:t>5/18/2026</a:t>
+              <a:t>5/19/26</a:t>
             </a:fld>
             <a:endParaRPr lang="en-US"/>
           </a:p>
@@ -16296,7 +16296,7 @@
           <a:p>
             <a:fld id="{C1FF6DA9-008F-8B48-92A6-B652298478BF}" type="slidenum">
               <a:rPr lang="en-US" smtClean="0"/>
-              <a:t>‹Nr.›</a:t>
+              <a:t>‹#›</a:t>
             </a:fld>
             <a:endParaRPr lang="en-US"/>
           </a:p>
@@ -17594,15 +17594,7 @@
             </a:r>
             <a:r>
               <a:rPr lang="de-CH" sz="2100" dirty="0"/>
-              <a:t> werden </a:t>
-            </a:r>
-            <a:r>
-              <a:rPr lang="de-CH" sz="2100" dirty="0" err="1"/>
-              <a:t>rücktwärts</a:t>
-            </a:r>
-            <a:r>
-              <a:rPr lang="de-CH" sz="2100" dirty="0"/>
-              <a:t> ausgeführt (LIFO)</a:t>
+              <a:t> werden rückwärts ausgeführt (LIFO aka Stack)</a:t>
             </a:r>
           </a:p>
           <a:p>
@@ -17695,13 +17687,8 @@
             </a:r>
             <a:r>
               <a:rPr lang="de-CH" sz="2100" dirty="0"/>
-              <a:t> und gibt Panic-Wert </a:t>
+              <a:t> und gibt Panic-Wert zurück</a:t>
             </a:r>
-            <a:r>
-              <a:rPr lang="de-CH" sz="2100" dirty="0" err="1"/>
-              <a:t>züruck</a:t>
-            </a:r>
-            <a:endParaRPr lang="de-CH" sz="2100" dirty="0"/>
           </a:p>
         </p:txBody>
       </p:sp>
@@ -23756,8 +23743,13 @@
             </a:pPr>
             <a:r>
               <a:rPr lang="de-CH" sz="2100" dirty="0"/>
-              <a:t>GO verwendet Zeiger, verzichtet jedoch auf Zeigerarithmetik</a:t>
+              <a:t>GO verwendet Pointers, verzichtet jedoch auf </a:t>
             </a:r>
+            <a:r>
+              <a:rPr lang="de-CH" sz="2100" dirty="0" err="1"/>
+              <a:t>Pointerarithmetik</a:t>
+            </a:r>
+            <a:endParaRPr lang="de-CH" sz="2100" dirty="0"/>
           </a:p>
           <a:p>
             <a:pPr marL="0" indent="0">
@@ -25240,7 +25232,7 @@
             </a:r>
             <a:r>
               <a:rPr lang="de-CH" sz="2100" dirty="0" err="1"/>
-              <a:t>Structur</a:t>
+              <a:t>Structure</a:t>
             </a:r>
             <a:endParaRPr lang="de-CH" sz="2100" dirty="0"/>
           </a:p>

--- a/presentation/GO-Präsi.pptx
+++ b/presentation/GO-Präsi.pptx
@@ -5,7 +5,7 @@
     <p:sldMasterId id="2147483648" r:id="rId1"/>
   </p:sldMasterIdLst>
   <p:notesMasterIdLst>
-    <p:notesMasterId r:id="rId21"/>
+    <p:notesMasterId r:id="rId23"/>
   </p:notesMasterIdLst>
   <p:sldIdLst>
     <p:sldId id="256" r:id="rId2"/>
@@ -14,19 +14,21 @@
     <p:sldId id="259" r:id="rId5"/>
     <p:sldId id="272" r:id="rId6"/>
     <p:sldId id="262" r:id="rId7"/>
-    <p:sldId id="274" r:id="rId8"/>
-    <p:sldId id="273" r:id="rId9"/>
-    <p:sldId id="276" r:id="rId10"/>
-    <p:sldId id="266" r:id="rId11"/>
-    <p:sldId id="277" r:id="rId12"/>
-    <p:sldId id="263" r:id="rId13"/>
-    <p:sldId id="278" r:id="rId14"/>
-    <p:sldId id="260" r:id="rId15"/>
-    <p:sldId id="267" r:id="rId16"/>
-    <p:sldId id="268" r:id="rId17"/>
-    <p:sldId id="269" r:id="rId18"/>
-    <p:sldId id="270" r:id="rId19"/>
-    <p:sldId id="271" r:id="rId20"/>
+    <p:sldId id="280" r:id="rId8"/>
+    <p:sldId id="279" r:id="rId9"/>
+    <p:sldId id="274" r:id="rId10"/>
+    <p:sldId id="273" r:id="rId11"/>
+    <p:sldId id="276" r:id="rId12"/>
+    <p:sldId id="266" r:id="rId13"/>
+    <p:sldId id="277" r:id="rId14"/>
+    <p:sldId id="281" r:id="rId15"/>
+    <p:sldId id="278" r:id="rId16"/>
+    <p:sldId id="260" r:id="rId17"/>
+    <p:sldId id="267" r:id="rId18"/>
+    <p:sldId id="268" r:id="rId19"/>
+    <p:sldId id="269" r:id="rId20"/>
+    <p:sldId id="270" r:id="rId21"/>
+    <p:sldId id="271" r:id="rId22"/>
   </p:sldIdLst>
   <p:sldSz cx="9144000" cy="6858000" type="screen4x3"/>
   <p:notesSz cx="6858000" cy="9144000"/>
@@ -2444,10 +2446,22 @@
         <a:lstStyle/>
         <a:p>
           <a:r>
-            <a:rPr lang="de-CH" b="1"/>
-            <a:t>Structural Typing:</a:t>
+            <a:rPr lang="de-CH" b="1" dirty="0" err="1"/>
+            <a:t>Structural</a:t>
           </a:r>
-          <a:endParaRPr lang="en-US"/>
+          <a:r>
+            <a:rPr lang="de-CH" b="1" dirty="0"/>
+            <a:t> </a:t>
+          </a:r>
+          <a:r>
+            <a:rPr lang="de-CH" b="1" dirty="0" err="1"/>
+            <a:t>Typing</a:t>
+          </a:r>
+          <a:r>
+            <a:rPr lang="de-CH" b="1" dirty="0"/>
+            <a:t>:</a:t>
+          </a:r>
+          <a:endParaRPr lang="en-US" dirty="0"/>
         </a:p>
       </dgm:t>
     </dgm:pt>
@@ -4851,10 +4865,22 @@
             <a:buNone/>
           </a:pPr>
           <a:r>
-            <a:rPr lang="de-CH" sz="2500" b="1" kern="1200"/>
-            <a:t>Structural Typing:</a:t>
+            <a:rPr lang="de-CH" sz="2500" b="1" kern="1200" dirty="0" err="1"/>
+            <a:t>Structural</a:t>
           </a:r>
-          <a:endParaRPr lang="en-US" sz="2500" kern="1200"/>
+          <a:r>
+            <a:rPr lang="de-CH" sz="2500" b="1" kern="1200" dirty="0"/>
+            <a:t> </a:t>
+          </a:r>
+          <a:r>
+            <a:rPr lang="de-CH" sz="2500" b="1" kern="1200" dirty="0" err="1"/>
+            <a:t>Typing</a:t>
+          </a:r>
+          <a:r>
+            <a:rPr lang="de-CH" sz="2500" b="1" kern="1200" dirty="0"/>
+            <a:t>:</a:t>
+          </a:r>
+          <a:endParaRPr lang="en-US" sz="2500" kern="1200" dirty="0"/>
         </a:p>
       </dsp:txBody>
       <dsp:txXfrm>
@@ -12728,7 +12754,7 @@
           <a:p>
             <a:fld id="{D9EF2C90-E8EE-43CD-8D96-4E8A72565517}" type="datetimeFigureOut">
               <a:rPr lang="de-CH" smtClean="0"/>
-              <a:t>19.05.26</a:t>
+              <a:t>20.05.26</a:t>
             </a:fld>
             <a:endParaRPr lang="de-CH"/>
           </a:p>
@@ -13561,6 +13587,506 @@
       </p:grpSpPr>
       <p:sp>
         <p:nvSpPr>
+          <p:cNvPr id="2" name="Slide Image Placeholder 1"/>
+          <p:cNvSpPr>
+            <a:spLocks noGrp="1" noRot="1" noChangeAspect="1"/>
+          </p:cNvSpPr>
+          <p:nvPr>
+            <p:ph type="sldImg"/>
+          </p:nvPr>
+        </p:nvSpPr>
+        <p:spPr/>
+      </p:sp>
+      <p:sp>
+        <p:nvSpPr>
+          <p:cNvPr id="3" name="Notes Placeholder 2"/>
+          <p:cNvSpPr>
+            <a:spLocks noGrp="1"/>
+          </p:cNvSpPr>
+          <p:nvPr>
+            <p:ph type="body" idx="1"/>
+          </p:nvPr>
+        </p:nvSpPr>
+        <p:spPr/>
+        <p:txBody>
+          <a:bodyPr/>
+          <a:lstStyle/>
+          <a:p>
+            <a:r>
+              <a:rPr lang="en-CH" dirty="0"/>
+              <a:t>Es gibt Pointer wie in C, aber sie sind sicher wie in Java, weil man nicht mit Speicheradressen rechnen kann</a:t>
+            </a:r>
+          </a:p>
+          <a:p>
+            <a:endParaRPr lang="en-CH" dirty="0"/>
+          </a:p>
+          <a:p>
+            <a:r>
+              <a:rPr lang="en-GB" dirty="0"/>
+              <a:t>J</a:t>
+            </a:r>
+            <a:r>
+              <a:rPr lang="en-CH" dirty="0"/>
+              <a:t>ava 50 vs 25 in go</a:t>
+            </a:r>
+          </a:p>
+        </p:txBody>
+      </p:sp>
+      <p:sp>
+        <p:nvSpPr>
+          <p:cNvPr id="4" name="Slide Number Placeholder 3"/>
+          <p:cNvSpPr>
+            <a:spLocks noGrp="1"/>
+          </p:cNvSpPr>
+          <p:nvPr>
+            <p:ph type="sldNum" sz="quarter" idx="5"/>
+          </p:nvPr>
+        </p:nvSpPr>
+        <p:spPr/>
+        <p:txBody>
+          <a:bodyPr/>
+          <a:lstStyle/>
+          <a:p>
+            <a:fld id="{62945742-DB6B-4CE6-B846-92E01489719F}" type="slidenum">
+              <a:rPr lang="de-CH" smtClean="0"/>
+              <a:t>5</a:t>
+            </a:fld>
+            <a:endParaRPr lang="de-CH"/>
+          </a:p>
+        </p:txBody>
+      </p:sp>
+    </p:spTree>
+    <p:extLst>
+      <p:ext uri="{BB962C8B-B14F-4D97-AF65-F5344CB8AC3E}">
+        <p14:creationId xmlns:p14="http://schemas.microsoft.com/office/powerpoint/2010/main" val="246070458"/>
+      </p:ext>
+    </p:extLst>
+  </p:cSld>
+  <p:clrMapOvr>
+    <a:masterClrMapping/>
+  </p:clrMapOvr>
+</p:notes>
+</file>
+
+<file path=ppt/notesSlides/notesSlide4.xml><?xml version="1.0" encoding="utf-8"?>
+<p:notes xmlns:a="http://schemas.openxmlformats.org/drawingml/2006/main" xmlns:r="http://schemas.openxmlformats.org/officeDocument/2006/relationships" xmlns:p="http://schemas.openxmlformats.org/presentationml/2006/main">
+  <p:cSld>
+    <p:spTree>
+      <p:nvGrpSpPr>
+        <p:cNvPr id="1" name=""/>
+        <p:cNvGrpSpPr/>
+        <p:nvPr/>
+      </p:nvGrpSpPr>
+      <p:grpSpPr>
+        <a:xfrm>
+          <a:off x="0" y="0"/>
+          <a:ext cx="0" cy="0"/>
+          <a:chOff x="0" y="0"/>
+          <a:chExt cx="0" cy="0"/>
+        </a:xfrm>
+      </p:grpSpPr>
+      <p:sp>
+        <p:nvSpPr>
+          <p:cNvPr id="2" name="Slide Image Placeholder 1"/>
+          <p:cNvSpPr>
+            <a:spLocks noGrp="1" noRot="1" noChangeAspect="1"/>
+          </p:cNvSpPr>
+          <p:nvPr>
+            <p:ph type="sldImg"/>
+          </p:nvPr>
+        </p:nvSpPr>
+        <p:spPr/>
+      </p:sp>
+      <p:sp>
+        <p:nvSpPr>
+          <p:cNvPr id="3" name="Notes Placeholder 2"/>
+          <p:cNvSpPr>
+            <a:spLocks noGrp="1"/>
+          </p:cNvSpPr>
+          <p:nvPr>
+            <p:ph type="body" idx="1"/>
+          </p:nvPr>
+        </p:nvSpPr>
+        <p:spPr/>
+        <p:txBody>
+          <a:bodyPr/>
+          <a:lstStyle/>
+          <a:p>
+            <a:r>
+              <a:rPr lang="en-CH" dirty="0"/>
+              <a:t>„In Java ist eine </a:t>
+            </a:r>
+            <a:r>
+              <a:rPr lang="en-CH" sz="1200" kern="1200" dirty="0">
+                <a:solidFill>
+                  <a:schemeClr val="tx1"/>
+                </a:solidFill>
+                <a:latin typeface="+mn-lt"/>
+                <a:ea typeface="+mn-ea"/>
+                <a:cs typeface="+mn-cs"/>
+              </a:rPr>
+              <a:t>ArrayList</a:t>
+            </a:r>
+            <a:r>
+              <a:rPr lang="en-CH" dirty="0"/>
+              <a:t> ein massives Objekt auf dem Heap, das bei Vergrösserung im Hintergrund komplett kopiert wird. In Go ist ein Slice extrem leichtgewichtig. Es ist nur ein kleines 'Fenster' oder eine Lupe, die auf ein echtes Array schaut. Wenn wir das Fenster verändern oder Daten darin manipulieren, editieren wir ohne Umwege das echte Array im RAM.“</a:t>
+            </a:r>
+          </a:p>
+          <a:p>
+            <a:endParaRPr lang="en-CH" dirty="0"/>
+          </a:p>
+          <a:p>
+            <a:r>
+              <a:rPr lang="en-CH" dirty="0"/>
+              <a:t>„Hier sehen wir den Unterschied: </a:t>
+            </a:r>
+            <a:r>
+              <a:rPr lang="en-CH" sz="1200" kern="1200" dirty="0">
+                <a:solidFill>
+                  <a:schemeClr val="tx1"/>
+                </a:solidFill>
+                <a:latin typeface="+mn-lt"/>
+                <a:ea typeface="+mn-ea"/>
+                <a:cs typeface="+mn-cs"/>
+              </a:rPr>
+              <a:t>length</a:t>
+            </a:r>
+            <a:r>
+              <a:rPr lang="en-CH" dirty="0"/>
+              <a:t> ist das, was wir aktuell im Fenster sehen (im Codebeispiel 3 Elemente). </a:t>
+            </a:r>
+            <a:r>
+              <a:rPr lang="en-CH" sz="1200" kern="1200" dirty="0">
+                <a:solidFill>
+                  <a:schemeClr val="tx1"/>
+                </a:solidFill>
+                <a:latin typeface="+mn-lt"/>
+                <a:ea typeface="+mn-ea"/>
+                <a:cs typeface="+mn-cs"/>
+              </a:rPr>
+              <a:t>capacity</a:t>
+            </a:r>
+            <a:r>
+              <a:rPr lang="en-CH" dirty="0"/>
+              <a:t> ist der Platz, den das zugrunde liegende Array ab unserem Startpunkt noch bietet (hier 4 Elemente). Wenn wir mit </a:t>
+            </a:r>
+            <a:r>
+              <a:rPr lang="en-CH" sz="1200" kern="1200" dirty="0">
+                <a:solidFill>
+                  <a:schemeClr val="tx1"/>
+                </a:solidFill>
+                <a:latin typeface="+mn-lt"/>
+                <a:ea typeface="+mn-ea"/>
+                <a:cs typeface="+mn-cs"/>
+              </a:rPr>
+              <a:t>append()</a:t>
+            </a:r>
+            <a:r>
+              <a:rPr lang="en-CH" dirty="0"/>
+              <a:t> Daten anfügen, nutzt Go diesen Puffer aus. Das macht Listen in Go rasend schnell, weil nicht ständig neuer Speicher allokiert werden muss.“</a:t>
+            </a:r>
+          </a:p>
+        </p:txBody>
+      </p:sp>
+      <p:sp>
+        <p:nvSpPr>
+          <p:cNvPr id="4" name="Slide Number Placeholder 3"/>
+          <p:cNvSpPr>
+            <a:spLocks noGrp="1"/>
+          </p:cNvSpPr>
+          <p:nvPr>
+            <p:ph type="sldNum" sz="quarter" idx="5"/>
+          </p:nvPr>
+        </p:nvSpPr>
+        <p:spPr/>
+        <p:txBody>
+          <a:bodyPr/>
+          <a:lstStyle/>
+          <a:p>
+            <a:fld id="{62945742-DB6B-4CE6-B846-92E01489719F}" type="slidenum">
+              <a:rPr lang="de-CH" smtClean="0"/>
+              <a:t>7</a:t>
+            </a:fld>
+            <a:endParaRPr lang="de-CH"/>
+          </a:p>
+        </p:txBody>
+      </p:sp>
+    </p:spTree>
+    <p:extLst>
+      <p:ext uri="{BB962C8B-B14F-4D97-AF65-F5344CB8AC3E}">
+        <p14:creationId xmlns:p14="http://schemas.microsoft.com/office/powerpoint/2010/main" val="768985953"/>
+      </p:ext>
+    </p:extLst>
+  </p:cSld>
+  <p:clrMapOvr>
+    <a:masterClrMapping/>
+  </p:clrMapOvr>
+</p:notes>
+</file>
+
+<file path=ppt/notesSlides/notesSlide5.xml><?xml version="1.0" encoding="utf-8"?>
+<p:notes xmlns:a="http://schemas.openxmlformats.org/drawingml/2006/main" xmlns:r="http://schemas.openxmlformats.org/officeDocument/2006/relationships" xmlns:p="http://schemas.openxmlformats.org/presentationml/2006/main">
+  <p:cSld>
+    <p:spTree>
+      <p:nvGrpSpPr>
+        <p:cNvPr id="1" name=""/>
+        <p:cNvGrpSpPr/>
+        <p:nvPr/>
+      </p:nvGrpSpPr>
+      <p:grpSpPr>
+        <a:xfrm>
+          <a:off x="0" y="0"/>
+          <a:ext cx="0" cy="0"/>
+          <a:chOff x="0" y="0"/>
+          <a:chExt cx="0" cy="0"/>
+        </a:xfrm>
+      </p:grpSpPr>
+      <p:sp>
+        <p:nvSpPr>
+          <p:cNvPr id="2" name="Slide Image Placeholder 1"/>
+          <p:cNvSpPr>
+            <a:spLocks noGrp="1" noRot="1" noChangeAspect="1"/>
+          </p:cNvSpPr>
+          <p:nvPr>
+            <p:ph type="sldImg"/>
+          </p:nvPr>
+        </p:nvSpPr>
+        <p:spPr/>
+      </p:sp>
+      <p:sp>
+        <p:nvSpPr>
+          <p:cNvPr id="3" name="Notes Placeholder 2"/>
+          <p:cNvSpPr>
+            <a:spLocks noGrp="1"/>
+          </p:cNvSpPr>
+          <p:nvPr>
+            <p:ph type="body" idx="1"/>
+          </p:nvPr>
+        </p:nvSpPr>
+        <p:spPr/>
+        <p:txBody>
+          <a:bodyPr/>
+          <a:lstStyle/>
+          <a:p>
+            <a:r>
+              <a:rPr lang="en-CH" dirty="0"/>
+              <a:t>Das Prinzip kennen wir aus Java als </a:t>
+            </a:r>
+            <a:r>
+              <a:rPr lang="en-CH" sz="1200" kern="1200" dirty="0">
+                <a:solidFill>
+                  <a:schemeClr val="tx1"/>
+                </a:solidFill>
+                <a:latin typeface="+mn-lt"/>
+                <a:ea typeface="+mn-ea"/>
+                <a:cs typeface="+mn-cs"/>
+              </a:rPr>
+              <a:t>HashMap&lt;K, V&gt;</a:t>
+            </a:r>
+            <a:r>
+              <a:rPr lang="en-CH" dirty="0"/>
+              <a:t>. Der grosse Unterschied ist: In Go ist die Map direkt als nativer Datentyp in die Sprach-Syntax eingebaut. Man muss keine Klassen importieren, sondern erzeugt sie einfach über </a:t>
+            </a:r>
+            <a:r>
+              <a:rPr lang="en-CH" sz="1200" kern="1200" dirty="0">
+                <a:solidFill>
+                  <a:schemeClr val="tx1"/>
+                </a:solidFill>
+                <a:latin typeface="+mn-lt"/>
+                <a:ea typeface="+mn-ea"/>
+                <a:cs typeface="+mn-cs"/>
+              </a:rPr>
+              <a:t>make(map[KeyTyp]ValueTyp)</a:t>
+            </a:r>
+          </a:p>
+          <a:p>
+            <a:endParaRPr lang="en-CH" sz="1200" kern="1200" dirty="0">
+              <a:solidFill>
+                <a:schemeClr val="tx1"/>
+              </a:solidFill>
+              <a:latin typeface="+mn-lt"/>
+              <a:ea typeface="+mn-ea"/>
+              <a:cs typeface="+mn-cs"/>
+            </a:endParaRPr>
+          </a:p>
+          <a:p>
+            <a:r>
+              <a:rPr lang="en-CH" dirty="0"/>
+              <a:t>In Java ist die Reihenfolge beim Auslesen einer standardmässigen </a:t>
+            </a:r>
+            <a:r>
+              <a:rPr lang="en-CH" sz="1200" kern="1200" dirty="0">
+                <a:solidFill>
+                  <a:schemeClr val="tx1"/>
+                </a:solidFill>
+                <a:latin typeface="+mn-lt"/>
+                <a:ea typeface="+mn-ea"/>
+                <a:cs typeface="+mn-cs"/>
+              </a:rPr>
+              <a:t>HashMap</a:t>
+            </a:r>
+            <a:r>
+              <a:rPr lang="en-CH" dirty="0"/>
+              <a:t> zwar nicht geordnet, bleibt aber bei mehreren Durchläufen oft technisch bedingt zufällig gleich. </a:t>
+            </a:r>
+            <a:r>
+              <a:rPr lang="en-CH" b="1" dirty="0"/>
+              <a:t>Go ist hier radikal:</a:t>
+            </a:r>
+            <a:r>
+              <a:rPr lang="en-CH" dirty="0"/>
+              <a:t> Die Go-Runtime baut beim Iterieren über eine Map absichtlich einen </a:t>
+            </a:r>
+            <a:r>
+              <a:rPr lang="en-CH" b="1" dirty="0"/>
+              <a:t>Zufallsfaktor</a:t>
+            </a:r>
+            <a:r>
+              <a:rPr lang="en-CH" dirty="0"/>
+              <a:t> ein. Wer dieselbe Map dreimal hintereinander ausgibt, bekommt die Keys jedes Mal in einer anderen Reihenfolge. Go zwingt uns Entwickler damit aktiv dazu, uns niemals auf eine vermeintliche Reihenfolge zu verlassen.</a:t>
+            </a:r>
+          </a:p>
+        </p:txBody>
+      </p:sp>
+      <p:sp>
+        <p:nvSpPr>
+          <p:cNvPr id="4" name="Slide Number Placeholder 3"/>
+          <p:cNvSpPr>
+            <a:spLocks noGrp="1"/>
+          </p:cNvSpPr>
+          <p:nvPr>
+            <p:ph type="sldNum" sz="quarter" idx="5"/>
+          </p:nvPr>
+        </p:nvSpPr>
+        <p:spPr/>
+        <p:txBody>
+          <a:bodyPr/>
+          <a:lstStyle/>
+          <a:p>
+            <a:fld id="{62945742-DB6B-4CE6-B846-92E01489719F}" type="slidenum">
+              <a:rPr lang="de-CH" smtClean="0"/>
+              <a:t>10</a:t>
+            </a:fld>
+            <a:endParaRPr lang="de-CH"/>
+          </a:p>
+        </p:txBody>
+      </p:sp>
+    </p:spTree>
+    <p:extLst>
+      <p:ext uri="{BB962C8B-B14F-4D97-AF65-F5344CB8AC3E}">
+        <p14:creationId xmlns:p14="http://schemas.microsoft.com/office/powerpoint/2010/main" val="3083146692"/>
+      </p:ext>
+    </p:extLst>
+  </p:cSld>
+  <p:clrMapOvr>
+    <a:masterClrMapping/>
+  </p:clrMapOvr>
+</p:notes>
+</file>
+
+<file path=ppt/notesSlides/notesSlide6.xml><?xml version="1.0" encoding="utf-8"?>
+<p:notes xmlns:a="http://schemas.openxmlformats.org/drawingml/2006/main" xmlns:r="http://schemas.openxmlformats.org/officeDocument/2006/relationships" xmlns:p="http://schemas.openxmlformats.org/presentationml/2006/main">
+  <p:cSld>
+    <p:spTree>
+      <p:nvGrpSpPr>
+        <p:cNvPr id="1" name=""/>
+        <p:cNvGrpSpPr/>
+        <p:nvPr/>
+      </p:nvGrpSpPr>
+      <p:grpSpPr>
+        <a:xfrm>
+          <a:off x="0" y="0"/>
+          <a:ext cx="0" cy="0"/>
+          <a:chOff x="0" y="0"/>
+          <a:chExt cx="0" cy="0"/>
+        </a:xfrm>
+      </p:grpSpPr>
+      <p:sp>
+        <p:nvSpPr>
+          <p:cNvPr id="2" name="Slide Image Placeholder 1"/>
+          <p:cNvSpPr>
+            <a:spLocks noGrp="1" noRot="1" noChangeAspect="1"/>
+          </p:cNvSpPr>
+          <p:nvPr>
+            <p:ph type="sldImg"/>
+          </p:nvPr>
+        </p:nvSpPr>
+        <p:spPr/>
+      </p:sp>
+      <p:sp>
+        <p:nvSpPr>
+          <p:cNvPr id="3" name="Notes Placeholder 2"/>
+          <p:cNvSpPr>
+            <a:spLocks noGrp="1"/>
+          </p:cNvSpPr>
+          <p:nvPr>
+            <p:ph type="body" idx="1"/>
+          </p:nvPr>
+        </p:nvSpPr>
+        <p:spPr/>
+        <p:txBody>
+          <a:bodyPr/>
+          <a:lstStyle/>
+          <a:p>
+            <a:endParaRPr lang="en-CH" dirty="0"/>
+          </a:p>
+        </p:txBody>
+      </p:sp>
+      <p:sp>
+        <p:nvSpPr>
+          <p:cNvPr id="4" name="Slide Number Placeholder 3"/>
+          <p:cNvSpPr>
+            <a:spLocks noGrp="1"/>
+          </p:cNvSpPr>
+          <p:nvPr>
+            <p:ph type="sldNum" sz="quarter" idx="5"/>
+          </p:nvPr>
+        </p:nvSpPr>
+        <p:spPr/>
+        <p:txBody>
+          <a:bodyPr/>
+          <a:lstStyle/>
+          <a:p>
+            <a:fld id="{62945742-DB6B-4CE6-B846-92E01489719F}" type="slidenum">
+              <a:rPr lang="de-CH" smtClean="0"/>
+              <a:t>12</a:t>
+            </a:fld>
+            <a:endParaRPr lang="de-CH"/>
+          </a:p>
+        </p:txBody>
+      </p:sp>
+    </p:spTree>
+    <p:extLst>
+      <p:ext uri="{BB962C8B-B14F-4D97-AF65-F5344CB8AC3E}">
+        <p14:creationId xmlns:p14="http://schemas.microsoft.com/office/powerpoint/2010/main" val="1733516924"/>
+      </p:ext>
+    </p:extLst>
+  </p:cSld>
+  <p:clrMapOvr>
+    <a:masterClrMapping/>
+  </p:clrMapOvr>
+</p:notes>
+</file>
+
+<file path=ppt/notesSlides/notesSlide7.xml><?xml version="1.0" encoding="utf-8"?>
+<p:notes xmlns:a="http://schemas.openxmlformats.org/drawingml/2006/main" xmlns:r="http://schemas.openxmlformats.org/officeDocument/2006/relationships" xmlns:p="http://schemas.openxmlformats.org/presentationml/2006/main">
+  <p:cSld>
+    <p:spTree>
+      <p:nvGrpSpPr>
+        <p:cNvPr id="1" name=""/>
+        <p:cNvGrpSpPr/>
+        <p:nvPr/>
+      </p:nvGrpSpPr>
+      <p:grpSpPr>
+        <a:xfrm>
+          <a:off x="0" y="0"/>
+          <a:ext cx="0" cy="0"/>
+          <a:chOff x="0" y="0"/>
+          <a:chExt cx="0" cy="0"/>
+        </a:xfrm>
+      </p:grpSpPr>
+      <p:sp>
+        <p:nvSpPr>
           <p:cNvPr id="2" name="Folienbildplatzhalter 1"/>
           <p:cNvSpPr>
             <a:spLocks noGrp="1" noRot="1" noChangeAspect="1"/>
@@ -13607,7 +14133,7 @@
           <a:p>
             <a:fld id="{62945742-DB6B-4CE6-B846-92E01489719F}" type="slidenum">
               <a:rPr lang="de-CH" smtClean="0"/>
-              <a:t>15</a:t>
+              <a:t>17</a:t>
             </a:fld>
             <a:endParaRPr lang="de-CH"/>
           </a:p>
@@ -13805,7 +14331,7 @@
           <a:p>
             <a:fld id="{5BCAD085-E8A6-8845-BD4E-CB4CCA059FC4}" type="datetimeFigureOut">
               <a:rPr lang="en-US" smtClean="0"/>
-              <a:t>5/19/26</a:t>
+              <a:t>5/20/26</a:t>
             </a:fld>
             <a:endParaRPr lang="en-US"/>
           </a:p>
@@ -13973,7 +14499,7 @@
           <a:p>
             <a:fld id="{5BCAD085-E8A6-8845-BD4E-CB4CCA059FC4}" type="datetimeFigureOut">
               <a:rPr lang="en-US" smtClean="0"/>
-              <a:t>5/19/26</a:t>
+              <a:t>5/20/26</a:t>
             </a:fld>
             <a:endParaRPr lang="en-US"/>
           </a:p>
@@ -14151,7 +14677,7 @@
           <a:p>
             <a:fld id="{5BCAD085-E8A6-8845-BD4E-CB4CCA059FC4}" type="datetimeFigureOut">
               <a:rPr lang="en-US" smtClean="0"/>
-              <a:t>5/19/26</a:t>
+              <a:t>5/20/26</a:t>
             </a:fld>
             <a:endParaRPr lang="en-US"/>
           </a:p>
@@ -14319,7 +14845,7 @@
           <a:p>
             <a:fld id="{5BCAD085-E8A6-8845-BD4E-CB4CCA059FC4}" type="datetimeFigureOut">
               <a:rPr lang="en-US" smtClean="0"/>
-              <a:t>5/19/26</a:t>
+              <a:t>5/20/26</a:t>
             </a:fld>
             <a:endParaRPr lang="en-US"/>
           </a:p>
@@ -14564,7 +15090,7 @@
           <a:p>
             <a:fld id="{5BCAD085-E8A6-8845-BD4E-CB4CCA059FC4}" type="datetimeFigureOut">
               <a:rPr lang="en-US" smtClean="0"/>
-              <a:t>5/19/26</a:t>
+              <a:t>5/20/26</a:t>
             </a:fld>
             <a:endParaRPr lang="en-US"/>
           </a:p>
@@ -14849,7 +15375,7 @@
           <a:p>
             <a:fld id="{5BCAD085-E8A6-8845-BD4E-CB4CCA059FC4}" type="datetimeFigureOut">
               <a:rPr lang="en-US" smtClean="0"/>
-              <a:t>5/19/26</a:t>
+              <a:t>5/20/26</a:t>
             </a:fld>
             <a:endParaRPr lang="en-US"/>
           </a:p>
@@ -15268,7 +15794,7 @@
           <a:p>
             <a:fld id="{5BCAD085-E8A6-8845-BD4E-CB4CCA059FC4}" type="datetimeFigureOut">
               <a:rPr lang="en-US" smtClean="0"/>
-              <a:t>5/19/26</a:t>
+              <a:t>5/20/26</a:t>
             </a:fld>
             <a:endParaRPr lang="en-US"/>
           </a:p>
@@ -15385,7 +15911,7 @@
           <a:p>
             <a:fld id="{5BCAD085-E8A6-8845-BD4E-CB4CCA059FC4}" type="datetimeFigureOut">
               <a:rPr lang="en-US" smtClean="0"/>
-              <a:t>5/19/26</a:t>
+              <a:t>5/20/26</a:t>
             </a:fld>
             <a:endParaRPr lang="en-US"/>
           </a:p>
@@ -15480,7 +16006,7 @@
           <a:p>
             <a:fld id="{5BCAD085-E8A6-8845-BD4E-CB4CCA059FC4}" type="datetimeFigureOut">
               <a:rPr lang="en-US" smtClean="0"/>
-              <a:t>5/19/26</a:t>
+              <a:t>5/20/26</a:t>
             </a:fld>
             <a:endParaRPr lang="en-US"/>
           </a:p>
@@ -15755,7 +16281,7 @@
           <a:p>
             <a:fld id="{5BCAD085-E8A6-8845-BD4E-CB4CCA059FC4}" type="datetimeFigureOut">
               <a:rPr lang="en-US" smtClean="0"/>
-              <a:t>5/19/26</a:t>
+              <a:t>5/20/26</a:t>
             </a:fld>
             <a:endParaRPr lang="en-US"/>
           </a:p>
@@ -16007,7 +16533,7 @@
           <a:p>
             <a:fld id="{5BCAD085-E8A6-8845-BD4E-CB4CCA059FC4}" type="datetimeFigureOut">
               <a:rPr lang="en-US" smtClean="0"/>
-              <a:t>5/19/26</a:t>
+              <a:t>5/20/26</a:t>
             </a:fld>
             <a:endParaRPr lang="en-US"/>
           </a:p>
@@ -16218,7 +16744,7 @@
           <a:p>
             <a:fld id="{5BCAD085-E8A6-8845-BD4E-CB4CCA059FC4}" type="datetimeFigureOut">
               <a:rPr lang="en-US" smtClean="0"/>
-              <a:t>5/19/26</a:t>
+              <a:t>5/20/26</a:t>
             </a:fld>
             <a:endParaRPr lang="en-US"/>
           </a:p>
@@ -17202,7 +17728,7 @@
         <p:cNvPr id="1" name="">
           <a:extLst>
             <a:ext uri="{FF2B5EF4-FFF2-40B4-BE49-F238E27FC236}">
-              <a16:creationId xmlns:a16="http://schemas.microsoft.com/office/drawing/2014/main" id="{889522E0-8191-FC52-5CFD-F2A33A7437F8}"/>
+              <a16:creationId xmlns:a16="http://schemas.microsoft.com/office/drawing/2014/main" id="{870D3697-1D78-4CC0-4F13-58412528479B}"/>
             </a:ext>
           </a:extLst>
         </p:cNvPr>
@@ -17222,7 +17748,7 @@
           <p:cNvPr id="2057" name="Rectangle 2056">
             <a:extLst>
               <a:ext uri="{FF2B5EF4-FFF2-40B4-BE49-F238E27FC236}">
-                <a16:creationId xmlns:a16="http://schemas.microsoft.com/office/drawing/2014/main" id="{CE61B5A9-75F8-C90C-7750-AD98FA383187}"/>
+                <a16:creationId xmlns:a16="http://schemas.microsoft.com/office/drawing/2014/main" id="{5A373F65-2C02-EFA5-13AA-9A31C2292C05}"/>
               </a:ext>
               <a:ext uri="{C183D7F6-B498-43B3-948B-1728B52AA6E4}">
                 <adec:decorative xmlns:adec="http://schemas.microsoft.com/office/drawing/2017/decorative" val="1"/>
@@ -17282,7 +17808,7 @@
           <p:cNvPr id="2" name="Titel 1">
             <a:extLst>
               <a:ext uri="{FF2B5EF4-FFF2-40B4-BE49-F238E27FC236}">
-                <a16:creationId xmlns:a16="http://schemas.microsoft.com/office/drawing/2014/main" id="{683C65F9-23E4-72A7-787D-29C9770866E9}"/>
+                <a16:creationId xmlns:a16="http://schemas.microsoft.com/office/drawing/2014/main" id="{CD1BDE69-E2DE-724F-472B-FD80F7617AEB}"/>
               </a:ext>
             </a:extLst>
           </p:cNvPr>
@@ -17307,13 +17833,8 @@
           <a:p>
             <a:r>
               <a:rPr lang="de-CH" sz="4700" dirty="0"/>
-              <a:t>Defer &amp; Panic &amp; </a:t>
-            </a:r>
-            <a:r>
-              <a:rPr lang="de-CH" sz="4700" dirty="0" err="1"/>
-              <a:t>Recover</a:t>
-            </a:r>
-            <a:endParaRPr lang="de-CH" sz="4700" dirty="0"/>
+              <a:t>Maps Eigenschaften</a:t>
+            </a:r>
           </a:p>
         </p:txBody>
       </p:sp>
@@ -17322,7 +17843,7 @@
           <p:cNvPr id="2059" name="Group 2058">
             <a:extLst>
               <a:ext uri="{FF2B5EF4-FFF2-40B4-BE49-F238E27FC236}">
-                <a16:creationId xmlns:a16="http://schemas.microsoft.com/office/drawing/2014/main" id="{86087ACA-52D5-B423-2E52-30CA83D694BB}"/>
+                <a16:creationId xmlns:a16="http://schemas.microsoft.com/office/drawing/2014/main" id="{87D5C43B-983C-CD03-D581-AFD3991ACE9A}"/>
               </a:ext>
               <a:ext uri="{C183D7F6-B498-43B3-948B-1728B52AA6E4}">
                 <adec:decorative xmlns:adec="http://schemas.microsoft.com/office/drawing/2017/decorative" val="1"/>
@@ -17353,7 +17874,7 @@
             <p:cNvPr id="2060" name="Rectangle 2059">
               <a:extLst>
                 <a:ext uri="{FF2B5EF4-FFF2-40B4-BE49-F238E27FC236}">
-                  <a16:creationId xmlns:a16="http://schemas.microsoft.com/office/drawing/2014/main" id="{90ACB274-48E1-BDAD-C4BF-691212CFFBE7}"/>
+                  <a16:creationId xmlns:a16="http://schemas.microsoft.com/office/drawing/2014/main" id="{684B53A0-F78A-B158-551A-317242B87B5F}"/>
                 </a:ext>
                 <a:ext uri="{C183D7F6-B498-43B3-948B-1728B52AA6E4}">
                   <adec:decorative xmlns:adec="http://schemas.microsoft.com/office/drawing/2017/decorative" val="1"/>
@@ -17414,7 +17935,7 @@
             <p:cNvPr id="2061" name="Rectangle 2060">
               <a:extLst>
                 <a:ext uri="{FF2B5EF4-FFF2-40B4-BE49-F238E27FC236}">
-                  <a16:creationId xmlns:a16="http://schemas.microsoft.com/office/drawing/2014/main" id="{B79B482B-1721-F56D-BAB4-794FC03E7594}"/>
+                  <a16:creationId xmlns:a16="http://schemas.microsoft.com/office/drawing/2014/main" id="{2D887804-3785-DB50-0179-D457655D4576}"/>
                 </a:ext>
                 <a:ext uri="{C183D7F6-B498-43B3-948B-1728B52AA6E4}">
                   <adec:decorative xmlns:adec="http://schemas.microsoft.com/office/drawing/2017/decorative" val="1"/>
@@ -17476,7 +17997,7 @@
           <p:cNvPr id="2063" name="Rectangle 2062">
             <a:extLst>
               <a:ext uri="{FF2B5EF4-FFF2-40B4-BE49-F238E27FC236}">
-                <a16:creationId xmlns:a16="http://schemas.microsoft.com/office/drawing/2014/main" id="{4F7BE736-E1C7-1E7F-A041-228F6CC252CD}"/>
+                <a16:creationId xmlns:a16="http://schemas.microsoft.com/office/drawing/2014/main" id="{2A809A91-C8A4-CF93-32BC-064223DC5095}"/>
               </a:ext>
               <a:ext uri="{C183D7F6-B498-43B3-948B-1728B52AA6E4}">
                 <adec:decorative xmlns:adec="http://schemas.microsoft.com/office/drawing/2017/decorative" val="1"/>
@@ -17546,7 +18067,7 @@
           <p:cNvPr id="4" name="Inhaltsplatzhalter 3">
             <a:extLst>
               <a:ext uri="{FF2B5EF4-FFF2-40B4-BE49-F238E27FC236}">
-                <a16:creationId xmlns:a16="http://schemas.microsoft.com/office/drawing/2014/main" id="{B42A37F2-725F-EE4C-0349-7ACC77A14898}"/>
+                <a16:creationId xmlns:a16="http://schemas.microsoft.com/office/drawing/2014/main" id="{21EC2F82-2079-BEE9-A04D-EC18AE7FE18B}"/>
               </a:ext>
             </a:extLst>
           </p:cNvPr>
@@ -17565,7 +18086,677 @@
         </p:spPr>
         <p:txBody>
           <a:bodyPr anchor="ctr">
-            <a:normAutofit fontScale="85000" lnSpcReduction="20000"/>
+            <a:normAutofit/>
+          </a:bodyPr>
+          <a:lstStyle/>
+          <a:p>
+            <a:r>
+              <a:rPr lang="de-CH" sz="2100" dirty="0"/>
+              <a:t>Key – Value</a:t>
+            </a:r>
+          </a:p>
+          <a:p>
+            <a:r>
+              <a:rPr lang="de-CH" sz="2100" dirty="0"/>
+              <a:t>Dynamische Grösse</a:t>
+            </a:r>
+          </a:p>
+          <a:p>
+            <a:r>
+              <a:rPr lang="de-CH" sz="2100" dirty="0"/>
+              <a:t>Reihenfolge ist nicht garantiert</a:t>
+            </a:r>
+          </a:p>
+          <a:p>
+            <a:r>
+              <a:rPr lang="de-CH" sz="2100" dirty="0"/>
+              <a:t>Standardwert ist </a:t>
+            </a:r>
+            <a:r>
+              <a:rPr lang="de-CH" sz="2100" dirty="0" err="1"/>
+              <a:t>nil</a:t>
+            </a:r>
+            <a:endParaRPr lang="de-CH" sz="2100" dirty="0"/>
+          </a:p>
+          <a:p>
+            <a:r>
+              <a:rPr lang="de-CH" sz="2100" dirty="0"/>
+              <a:t>«</a:t>
+            </a:r>
+            <a:r>
+              <a:rPr lang="de-CH" sz="2100" dirty="0" err="1"/>
+              <a:t>range</a:t>
+            </a:r>
+            <a:r>
+              <a:rPr lang="de-CH" sz="2100" dirty="0"/>
+              <a:t>» für Iteration</a:t>
+            </a:r>
+          </a:p>
+        </p:txBody>
+      </p:sp>
+      <p:pic>
+        <p:nvPicPr>
+          <p:cNvPr id="5122" name="Picture 2" descr="Principles of map type in GO | Golang for all">
+            <a:extLst>
+              <a:ext uri="{FF2B5EF4-FFF2-40B4-BE49-F238E27FC236}">
+                <a16:creationId xmlns:a16="http://schemas.microsoft.com/office/drawing/2014/main" id="{69F9ACEF-2D5B-86F1-8B14-5A58AEDD975F}"/>
+              </a:ext>
+            </a:extLst>
+          </p:cNvPr>
+          <p:cNvPicPr>
+            <a:picLocks noChangeAspect="1" noChangeArrowheads="1"/>
+          </p:cNvPicPr>
+          <p:nvPr/>
+        </p:nvPicPr>
+        <p:blipFill>
+          <a:blip r:embed="rId3">
+            <a:extLst>
+              <a:ext uri="{28A0092B-C50C-407E-A947-70E740481C1C}">
+                <a14:useLocalDpi xmlns:a14="http://schemas.microsoft.com/office/drawing/2010/main" val="0"/>
+              </a:ext>
+            </a:extLst>
+          </a:blip>
+          <a:srcRect/>
+          <a:stretch>
+            <a:fillRect/>
+          </a:stretch>
+        </p:blipFill>
+        <p:spPr bwMode="auto">
+          <a:xfrm flipH="1">
+            <a:off x="7917460" y="262271"/>
+            <a:ext cx="1056904" cy="1416469"/>
+          </a:xfrm>
+          <a:prstGeom prst="rect">
+            <a:avLst/>
+          </a:prstGeom>
+          <a:noFill/>
+          <a:extLst>
+            <a:ext uri="{909E8E84-426E-40DD-AFC4-6F175D3DCCD1}">
+              <a14:hiddenFill xmlns:a14="http://schemas.microsoft.com/office/drawing/2010/main">
+                <a:solidFill>
+                  <a:srgbClr val="FFFFFF"/>
+                </a:solidFill>
+              </a14:hiddenFill>
+            </a:ext>
+          </a:extLst>
+        </p:spPr>
+      </p:pic>
+    </p:spTree>
+    <p:extLst>
+      <p:ext uri="{BB962C8B-B14F-4D97-AF65-F5344CB8AC3E}">
+        <p14:creationId xmlns:p14="http://schemas.microsoft.com/office/powerpoint/2010/main" val="1655206865"/>
+      </p:ext>
+    </p:extLst>
+  </p:cSld>
+  <p:clrMapOvr>
+    <a:masterClrMapping/>
+  </p:clrMapOvr>
+</p:sld>
+</file>
+
+<file path=ppt/slides/slide11.xml><?xml version="1.0" encoding="utf-8"?>
+<p:sld xmlns:a="http://schemas.openxmlformats.org/drawingml/2006/main" xmlns:r="http://schemas.openxmlformats.org/officeDocument/2006/relationships" xmlns:p="http://schemas.openxmlformats.org/presentationml/2006/main">
+  <p:cSld>
+    <p:bg>
+      <p:bgPr>
+        <a:solidFill>
+          <a:schemeClr val="bg1"/>
+        </a:solidFill>
+        <a:effectLst/>
+      </p:bgPr>
+    </p:bg>
+    <p:spTree>
+      <p:nvGrpSpPr>
+        <p:cNvPr id="1" name="">
+          <a:extLst>
+            <a:ext uri="{FF2B5EF4-FFF2-40B4-BE49-F238E27FC236}">
+              <a16:creationId xmlns:a16="http://schemas.microsoft.com/office/drawing/2014/main" id="{1422B429-924E-38BF-0BC7-8AB83FA47097}"/>
+            </a:ext>
+          </a:extLst>
+        </p:cNvPr>
+        <p:cNvGrpSpPr/>
+        <p:nvPr/>
+      </p:nvGrpSpPr>
+      <p:grpSpPr>
+        <a:xfrm>
+          <a:off x="0" y="0"/>
+          <a:ext cx="0" cy="0"/>
+          <a:chOff x="0" y="0"/>
+          <a:chExt cx="0" cy="0"/>
+        </a:xfrm>
+      </p:grpSpPr>
+      <p:sp useBgFill="1">
+        <p:nvSpPr>
+          <p:cNvPr id="2057" name="Rectangle 2056">
+            <a:extLst>
+              <a:ext uri="{FF2B5EF4-FFF2-40B4-BE49-F238E27FC236}">
+                <a16:creationId xmlns:a16="http://schemas.microsoft.com/office/drawing/2014/main" id="{7402BCCD-8498-F895-FB49-3A6814D953FC}"/>
+              </a:ext>
+              <a:ext uri="{C183D7F6-B498-43B3-948B-1728B52AA6E4}">
+                <adec:decorative xmlns:adec="http://schemas.microsoft.com/office/drawing/2017/decorative" val="1"/>
+              </a:ext>
+            </a:extLst>
+          </p:cNvPr>
+          <p:cNvSpPr>
+            <a:spLocks noGrp="1" noRot="1" noChangeAspect="1" noMove="1" noResize="1" noEditPoints="1" noAdjustHandles="1" noChangeArrowheads="1" noChangeShapeType="1" noTextEdit="1"/>
+          </p:cNvSpPr>
+          <p:nvPr>
+            <p:extLst>
+              <p:ext uri="{386F3935-93C4-4BCD-93E2-E3B085C9AB24}">
+                <p16:designElem xmlns:p16="http://schemas.microsoft.com/office/powerpoint/2015/main" val="1"/>
+              </p:ext>
+            </p:extLst>
+          </p:nvPr>
+        </p:nvSpPr>
+        <p:spPr>
+          <a:xfrm>
+            <a:off x="0" y="0"/>
+            <a:ext cx="9143999" cy="6857365"/>
+          </a:xfrm>
+          <a:prstGeom prst="rect">
+            <a:avLst/>
+          </a:prstGeom>
+          <a:ln>
+            <a:noFill/>
+          </a:ln>
+        </p:spPr>
+        <p:style>
+          <a:lnRef idx="2">
+            <a:schemeClr val="accent1">
+              <a:shade val="50000"/>
+            </a:schemeClr>
+          </a:lnRef>
+          <a:fillRef idx="1">
+            <a:schemeClr val="accent1"/>
+          </a:fillRef>
+          <a:effectRef idx="0">
+            <a:schemeClr val="accent1"/>
+          </a:effectRef>
+          <a:fontRef idx="minor">
+            <a:schemeClr val="lt1"/>
+          </a:fontRef>
+        </p:style>
+        <p:txBody>
+          <a:bodyPr rtlCol="0" anchor="ctr"/>
+          <a:lstStyle/>
+          <a:p>
+            <a:pPr algn="ctr"/>
+            <a:endParaRPr lang="en-US"/>
+          </a:p>
+        </p:txBody>
+      </p:sp>
+      <p:sp>
+        <p:nvSpPr>
+          <p:cNvPr id="2" name="Titel 1">
+            <a:extLst>
+              <a:ext uri="{FF2B5EF4-FFF2-40B4-BE49-F238E27FC236}">
+                <a16:creationId xmlns:a16="http://schemas.microsoft.com/office/drawing/2014/main" id="{37AD8B81-93FE-CB35-DFBF-BA8F6C5E60FD}"/>
+              </a:ext>
+            </a:extLst>
+          </p:cNvPr>
+          <p:cNvSpPr>
+            <a:spLocks noGrp="1"/>
+          </p:cNvSpPr>
+          <p:nvPr>
+            <p:ph type="title"/>
+          </p:nvPr>
+        </p:nvSpPr>
+        <p:spPr>
+          <a:xfrm>
+            <a:off x="606478" y="386930"/>
+            <a:ext cx="6927525" cy="1188950"/>
+          </a:xfrm>
+        </p:spPr>
+        <p:txBody>
+          <a:bodyPr anchor="b">
+            <a:normAutofit/>
+          </a:bodyPr>
+          <a:lstStyle/>
+          <a:p>
+            <a:r>
+              <a:rPr lang="de-CH" sz="4700" dirty="0"/>
+              <a:t>Maps Code Beispiele</a:t>
+            </a:r>
+          </a:p>
+        </p:txBody>
+      </p:sp>
+      <p:grpSp>
+        <p:nvGrpSpPr>
+          <p:cNvPr id="2059" name="Group 2058">
+            <a:extLst>
+              <a:ext uri="{FF2B5EF4-FFF2-40B4-BE49-F238E27FC236}">
+                <a16:creationId xmlns:a16="http://schemas.microsoft.com/office/drawing/2014/main" id="{DE216921-7EE9-EFE6-44AD-A3B756E86DC1}"/>
+              </a:ext>
+              <a:ext uri="{C183D7F6-B498-43B3-948B-1728B52AA6E4}">
+                <adec:decorative xmlns:adec="http://schemas.microsoft.com/office/drawing/2017/decorative" val="1"/>
+              </a:ext>
+            </a:extLst>
+          </p:cNvPr>
+          <p:cNvGrpSpPr>
+            <a:grpSpLocks noGrp="1" noUngrp="1" noRot="1" noChangeAspect="1" noMove="1" noResize="1"/>
+          </p:cNvGrpSpPr>
+          <p:nvPr>
+            <p:extLst>
+              <p:ext uri="{386F3935-93C4-4BCD-93E2-E3B085C9AB24}">
+                <p16:designElem xmlns:p16="http://schemas.microsoft.com/office/powerpoint/2015/main" val="1"/>
+              </p:ext>
+            </p:extLst>
+          </p:nvPr>
+        </p:nvGrpSpPr>
+        <p:grpSpPr>
+          <a:xfrm>
+            <a:off x="-1" y="1998368"/>
+            <a:ext cx="8771274" cy="782176"/>
+            <a:chOff x="-2" y="1998368"/>
+            <a:chExt cx="11695083" cy="782176"/>
+          </a:xfrm>
+        </p:grpSpPr>
+        <p:sp>
+          <p:nvSpPr>
+            <p:cNvPr id="2060" name="Rectangle 2059">
+              <a:extLst>
+                <a:ext uri="{FF2B5EF4-FFF2-40B4-BE49-F238E27FC236}">
+                  <a16:creationId xmlns:a16="http://schemas.microsoft.com/office/drawing/2014/main" id="{3835E63B-DABD-FA75-AE20-E2F8F53925E9}"/>
+                </a:ext>
+                <a:ext uri="{C183D7F6-B498-43B3-948B-1728B52AA6E4}">
+                  <adec:decorative xmlns:adec="http://schemas.microsoft.com/office/drawing/2017/decorative" val="1"/>
+                </a:ext>
+              </a:extLst>
+            </p:cNvPr>
+            <p:cNvSpPr/>
+            <p:nvPr>
+              <p:extLst>
+                <p:ext uri="{386F3935-93C4-4BCD-93E2-E3B085C9AB24}">
+                  <p16:designElem xmlns:p16="http://schemas.microsoft.com/office/powerpoint/2015/main" val="1"/>
+                </p:ext>
+              </p:extLst>
+            </p:nvPr>
+          </p:nvSpPr>
+          <p:spPr>
+            <a:xfrm rot="5400000">
+              <a:off x="11228040" y="2313027"/>
+              <a:ext cx="781700" cy="152382"/>
+            </a:xfrm>
+            <a:prstGeom prst="rect">
+              <a:avLst/>
+            </a:prstGeom>
+            <a:solidFill>
+              <a:schemeClr val="accent4"/>
+            </a:solidFill>
+            <a:ln>
+              <a:noFill/>
+            </a:ln>
+          </p:spPr>
+          <p:style>
+            <a:lnRef idx="2">
+              <a:schemeClr val="accent1">
+                <a:shade val="50000"/>
+              </a:schemeClr>
+            </a:lnRef>
+            <a:fillRef idx="1">
+              <a:schemeClr val="accent1"/>
+            </a:fillRef>
+            <a:effectRef idx="0">
+              <a:schemeClr val="accent1"/>
+            </a:effectRef>
+            <a:fontRef idx="minor">
+              <a:schemeClr val="lt1"/>
+            </a:fontRef>
+          </p:style>
+          <p:txBody>
+            <a:bodyPr rtlCol="0" anchor="ctr"/>
+            <a:lstStyle/>
+            <a:p>
+              <a:pPr algn="ctr"/>
+              <a:endParaRPr lang="en-US"/>
+            </a:p>
+          </p:txBody>
+        </p:sp>
+        <p:sp>
+          <p:nvSpPr>
+            <p:cNvPr id="2061" name="Rectangle 2060">
+              <a:extLst>
+                <a:ext uri="{FF2B5EF4-FFF2-40B4-BE49-F238E27FC236}">
+                  <a16:creationId xmlns:a16="http://schemas.microsoft.com/office/drawing/2014/main" id="{3B6EA3F6-276C-754D-03DB-3A255433B2A9}"/>
+                </a:ext>
+                <a:ext uri="{C183D7F6-B498-43B3-948B-1728B52AA6E4}">
+                  <adec:decorative xmlns:adec="http://schemas.microsoft.com/office/drawing/2017/decorative" val="1"/>
+                </a:ext>
+              </a:extLst>
+            </p:cNvPr>
+            <p:cNvSpPr/>
+            <p:nvPr>
+              <p:extLst>
+                <p:ext uri="{386F3935-93C4-4BCD-93E2-E3B085C9AB24}">
+                  <p16:designElem xmlns:p16="http://schemas.microsoft.com/office/powerpoint/2015/main" val="1"/>
+                </p:ext>
+              </p:extLst>
+            </p:nvPr>
+          </p:nvSpPr>
+          <p:spPr>
+            <a:xfrm flipH="1" flipV="1">
+              <a:off x="-2" y="1998845"/>
+              <a:ext cx="11454595" cy="781699"/>
+            </a:xfrm>
+            <a:prstGeom prst="rect">
+              <a:avLst/>
+            </a:prstGeom>
+            <a:solidFill>
+              <a:schemeClr val="accent4"/>
+            </a:solidFill>
+            <a:ln>
+              <a:noFill/>
+            </a:ln>
+          </p:spPr>
+          <p:style>
+            <a:lnRef idx="2">
+              <a:schemeClr val="accent1">
+                <a:shade val="50000"/>
+              </a:schemeClr>
+            </a:lnRef>
+            <a:fillRef idx="1">
+              <a:schemeClr val="accent1"/>
+            </a:fillRef>
+            <a:effectRef idx="0">
+              <a:schemeClr val="accent1"/>
+            </a:effectRef>
+            <a:fontRef idx="minor">
+              <a:schemeClr val="lt1"/>
+            </a:fontRef>
+          </p:style>
+          <p:txBody>
+            <a:bodyPr rtlCol="0" anchor="ctr"/>
+            <a:lstStyle/>
+            <a:p>
+              <a:pPr algn="ctr"/>
+              <a:endParaRPr lang="en-US"/>
+            </a:p>
+          </p:txBody>
+        </p:sp>
+      </p:grpSp>
+      <p:sp>
+        <p:nvSpPr>
+          <p:cNvPr id="2063" name="Rectangle 2062">
+            <a:extLst>
+              <a:ext uri="{FF2B5EF4-FFF2-40B4-BE49-F238E27FC236}">
+                <a16:creationId xmlns:a16="http://schemas.microsoft.com/office/drawing/2014/main" id="{82F5968E-22DD-92BC-BF02-61C6E2E954CC}"/>
+              </a:ext>
+              <a:ext uri="{C183D7F6-B498-43B3-948B-1728B52AA6E4}">
+                <adec:decorative xmlns:adec="http://schemas.microsoft.com/office/drawing/2017/decorative" val="1"/>
+              </a:ext>
+            </a:extLst>
+          </p:cNvPr>
+          <p:cNvSpPr>
+            <a:spLocks noGrp="1" noRot="1" noChangeAspect="1" noMove="1" noResize="1" noEditPoints="1" noAdjustHandles="1" noChangeArrowheads="1" noChangeShapeType="1" noTextEdit="1"/>
+          </p:cNvSpPr>
+          <p:nvPr>
+            <p:extLst>
+              <p:ext uri="{386F3935-93C4-4BCD-93E2-E3B085C9AB24}">
+                <p16:designElem xmlns:p16="http://schemas.microsoft.com/office/powerpoint/2015/main" val="1"/>
+              </p:ext>
+            </p:extLst>
+          </p:nvPr>
+        </p:nvSpPr>
+        <p:spPr>
+          <a:xfrm>
+            <a:off x="0" y="2203079"/>
+            <a:ext cx="8537521" cy="4147845"/>
+          </a:xfrm>
+          <a:prstGeom prst="rect">
+            <a:avLst/>
+          </a:prstGeom>
+          <a:solidFill>
+            <a:schemeClr val="bg1"/>
+          </a:solidFill>
+          <a:ln>
+            <a:noFill/>
+          </a:ln>
+          <a:effectLst>
+            <a:outerShdw blurRad="139700" dist="127000" dir="5400000" algn="t" rotWithShape="0">
+              <a:prstClr val="black">
+                <a:alpha val="15000"/>
+              </a:prstClr>
+            </a:outerShdw>
+          </a:effectLst>
+        </p:spPr>
+        <p:style>
+          <a:lnRef idx="2">
+            <a:schemeClr val="accent1">
+              <a:shade val="50000"/>
+            </a:schemeClr>
+          </a:lnRef>
+          <a:fillRef idx="1">
+            <a:schemeClr val="accent1"/>
+          </a:fillRef>
+          <a:effectRef idx="0">
+            <a:schemeClr val="accent1"/>
+          </a:effectRef>
+          <a:fontRef idx="minor">
+            <a:schemeClr val="lt1"/>
+          </a:fontRef>
+        </p:style>
+        <p:txBody>
+          <a:bodyPr rtlCol="0" anchor="ctr"/>
+          <a:lstStyle/>
+          <a:p>
+            <a:pPr algn="ctr"/>
+            <a:endParaRPr lang="en-US"/>
+          </a:p>
+        </p:txBody>
+      </p:sp>
+      <p:pic>
+        <p:nvPicPr>
+          <p:cNvPr id="5" name="Content Placeholder 4">
+            <a:extLst>
+              <a:ext uri="{FF2B5EF4-FFF2-40B4-BE49-F238E27FC236}">
+                <a16:creationId xmlns:a16="http://schemas.microsoft.com/office/drawing/2014/main" id="{C124BCC5-BC45-8F4A-453A-D063416C41D6}"/>
+              </a:ext>
+            </a:extLst>
+          </p:cNvPr>
+          <p:cNvPicPr>
+            <a:picLocks noGrp="1" noChangeAspect="1"/>
+          </p:cNvPicPr>
+          <p:nvPr>
+            <p:ph idx="1"/>
+          </p:nvPr>
+        </p:nvPicPr>
+        <p:blipFill>
+          <a:blip r:embed="rId2"/>
+          <a:stretch>
+            <a:fillRect/>
+          </a:stretch>
+        </p:blipFill>
+        <p:spPr>
+          <a:xfrm>
+            <a:off x="79103" y="2340989"/>
+            <a:ext cx="7454900" cy="2438400"/>
+          </a:xfrm>
+          <a:prstGeom prst="rect">
+            <a:avLst/>
+          </a:prstGeom>
+        </p:spPr>
+      </p:pic>
+      <p:pic>
+        <p:nvPicPr>
+          <p:cNvPr id="6" name="Picture 5">
+            <a:extLst>
+              <a:ext uri="{FF2B5EF4-FFF2-40B4-BE49-F238E27FC236}">
+                <a16:creationId xmlns:a16="http://schemas.microsoft.com/office/drawing/2014/main" id="{6B8505F5-DDE7-A0BA-C31D-E4A3E7D20CE4}"/>
+              </a:ext>
+            </a:extLst>
+          </p:cNvPr>
+          <p:cNvPicPr>
+            <a:picLocks noChangeAspect="1"/>
+          </p:cNvPicPr>
+          <p:nvPr/>
+        </p:nvPicPr>
+        <p:blipFill>
+          <a:blip r:embed="rId3"/>
+          <a:stretch>
+            <a:fillRect/>
+          </a:stretch>
+        </p:blipFill>
+        <p:spPr>
+          <a:xfrm>
+            <a:off x="79103" y="5209556"/>
+            <a:ext cx="5346700" cy="711200"/>
+          </a:xfrm>
+          <a:prstGeom prst="rect">
+            <a:avLst/>
+          </a:prstGeom>
+        </p:spPr>
+      </p:pic>
+      <p:pic>
+        <p:nvPicPr>
+          <p:cNvPr id="3" name="Picture 2" descr="Principles of map type in GO | Golang for all">
+            <a:extLst>
+              <a:ext uri="{FF2B5EF4-FFF2-40B4-BE49-F238E27FC236}">
+                <a16:creationId xmlns:a16="http://schemas.microsoft.com/office/drawing/2014/main" id="{7D01E7C5-2454-E971-939B-A66EC48F7983}"/>
+              </a:ext>
+            </a:extLst>
+          </p:cNvPr>
+          <p:cNvPicPr>
+            <a:picLocks noChangeAspect="1" noChangeArrowheads="1"/>
+          </p:cNvPicPr>
+          <p:nvPr/>
+        </p:nvPicPr>
+        <p:blipFill>
+          <a:blip r:embed="rId4">
+            <a:extLst>
+              <a:ext uri="{28A0092B-C50C-407E-A947-70E740481C1C}">
+                <a14:useLocalDpi xmlns:a14="http://schemas.microsoft.com/office/drawing/2010/main" val="0"/>
+              </a:ext>
+            </a:extLst>
+          </a:blip>
+          <a:srcRect/>
+          <a:stretch>
+            <a:fillRect/>
+          </a:stretch>
+        </p:blipFill>
+        <p:spPr bwMode="auto">
+          <a:xfrm flipH="1">
+            <a:off x="7917460" y="262271"/>
+            <a:ext cx="1056904" cy="1416469"/>
+          </a:xfrm>
+          <a:prstGeom prst="rect">
+            <a:avLst/>
+          </a:prstGeom>
+          <a:noFill/>
+          <a:extLst>
+            <a:ext uri="{909E8E84-426E-40DD-AFC4-6F175D3DCCD1}">
+              <a14:hiddenFill xmlns:a14="http://schemas.microsoft.com/office/drawing/2010/main">
+                <a:solidFill>
+                  <a:srgbClr val="FFFFFF"/>
+                </a:solidFill>
+              </a14:hiddenFill>
+            </a:ext>
+          </a:extLst>
+        </p:spPr>
+      </p:pic>
+    </p:spTree>
+    <p:extLst>
+      <p:ext uri="{BB962C8B-B14F-4D97-AF65-F5344CB8AC3E}">
+        <p14:creationId xmlns:p14="http://schemas.microsoft.com/office/powerpoint/2010/main" val="3427786389"/>
+      </p:ext>
+    </p:extLst>
+  </p:cSld>
+  <p:clrMapOvr>
+    <a:masterClrMapping/>
+  </p:clrMapOvr>
+</p:sld>
+</file>
+
+<file path=ppt/slides/slide12.xml><?xml version="1.0" encoding="utf-8"?>
+<p:sld xmlns:a="http://schemas.openxmlformats.org/drawingml/2006/main" xmlns:r="http://schemas.openxmlformats.org/officeDocument/2006/relationships" xmlns:p="http://schemas.openxmlformats.org/presentationml/2006/main">
+  <p:cSld>
+    <p:bg>
+      <p:bgPr>
+        <a:solidFill>
+          <a:schemeClr val="bg1"/>
+        </a:solidFill>
+        <a:effectLst/>
+      </p:bgPr>
+    </p:bg>
+    <p:spTree>
+      <p:nvGrpSpPr>
+        <p:cNvPr id="1" name="">
+          <a:extLst>
+            <a:ext uri="{FF2B5EF4-FFF2-40B4-BE49-F238E27FC236}">
+              <a16:creationId xmlns:a16="http://schemas.microsoft.com/office/drawing/2014/main" id="{889522E0-8191-FC52-5CFD-F2A33A7437F8}"/>
+            </a:ext>
+          </a:extLst>
+        </p:cNvPr>
+        <p:cNvGrpSpPr/>
+        <p:nvPr/>
+      </p:nvGrpSpPr>
+      <p:grpSpPr>
+        <a:xfrm>
+          <a:off x="0" y="0"/>
+          <a:ext cx="0" cy="0"/>
+          <a:chOff x="0" y="0"/>
+          <a:chExt cx="0" cy="0"/>
+        </a:xfrm>
+      </p:grpSpPr>
+      <p:sp>
+        <p:nvSpPr>
+          <p:cNvPr id="2" name="Titel 1">
+            <a:extLst>
+              <a:ext uri="{FF2B5EF4-FFF2-40B4-BE49-F238E27FC236}">
+                <a16:creationId xmlns:a16="http://schemas.microsoft.com/office/drawing/2014/main" id="{683C65F9-23E4-72A7-787D-29C9770866E9}"/>
+              </a:ext>
+            </a:extLst>
+          </p:cNvPr>
+          <p:cNvSpPr>
+            <a:spLocks noGrp="1"/>
+          </p:cNvSpPr>
+          <p:nvPr>
+            <p:ph type="title"/>
+          </p:nvPr>
+        </p:nvSpPr>
+        <p:spPr/>
+        <p:txBody>
+          <a:bodyPr anchor="b">
+            <a:normAutofit/>
+          </a:bodyPr>
+          <a:lstStyle/>
+          <a:p>
+            <a:r>
+              <a:rPr lang="de-CH" sz="4700" dirty="0"/>
+              <a:t>Defer &amp; Panic &amp; </a:t>
+            </a:r>
+            <a:r>
+              <a:rPr lang="de-CH" sz="4700" dirty="0" err="1"/>
+              <a:t>Recover</a:t>
+            </a:r>
+            <a:endParaRPr lang="de-CH" sz="4700" dirty="0"/>
+          </a:p>
+        </p:txBody>
+      </p:sp>
+      <p:sp>
+        <p:nvSpPr>
+          <p:cNvPr id="4" name="Inhaltsplatzhalter 3">
+            <a:extLst>
+              <a:ext uri="{FF2B5EF4-FFF2-40B4-BE49-F238E27FC236}">
+                <a16:creationId xmlns:a16="http://schemas.microsoft.com/office/drawing/2014/main" id="{B42A37F2-725F-EE4C-0349-7ACC77A14898}"/>
+              </a:ext>
+            </a:extLst>
+          </p:cNvPr>
+          <p:cNvSpPr>
+            <a:spLocks noGrp="1"/>
+          </p:cNvSpPr>
+          <p:nvPr>
+            <p:ph sz="half" idx="1"/>
+          </p:nvPr>
+        </p:nvSpPr>
+        <p:spPr>
+          <a:xfrm>
+            <a:off x="457199" y="1600200"/>
+            <a:ext cx="4321277" cy="4525963"/>
+          </a:xfrm>
+        </p:spPr>
+        <p:txBody>
+          <a:bodyPr anchor="ctr">
+            <a:normAutofit fontScale="92500"/>
           </a:bodyPr>
           <a:lstStyle/>
           <a:p>
@@ -17574,28 +18765,41 @@
             </a:pPr>
             <a:r>
               <a:rPr lang="de-CH" sz="2100" b="1" dirty="0"/>
-              <a:t>Defer:</a:t>
+              <a:t>Defer -&gt; </a:t>
+            </a:r>
+            <a:r>
+              <a:rPr lang="en-CH" sz="2100" i="1" dirty="0"/>
+              <a:t>finally</a:t>
+            </a:r>
+            <a:r>
+              <a:rPr lang="de-CH" sz="2100" b="1" dirty="0"/>
+              <a:t>:</a:t>
             </a:r>
           </a:p>
           <a:p>
             <a:r>
               <a:rPr lang="de-CH" sz="2100" dirty="0"/>
-              <a:t>Wird am Ende der Funktion ausgeführt</a:t>
+              <a:t>Code, der garantiert ganz am Ende ausgeführt wird.</a:t>
             </a:r>
           </a:p>
           <a:p>
             <a:r>
               <a:rPr lang="de-CH" sz="2100" dirty="0"/>
-              <a:t>Mehrere </a:t>
+              <a:t>Ähnlich wie Try-</a:t>
             </a:r>
             <a:r>
               <a:rPr lang="de-CH" sz="2100" dirty="0" err="1"/>
-              <a:t>defer</a:t>
+              <a:t>with</a:t>
             </a:r>
             <a:r>
               <a:rPr lang="de-CH" sz="2100" dirty="0"/>
-              <a:t> werden rückwärts ausgeführt (LIFO aka Stack)</a:t>
-            </a:r>
+              <a:t>-</a:t>
+            </a:r>
+            <a:r>
+              <a:rPr lang="de-CH" sz="2100" dirty="0" err="1"/>
+              <a:t>resources</a:t>
+            </a:r>
+            <a:endParaRPr lang="de-CH" sz="2100" dirty="0"/>
           </a:p>
           <a:p>
             <a:r>
@@ -17610,6 +18814,13 @@
               <a:rPr lang="de-CH" sz="2100" dirty="0"/>
               <a:t> ausgeführt</a:t>
             </a:r>
+          </a:p>
+          <a:p>
+            <a:r>
+              <a:rPr lang="de-CH" sz="2100" dirty="0" err="1"/>
+              <a:t>Stackbasiert</a:t>
+            </a:r>
+            <a:endParaRPr lang="de-CH" sz="2100" dirty="0"/>
           </a:p>
           <a:p>
             <a:pPr marL="0" indent="0">
@@ -17617,31 +18828,33 @@
             </a:pPr>
             <a:r>
               <a:rPr lang="de-CH" sz="2100" b="1" dirty="0"/>
-              <a:t>Panic:</a:t>
+              <a:t>Panic -&gt; </a:t>
+            </a:r>
+            <a:r>
+              <a:rPr lang="en-CH" sz="2100" i="1" dirty="0"/>
+              <a:t>throw new RuntimeException</a:t>
+            </a:r>
+            <a:r>
+              <a:rPr lang="de-CH" sz="2100" b="1" dirty="0"/>
+              <a:t>:</a:t>
             </a:r>
           </a:p>
           <a:p>
             <a:r>
               <a:rPr lang="de-CH" sz="2100" dirty="0"/>
-              <a:t>Stoppt die Programmausführung</a:t>
+              <a:t>Löst sofort einen fatalen Fehler aus und stoppt das normale Programm</a:t>
             </a:r>
           </a:p>
           <a:p>
             <a:r>
               <a:rPr lang="de-CH" sz="2100" dirty="0"/>
-              <a:t>Springt sofort zu </a:t>
+              <a:t>Springt direkt zu </a:t>
             </a:r>
             <a:r>
               <a:rPr lang="de-CH" sz="2100" dirty="0" err="1"/>
               <a:t>defer</a:t>
             </a:r>
             <a:endParaRPr lang="de-CH" sz="2100" dirty="0"/>
-          </a:p>
-          <a:p>
-            <a:r>
-              <a:rPr lang="de-CH" sz="2100" dirty="0"/>
-              <a:t>Kann eigene Fehlermeldungen enthalten</a:t>
-            </a:r>
           </a:p>
           <a:p>
             <a:pPr marL="0" indent="0">
@@ -17653,6 +18866,14 @@
             </a:r>
             <a:r>
               <a:rPr lang="de-CH" sz="2100" b="1" dirty="0"/>
+              <a:t> -&gt; </a:t>
+            </a:r>
+            <a:r>
+              <a:rPr lang="en-CH" sz="2100" i="1" dirty="0"/>
+              <a:t>catch</a:t>
+            </a:r>
+            <a:r>
+              <a:rPr lang="de-CH" sz="2100" b="1" dirty="0"/>
               <a:t>:</a:t>
             </a:r>
           </a:p>
@@ -17674,20 +18895,6 @@
             <a:r>
               <a:rPr lang="de-CH" sz="2100" dirty="0"/>
               <a:t>Verhindert Absturz des Programms</a:t>
-            </a:r>
-          </a:p>
-          <a:p>
-            <a:r>
-              <a:rPr lang="de-CH" sz="2100" dirty="0"/>
-              <a:t>Funktioniert nur innerhalb von </a:t>
-            </a:r>
-            <a:r>
-              <a:rPr lang="de-CH" sz="2100" dirty="0" err="1"/>
-              <a:t>defer</a:t>
-            </a:r>
-            <a:r>
-              <a:rPr lang="de-CH" sz="2100" dirty="0"/>
-              <a:t> und gibt Panic-Wert zurück</a:t>
             </a:r>
           </a:p>
         </p:txBody>
@@ -17707,7 +18914,7 @@
           <p:nvPr/>
         </p:nvPicPr>
         <p:blipFill>
-          <a:blip r:embed="rId2">
+          <a:blip r:embed="rId3">
             <a:extLst>
               <a:ext uri="{28A0092B-C50C-407E-A947-70E740481C1C}">
                 <a14:useLocalDpi xmlns:a14="http://schemas.microsoft.com/office/drawing/2010/main" val="0"/>
@@ -17739,6 +18946,55 @@
           </a:extLst>
         </p:spPr>
       </p:pic>
+      <p:pic>
+        <p:nvPicPr>
+          <p:cNvPr id="7170" name="Picture 2">
+            <a:extLst>
+              <a:ext uri="{FF2B5EF4-FFF2-40B4-BE49-F238E27FC236}">
+                <a16:creationId xmlns:a16="http://schemas.microsoft.com/office/drawing/2014/main" id="{BF63AEF3-8E6F-E535-87EA-2BCB42627D4D}"/>
+              </a:ext>
+            </a:extLst>
+          </p:cNvPr>
+          <p:cNvPicPr>
+            <a:picLocks noGrp="1" noChangeAspect="1" noChangeArrowheads="1"/>
+          </p:cNvPicPr>
+          <p:nvPr>
+            <p:ph sz="half" idx="2"/>
+          </p:nvPr>
+        </p:nvPicPr>
+        <p:blipFill>
+          <a:blip r:embed="rId4">
+            <a:extLst>
+              <a:ext uri="{28A0092B-C50C-407E-A947-70E740481C1C}">
+                <a14:useLocalDpi xmlns:a14="http://schemas.microsoft.com/office/drawing/2010/main" val="0"/>
+              </a:ext>
+            </a:extLst>
+          </a:blip>
+          <a:srcRect/>
+          <a:stretch>
+            <a:fillRect/>
+          </a:stretch>
+        </p:blipFill>
+        <p:spPr bwMode="auto">
+          <a:xfrm>
+            <a:off x="4648200" y="2088645"/>
+            <a:ext cx="4038600" cy="3549072"/>
+          </a:xfrm>
+          <a:prstGeom prst="rect">
+            <a:avLst/>
+          </a:prstGeom>
+          <a:noFill/>
+          <a:extLst>
+            <a:ext uri="{909E8E84-426E-40DD-AFC4-6F175D3DCCD1}">
+              <a14:hiddenFill xmlns:a14="http://schemas.microsoft.com/office/drawing/2010/main">
+                <a:solidFill>
+                  <a:srgbClr val="FFFFFF"/>
+                </a:solidFill>
+              </a14:hiddenFill>
+            </a:ext>
+          </a:extLst>
+        </p:spPr>
+      </p:pic>
     </p:spTree>
     <p:extLst>
       <p:ext uri="{BB962C8B-B14F-4D97-AF65-F5344CB8AC3E}">
@@ -17752,7 +19008,7 @@
 </p:sld>
 </file>
 
-<file path=ppt/slides/slide11.xml><?xml version="1.0" encoding="utf-8"?>
+<file path=ppt/slides/slide13.xml><?xml version="1.0" encoding="utf-8"?>
 <p:sld xmlns:a="http://schemas.openxmlformats.org/drawingml/2006/main" xmlns:r="http://schemas.openxmlformats.org/officeDocument/2006/relationships" xmlns:p="http://schemas.openxmlformats.org/presentationml/2006/main">
   <p:cSld>
     <p:bg>
@@ -18262,7 +19518,7 @@
 </p:sld>
 </file>
 
-<file path=ppt/slides/slide12.xml><?xml version="1.0" encoding="utf-8"?>
+<file path=ppt/slides/slide14.xml><?xml version="1.0" encoding="utf-8"?>
 <p:sld xmlns:a="http://schemas.openxmlformats.org/drawingml/2006/main" xmlns:r="http://schemas.openxmlformats.org/officeDocument/2006/relationships" xmlns:p="http://schemas.openxmlformats.org/presentationml/2006/main">
   <p:cSld>
     <p:bg>
@@ -18278,7 +19534,7 @@
         <p:cNvPr id="1" name="">
           <a:extLst>
             <a:ext uri="{FF2B5EF4-FFF2-40B4-BE49-F238E27FC236}">
-              <a16:creationId xmlns:a16="http://schemas.microsoft.com/office/drawing/2014/main" id="{20083E05-8DA5-F060-89D7-20656CB60847}"/>
+              <a16:creationId xmlns:a16="http://schemas.microsoft.com/office/drawing/2014/main" id="{CE34B898-13FC-0D32-A097-028F5028F164}"/>
             </a:ext>
           </a:extLst>
         </p:cNvPr>
@@ -18298,7 +19554,7 @@
           <p:cNvPr id="2057" name="Rectangle 2056">
             <a:extLst>
               <a:ext uri="{FF2B5EF4-FFF2-40B4-BE49-F238E27FC236}">
-                <a16:creationId xmlns:a16="http://schemas.microsoft.com/office/drawing/2014/main" id="{7E68462F-040C-2519-41D1-B8764D7DFB83}"/>
+                <a16:creationId xmlns:a16="http://schemas.microsoft.com/office/drawing/2014/main" id="{C998945D-2183-E218-85BA-4C19A3117EA0}"/>
               </a:ext>
               <a:ext uri="{C183D7F6-B498-43B3-948B-1728B52AA6E4}">
                 <adec:decorative xmlns:adec="http://schemas.microsoft.com/office/drawing/2017/decorative" val="1"/>
@@ -18358,7 +19614,7 @@
           <p:cNvPr id="2" name="Titel 1">
             <a:extLst>
               <a:ext uri="{FF2B5EF4-FFF2-40B4-BE49-F238E27FC236}">
-                <a16:creationId xmlns:a16="http://schemas.microsoft.com/office/drawing/2014/main" id="{60BAE5CC-D4E8-DBEC-F3E7-E04078AA7525}"/>
+                <a16:creationId xmlns:a16="http://schemas.microsoft.com/office/drawing/2014/main" id="{D098F81B-12AD-584F-0621-D2E389F6FC21}"/>
               </a:ext>
             </a:extLst>
           </p:cNvPr>
@@ -18402,7 +19658,7 @@
           <p:cNvPr id="2059" name="Group 2058">
             <a:extLst>
               <a:ext uri="{FF2B5EF4-FFF2-40B4-BE49-F238E27FC236}">
-                <a16:creationId xmlns:a16="http://schemas.microsoft.com/office/drawing/2014/main" id="{98ACF4CF-7998-811A-227C-5EBE8C223C7F}"/>
+                <a16:creationId xmlns:a16="http://schemas.microsoft.com/office/drawing/2014/main" id="{2D90C02A-7658-3950-9411-AF5E7672E4CC}"/>
               </a:ext>
               <a:ext uri="{C183D7F6-B498-43B3-948B-1728B52AA6E4}">
                 <adec:decorative xmlns:adec="http://schemas.microsoft.com/office/drawing/2017/decorative" val="1"/>
@@ -18433,7 +19689,7 @@
             <p:cNvPr id="2060" name="Rectangle 2059">
               <a:extLst>
                 <a:ext uri="{FF2B5EF4-FFF2-40B4-BE49-F238E27FC236}">
-                  <a16:creationId xmlns:a16="http://schemas.microsoft.com/office/drawing/2014/main" id="{BD93F3F9-CED9-38C3-8F87-1ED11BB186F2}"/>
+                  <a16:creationId xmlns:a16="http://schemas.microsoft.com/office/drawing/2014/main" id="{0EACA24A-0308-2216-7B05-EB3A4DDF016E}"/>
                 </a:ext>
                 <a:ext uri="{C183D7F6-B498-43B3-948B-1728B52AA6E4}">
                   <adec:decorative xmlns:adec="http://schemas.microsoft.com/office/drawing/2017/decorative" val="1"/>
@@ -18494,7 +19750,7 @@
             <p:cNvPr id="2061" name="Rectangle 2060">
               <a:extLst>
                 <a:ext uri="{FF2B5EF4-FFF2-40B4-BE49-F238E27FC236}">
-                  <a16:creationId xmlns:a16="http://schemas.microsoft.com/office/drawing/2014/main" id="{6532D027-F793-7D84-6972-C6637034235E}"/>
+                  <a16:creationId xmlns:a16="http://schemas.microsoft.com/office/drawing/2014/main" id="{3F02C177-0E45-062E-3743-AE77E7C04FF4}"/>
                 </a:ext>
                 <a:ext uri="{C183D7F6-B498-43B3-948B-1728B52AA6E4}">
                   <adec:decorative xmlns:adec="http://schemas.microsoft.com/office/drawing/2017/decorative" val="1"/>
@@ -18556,7 +19812,7 @@
           <p:cNvPr id="2063" name="Rectangle 2062">
             <a:extLst>
               <a:ext uri="{FF2B5EF4-FFF2-40B4-BE49-F238E27FC236}">
-                <a16:creationId xmlns:a16="http://schemas.microsoft.com/office/drawing/2014/main" id="{98419B50-645B-3496-56B6-147C308C10CA}"/>
+                <a16:creationId xmlns:a16="http://schemas.microsoft.com/office/drawing/2014/main" id="{5606CF39-0F2B-2ABB-773A-AC89545166F9}"/>
               </a:ext>
               <a:ext uri="{C183D7F6-B498-43B3-948B-1728B52AA6E4}">
                 <adec:decorative xmlns:adec="http://schemas.microsoft.com/office/drawing/2017/decorative" val="1"/>
@@ -18626,7 +19882,7 @@
           <p:cNvPr id="2065" name="Inhaltsplatzhalter 3">
             <a:extLst>
               <a:ext uri="{FF2B5EF4-FFF2-40B4-BE49-F238E27FC236}">
-                <a16:creationId xmlns:a16="http://schemas.microsoft.com/office/drawing/2014/main" id="{71116FDD-296C-4765-5835-808C8408B18A}"/>
+                <a16:creationId xmlns:a16="http://schemas.microsoft.com/office/drawing/2014/main" id="{36FCF76C-24F2-F076-5D48-7A8C53BA498C}"/>
               </a:ext>
             </a:extLst>
           </p:cNvPr>
@@ -18652,7 +19908,7 @@
           <p:cNvPr id="2052" name="Picture 4" descr="Learning Golang in 24 hours | Kislay Verma">
             <a:extLst>
               <a:ext uri="{FF2B5EF4-FFF2-40B4-BE49-F238E27FC236}">
-                <a16:creationId xmlns:a16="http://schemas.microsoft.com/office/drawing/2014/main" id="{EFDAC631-A1D3-6140-E10F-83087B1F2D8E}"/>
+                <a16:creationId xmlns:a16="http://schemas.microsoft.com/office/drawing/2014/main" id="{C34E99D4-BFE0-DFD2-EBBB-F76985C335FF}"/>
               </a:ext>
             </a:extLst>
           </p:cNvPr>
@@ -18697,7 +19953,7 @@
     </p:spTree>
     <p:extLst>
       <p:ext uri="{BB962C8B-B14F-4D97-AF65-F5344CB8AC3E}">
-        <p14:creationId xmlns:p14="http://schemas.microsoft.com/office/powerpoint/2010/main" val="1537264246"/>
+        <p14:creationId xmlns:p14="http://schemas.microsoft.com/office/powerpoint/2010/main" val="1198289947"/>
       </p:ext>
     </p:extLst>
   </p:cSld>
@@ -18707,7 +19963,7 @@
 </p:sld>
 </file>
 
-<file path=ppt/slides/slide13.xml><?xml version="1.0" encoding="utf-8"?>
+<file path=ppt/slides/slide15.xml><?xml version="1.0" encoding="utf-8"?>
 <p:sld xmlns:a="http://schemas.openxmlformats.org/drawingml/2006/main" xmlns:r="http://schemas.openxmlformats.org/officeDocument/2006/relationships" xmlns:p="http://schemas.openxmlformats.org/presentationml/2006/main">
   <p:cSld>
     <p:bg>
@@ -19440,7 +20696,7 @@
 </p:sld>
 </file>
 
-<file path=ppt/slides/slide14.xml><?xml version="1.0" encoding="utf-8"?>
+<file path=ppt/slides/slide16.xml><?xml version="1.0" encoding="utf-8"?>
 <p:sld xmlns:a="http://schemas.openxmlformats.org/drawingml/2006/main" xmlns:r="http://schemas.openxmlformats.org/officeDocument/2006/relationships" xmlns:p="http://schemas.openxmlformats.org/presentationml/2006/main">
   <p:cSld>
     <p:bg>
@@ -19880,7 +21136,7 @@
 </p:sld>
 </file>
 
-<file path=ppt/slides/slide15.xml><?xml version="1.0" encoding="utf-8"?>
+<file path=ppt/slides/slide17.xml><?xml version="1.0" encoding="utf-8"?>
 <p:sld xmlns:a="http://schemas.openxmlformats.org/drawingml/2006/main" xmlns:r="http://schemas.openxmlformats.org/officeDocument/2006/relationships" xmlns:p="http://schemas.openxmlformats.org/presentationml/2006/main">
   <p:cSld>
     <p:bg>
@@ -20164,7 +21420,7 @@
 </p:sld>
 </file>
 
-<file path=ppt/slides/slide16.xml><?xml version="1.0" encoding="utf-8"?>
+<file path=ppt/slides/slide18.xml><?xml version="1.0" encoding="utf-8"?>
 <p:sld xmlns:a="http://schemas.openxmlformats.org/drawingml/2006/main" xmlns:r="http://schemas.openxmlformats.org/officeDocument/2006/relationships" xmlns:p="http://schemas.openxmlformats.org/presentationml/2006/main">
   <p:cSld>
     <p:bg>
@@ -20556,7 +21812,7 @@
           <a:p>
             <a:r>
               <a:rPr lang="de-CH" sz="2100" dirty="0"/>
-              <a:t>Weniger Komplex</a:t>
+              <a:t>Weniger komplex</a:t>
             </a:r>
           </a:p>
           <a:p>
@@ -20646,7 +21902,7 @@
 </p:sld>
 </file>
 
-<file path=ppt/slides/slide17.xml><?xml version="1.0" encoding="utf-8"?>
+<file path=ppt/slides/slide19.xml><?xml version="1.0" encoding="utf-8"?>
 <p:sld xmlns:a="http://schemas.openxmlformats.org/drawingml/2006/main" xmlns:r="http://schemas.openxmlformats.org/officeDocument/2006/relationships" xmlns:p="http://schemas.openxmlformats.org/presentationml/2006/main">
   <p:cSld>
     <p:bg>
@@ -21042,7 +22298,520 @@
 </p:sld>
 </file>
 
-<file path=ppt/slides/slide18.xml><?xml version="1.0" encoding="utf-8"?>
+<file path=ppt/slides/slide2.xml><?xml version="1.0" encoding="utf-8"?>
+<p:sld xmlns:a="http://schemas.openxmlformats.org/drawingml/2006/main" xmlns:r="http://schemas.openxmlformats.org/officeDocument/2006/relationships" xmlns:p="http://schemas.openxmlformats.org/presentationml/2006/main">
+  <p:cSld>
+    <p:bg>
+      <p:bgPr>
+        <a:solidFill>
+          <a:schemeClr val="bg1"/>
+        </a:solidFill>
+        <a:effectLst/>
+      </p:bgPr>
+    </p:bg>
+    <p:spTree>
+      <p:nvGrpSpPr>
+        <p:cNvPr id="1" name=""/>
+        <p:cNvGrpSpPr/>
+        <p:nvPr/>
+      </p:nvGrpSpPr>
+      <p:grpSpPr>
+        <a:xfrm>
+          <a:off x="0" y="0"/>
+          <a:ext cx="0" cy="0"/>
+          <a:chOff x="0" y="0"/>
+          <a:chExt cx="0" cy="0"/>
+        </a:xfrm>
+      </p:grpSpPr>
+      <p:sp useBgFill="1">
+        <p:nvSpPr>
+          <p:cNvPr id="2068" name="Rectangle 2067">
+            <a:extLst>
+              <a:ext uri="{FF2B5EF4-FFF2-40B4-BE49-F238E27FC236}">
+                <a16:creationId xmlns:a16="http://schemas.microsoft.com/office/drawing/2014/main" id="{3AD318CC-E2A8-4E27-9548-A047A78999B1}"/>
+              </a:ext>
+              <a:ext uri="{C183D7F6-B498-43B3-948B-1728B52AA6E4}">
+                <adec:decorative xmlns:adec="http://schemas.microsoft.com/office/drawing/2017/decorative" val="1"/>
+              </a:ext>
+            </a:extLst>
+          </p:cNvPr>
+          <p:cNvSpPr>
+            <a:spLocks noGrp="1" noRot="1" noChangeAspect="1" noMove="1" noResize="1" noEditPoints="1" noAdjustHandles="1" noChangeArrowheads="1" noChangeShapeType="1" noTextEdit="1"/>
+          </p:cNvSpPr>
+          <p:nvPr>
+            <p:extLst>
+              <p:ext uri="{386F3935-93C4-4BCD-93E2-E3B085C9AB24}">
+                <p16:designElem xmlns:p16="http://schemas.microsoft.com/office/powerpoint/2015/main" val="1"/>
+              </p:ext>
+            </p:extLst>
+          </p:nvPr>
+        </p:nvSpPr>
+        <p:spPr>
+          <a:xfrm>
+            <a:off x="0" y="0"/>
+            <a:ext cx="9143999" cy="6857365"/>
+          </a:xfrm>
+          <a:prstGeom prst="rect">
+            <a:avLst/>
+          </a:prstGeom>
+          <a:ln>
+            <a:noFill/>
+          </a:ln>
+        </p:spPr>
+        <p:style>
+          <a:lnRef idx="2">
+            <a:schemeClr val="accent1">
+              <a:shade val="50000"/>
+            </a:schemeClr>
+          </a:lnRef>
+          <a:fillRef idx="1">
+            <a:schemeClr val="accent1"/>
+          </a:fillRef>
+          <a:effectRef idx="0">
+            <a:schemeClr val="accent1"/>
+          </a:effectRef>
+          <a:fontRef idx="minor">
+            <a:schemeClr val="lt1"/>
+          </a:fontRef>
+        </p:style>
+        <p:txBody>
+          <a:bodyPr rtlCol="0" anchor="ctr"/>
+          <a:lstStyle/>
+          <a:p>
+            <a:pPr algn="ctr"/>
+            <a:endParaRPr lang="en-US"/>
+          </a:p>
+        </p:txBody>
+      </p:sp>
+      <p:sp>
+        <p:nvSpPr>
+          <p:cNvPr id="2" name="Titel 1">
+            <a:extLst>
+              <a:ext uri="{FF2B5EF4-FFF2-40B4-BE49-F238E27FC236}">
+                <a16:creationId xmlns:a16="http://schemas.microsoft.com/office/drawing/2014/main" id="{710A1EB6-AD89-4B38-B328-726CF9C21286}"/>
+              </a:ext>
+            </a:extLst>
+          </p:cNvPr>
+          <p:cNvSpPr>
+            <a:spLocks noGrp="1"/>
+          </p:cNvSpPr>
+          <p:nvPr>
+            <p:ph type="title"/>
+          </p:nvPr>
+        </p:nvSpPr>
+        <p:spPr>
+          <a:xfrm>
+            <a:off x="483798" y="1463040"/>
+            <a:ext cx="2847230" cy="2690949"/>
+          </a:xfrm>
+        </p:spPr>
+        <p:txBody>
+          <a:bodyPr anchor="t">
+            <a:normAutofit/>
+          </a:bodyPr>
+          <a:lstStyle/>
+          <a:p>
+            <a:r>
+              <a:rPr lang="de-CH" sz="4200"/>
+              <a:t>Vision</a:t>
+            </a:r>
+          </a:p>
+        </p:txBody>
+      </p:sp>
+      <p:grpSp>
+        <p:nvGrpSpPr>
+          <p:cNvPr id="2070" name="Group 2069">
+            <a:extLst>
+              <a:ext uri="{FF2B5EF4-FFF2-40B4-BE49-F238E27FC236}">
+                <a16:creationId xmlns:a16="http://schemas.microsoft.com/office/drawing/2014/main" id="{B14B560F-9DD7-4302-A60B-EBD3EF59B073}"/>
+              </a:ext>
+              <a:ext uri="{C183D7F6-B498-43B3-948B-1728B52AA6E4}">
+                <adec:decorative xmlns:adec="http://schemas.microsoft.com/office/drawing/2017/decorative" val="1"/>
+              </a:ext>
+            </a:extLst>
+          </p:cNvPr>
+          <p:cNvGrpSpPr>
+            <a:grpSpLocks noGrp="1" noUngrp="1" noRot="1" noChangeAspect="1" noMove="1" noResize="1"/>
+          </p:cNvGrpSpPr>
+          <p:nvPr>
+            <p:extLst>
+              <p:ext uri="{386F3935-93C4-4BCD-93E2-E3B085C9AB24}">
+                <p16:designElem xmlns:p16="http://schemas.microsoft.com/office/powerpoint/2015/main" val="1"/>
+              </p:ext>
+            </p:extLst>
+          </p:nvPr>
+        </p:nvGrpSpPr>
+        <p:grpSpPr>
+          <a:xfrm>
+            <a:off x="157250" y="4415246"/>
+            <a:ext cx="8986749" cy="2087795"/>
+            <a:chOff x="143163" y="5763486"/>
+            <a:chExt cx="11982332" cy="739555"/>
+          </a:xfrm>
+        </p:grpSpPr>
+        <p:sp>
+          <p:nvSpPr>
+            <p:cNvPr id="2071" name="Rectangle 2070">
+              <a:extLst>
+                <a:ext uri="{FF2B5EF4-FFF2-40B4-BE49-F238E27FC236}">
+                  <a16:creationId xmlns:a16="http://schemas.microsoft.com/office/drawing/2014/main" id="{3A9A4357-BD1D-4622-A4FE-766E6AB8DE84}"/>
+                </a:ext>
+                <a:ext uri="{C183D7F6-B498-43B3-948B-1728B52AA6E4}">
+                  <adec:decorative xmlns:adec="http://schemas.microsoft.com/office/drawing/2017/decorative" val="1"/>
+                </a:ext>
+              </a:extLst>
+            </p:cNvPr>
+            <p:cNvSpPr/>
+            <p:nvPr>
+              <p:extLst>
+                <p:ext uri="{386F3935-93C4-4BCD-93E2-E3B085C9AB24}">
+                  <p16:designElem xmlns:p16="http://schemas.microsoft.com/office/powerpoint/2015/main" val="1"/>
+                </p:ext>
+              </p:extLst>
+            </p:nvPr>
+          </p:nvSpPr>
+          <p:spPr>
+            <a:xfrm flipH="1" flipV="1">
+              <a:off x="357444" y="5763486"/>
+              <a:ext cx="11768051" cy="739555"/>
+            </a:xfrm>
+            <a:prstGeom prst="rect">
+              <a:avLst/>
+            </a:prstGeom>
+            <a:solidFill>
+              <a:schemeClr val="accent4"/>
+            </a:solidFill>
+            <a:ln>
+              <a:noFill/>
+            </a:ln>
+          </p:spPr>
+          <p:style>
+            <a:lnRef idx="2">
+              <a:schemeClr val="accent1">
+                <a:shade val="50000"/>
+              </a:schemeClr>
+            </a:lnRef>
+            <a:fillRef idx="1">
+              <a:schemeClr val="accent1"/>
+            </a:fillRef>
+            <a:effectRef idx="0">
+              <a:schemeClr val="accent1"/>
+            </a:effectRef>
+            <a:fontRef idx="minor">
+              <a:schemeClr val="lt1"/>
+            </a:fontRef>
+          </p:style>
+          <p:txBody>
+            <a:bodyPr rtlCol="0" anchor="ctr"/>
+            <a:lstStyle/>
+            <a:p>
+              <a:pPr algn="ctr"/>
+              <a:endParaRPr lang="en-US"/>
+            </a:p>
+          </p:txBody>
+        </p:sp>
+        <p:cxnSp>
+          <p:nvCxnSpPr>
+            <p:cNvPr id="2072" name="Straight Connector 2071">
+              <a:extLst>
+                <a:ext uri="{FF2B5EF4-FFF2-40B4-BE49-F238E27FC236}">
+                  <a16:creationId xmlns:a16="http://schemas.microsoft.com/office/drawing/2014/main" id="{C21D6966-343E-49AC-A026-D2497E0C3CA1}"/>
+                </a:ext>
+                <a:ext uri="{C183D7F6-B498-43B3-948B-1728B52AA6E4}">
+                  <adec:decorative xmlns:adec="http://schemas.microsoft.com/office/drawing/2017/decorative" val="1"/>
+                </a:ext>
+              </a:extLst>
+            </p:cNvPr>
+            <p:cNvCxnSpPr>
+              <a:cxnSpLocks/>
+            </p:cNvCxnSpPr>
+            <p:nvPr>
+              <p:extLst>
+                <p:ext uri="{386F3935-93C4-4BCD-93E2-E3B085C9AB24}">
+                  <p16:designElem xmlns:p16="http://schemas.microsoft.com/office/powerpoint/2015/main" val="1"/>
+                </p:ext>
+              </p:extLst>
+            </p:nvPr>
+          </p:nvCxnSpPr>
+          <p:spPr>
+            <a:xfrm flipH="1">
+              <a:off x="143163" y="5763486"/>
+              <a:ext cx="1" cy="739555"/>
+            </a:xfrm>
+            <a:prstGeom prst="line">
+              <a:avLst/>
+            </a:prstGeom>
+            <a:ln w="177800">
+              <a:solidFill>
+                <a:schemeClr val="accent4"/>
+              </a:solidFill>
+            </a:ln>
+          </p:spPr>
+          <p:style>
+            <a:lnRef idx="1">
+              <a:schemeClr val="accent1"/>
+            </a:lnRef>
+            <a:fillRef idx="0">
+              <a:schemeClr val="accent1"/>
+            </a:fillRef>
+            <a:effectRef idx="0">
+              <a:schemeClr val="accent1"/>
+            </a:effectRef>
+            <a:fontRef idx="minor">
+              <a:schemeClr val="tx1"/>
+            </a:fontRef>
+          </p:style>
+        </p:cxnSp>
+      </p:grpSp>
+      <p:sp>
+        <p:nvSpPr>
+          <p:cNvPr id="2074" name="Rectangle 2073">
+            <a:extLst>
+              <a:ext uri="{FF2B5EF4-FFF2-40B4-BE49-F238E27FC236}">
+                <a16:creationId xmlns:a16="http://schemas.microsoft.com/office/drawing/2014/main" id="{2C1BBA94-3F40-40AA-8BB9-E69E25E537C1}"/>
+              </a:ext>
+              <a:ext uri="{C183D7F6-B498-43B3-948B-1728B52AA6E4}">
+                <adec:decorative xmlns:adec="http://schemas.microsoft.com/office/drawing/2017/decorative" val="1"/>
+              </a:ext>
+            </a:extLst>
+          </p:cNvPr>
+          <p:cNvSpPr>
+            <a:spLocks noGrp="1" noRot="1" noChangeAspect="1" noMove="1" noResize="1" noEditPoints="1" noAdjustHandles="1" noChangeArrowheads="1" noChangeShapeType="1" noTextEdit="1"/>
+          </p:cNvSpPr>
+          <p:nvPr>
+            <p:extLst>
+              <p:ext uri="{386F3935-93C4-4BCD-93E2-E3B085C9AB24}">
+                <p16:designElem xmlns:p16="http://schemas.microsoft.com/office/powerpoint/2015/main" val="1"/>
+              </p:ext>
+            </p:extLst>
+          </p:nvPr>
+        </p:nvSpPr>
+        <p:spPr>
+          <a:xfrm>
+            <a:off x="3850279" y="587829"/>
+            <a:ext cx="4878975" cy="5682342"/>
+          </a:xfrm>
+          <a:prstGeom prst="rect">
+            <a:avLst/>
+          </a:prstGeom>
+          <a:solidFill>
+            <a:schemeClr val="bg1"/>
+          </a:solidFill>
+          <a:ln>
+            <a:noFill/>
+          </a:ln>
+          <a:effectLst>
+            <a:outerShdw blurRad="139700" dist="127000" dir="5400000" algn="t" rotWithShape="0">
+              <a:prstClr val="black">
+                <a:alpha val="15000"/>
+              </a:prstClr>
+            </a:outerShdw>
+          </a:effectLst>
+        </p:spPr>
+        <p:style>
+          <a:lnRef idx="2">
+            <a:schemeClr val="accent1">
+              <a:shade val="50000"/>
+            </a:schemeClr>
+          </a:lnRef>
+          <a:fillRef idx="1">
+            <a:schemeClr val="accent1"/>
+          </a:fillRef>
+          <a:effectRef idx="0">
+            <a:schemeClr val="accent1"/>
+          </a:effectRef>
+          <a:fontRef idx="minor">
+            <a:schemeClr val="lt1"/>
+          </a:fontRef>
+        </p:style>
+        <p:txBody>
+          <a:bodyPr rtlCol="0" anchor="ctr"/>
+          <a:lstStyle/>
+          <a:p>
+            <a:pPr algn="ctr"/>
+            <a:endParaRPr lang="en-US"/>
+          </a:p>
+        </p:txBody>
+      </p:sp>
+      <p:sp>
+        <p:nvSpPr>
+          <p:cNvPr id="4" name="Inhaltsplatzhalter 3">
+            <a:extLst>
+              <a:ext uri="{FF2B5EF4-FFF2-40B4-BE49-F238E27FC236}">
+                <a16:creationId xmlns:a16="http://schemas.microsoft.com/office/drawing/2014/main" id="{3EDAB6A7-60DE-D475-B6EF-B1A6D39349F1}"/>
+              </a:ext>
+            </a:extLst>
+          </p:cNvPr>
+          <p:cNvSpPr>
+            <a:spLocks noGrp="1"/>
+          </p:cNvSpPr>
+          <p:nvPr>
+            <p:ph idx="1"/>
+          </p:nvPr>
+        </p:nvSpPr>
+        <p:spPr>
+          <a:xfrm>
+            <a:off x="4242163" y="1463039"/>
+            <a:ext cx="4245132" cy="4300447"/>
+          </a:xfrm>
+        </p:spPr>
+        <p:txBody>
+          <a:bodyPr anchor="t">
+            <a:normAutofit/>
+          </a:bodyPr>
+          <a:lstStyle/>
+          <a:p>
+            <a:pPr marL="0" indent="0">
+              <a:buNone/>
+            </a:pPr>
+            <a:r>
+              <a:rPr lang="de-CH" sz="1900" b="1" dirty="0"/>
+              <a:t>Kernidee</a:t>
+            </a:r>
+          </a:p>
+          <a:p>
+            <a:pPr>
+              <a:buFont typeface="Wingdings" panose="05000000000000000000" pitchFamily="2" charset="2"/>
+              <a:buChar char="Ø"/>
+            </a:pPr>
+            <a:r>
+              <a:rPr lang="de-CH" sz="1900" dirty="0"/>
+              <a:t>Grosse Systeme bei Google wurden immer komplexer, </a:t>
+            </a:r>
+            <a:r>
+              <a:rPr lang="de-CH" sz="1900" dirty="0" err="1"/>
+              <a:t>Builds</a:t>
+            </a:r>
+            <a:r>
+              <a:rPr lang="de-CH" sz="1900" dirty="0"/>
+              <a:t> dauerten lange und viele Sprachen waren zu kompliziert oder zu ineffizient </a:t>
+            </a:r>
+            <a:r>
+              <a:rPr lang="de-CH" sz="1900" dirty="0">
+                <a:sym typeface="Wingdings" panose="05000000000000000000" pitchFamily="2" charset="2"/>
+              </a:rPr>
+              <a:t> </a:t>
+            </a:r>
+            <a:r>
+              <a:rPr lang="de-CH" sz="1900" b="1" dirty="0">
+                <a:sym typeface="Wingdings" panose="05000000000000000000" pitchFamily="2" charset="2"/>
+              </a:rPr>
+              <a:t>Go sollte die Mitte treffen</a:t>
+            </a:r>
+            <a:endParaRPr lang="de-CH" sz="1900" dirty="0"/>
+          </a:p>
+          <a:p>
+            <a:pPr marL="0" indent="0">
+              <a:buNone/>
+            </a:pPr>
+            <a:r>
+              <a:rPr lang="de-CH" sz="1900" b="1" dirty="0"/>
+              <a:t>Die wichtigsten Prinzipien der Go-Vision</a:t>
+            </a:r>
+          </a:p>
+          <a:p>
+            <a:pPr>
+              <a:buFont typeface="Wingdings" panose="05000000000000000000" pitchFamily="2" charset="2"/>
+              <a:buChar char="Ø"/>
+            </a:pPr>
+            <a:r>
+              <a:rPr lang="de-CH" sz="1900" dirty="0"/>
+              <a:t>Einfachheit über alles</a:t>
+            </a:r>
+          </a:p>
+          <a:p>
+            <a:pPr>
+              <a:buFont typeface="Wingdings" panose="05000000000000000000" pitchFamily="2" charset="2"/>
+              <a:buChar char="Ø"/>
+            </a:pPr>
+            <a:r>
+              <a:rPr lang="de-CH" sz="1900" dirty="0"/>
+              <a:t>Schnelligkeit</a:t>
+            </a:r>
+          </a:p>
+          <a:p>
+            <a:pPr>
+              <a:buFont typeface="Wingdings" panose="05000000000000000000" pitchFamily="2" charset="2"/>
+              <a:buChar char="Ø"/>
+            </a:pPr>
+            <a:r>
+              <a:rPr lang="de-CH" sz="1900" dirty="0"/>
+              <a:t>Eingebaute Nebenläufigkeit</a:t>
+            </a:r>
+          </a:p>
+          <a:p>
+            <a:pPr>
+              <a:buFont typeface="Wingdings" panose="05000000000000000000" pitchFamily="2" charset="2"/>
+              <a:buChar char="Ø"/>
+            </a:pPr>
+            <a:r>
+              <a:rPr lang="de-CH" sz="1900" dirty="0"/>
+              <a:t>Starke Standardbibliothek</a:t>
+            </a:r>
+          </a:p>
+        </p:txBody>
+      </p:sp>
+      <p:pic>
+        <p:nvPicPr>
+          <p:cNvPr id="2052" name="Picture 4" descr="Learning Golang in 24 hours | Kislay Verma">
+            <a:extLst>
+              <a:ext uri="{FF2B5EF4-FFF2-40B4-BE49-F238E27FC236}">
+                <a16:creationId xmlns:a16="http://schemas.microsoft.com/office/drawing/2014/main" id="{E5CF7752-C6D5-F45E-36E9-7DBD67F25235}"/>
+              </a:ext>
+            </a:extLst>
+          </p:cNvPr>
+          <p:cNvPicPr>
+            <a:picLocks noChangeAspect="1" noChangeArrowheads="1"/>
+          </p:cNvPicPr>
+          <p:nvPr/>
+        </p:nvPicPr>
+        <p:blipFill>
+          <a:blip r:embed="rId3">
+            <a:extLst>
+              <a:ext uri="{28A0092B-C50C-407E-A947-70E740481C1C}">
+                <a14:useLocalDpi xmlns:a14="http://schemas.microsoft.com/office/drawing/2010/main" val="0"/>
+              </a:ext>
+            </a:extLst>
+          </a:blip>
+          <a:srcRect/>
+          <a:stretch>
+            <a:fillRect/>
+          </a:stretch>
+        </p:blipFill>
+        <p:spPr bwMode="auto">
+          <a:xfrm>
+            <a:off x="7955280" y="0"/>
+            <a:ext cx="1116418" cy="1369399"/>
+          </a:xfrm>
+          <a:prstGeom prst="rect">
+            <a:avLst/>
+          </a:prstGeom>
+          <a:noFill/>
+          <a:extLst>
+            <a:ext uri="{909E8E84-426E-40DD-AFC4-6F175D3DCCD1}">
+              <a14:hiddenFill xmlns:a14="http://schemas.microsoft.com/office/drawing/2010/main">
+                <a:solidFill>
+                  <a:srgbClr val="FFFFFF"/>
+                </a:solidFill>
+              </a14:hiddenFill>
+            </a:ext>
+          </a:extLst>
+        </p:spPr>
+      </p:pic>
+    </p:spTree>
+    <p:extLst>
+      <p:ext uri="{BB962C8B-B14F-4D97-AF65-F5344CB8AC3E}">
+        <p14:creationId xmlns:p14="http://schemas.microsoft.com/office/powerpoint/2010/main" val="848672094"/>
+      </p:ext>
+    </p:extLst>
+  </p:cSld>
+  <p:clrMapOvr>
+    <a:masterClrMapping/>
+  </p:clrMapOvr>
+</p:sld>
+</file>
+
+<file path=ppt/slides/slide20.xml><?xml version="1.0" encoding="utf-8"?>
 <p:sld xmlns:a="http://schemas.openxmlformats.org/drawingml/2006/main" xmlns:r="http://schemas.openxmlformats.org/officeDocument/2006/relationships" xmlns:p="http://schemas.openxmlformats.org/presentationml/2006/main">
   <p:cSld>
     <p:bg>
@@ -21517,7 +23286,7 @@
 </p:sld>
 </file>
 
-<file path=ppt/slides/slide19.xml><?xml version="1.0" encoding="utf-8"?>
+<file path=ppt/slides/slide21.xml><?xml version="1.0" encoding="utf-8"?>
 <p:sld xmlns:a="http://schemas.openxmlformats.org/drawingml/2006/main" xmlns:r="http://schemas.openxmlformats.org/officeDocument/2006/relationships" xmlns:p="http://schemas.openxmlformats.org/presentationml/2006/main">
   <p:cSld>
     <p:bg>
@@ -21952,519 +23721,6 @@
     <p:extLst>
       <p:ext uri="{BB962C8B-B14F-4D97-AF65-F5344CB8AC3E}">
         <p14:creationId xmlns:p14="http://schemas.microsoft.com/office/powerpoint/2010/main" val="2803096092"/>
-      </p:ext>
-    </p:extLst>
-  </p:cSld>
-  <p:clrMapOvr>
-    <a:masterClrMapping/>
-  </p:clrMapOvr>
-</p:sld>
-</file>
-
-<file path=ppt/slides/slide2.xml><?xml version="1.0" encoding="utf-8"?>
-<p:sld xmlns:a="http://schemas.openxmlformats.org/drawingml/2006/main" xmlns:r="http://schemas.openxmlformats.org/officeDocument/2006/relationships" xmlns:p="http://schemas.openxmlformats.org/presentationml/2006/main">
-  <p:cSld>
-    <p:bg>
-      <p:bgPr>
-        <a:solidFill>
-          <a:schemeClr val="bg1"/>
-        </a:solidFill>
-        <a:effectLst/>
-      </p:bgPr>
-    </p:bg>
-    <p:spTree>
-      <p:nvGrpSpPr>
-        <p:cNvPr id="1" name=""/>
-        <p:cNvGrpSpPr/>
-        <p:nvPr/>
-      </p:nvGrpSpPr>
-      <p:grpSpPr>
-        <a:xfrm>
-          <a:off x="0" y="0"/>
-          <a:ext cx="0" cy="0"/>
-          <a:chOff x="0" y="0"/>
-          <a:chExt cx="0" cy="0"/>
-        </a:xfrm>
-      </p:grpSpPr>
-      <p:sp useBgFill="1">
-        <p:nvSpPr>
-          <p:cNvPr id="2068" name="Rectangle 2067">
-            <a:extLst>
-              <a:ext uri="{FF2B5EF4-FFF2-40B4-BE49-F238E27FC236}">
-                <a16:creationId xmlns:a16="http://schemas.microsoft.com/office/drawing/2014/main" id="{3AD318CC-E2A8-4E27-9548-A047A78999B1}"/>
-              </a:ext>
-              <a:ext uri="{C183D7F6-B498-43B3-948B-1728B52AA6E4}">
-                <adec:decorative xmlns:adec="http://schemas.microsoft.com/office/drawing/2017/decorative" val="1"/>
-              </a:ext>
-            </a:extLst>
-          </p:cNvPr>
-          <p:cNvSpPr>
-            <a:spLocks noGrp="1" noRot="1" noChangeAspect="1" noMove="1" noResize="1" noEditPoints="1" noAdjustHandles="1" noChangeArrowheads="1" noChangeShapeType="1" noTextEdit="1"/>
-          </p:cNvSpPr>
-          <p:nvPr>
-            <p:extLst>
-              <p:ext uri="{386F3935-93C4-4BCD-93E2-E3B085C9AB24}">
-                <p16:designElem xmlns:p16="http://schemas.microsoft.com/office/powerpoint/2015/main" val="1"/>
-              </p:ext>
-            </p:extLst>
-          </p:nvPr>
-        </p:nvSpPr>
-        <p:spPr>
-          <a:xfrm>
-            <a:off x="0" y="0"/>
-            <a:ext cx="9143999" cy="6857365"/>
-          </a:xfrm>
-          <a:prstGeom prst="rect">
-            <a:avLst/>
-          </a:prstGeom>
-          <a:ln>
-            <a:noFill/>
-          </a:ln>
-        </p:spPr>
-        <p:style>
-          <a:lnRef idx="2">
-            <a:schemeClr val="accent1">
-              <a:shade val="50000"/>
-            </a:schemeClr>
-          </a:lnRef>
-          <a:fillRef idx="1">
-            <a:schemeClr val="accent1"/>
-          </a:fillRef>
-          <a:effectRef idx="0">
-            <a:schemeClr val="accent1"/>
-          </a:effectRef>
-          <a:fontRef idx="minor">
-            <a:schemeClr val="lt1"/>
-          </a:fontRef>
-        </p:style>
-        <p:txBody>
-          <a:bodyPr rtlCol="0" anchor="ctr"/>
-          <a:lstStyle/>
-          <a:p>
-            <a:pPr algn="ctr"/>
-            <a:endParaRPr lang="en-US"/>
-          </a:p>
-        </p:txBody>
-      </p:sp>
-      <p:sp>
-        <p:nvSpPr>
-          <p:cNvPr id="2" name="Titel 1">
-            <a:extLst>
-              <a:ext uri="{FF2B5EF4-FFF2-40B4-BE49-F238E27FC236}">
-                <a16:creationId xmlns:a16="http://schemas.microsoft.com/office/drawing/2014/main" id="{710A1EB6-AD89-4B38-B328-726CF9C21286}"/>
-              </a:ext>
-            </a:extLst>
-          </p:cNvPr>
-          <p:cNvSpPr>
-            <a:spLocks noGrp="1"/>
-          </p:cNvSpPr>
-          <p:nvPr>
-            <p:ph type="title"/>
-          </p:nvPr>
-        </p:nvSpPr>
-        <p:spPr>
-          <a:xfrm>
-            <a:off x="483798" y="1463040"/>
-            <a:ext cx="2847230" cy="2690949"/>
-          </a:xfrm>
-        </p:spPr>
-        <p:txBody>
-          <a:bodyPr anchor="t">
-            <a:normAutofit/>
-          </a:bodyPr>
-          <a:lstStyle/>
-          <a:p>
-            <a:r>
-              <a:rPr lang="de-CH" sz="4200"/>
-              <a:t>Vision</a:t>
-            </a:r>
-          </a:p>
-        </p:txBody>
-      </p:sp>
-      <p:grpSp>
-        <p:nvGrpSpPr>
-          <p:cNvPr id="2070" name="Group 2069">
-            <a:extLst>
-              <a:ext uri="{FF2B5EF4-FFF2-40B4-BE49-F238E27FC236}">
-                <a16:creationId xmlns:a16="http://schemas.microsoft.com/office/drawing/2014/main" id="{B14B560F-9DD7-4302-A60B-EBD3EF59B073}"/>
-              </a:ext>
-              <a:ext uri="{C183D7F6-B498-43B3-948B-1728B52AA6E4}">
-                <adec:decorative xmlns:adec="http://schemas.microsoft.com/office/drawing/2017/decorative" val="1"/>
-              </a:ext>
-            </a:extLst>
-          </p:cNvPr>
-          <p:cNvGrpSpPr>
-            <a:grpSpLocks noGrp="1" noUngrp="1" noRot="1" noChangeAspect="1" noMove="1" noResize="1"/>
-          </p:cNvGrpSpPr>
-          <p:nvPr>
-            <p:extLst>
-              <p:ext uri="{386F3935-93C4-4BCD-93E2-E3B085C9AB24}">
-                <p16:designElem xmlns:p16="http://schemas.microsoft.com/office/powerpoint/2015/main" val="1"/>
-              </p:ext>
-            </p:extLst>
-          </p:nvPr>
-        </p:nvGrpSpPr>
-        <p:grpSpPr>
-          <a:xfrm>
-            <a:off x="157250" y="4415246"/>
-            <a:ext cx="8986749" cy="2087795"/>
-            <a:chOff x="143163" y="5763486"/>
-            <a:chExt cx="11982332" cy="739555"/>
-          </a:xfrm>
-        </p:grpSpPr>
-        <p:sp>
-          <p:nvSpPr>
-            <p:cNvPr id="2071" name="Rectangle 2070">
-              <a:extLst>
-                <a:ext uri="{FF2B5EF4-FFF2-40B4-BE49-F238E27FC236}">
-                  <a16:creationId xmlns:a16="http://schemas.microsoft.com/office/drawing/2014/main" id="{3A9A4357-BD1D-4622-A4FE-766E6AB8DE84}"/>
-                </a:ext>
-                <a:ext uri="{C183D7F6-B498-43B3-948B-1728B52AA6E4}">
-                  <adec:decorative xmlns:adec="http://schemas.microsoft.com/office/drawing/2017/decorative" val="1"/>
-                </a:ext>
-              </a:extLst>
-            </p:cNvPr>
-            <p:cNvSpPr/>
-            <p:nvPr>
-              <p:extLst>
-                <p:ext uri="{386F3935-93C4-4BCD-93E2-E3B085C9AB24}">
-                  <p16:designElem xmlns:p16="http://schemas.microsoft.com/office/powerpoint/2015/main" val="1"/>
-                </p:ext>
-              </p:extLst>
-            </p:nvPr>
-          </p:nvSpPr>
-          <p:spPr>
-            <a:xfrm flipH="1" flipV="1">
-              <a:off x="357444" y="5763486"/>
-              <a:ext cx="11768051" cy="739555"/>
-            </a:xfrm>
-            <a:prstGeom prst="rect">
-              <a:avLst/>
-            </a:prstGeom>
-            <a:solidFill>
-              <a:schemeClr val="accent4"/>
-            </a:solidFill>
-            <a:ln>
-              <a:noFill/>
-            </a:ln>
-          </p:spPr>
-          <p:style>
-            <a:lnRef idx="2">
-              <a:schemeClr val="accent1">
-                <a:shade val="50000"/>
-              </a:schemeClr>
-            </a:lnRef>
-            <a:fillRef idx="1">
-              <a:schemeClr val="accent1"/>
-            </a:fillRef>
-            <a:effectRef idx="0">
-              <a:schemeClr val="accent1"/>
-            </a:effectRef>
-            <a:fontRef idx="minor">
-              <a:schemeClr val="lt1"/>
-            </a:fontRef>
-          </p:style>
-          <p:txBody>
-            <a:bodyPr rtlCol="0" anchor="ctr"/>
-            <a:lstStyle/>
-            <a:p>
-              <a:pPr algn="ctr"/>
-              <a:endParaRPr lang="en-US"/>
-            </a:p>
-          </p:txBody>
-        </p:sp>
-        <p:cxnSp>
-          <p:nvCxnSpPr>
-            <p:cNvPr id="2072" name="Straight Connector 2071">
-              <a:extLst>
-                <a:ext uri="{FF2B5EF4-FFF2-40B4-BE49-F238E27FC236}">
-                  <a16:creationId xmlns:a16="http://schemas.microsoft.com/office/drawing/2014/main" id="{C21D6966-343E-49AC-A026-D2497E0C3CA1}"/>
-                </a:ext>
-                <a:ext uri="{C183D7F6-B498-43B3-948B-1728B52AA6E4}">
-                  <adec:decorative xmlns:adec="http://schemas.microsoft.com/office/drawing/2017/decorative" val="1"/>
-                </a:ext>
-              </a:extLst>
-            </p:cNvPr>
-            <p:cNvCxnSpPr>
-              <a:cxnSpLocks/>
-            </p:cNvCxnSpPr>
-            <p:nvPr>
-              <p:extLst>
-                <p:ext uri="{386F3935-93C4-4BCD-93E2-E3B085C9AB24}">
-                  <p16:designElem xmlns:p16="http://schemas.microsoft.com/office/powerpoint/2015/main" val="1"/>
-                </p:ext>
-              </p:extLst>
-            </p:nvPr>
-          </p:nvCxnSpPr>
-          <p:spPr>
-            <a:xfrm flipH="1">
-              <a:off x="143163" y="5763486"/>
-              <a:ext cx="1" cy="739555"/>
-            </a:xfrm>
-            <a:prstGeom prst="line">
-              <a:avLst/>
-            </a:prstGeom>
-            <a:ln w="177800">
-              <a:solidFill>
-                <a:schemeClr val="accent4"/>
-              </a:solidFill>
-            </a:ln>
-          </p:spPr>
-          <p:style>
-            <a:lnRef idx="1">
-              <a:schemeClr val="accent1"/>
-            </a:lnRef>
-            <a:fillRef idx="0">
-              <a:schemeClr val="accent1"/>
-            </a:fillRef>
-            <a:effectRef idx="0">
-              <a:schemeClr val="accent1"/>
-            </a:effectRef>
-            <a:fontRef idx="minor">
-              <a:schemeClr val="tx1"/>
-            </a:fontRef>
-          </p:style>
-        </p:cxnSp>
-      </p:grpSp>
-      <p:sp>
-        <p:nvSpPr>
-          <p:cNvPr id="2074" name="Rectangle 2073">
-            <a:extLst>
-              <a:ext uri="{FF2B5EF4-FFF2-40B4-BE49-F238E27FC236}">
-                <a16:creationId xmlns:a16="http://schemas.microsoft.com/office/drawing/2014/main" id="{2C1BBA94-3F40-40AA-8BB9-E69E25E537C1}"/>
-              </a:ext>
-              <a:ext uri="{C183D7F6-B498-43B3-948B-1728B52AA6E4}">
-                <adec:decorative xmlns:adec="http://schemas.microsoft.com/office/drawing/2017/decorative" val="1"/>
-              </a:ext>
-            </a:extLst>
-          </p:cNvPr>
-          <p:cNvSpPr>
-            <a:spLocks noGrp="1" noRot="1" noChangeAspect="1" noMove="1" noResize="1" noEditPoints="1" noAdjustHandles="1" noChangeArrowheads="1" noChangeShapeType="1" noTextEdit="1"/>
-          </p:cNvSpPr>
-          <p:nvPr>
-            <p:extLst>
-              <p:ext uri="{386F3935-93C4-4BCD-93E2-E3B085C9AB24}">
-                <p16:designElem xmlns:p16="http://schemas.microsoft.com/office/powerpoint/2015/main" val="1"/>
-              </p:ext>
-            </p:extLst>
-          </p:nvPr>
-        </p:nvSpPr>
-        <p:spPr>
-          <a:xfrm>
-            <a:off x="3850279" y="587829"/>
-            <a:ext cx="4878975" cy="5682342"/>
-          </a:xfrm>
-          <a:prstGeom prst="rect">
-            <a:avLst/>
-          </a:prstGeom>
-          <a:solidFill>
-            <a:schemeClr val="bg1"/>
-          </a:solidFill>
-          <a:ln>
-            <a:noFill/>
-          </a:ln>
-          <a:effectLst>
-            <a:outerShdw blurRad="139700" dist="127000" dir="5400000" algn="t" rotWithShape="0">
-              <a:prstClr val="black">
-                <a:alpha val="15000"/>
-              </a:prstClr>
-            </a:outerShdw>
-          </a:effectLst>
-        </p:spPr>
-        <p:style>
-          <a:lnRef idx="2">
-            <a:schemeClr val="accent1">
-              <a:shade val="50000"/>
-            </a:schemeClr>
-          </a:lnRef>
-          <a:fillRef idx="1">
-            <a:schemeClr val="accent1"/>
-          </a:fillRef>
-          <a:effectRef idx="0">
-            <a:schemeClr val="accent1"/>
-          </a:effectRef>
-          <a:fontRef idx="minor">
-            <a:schemeClr val="lt1"/>
-          </a:fontRef>
-        </p:style>
-        <p:txBody>
-          <a:bodyPr rtlCol="0" anchor="ctr"/>
-          <a:lstStyle/>
-          <a:p>
-            <a:pPr algn="ctr"/>
-            <a:endParaRPr lang="en-US"/>
-          </a:p>
-        </p:txBody>
-      </p:sp>
-      <p:sp>
-        <p:nvSpPr>
-          <p:cNvPr id="4" name="Inhaltsplatzhalter 3">
-            <a:extLst>
-              <a:ext uri="{FF2B5EF4-FFF2-40B4-BE49-F238E27FC236}">
-                <a16:creationId xmlns:a16="http://schemas.microsoft.com/office/drawing/2014/main" id="{3EDAB6A7-60DE-D475-B6EF-B1A6D39349F1}"/>
-              </a:ext>
-            </a:extLst>
-          </p:cNvPr>
-          <p:cNvSpPr>
-            <a:spLocks noGrp="1"/>
-          </p:cNvSpPr>
-          <p:nvPr>
-            <p:ph idx="1"/>
-          </p:nvPr>
-        </p:nvSpPr>
-        <p:spPr>
-          <a:xfrm>
-            <a:off x="4242163" y="1463039"/>
-            <a:ext cx="4245132" cy="4300447"/>
-          </a:xfrm>
-        </p:spPr>
-        <p:txBody>
-          <a:bodyPr anchor="t">
-            <a:normAutofit/>
-          </a:bodyPr>
-          <a:lstStyle/>
-          <a:p>
-            <a:pPr marL="0" indent="0">
-              <a:buNone/>
-            </a:pPr>
-            <a:r>
-              <a:rPr lang="de-CH" sz="1900" b="1" dirty="0"/>
-              <a:t>Kernidee</a:t>
-            </a:r>
-          </a:p>
-          <a:p>
-            <a:pPr>
-              <a:buFont typeface="Wingdings" panose="05000000000000000000" pitchFamily="2" charset="2"/>
-              <a:buChar char="Ø"/>
-            </a:pPr>
-            <a:r>
-              <a:rPr lang="de-CH" sz="1900" dirty="0"/>
-              <a:t>Grosse Systeme bei Google wurden immer komplexer, </a:t>
-            </a:r>
-            <a:r>
-              <a:rPr lang="de-CH" sz="1900" dirty="0" err="1"/>
-              <a:t>Builds</a:t>
-            </a:r>
-            <a:r>
-              <a:rPr lang="de-CH" sz="1900" dirty="0"/>
-              <a:t> dauerten lange und viele Sprachen waren zu kompliziert oder zu ineffizient </a:t>
-            </a:r>
-            <a:r>
-              <a:rPr lang="de-CH" sz="1900" dirty="0">
-                <a:sym typeface="Wingdings" panose="05000000000000000000" pitchFamily="2" charset="2"/>
-              </a:rPr>
-              <a:t> </a:t>
-            </a:r>
-            <a:r>
-              <a:rPr lang="de-CH" sz="1900" b="1" dirty="0">
-                <a:sym typeface="Wingdings" panose="05000000000000000000" pitchFamily="2" charset="2"/>
-              </a:rPr>
-              <a:t>Go sollte die Mitte treffen</a:t>
-            </a:r>
-            <a:endParaRPr lang="de-CH" sz="1900" dirty="0"/>
-          </a:p>
-          <a:p>
-            <a:pPr marL="0" indent="0">
-              <a:buNone/>
-            </a:pPr>
-            <a:r>
-              <a:rPr lang="de-CH" sz="1900" b="1" dirty="0"/>
-              <a:t>Die wichtigsten Prinzipien der Go-Vision</a:t>
-            </a:r>
-          </a:p>
-          <a:p>
-            <a:pPr>
-              <a:buFont typeface="Wingdings" panose="05000000000000000000" pitchFamily="2" charset="2"/>
-              <a:buChar char="Ø"/>
-            </a:pPr>
-            <a:r>
-              <a:rPr lang="de-CH" sz="1900" dirty="0"/>
-              <a:t>Einfachheit über alles</a:t>
-            </a:r>
-          </a:p>
-          <a:p>
-            <a:pPr>
-              <a:buFont typeface="Wingdings" panose="05000000000000000000" pitchFamily="2" charset="2"/>
-              <a:buChar char="Ø"/>
-            </a:pPr>
-            <a:r>
-              <a:rPr lang="de-CH" sz="1900" dirty="0"/>
-              <a:t>Schnelligkeit</a:t>
-            </a:r>
-          </a:p>
-          <a:p>
-            <a:pPr>
-              <a:buFont typeface="Wingdings" panose="05000000000000000000" pitchFamily="2" charset="2"/>
-              <a:buChar char="Ø"/>
-            </a:pPr>
-            <a:r>
-              <a:rPr lang="de-CH" sz="1900" dirty="0"/>
-              <a:t>Eingebaute Nebenläufigkeit</a:t>
-            </a:r>
-          </a:p>
-          <a:p>
-            <a:pPr>
-              <a:buFont typeface="Wingdings" panose="05000000000000000000" pitchFamily="2" charset="2"/>
-              <a:buChar char="Ø"/>
-            </a:pPr>
-            <a:r>
-              <a:rPr lang="de-CH" sz="1900" dirty="0"/>
-              <a:t>Starke Standardbibliothek</a:t>
-            </a:r>
-          </a:p>
-        </p:txBody>
-      </p:sp>
-      <p:pic>
-        <p:nvPicPr>
-          <p:cNvPr id="2052" name="Picture 4" descr="Learning Golang in 24 hours | Kislay Verma">
-            <a:extLst>
-              <a:ext uri="{FF2B5EF4-FFF2-40B4-BE49-F238E27FC236}">
-                <a16:creationId xmlns:a16="http://schemas.microsoft.com/office/drawing/2014/main" id="{E5CF7752-C6D5-F45E-36E9-7DBD67F25235}"/>
-              </a:ext>
-            </a:extLst>
-          </p:cNvPr>
-          <p:cNvPicPr>
-            <a:picLocks noChangeAspect="1" noChangeArrowheads="1"/>
-          </p:cNvPicPr>
-          <p:nvPr/>
-        </p:nvPicPr>
-        <p:blipFill>
-          <a:blip r:embed="rId3">
-            <a:extLst>
-              <a:ext uri="{28A0092B-C50C-407E-A947-70E740481C1C}">
-                <a14:useLocalDpi xmlns:a14="http://schemas.microsoft.com/office/drawing/2010/main" val="0"/>
-              </a:ext>
-            </a:extLst>
-          </a:blip>
-          <a:srcRect/>
-          <a:stretch>
-            <a:fillRect/>
-          </a:stretch>
-        </p:blipFill>
-        <p:spPr bwMode="auto">
-          <a:xfrm>
-            <a:off x="7955280" y="0"/>
-            <a:ext cx="1116418" cy="1369399"/>
-          </a:xfrm>
-          <a:prstGeom prst="rect">
-            <a:avLst/>
-          </a:prstGeom>
-          <a:noFill/>
-          <a:extLst>
-            <a:ext uri="{909E8E84-426E-40DD-AFC4-6F175D3DCCD1}">
-              <a14:hiddenFill xmlns:a14="http://schemas.microsoft.com/office/drawing/2010/main">
-                <a:solidFill>
-                  <a:srgbClr val="FFFFFF"/>
-                </a:solidFill>
-              </a14:hiddenFill>
-            </a:ext>
-          </a:extLst>
-        </p:spPr>
-      </p:pic>
-    </p:spTree>
-    <p:extLst>
-      <p:ext uri="{BB962C8B-B14F-4D97-AF65-F5344CB8AC3E}">
-        <p14:creationId xmlns:p14="http://schemas.microsoft.com/office/powerpoint/2010/main" val="848672094"/>
       </p:ext>
     </p:extLst>
   </p:cSld>
@@ -23712,7 +24968,7 @@
             </a:pPr>
             <a:r>
               <a:rPr lang="de-CH" sz="2100" dirty="0"/>
-              <a:t>Hat im vergleich zu anderen Sprachen, weniger Schlüsselwörter</a:t>
+              <a:t>Hat im Vergleich zu anderen Sprachen, weniger Schlüsselwörter (25)</a:t>
             </a:r>
           </a:p>
           <a:p>
@@ -23786,7 +25042,7 @@
           <p:nvPr/>
         </p:nvPicPr>
         <p:blipFill>
-          <a:blip r:embed="rId2">
+          <a:blip r:embed="rId3">
             <a:extLst>
               <a:ext uri="{28A0092B-C50C-407E-A947-70E740481C1C}">
                 <a14:useLocalDpi xmlns:a14="http://schemas.microsoft.com/office/drawing/2010/main" val="0"/>
@@ -24205,6 +25461,1016 @@
         </p:spPr>
         <p:txBody>
           <a:bodyPr anchor="ctr">
+            <a:normAutofit/>
+          </a:bodyPr>
+          <a:lstStyle/>
+          <a:p>
+            <a:r>
+              <a:rPr lang="de-CH" sz="2100" dirty="0"/>
+              <a:t>Basieren auf Arrays, referenzieren denselben Speicherbereich, können Teilbereiche darstellen.</a:t>
+            </a:r>
+          </a:p>
+          <a:p>
+            <a:r>
+              <a:rPr lang="de-CH" sz="2100" dirty="0"/>
+              <a:t>Dynamische Grösse, können wachsen (</a:t>
+            </a:r>
+            <a:r>
+              <a:rPr lang="de-CH" sz="2100" dirty="0" err="1"/>
+              <a:t>append</a:t>
+            </a:r>
+            <a:r>
+              <a:rPr lang="de-CH" sz="2100" dirty="0"/>
+              <a:t>), haben «</a:t>
+            </a:r>
+            <a:r>
+              <a:rPr lang="de-CH" sz="2100" dirty="0" err="1"/>
+              <a:t>length</a:t>
+            </a:r>
+            <a:r>
+              <a:rPr lang="de-CH" sz="2100" dirty="0"/>
+              <a:t>» und «</a:t>
+            </a:r>
+            <a:r>
+              <a:rPr lang="de-CH" sz="2100" dirty="0" err="1"/>
+              <a:t>capacity</a:t>
+            </a:r>
+            <a:r>
+              <a:rPr lang="de-CH" sz="2100" dirty="0"/>
+              <a:t>».</a:t>
+            </a:r>
+          </a:p>
+          <a:p>
+            <a:r>
+              <a:rPr lang="de-CH" sz="2100" dirty="0"/>
+              <a:t>Standardwert </a:t>
+            </a:r>
+            <a:r>
+              <a:rPr lang="de-CH" sz="2100" dirty="0" err="1"/>
+              <a:t>nil</a:t>
+            </a:r>
+            <a:r>
+              <a:rPr lang="de-CH" sz="2100" dirty="0"/>
+              <a:t>, Zugriff über Index, unterstützen </a:t>
+            </a:r>
+            <a:r>
+              <a:rPr lang="de-CH" sz="2100" dirty="0" err="1"/>
+              <a:t>Slicing</a:t>
+            </a:r>
+            <a:r>
+              <a:rPr lang="de-CH" sz="2100" dirty="0"/>
+              <a:t> [</a:t>
+            </a:r>
+            <a:r>
+              <a:rPr lang="de-CH" sz="2100" dirty="0" err="1"/>
+              <a:t>a:b</a:t>
+            </a:r>
+            <a:r>
+              <a:rPr lang="de-CH" sz="2100" dirty="0"/>
+              <a:t>], sehr effizient für Listen.</a:t>
+            </a:r>
+          </a:p>
+        </p:txBody>
+      </p:sp>
+      <p:pic>
+        <p:nvPicPr>
+          <p:cNvPr id="1026" name="Picture 2" descr="Principles of slice type in GO | Golang for all">
+            <a:extLst>
+              <a:ext uri="{FF2B5EF4-FFF2-40B4-BE49-F238E27FC236}">
+                <a16:creationId xmlns:a16="http://schemas.microsoft.com/office/drawing/2014/main" id="{B4F2CCEA-925D-3908-AE0C-8B699D168762}"/>
+              </a:ext>
+            </a:extLst>
+          </p:cNvPr>
+          <p:cNvPicPr>
+            <a:picLocks noChangeAspect="1" noChangeArrowheads="1"/>
+          </p:cNvPicPr>
+          <p:nvPr/>
+        </p:nvPicPr>
+        <p:blipFill>
+          <a:blip r:embed="rId2">
+            <a:extLst>
+              <a:ext uri="{28A0092B-C50C-407E-A947-70E740481C1C}">
+                <a14:useLocalDpi xmlns:a14="http://schemas.microsoft.com/office/drawing/2010/main" val="0"/>
+              </a:ext>
+            </a:extLst>
+          </a:blip>
+          <a:srcRect/>
+          <a:stretch>
+            <a:fillRect/>
+          </a:stretch>
+        </p:blipFill>
+        <p:spPr bwMode="auto">
+          <a:xfrm>
+            <a:off x="7534003" y="221439"/>
+            <a:ext cx="1445390" cy="1188950"/>
+          </a:xfrm>
+          <a:prstGeom prst="rect">
+            <a:avLst/>
+          </a:prstGeom>
+          <a:noFill/>
+          <a:extLst>
+            <a:ext uri="{909E8E84-426E-40DD-AFC4-6F175D3DCCD1}">
+              <a14:hiddenFill xmlns:a14="http://schemas.microsoft.com/office/drawing/2010/main">
+                <a:solidFill>
+                  <a:srgbClr val="FFFFFF"/>
+                </a:solidFill>
+              </a14:hiddenFill>
+            </a:ext>
+          </a:extLst>
+        </p:spPr>
+      </p:pic>
+    </p:spTree>
+    <p:extLst>
+      <p:ext uri="{BB962C8B-B14F-4D97-AF65-F5344CB8AC3E}">
+        <p14:creationId xmlns:p14="http://schemas.microsoft.com/office/powerpoint/2010/main" val="4055002409"/>
+      </p:ext>
+    </p:extLst>
+  </p:cSld>
+  <p:clrMapOvr>
+    <a:masterClrMapping/>
+  </p:clrMapOvr>
+</p:sld>
+</file>
+
+<file path=ppt/slides/slide7.xml><?xml version="1.0" encoding="utf-8"?>
+<p:sld xmlns:a="http://schemas.openxmlformats.org/drawingml/2006/main" xmlns:r="http://schemas.openxmlformats.org/officeDocument/2006/relationships" xmlns:p="http://schemas.openxmlformats.org/presentationml/2006/main">
+  <p:cSld>
+    <p:bg>
+      <p:bgPr>
+        <a:solidFill>
+          <a:schemeClr val="bg1"/>
+        </a:solidFill>
+        <a:effectLst/>
+      </p:bgPr>
+    </p:bg>
+    <p:spTree>
+      <p:nvGrpSpPr>
+        <p:cNvPr id="1" name="">
+          <a:extLst>
+            <a:ext uri="{FF2B5EF4-FFF2-40B4-BE49-F238E27FC236}">
+              <a16:creationId xmlns:a16="http://schemas.microsoft.com/office/drawing/2014/main" id="{5D3B384C-9801-C0A4-02CB-5E14482724AE}"/>
+            </a:ext>
+          </a:extLst>
+        </p:cNvPr>
+        <p:cNvGrpSpPr/>
+        <p:nvPr/>
+      </p:nvGrpSpPr>
+      <p:grpSpPr>
+        <a:xfrm>
+          <a:off x="0" y="0"/>
+          <a:ext cx="0" cy="0"/>
+          <a:chOff x="0" y="0"/>
+          <a:chExt cx="0" cy="0"/>
+        </a:xfrm>
+      </p:grpSpPr>
+      <p:sp useBgFill="1">
+        <p:nvSpPr>
+          <p:cNvPr id="2057" name="Rectangle 2056">
+            <a:extLst>
+              <a:ext uri="{FF2B5EF4-FFF2-40B4-BE49-F238E27FC236}">
+                <a16:creationId xmlns:a16="http://schemas.microsoft.com/office/drawing/2014/main" id="{6113D74E-2DB3-4205-E31A-CE60A0870175}"/>
+              </a:ext>
+              <a:ext uri="{C183D7F6-B498-43B3-948B-1728B52AA6E4}">
+                <adec:decorative xmlns:adec="http://schemas.microsoft.com/office/drawing/2017/decorative" val="1"/>
+              </a:ext>
+            </a:extLst>
+          </p:cNvPr>
+          <p:cNvSpPr>
+            <a:spLocks noGrp="1" noRot="1" noChangeAspect="1" noMove="1" noResize="1" noEditPoints="1" noAdjustHandles="1" noChangeArrowheads="1" noChangeShapeType="1" noTextEdit="1"/>
+          </p:cNvSpPr>
+          <p:nvPr>
+            <p:extLst>
+              <p:ext uri="{386F3935-93C4-4BCD-93E2-E3B085C9AB24}">
+                <p16:designElem xmlns:p16="http://schemas.microsoft.com/office/powerpoint/2015/main" val="1"/>
+              </p:ext>
+            </p:extLst>
+          </p:nvPr>
+        </p:nvSpPr>
+        <p:spPr>
+          <a:xfrm>
+            <a:off x="0" y="0"/>
+            <a:ext cx="9143999" cy="6857365"/>
+          </a:xfrm>
+          <a:prstGeom prst="rect">
+            <a:avLst/>
+          </a:prstGeom>
+          <a:ln>
+            <a:noFill/>
+          </a:ln>
+        </p:spPr>
+        <p:style>
+          <a:lnRef idx="2">
+            <a:schemeClr val="accent1">
+              <a:shade val="50000"/>
+            </a:schemeClr>
+          </a:lnRef>
+          <a:fillRef idx="1">
+            <a:schemeClr val="accent1"/>
+          </a:fillRef>
+          <a:effectRef idx="0">
+            <a:schemeClr val="accent1"/>
+          </a:effectRef>
+          <a:fontRef idx="minor">
+            <a:schemeClr val="lt1"/>
+          </a:fontRef>
+        </p:style>
+        <p:txBody>
+          <a:bodyPr rtlCol="0" anchor="ctr"/>
+          <a:lstStyle/>
+          <a:p>
+            <a:pPr algn="ctr"/>
+            <a:endParaRPr lang="en-US"/>
+          </a:p>
+        </p:txBody>
+      </p:sp>
+      <p:sp>
+        <p:nvSpPr>
+          <p:cNvPr id="2" name="Titel 1">
+            <a:extLst>
+              <a:ext uri="{FF2B5EF4-FFF2-40B4-BE49-F238E27FC236}">
+                <a16:creationId xmlns:a16="http://schemas.microsoft.com/office/drawing/2014/main" id="{9BF6F14F-D9F6-0369-5389-0E1BA37997B7}"/>
+              </a:ext>
+            </a:extLst>
+          </p:cNvPr>
+          <p:cNvSpPr>
+            <a:spLocks noGrp="1"/>
+          </p:cNvSpPr>
+          <p:nvPr>
+            <p:ph type="title"/>
+          </p:nvPr>
+        </p:nvSpPr>
+        <p:spPr>
+          <a:xfrm>
+            <a:off x="606478" y="386930"/>
+            <a:ext cx="6927525" cy="1188950"/>
+          </a:xfrm>
+        </p:spPr>
+        <p:txBody>
+          <a:bodyPr anchor="b">
+            <a:normAutofit/>
+          </a:bodyPr>
+          <a:lstStyle/>
+          <a:p>
+            <a:r>
+              <a:rPr lang="de-CH" sz="4700" dirty="0"/>
+              <a:t>Slices Eigenschaften</a:t>
+            </a:r>
+          </a:p>
+        </p:txBody>
+      </p:sp>
+      <p:grpSp>
+        <p:nvGrpSpPr>
+          <p:cNvPr id="2059" name="Group 2058">
+            <a:extLst>
+              <a:ext uri="{FF2B5EF4-FFF2-40B4-BE49-F238E27FC236}">
+                <a16:creationId xmlns:a16="http://schemas.microsoft.com/office/drawing/2014/main" id="{EFA27696-7C5C-FD8C-55BD-A999D3B06658}"/>
+              </a:ext>
+              <a:ext uri="{C183D7F6-B498-43B3-948B-1728B52AA6E4}">
+                <adec:decorative xmlns:adec="http://schemas.microsoft.com/office/drawing/2017/decorative" val="1"/>
+              </a:ext>
+            </a:extLst>
+          </p:cNvPr>
+          <p:cNvGrpSpPr>
+            <a:grpSpLocks noGrp="1" noUngrp="1" noRot="1" noChangeAspect="1" noMove="1" noResize="1"/>
+          </p:cNvGrpSpPr>
+          <p:nvPr>
+            <p:extLst>
+              <p:ext uri="{386F3935-93C4-4BCD-93E2-E3B085C9AB24}">
+                <p16:designElem xmlns:p16="http://schemas.microsoft.com/office/powerpoint/2015/main" val="1"/>
+              </p:ext>
+            </p:extLst>
+          </p:nvPr>
+        </p:nvGrpSpPr>
+        <p:grpSpPr>
+          <a:xfrm>
+            <a:off x="-1" y="1998368"/>
+            <a:ext cx="8771274" cy="782176"/>
+            <a:chOff x="-2" y="1998368"/>
+            <a:chExt cx="11695083" cy="782176"/>
+          </a:xfrm>
+        </p:grpSpPr>
+        <p:sp>
+          <p:nvSpPr>
+            <p:cNvPr id="2060" name="Rectangle 2059">
+              <a:extLst>
+                <a:ext uri="{FF2B5EF4-FFF2-40B4-BE49-F238E27FC236}">
+                  <a16:creationId xmlns:a16="http://schemas.microsoft.com/office/drawing/2014/main" id="{1786B35F-93EF-8E83-3406-B408ABE4D4E7}"/>
+                </a:ext>
+                <a:ext uri="{C183D7F6-B498-43B3-948B-1728B52AA6E4}">
+                  <adec:decorative xmlns:adec="http://schemas.microsoft.com/office/drawing/2017/decorative" val="1"/>
+                </a:ext>
+              </a:extLst>
+            </p:cNvPr>
+            <p:cNvSpPr/>
+            <p:nvPr>
+              <p:extLst>
+                <p:ext uri="{386F3935-93C4-4BCD-93E2-E3B085C9AB24}">
+                  <p16:designElem xmlns:p16="http://schemas.microsoft.com/office/powerpoint/2015/main" val="1"/>
+                </p:ext>
+              </p:extLst>
+            </p:nvPr>
+          </p:nvSpPr>
+          <p:spPr>
+            <a:xfrm rot="5400000">
+              <a:off x="11228040" y="2313027"/>
+              <a:ext cx="781700" cy="152382"/>
+            </a:xfrm>
+            <a:prstGeom prst="rect">
+              <a:avLst/>
+            </a:prstGeom>
+            <a:solidFill>
+              <a:schemeClr val="accent4"/>
+            </a:solidFill>
+            <a:ln>
+              <a:noFill/>
+            </a:ln>
+          </p:spPr>
+          <p:style>
+            <a:lnRef idx="2">
+              <a:schemeClr val="accent1">
+                <a:shade val="50000"/>
+              </a:schemeClr>
+            </a:lnRef>
+            <a:fillRef idx="1">
+              <a:schemeClr val="accent1"/>
+            </a:fillRef>
+            <a:effectRef idx="0">
+              <a:schemeClr val="accent1"/>
+            </a:effectRef>
+            <a:fontRef idx="minor">
+              <a:schemeClr val="lt1"/>
+            </a:fontRef>
+          </p:style>
+          <p:txBody>
+            <a:bodyPr rtlCol="0" anchor="ctr"/>
+            <a:lstStyle/>
+            <a:p>
+              <a:pPr algn="ctr"/>
+              <a:endParaRPr lang="en-US"/>
+            </a:p>
+          </p:txBody>
+        </p:sp>
+        <p:sp>
+          <p:nvSpPr>
+            <p:cNvPr id="2061" name="Rectangle 2060">
+              <a:extLst>
+                <a:ext uri="{FF2B5EF4-FFF2-40B4-BE49-F238E27FC236}">
+                  <a16:creationId xmlns:a16="http://schemas.microsoft.com/office/drawing/2014/main" id="{290AF499-170D-9F1D-2BD4-9DA49C567976}"/>
+                </a:ext>
+                <a:ext uri="{C183D7F6-B498-43B3-948B-1728B52AA6E4}">
+                  <adec:decorative xmlns:adec="http://schemas.microsoft.com/office/drawing/2017/decorative" val="1"/>
+                </a:ext>
+              </a:extLst>
+            </p:cNvPr>
+            <p:cNvSpPr/>
+            <p:nvPr>
+              <p:extLst>
+                <p:ext uri="{386F3935-93C4-4BCD-93E2-E3B085C9AB24}">
+                  <p16:designElem xmlns:p16="http://schemas.microsoft.com/office/powerpoint/2015/main" val="1"/>
+                </p:ext>
+              </p:extLst>
+            </p:nvPr>
+          </p:nvSpPr>
+          <p:spPr>
+            <a:xfrm flipH="1" flipV="1">
+              <a:off x="-2" y="1998845"/>
+              <a:ext cx="11454595" cy="781699"/>
+            </a:xfrm>
+            <a:prstGeom prst="rect">
+              <a:avLst/>
+            </a:prstGeom>
+            <a:solidFill>
+              <a:schemeClr val="accent4"/>
+            </a:solidFill>
+            <a:ln>
+              <a:noFill/>
+            </a:ln>
+          </p:spPr>
+          <p:style>
+            <a:lnRef idx="2">
+              <a:schemeClr val="accent1">
+                <a:shade val="50000"/>
+              </a:schemeClr>
+            </a:lnRef>
+            <a:fillRef idx="1">
+              <a:schemeClr val="accent1"/>
+            </a:fillRef>
+            <a:effectRef idx="0">
+              <a:schemeClr val="accent1"/>
+            </a:effectRef>
+            <a:fontRef idx="minor">
+              <a:schemeClr val="lt1"/>
+            </a:fontRef>
+          </p:style>
+          <p:txBody>
+            <a:bodyPr rtlCol="0" anchor="ctr"/>
+            <a:lstStyle/>
+            <a:p>
+              <a:pPr algn="ctr"/>
+              <a:endParaRPr lang="en-US"/>
+            </a:p>
+          </p:txBody>
+        </p:sp>
+      </p:grpSp>
+      <p:sp>
+        <p:nvSpPr>
+          <p:cNvPr id="2063" name="Rectangle 2062">
+            <a:extLst>
+              <a:ext uri="{FF2B5EF4-FFF2-40B4-BE49-F238E27FC236}">
+                <a16:creationId xmlns:a16="http://schemas.microsoft.com/office/drawing/2014/main" id="{BD49C972-FCC4-97FB-D459-239EC0C0BC2E}"/>
+              </a:ext>
+              <a:ext uri="{C183D7F6-B498-43B3-948B-1728B52AA6E4}">
+                <adec:decorative xmlns:adec="http://schemas.microsoft.com/office/drawing/2017/decorative" val="1"/>
+              </a:ext>
+            </a:extLst>
+          </p:cNvPr>
+          <p:cNvSpPr>
+            <a:spLocks noGrp="1" noRot="1" noChangeAspect="1" noMove="1" noResize="1" noEditPoints="1" noAdjustHandles="1" noChangeArrowheads="1" noChangeShapeType="1" noTextEdit="1"/>
+          </p:cNvSpPr>
+          <p:nvPr>
+            <p:extLst>
+              <p:ext uri="{386F3935-93C4-4BCD-93E2-E3B085C9AB24}">
+                <p16:designElem xmlns:p16="http://schemas.microsoft.com/office/powerpoint/2015/main" val="1"/>
+              </p:ext>
+            </p:extLst>
+          </p:nvPr>
+        </p:nvSpPr>
+        <p:spPr>
+          <a:xfrm>
+            <a:off x="0" y="2203079"/>
+            <a:ext cx="8537521" cy="4147845"/>
+          </a:xfrm>
+          <a:prstGeom prst="rect">
+            <a:avLst/>
+          </a:prstGeom>
+          <a:solidFill>
+            <a:schemeClr val="bg1"/>
+          </a:solidFill>
+          <a:ln>
+            <a:noFill/>
+          </a:ln>
+          <a:effectLst>
+            <a:outerShdw blurRad="139700" dist="127000" dir="5400000" algn="t" rotWithShape="0">
+              <a:prstClr val="black">
+                <a:alpha val="15000"/>
+              </a:prstClr>
+            </a:outerShdw>
+          </a:effectLst>
+        </p:spPr>
+        <p:style>
+          <a:lnRef idx="2">
+            <a:schemeClr val="accent1">
+              <a:shade val="50000"/>
+            </a:schemeClr>
+          </a:lnRef>
+          <a:fillRef idx="1">
+            <a:schemeClr val="accent1"/>
+          </a:fillRef>
+          <a:effectRef idx="0">
+            <a:schemeClr val="accent1"/>
+          </a:effectRef>
+          <a:fontRef idx="minor">
+            <a:schemeClr val="lt1"/>
+          </a:fontRef>
+        </p:style>
+        <p:txBody>
+          <a:bodyPr rtlCol="0" anchor="ctr"/>
+          <a:lstStyle/>
+          <a:p>
+            <a:pPr algn="ctr"/>
+            <a:endParaRPr lang="en-US"/>
+          </a:p>
+        </p:txBody>
+      </p:sp>
+      <p:sp>
+        <p:nvSpPr>
+          <p:cNvPr id="4" name="Inhaltsplatzhalter 3">
+            <a:extLst>
+              <a:ext uri="{FF2B5EF4-FFF2-40B4-BE49-F238E27FC236}">
+                <a16:creationId xmlns:a16="http://schemas.microsoft.com/office/drawing/2014/main" id="{E61C4E09-E166-0837-200D-5011FA91BE79}"/>
+              </a:ext>
+            </a:extLst>
+          </p:cNvPr>
+          <p:cNvSpPr>
+            <a:spLocks noGrp="1"/>
+          </p:cNvSpPr>
+          <p:nvPr>
+            <p:ph idx="1"/>
+          </p:nvPr>
+        </p:nvSpPr>
+        <p:spPr>
+          <a:xfrm>
+            <a:off x="595245" y="2599509"/>
+            <a:ext cx="7607751" cy="3435531"/>
+          </a:xfrm>
+        </p:spPr>
+        <p:txBody>
+          <a:bodyPr anchor="ctr">
+            <a:normAutofit/>
+          </a:bodyPr>
+          <a:lstStyle/>
+          <a:p>
+            <a:r>
+              <a:rPr lang="de-CH" sz="2100" dirty="0"/>
+              <a:t>Basieren auf Arrays, referenzieren denselben Speicherbereich, können Teilbereiche darstellen.</a:t>
+            </a:r>
+          </a:p>
+          <a:p>
+            <a:r>
+              <a:rPr lang="de-CH" sz="2100" dirty="0"/>
+              <a:t>Dynamische Grösse, können wachsen (</a:t>
+            </a:r>
+            <a:r>
+              <a:rPr lang="de-CH" sz="2100" dirty="0" err="1"/>
+              <a:t>append</a:t>
+            </a:r>
+            <a:r>
+              <a:rPr lang="de-CH" sz="2100" dirty="0"/>
+              <a:t>), haben «</a:t>
+            </a:r>
+            <a:r>
+              <a:rPr lang="de-CH" sz="2100" dirty="0" err="1"/>
+              <a:t>length</a:t>
+            </a:r>
+            <a:r>
+              <a:rPr lang="de-CH" sz="2100" dirty="0"/>
+              <a:t>» und «</a:t>
+            </a:r>
+            <a:r>
+              <a:rPr lang="de-CH" sz="2100" dirty="0" err="1"/>
+              <a:t>capacity</a:t>
+            </a:r>
+            <a:r>
+              <a:rPr lang="de-CH" sz="2100" dirty="0"/>
+              <a:t>».</a:t>
+            </a:r>
+          </a:p>
+          <a:p>
+            <a:r>
+              <a:rPr lang="de-CH" sz="2100" dirty="0"/>
+              <a:t>Standardwert </a:t>
+            </a:r>
+            <a:r>
+              <a:rPr lang="de-CH" sz="2100" dirty="0" err="1"/>
+              <a:t>nil</a:t>
+            </a:r>
+            <a:r>
+              <a:rPr lang="de-CH" sz="2100" dirty="0"/>
+              <a:t>, Zugriff über Index, unterstützen </a:t>
+            </a:r>
+            <a:r>
+              <a:rPr lang="de-CH" sz="2100" dirty="0" err="1"/>
+              <a:t>Slicing</a:t>
+            </a:r>
+            <a:r>
+              <a:rPr lang="de-CH" sz="2100" dirty="0"/>
+              <a:t> [</a:t>
+            </a:r>
+            <a:r>
+              <a:rPr lang="de-CH" sz="2100" dirty="0" err="1"/>
+              <a:t>a:b</a:t>
+            </a:r>
+            <a:r>
+              <a:rPr lang="de-CH" sz="2100" dirty="0"/>
+              <a:t>], sehr effizient für Listen.</a:t>
+            </a:r>
+          </a:p>
+        </p:txBody>
+      </p:sp>
+      <p:pic>
+        <p:nvPicPr>
+          <p:cNvPr id="1026" name="Picture 2" descr="Principles of slice type in GO | Golang for all">
+            <a:extLst>
+              <a:ext uri="{FF2B5EF4-FFF2-40B4-BE49-F238E27FC236}">
+                <a16:creationId xmlns:a16="http://schemas.microsoft.com/office/drawing/2014/main" id="{840E8124-7DC1-3BD2-D781-14527A6E685E}"/>
+              </a:ext>
+            </a:extLst>
+          </p:cNvPr>
+          <p:cNvPicPr>
+            <a:picLocks noChangeAspect="1" noChangeArrowheads="1"/>
+          </p:cNvPicPr>
+          <p:nvPr/>
+        </p:nvPicPr>
+        <p:blipFill>
+          <a:blip r:embed="rId3">
+            <a:extLst>
+              <a:ext uri="{28A0092B-C50C-407E-A947-70E740481C1C}">
+                <a14:useLocalDpi xmlns:a14="http://schemas.microsoft.com/office/drawing/2010/main" val="0"/>
+              </a:ext>
+            </a:extLst>
+          </a:blip>
+          <a:srcRect/>
+          <a:stretch>
+            <a:fillRect/>
+          </a:stretch>
+        </p:blipFill>
+        <p:spPr bwMode="auto">
+          <a:xfrm>
+            <a:off x="7534003" y="221439"/>
+            <a:ext cx="1445390" cy="1188950"/>
+          </a:xfrm>
+          <a:prstGeom prst="rect">
+            <a:avLst/>
+          </a:prstGeom>
+          <a:noFill/>
+          <a:extLst>
+            <a:ext uri="{909E8E84-426E-40DD-AFC4-6F175D3DCCD1}">
+              <a14:hiddenFill xmlns:a14="http://schemas.microsoft.com/office/drawing/2010/main">
+                <a:solidFill>
+                  <a:srgbClr val="FFFFFF"/>
+                </a:solidFill>
+              </a14:hiddenFill>
+            </a:ext>
+          </a:extLst>
+        </p:spPr>
+      </p:pic>
+    </p:spTree>
+    <p:extLst>
+      <p:ext uri="{BB962C8B-B14F-4D97-AF65-F5344CB8AC3E}">
+        <p14:creationId xmlns:p14="http://schemas.microsoft.com/office/powerpoint/2010/main" val="1522304916"/>
+      </p:ext>
+    </p:extLst>
+  </p:cSld>
+  <p:clrMapOvr>
+    <a:masterClrMapping/>
+  </p:clrMapOvr>
+</p:sld>
+</file>
+
+<file path=ppt/slides/slide8.xml><?xml version="1.0" encoding="utf-8"?>
+<p:sld xmlns:a="http://schemas.openxmlformats.org/drawingml/2006/main" xmlns:r="http://schemas.openxmlformats.org/officeDocument/2006/relationships" xmlns:p="http://schemas.openxmlformats.org/presentationml/2006/main" show="0">
+  <p:cSld>
+    <p:bg>
+      <p:bgPr>
+        <a:solidFill>
+          <a:schemeClr val="bg1"/>
+        </a:solidFill>
+        <a:effectLst/>
+      </p:bgPr>
+    </p:bg>
+    <p:spTree>
+      <p:nvGrpSpPr>
+        <p:cNvPr id="1" name="">
+          <a:extLst>
+            <a:ext uri="{FF2B5EF4-FFF2-40B4-BE49-F238E27FC236}">
+              <a16:creationId xmlns:a16="http://schemas.microsoft.com/office/drawing/2014/main" id="{78C51EE0-DE3C-09D3-4399-272B11D2C136}"/>
+            </a:ext>
+          </a:extLst>
+        </p:cNvPr>
+        <p:cNvGrpSpPr/>
+        <p:nvPr/>
+      </p:nvGrpSpPr>
+      <p:grpSpPr>
+        <a:xfrm>
+          <a:off x="0" y="0"/>
+          <a:ext cx="0" cy="0"/>
+          <a:chOff x="0" y="0"/>
+          <a:chExt cx="0" cy="0"/>
+        </a:xfrm>
+      </p:grpSpPr>
+      <p:sp useBgFill="1">
+        <p:nvSpPr>
+          <p:cNvPr id="2057" name="Rectangle 2056">
+            <a:extLst>
+              <a:ext uri="{FF2B5EF4-FFF2-40B4-BE49-F238E27FC236}">
+                <a16:creationId xmlns:a16="http://schemas.microsoft.com/office/drawing/2014/main" id="{31FEB667-0DDC-70B8-BE24-954F7ACAE624}"/>
+              </a:ext>
+              <a:ext uri="{C183D7F6-B498-43B3-948B-1728B52AA6E4}">
+                <adec:decorative xmlns:adec="http://schemas.microsoft.com/office/drawing/2017/decorative" val="1"/>
+              </a:ext>
+            </a:extLst>
+          </p:cNvPr>
+          <p:cNvSpPr>
+            <a:spLocks noGrp="1" noRot="1" noChangeAspect="1" noMove="1" noResize="1" noEditPoints="1" noAdjustHandles="1" noChangeArrowheads="1" noChangeShapeType="1" noTextEdit="1"/>
+          </p:cNvSpPr>
+          <p:nvPr>
+            <p:extLst>
+              <p:ext uri="{386F3935-93C4-4BCD-93E2-E3B085C9AB24}">
+                <p16:designElem xmlns:p16="http://schemas.microsoft.com/office/powerpoint/2015/main" val="1"/>
+              </p:ext>
+            </p:extLst>
+          </p:nvPr>
+        </p:nvSpPr>
+        <p:spPr>
+          <a:xfrm>
+            <a:off x="0" y="0"/>
+            <a:ext cx="9143999" cy="6857365"/>
+          </a:xfrm>
+          <a:prstGeom prst="rect">
+            <a:avLst/>
+          </a:prstGeom>
+          <a:ln>
+            <a:noFill/>
+          </a:ln>
+        </p:spPr>
+        <p:style>
+          <a:lnRef idx="2">
+            <a:schemeClr val="accent1">
+              <a:shade val="50000"/>
+            </a:schemeClr>
+          </a:lnRef>
+          <a:fillRef idx="1">
+            <a:schemeClr val="accent1"/>
+          </a:fillRef>
+          <a:effectRef idx="0">
+            <a:schemeClr val="accent1"/>
+          </a:effectRef>
+          <a:fontRef idx="minor">
+            <a:schemeClr val="lt1"/>
+          </a:fontRef>
+        </p:style>
+        <p:txBody>
+          <a:bodyPr rtlCol="0" anchor="ctr"/>
+          <a:lstStyle/>
+          <a:p>
+            <a:pPr algn="ctr"/>
+            <a:endParaRPr lang="en-US"/>
+          </a:p>
+        </p:txBody>
+      </p:sp>
+      <p:sp>
+        <p:nvSpPr>
+          <p:cNvPr id="2" name="Titel 1">
+            <a:extLst>
+              <a:ext uri="{FF2B5EF4-FFF2-40B4-BE49-F238E27FC236}">
+                <a16:creationId xmlns:a16="http://schemas.microsoft.com/office/drawing/2014/main" id="{EDE91F9F-ECF5-9218-4269-2298FF224051}"/>
+              </a:ext>
+            </a:extLst>
+          </p:cNvPr>
+          <p:cNvSpPr>
+            <a:spLocks noGrp="1"/>
+          </p:cNvSpPr>
+          <p:nvPr>
+            <p:ph type="title"/>
+          </p:nvPr>
+        </p:nvSpPr>
+        <p:spPr>
+          <a:xfrm>
+            <a:off x="606478" y="386930"/>
+            <a:ext cx="6927525" cy="1188950"/>
+          </a:xfrm>
+        </p:spPr>
+        <p:txBody>
+          <a:bodyPr anchor="b">
+            <a:normAutofit/>
+          </a:bodyPr>
+          <a:lstStyle/>
+          <a:p>
+            <a:r>
+              <a:rPr lang="de-CH" sz="4700" dirty="0"/>
+              <a:t>Slices Eigenschaften</a:t>
+            </a:r>
+          </a:p>
+        </p:txBody>
+      </p:sp>
+      <p:grpSp>
+        <p:nvGrpSpPr>
+          <p:cNvPr id="2059" name="Group 2058">
+            <a:extLst>
+              <a:ext uri="{FF2B5EF4-FFF2-40B4-BE49-F238E27FC236}">
+                <a16:creationId xmlns:a16="http://schemas.microsoft.com/office/drawing/2014/main" id="{A6B2CAB1-A2B5-EAD0-44E6-C61B3D7D6F08}"/>
+              </a:ext>
+              <a:ext uri="{C183D7F6-B498-43B3-948B-1728B52AA6E4}">
+                <adec:decorative xmlns:adec="http://schemas.microsoft.com/office/drawing/2017/decorative" val="1"/>
+              </a:ext>
+            </a:extLst>
+          </p:cNvPr>
+          <p:cNvGrpSpPr>
+            <a:grpSpLocks noGrp="1" noUngrp="1" noRot="1" noChangeAspect="1" noMove="1" noResize="1"/>
+          </p:cNvGrpSpPr>
+          <p:nvPr>
+            <p:extLst>
+              <p:ext uri="{386F3935-93C4-4BCD-93E2-E3B085C9AB24}">
+                <p16:designElem xmlns:p16="http://schemas.microsoft.com/office/powerpoint/2015/main" val="1"/>
+              </p:ext>
+            </p:extLst>
+          </p:nvPr>
+        </p:nvGrpSpPr>
+        <p:grpSpPr>
+          <a:xfrm>
+            <a:off x="-1" y="1998368"/>
+            <a:ext cx="8771274" cy="782176"/>
+            <a:chOff x="-2" y="1998368"/>
+            <a:chExt cx="11695083" cy="782176"/>
+          </a:xfrm>
+        </p:grpSpPr>
+        <p:sp>
+          <p:nvSpPr>
+            <p:cNvPr id="2060" name="Rectangle 2059">
+              <a:extLst>
+                <a:ext uri="{FF2B5EF4-FFF2-40B4-BE49-F238E27FC236}">
+                  <a16:creationId xmlns:a16="http://schemas.microsoft.com/office/drawing/2014/main" id="{BAAFEA31-D42E-FDC6-783C-FADC6C16E1D4}"/>
+                </a:ext>
+                <a:ext uri="{C183D7F6-B498-43B3-948B-1728B52AA6E4}">
+                  <adec:decorative xmlns:adec="http://schemas.microsoft.com/office/drawing/2017/decorative" val="1"/>
+                </a:ext>
+              </a:extLst>
+            </p:cNvPr>
+            <p:cNvSpPr/>
+            <p:nvPr>
+              <p:extLst>
+                <p:ext uri="{386F3935-93C4-4BCD-93E2-E3B085C9AB24}">
+                  <p16:designElem xmlns:p16="http://schemas.microsoft.com/office/powerpoint/2015/main" val="1"/>
+                </p:ext>
+              </p:extLst>
+            </p:nvPr>
+          </p:nvSpPr>
+          <p:spPr>
+            <a:xfrm rot="5400000">
+              <a:off x="11228040" y="2313027"/>
+              <a:ext cx="781700" cy="152382"/>
+            </a:xfrm>
+            <a:prstGeom prst="rect">
+              <a:avLst/>
+            </a:prstGeom>
+            <a:solidFill>
+              <a:schemeClr val="accent4"/>
+            </a:solidFill>
+            <a:ln>
+              <a:noFill/>
+            </a:ln>
+          </p:spPr>
+          <p:style>
+            <a:lnRef idx="2">
+              <a:schemeClr val="accent1">
+                <a:shade val="50000"/>
+              </a:schemeClr>
+            </a:lnRef>
+            <a:fillRef idx="1">
+              <a:schemeClr val="accent1"/>
+            </a:fillRef>
+            <a:effectRef idx="0">
+              <a:schemeClr val="accent1"/>
+            </a:effectRef>
+            <a:fontRef idx="minor">
+              <a:schemeClr val="lt1"/>
+            </a:fontRef>
+          </p:style>
+          <p:txBody>
+            <a:bodyPr rtlCol="0" anchor="ctr"/>
+            <a:lstStyle/>
+            <a:p>
+              <a:pPr algn="ctr"/>
+              <a:endParaRPr lang="en-US"/>
+            </a:p>
+          </p:txBody>
+        </p:sp>
+        <p:sp>
+          <p:nvSpPr>
+            <p:cNvPr id="2061" name="Rectangle 2060">
+              <a:extLst>
+                <a:ext uri="{FF2B5EF4-FFF2-40B4-BE49-F238E27FC236}">
+                  <a16:creationId xmlns:a16="http://schemas.microsoft.com/office/drawing/2014/main" id="{C44D276E-2145-2EBF-F656-A3611304354D}"/>
+                </a:ext>
+                <a:ext uri="{C183D7F6-B498-43B3-948B-1728B52AA6E4}">
+                  <adec:decorative xmlns:adec="http://schemas.microsoft.com/office/drawing/2017/decorative" val="1"/>
+                </a:ext>
+              </a:extLst>
+            </p:cNvPr>
+            <p:cNvSpPr/>
+            <p:nvPr>
+              <p:extLst>
+                <p:ext uri="{386F3935-93C4-4BCD-93E2-E3B085C9AB24}">
+                  <p16:designElem xmlns:p16="http://schemas.microsoft.com/office/powerpoint/2015/main" val="1"/>
+                </p:ext>
+              </p:extLst>
+            </p:nvPr>
+          </p:nvSpPr>
+          <p:spPr>
+            <a:xfrm flipH="1" flipV="1">
+              <a:off x="-2" y="1998845"/>
+              <a:ext cx="11454595" cy="781699"/>
+            </a:xfrm>
+            <a:prstGeom prst="rect">
+              <a:avLst/>
+            </a:prstGeom>
+            <a:solidFill>
+              <a:schemeClr val="accent4"/>
+            </a:solidFill>
+            <a:ln>
+              <a:noFill/>
+            </a:ln>
+          </p:spPr>
+          <p:style>
+            <a:lnRef idx="2">
+              <a:schemeClr val="accent1">
+                <a:shade val="50000"/>
+              </a:schemeClr>
+            </a:lnRef>
+            <a:fillRef idx="1">
+              <a:schemeClr val="accent1"/>
+            </a:fillRef>
+            <a:effectRef idx="0">
+              <a:schemeClr val="accent1"/>
+            </a:effectRef>
+            <a:fontRef idx="minor">
+              <a:schemeClr val="lt1"/>
+            </a:fontRef>
+          </p:style>
+          <p:txBody>
+            <a:bodyPr rtlCol="0" anchor="ctr"/>
+            <a:lstStyle/>
+            <a:p>
+              <a:pPr algn="ctr"/>
+              <a:endParaRPr lang="en-US"/>
+            </a:p>
+          </p:txBody>
+        </p:sp>
+      </p:grpSp>
+      <p:sp>
+        <p:nvSpPr>
+          <p:cNvPr id="2063" name="Rectangle 2062">
+            <a:extLst>
+              <a:ext uri="{FF2B5EF4-FFF2-40B4-BE49-F238E27FC236}">
+                <a16:creationId xmlns:a16="http://schemas.microsoft.com/office/drawing/2014/main" id="{F311CBA3-E2C9-6F58-DF7E-5507EDCD84DB}"/>
+              </a:ext>
+              <a:ext uri="{C183D7F6-B498-43B3-948B-1728B52AA6E4}">
+                <adec:decorative xmlns:adec="http://schemas.microsoft.com/office/drawing/2017/decorative" val="1"/>
+              </a:ext>
+            </a:extLst>
+          </p:cNvPr>
+          <p:cNvSpPr>
+            <a:spLocks noGrp="1" noRot="1" noChangeAspect="1" noMove="1" noResize="1" noEditPoints="1" noAdjustHandles="1" noChangeArrowheads="1" noChangeShapeType="1" noTextEdit="1"/>
+          </p:cNvSpPr>
+          <p:nvPr>
+            <p:extLst>
+              <p:ext uri="{386F3935-93C4-4BCD-93E2-E3B085C9AB24}">
+                <p16:designElem xmlns:p16="http://schemas.microsoft.com/office/powerpoint/2015/main" val="1"/>
+              </p:ext>
+            </p:extLst>
+          </p:nvPr>
+        </p:nvSpPr>
+        <p:spPr>
+          <a:xfrm>
+            <a:off x="0" y="2203079"/>
+            <a:ext cx="8537521" cy="4147845"/>
+          </a:xfrm>
+          <a:prstGeom prst="rect">
+            <a:avLst/>
+          </a:prstGeom>
+          <a:solidFill>
+            <a:schemeClr val="bg1"/>
+          </a:solidFill>
+          <a:ln>
+            <a:noFill/>
+          </a:ln>
+          <a:effectLst>
+            <a:outerShdw blurRad="139700" dist="127000" dir="5400000" algn="t" rotWithShape="0">
+              <a:prstClr val="black">
+                <a:alpha val="15000"/>
+              </a:prstClr>
+            </a:outerShdw>
+          </a:effectLst>
+        </p:spPr>
+        <p:style>
+          <a:lnRef idx="2">
+            <a:schemeClr val="accent1">
+              <a:shade val="50000"/>
+            </a:schemeClr>
+          </a:lnRef>
+          <a:fillRef idx="1">
+            <a:schemeClr val="accent1"/>
+          </a:fillRef>
+          <a:effectRef idx="0">
+            <a:schemeClr val="accent1"/>
+          </a:effectRef>
+          <a:fontRef idx="minor">
+            <a:schemeClr val="lt1"/>
+          </a:fontRef>
+        </p:style>
+        <p:txBody>
+          <a:bodyPr rtlCol="0" anchor="ctr"/>
+          <a:lstStyle/>
+          <a:p>
+            <a:pPr algn="ctr"/>
+            <a:endParaRPr lang="en-US"/>
+          </a:p>
+        </p:txBody>
+      </p:sp>
+      <p:sp>
+        <p:nvSpPr>
+          <p:cNvPr id="4" name="Inhaltsplatzhalter 3">
+            <a:extLst>
+              <a:ext uri="{FF2B5EF4-FFF2-40B4-BE49-F238E27FC236}">
+                <a16:creationId xmlns:a16="http://schemas.microsoft.com/office/drawing/2014/main" id="{805D1BB3-1F49-9819-9A1B-9D2CF438CFC6}"/>
+              </a:ext>
+            </a:extLst>
+          </p:cNvPr>
+          <p:cNvSpPr>
+            <a:spLocks noGrp="1"/>
+          </p:cNvSpPr>
+          <p:nvPr>
+            <p:ph idx="1"/>
+          </p:nvPr>
+        </p:nvSpPr>
+        <p:spPr>
+          <a:xfrm>
+            <a:off x="595245" y="2599509"/>
+            <a:ext cx="7607751" cy="3435531"/>
+          </a:xfrm>
+        </p:spPr>
+        <p:txBody>
+          <a:bodyPr anchor="ctr">
             <a:normAutofit fontScale="92500" lnSpcReduction="10000"/>
           </a:bodyPr>
           <a:lstStyle/>
@@ -24312,7 +26578,7 @@
           <p:cNvPr id="2052" name="Picture 4" descr="Learning Golang in 24 hours | Kislay Verma">
             <a:extLst>
               <a:ext uri="{FF2B5EF4-FFF2-40B4-BE49-F238E27FC236}">
-                <a16:creationId xmlns:a16="http://schemas.microsoft.com/office/drawing/2014/main" id="{870558DF-3A9C-0490-BF72-CC6E01F8A2A8}"/>
+                <a16:creationId xmlns:a16="http://schemas.microsoft.com/office/drawing/2014/main" id="{3DD8A027-9783-9022-5D59-C165F283AEF6}"/>
               </a:ext>
             </a:extLst>
           </p:cNvPr>
@@ -24357,7 +26623,7 @@
     </p:spTree>
     <p:extLst>
       <p:ext uri="{BB962C8B-B14F-4D97-AF65-F5344CB8AC3E}">
-        <p14:creationId xmlns:p14="http://schemas.microsoft.com/office/powerpoint/2010/main" val="4055002409"/>
+        <p14:creationId xmlns:p14="http://schemas.microsoft.com/office/powerpoint/2010/main" val="3282272350"/>
       </p:ext>
     </p:extLst>
   </p:cSld>
@@ -24367,7 +26633,7 @@
 </p:sld>
 </file>
 
-<file path=ppt/slides/slide7.xml><?xml version="1.0" encoding="utf-8"?>
+<file path=ppt/slides/slide9.xml><?xml version="1.0" encoding="utf-8"?>
 <p:sld xmlns:a="http://schemas.openxmlformats.org/drawingml/2006/main" xmlns:r="http://schemas.openxmlformats.org/officeDocument/2006/relationships" xmlns:p="http://schemas.openxmlformats.org/presentationml/2006/main">
   <p:cSld>
     <p:bg>
@@ -24760,53 +27026,6 @@
       </p:sp>
       <p:pic>
         <p:nvPicPr>
-          <p:cNvPr id="2052" name="Picture 4" descr="Learning Golang in 24 hours | Kislay Verma">
-            <a:extLst>
-              <a:ext uri="{FF2B5EF4-FFF2-40B4-BE49-F238E27FC236}">
-                <a16:creationId xmlns:a16="http://schemas.microsoft.com/office/drawing/2014/main" id="{CD77FB0C-D2BF-9BCE-3643-633B0779339C}"/>
-              </a:ext>
-            </a:extLst>
-          </p:cNvPr>
-          <p:cNvPicPr>
-            <a:picLocks noChangeAspect="1" noChangeArrowheads="1"/>
-          </p:cNvPicPr>
-          <p:nvPr/>
-        </p:nvPicPr>
-        <p:blipFill>
-          <a:blip r:embed="rId2">
-            <a:extLst>
-              <a:ext uri="{28A0092B-C50C-407E-A947-70E740481C1C}">
-                <a14:useLocalDpi xmlns:a14="http://schemas.microsoft.com/office/drawing/2010/main" val="0"/>
-              </a:ext>
-            </a:extLst>
-          </a:blip>
-          <a:srcRect/>
-          <a:stretch>
-            <a:fillRect/>
-          </a:stretch>
-        </p:blipFill>
-        <p:spPr bwMode="auto">
-          <a:xfrm>
-            <a:off x="7955280" y="0"/>
-            <a:ext cx="1116418" cy="1369399"/>
-          </a:xfrm>
-          <a:prstGeom prst="rect">
-            <a:avLst/>
-          </a:prstGeom>
-          <a:noFill/>
-          <a:extLst>
-            <a:ext uri="{909E8E84-426E-40DD-AFC4-6F175D3DCCD1}">
-              <a14:hiddenFill xmlns:a14="http://schemas.microsoft.com/office/drawing/2010/main">
-                <a:solidFill>
-                  <a:srgbClr val="FFFFFF"/>
-                </a:solidFill>
-              </a14:hiddenFill>
-            </a:ext>
-          </a:extLst>
-        </p:spPr>
-      </p:pic>
-      <p:pic>
-        <p:nvPicPr>
           <p:cNvPr id="9" name="Grafik 8">
             <a:extLst>
               <a:ext uri="{FF2B5EF4-FFF2-40B4-BE49-F238E27FC236}">
@@ -24820,7 +27039,7 @@
           <p:nvPr/>
         </p:nvPicPr>
         <p:blipFill>
-          <a:blip r:embed="rId3"/>
+          <a:blip r:embed="rId2"/>
           <a:stretch>
             <a:fillRect/>
           </a:stretch>
@@ -24835,894 +27054,12 @@
           </a:prstGeom>
         </p:spPr>
       </p:pic>
-    </p:spTree>
-    <p:extLst>
-      <p:ext uri="{BB962C8B-B14F-4D97-AF65-F5344CB8AC3E}">
-        <p14:creationId xmlns:p14="http://schemas.microsoft.com/office/powerpoint/2010/main" val="3128220194"/>
-      </p:ext>
-    </p:extLst>
-  </p:cSld>
-  <p:clrMapOvr>
-    <a:masterClrMapping/>
-  </p:clrMapOvr>
-</p:sld>
-</file>
-
-<file path=ppt/slides/slide8.xml><?xml version="1.0" encoding="utf-8"?>
-<p:sld xmlns:a="http://schemas.openxmlformats.org/drawingml/2006/main" xmlns:r="http://schemas.openxmlformats.org/officeDocument/2006/relationships" xmlns:p="http://schemas.openxmlformats.org/presentationml/2006/main">
-  <p:cSld>
-    <p:bg>
-      <p:bgPr>
-        <a:solidFill>
-          <a:schemeClr val="bg1"/>
-        </a:solidFill>
-        <a:effectLst/>
-      </p:bgPr>
-    </p:bg>
-    <p:spTree>
-      <p:nvGrpSpPr>
-        <p:cNvPr id="1" name="">
-          <a:extLst>
-            <a:ext uri="{FF2B5EF4-FFF2-40B4-BE49-F238E27FC236}">
-              <a16:creationId xmlns:a16="http://schemas.microsoft.com/office/drawing/2014/main" id="{870D3697-1D78-4CC0-4F13-58412528479B}"/>
-            </a:ext>
-          </a:extLst>
-        </p:cNvPr>
-        <p:cNvGrpSpPr/>
-        <p:nvPr/>
-      </p:nvGrpSpPr>
-      <p:grpSpPr>
-        <a:xfrm>
-          <a:off x="0" y="0"/>
-          <a:ext cx="0" cy="0"/>
-          <a:chOff x="0" y="0"/>
-          <a:chExt cx="0" cy="0"/>
-        </a:xfrm>
-      </p:grpSpPr>
-      <p:sp useBgFill="1">
-        <p:nvSpPr>
-          <p:cNvPr id="2057" name="Rectangle 2056">
+      <p:pic>
+        <p:nvPicPr>
+          <p:cNvPr id="3" name="Picture 2" descr="Principles of slice type in GO | Golang for all">
             <a:extLst>
               <a:ext uri="{FF2B5EF4-FFF2-40B4-BE49-F238E27FC236}">
-                <a16:creationId xmlns:a16="http://schemas.microsoft.com/office/drawing/2014/main" id="{5A373F65-2C02-EFA5-13AA-9A31C2292C05}"/>
-              </a:ext>
-              <a:ext uri="{C183D7F6-B498-43B3-948B-1728B52AA6E4}">
-                <adec:decorative xmlns:adec="http://schemas.microsoft.com/office/drawing/2017/decorative" val="1"/>
-              </a:ext>
-            </a:extLst>
-          </p:cNvPr>
-          <p:cNvSpPr>
-            <a:spLocks noGrp="1" noRot="1" noChangeAspect="1" noMove="1" noResize="1" noEditPoints="1" noAdjustHandles="1" noChangeArrowheads="1" noChangeShapeType="1" noTextEdit="1"/>
-          </p:cNvSpPr>
-          <p:nvPr>
-            <p:extLst>
-              <p:ext uri="{386F3935-93C4-4BCD-93E2-E3B085C9AB24}">
-                <p16:designElem xmlns:p16="http://schemas.microsoft.com/office/powerpoint/2015/main" val="1"/>
-              </p:ext>
-            </p:extLst>
-          </p:nvPr>
-        </p:nvSpPr>
-        <p:spPr>
-          <a:xfrm>
-            <a:off x="0" y="0"/>
-            <a:ext cx="9143999" cy="6857365"/>
-          </a:xfrm>
-          <a:prstGeom prst="rect">
-            <a:avLst/>
-          </a:prstGeom>
-          <a:ln>
-            <a:noFill/>
-          </a:ln>
-        </p:spPr>
-        <p:style>
-          <a:lnRef idx="2">
-            <a:schemeClr val="accent1">
-              <a:shade val="50000"/>
-            </a:schemeClr>
-          </a:lnRef>
-          <a:fillRef idx="1">
-            <a:schemeClr val="accent1"/>
-          </a:fillRef>
-          <a:effectRef idx="0">
-            <a:schemeClr val="accent1"/>
-          </a:effectRef>
-          <a:fontRef idx="minor">
-            <a:schemeClr val="lt1"/>
-          </a:fontRef>
-        </p:style>
-        <p:txBody>
-          <a:bodyPr rtlCol="0" anchor="ctr"/>
-          <a:lstStyle/>
-          <a:p>
-            <a:pPr algn="ctr"/>
-            <a:endParaRPr lang="en-US"/>
-          </a:p>
-        </p:txBody>
-      </p:sp>
-      <p:sp>
-        <p:nvSpPr>
-          <p:cNvPr id="2" name="Titel 1">
-            <a:extLst>
-              <a:ext uri="{FF2B5EF4-FFF2-40B4-BE49-F238E27FC236}">
-                <a16:creationId xmlns:a16="http://schemas.microsoft.com/office/drawing/2014/main" id="{CD1BDE69-E2DE-724F-472B-FD80F7617AEB}"/>
-              </a:ext>
-            </a:extLst>
-          </p:cNvPr>
-          <p:cNvSpPr>
-            <a:spLocks noGrp="1"/>
-          </p:cNvSpPr>
-          <p:nvPr>
-            <p:ph type="title"/>
-          </p:nvPr>
-        </p:nvSpPr>
-        <p:spPr>
-          <a:xfrm>
-            <a:off x="606478" y="386930"/>
-            <a:ext cx="6927525" cy="1188950"/>
-          </a:xfrm>
-        </p:spPr>
-        <p:txBody>
-          <a:bodyPr anchor="b">
-            <a:normAutofit/>
-          </a:bodyPr>
-          <a:lstStyle/>
-          <a:p>
-            <a:r>
-              <a:rPr lang="de-CH" sz="4700" dirty="0"/>
-              <a:t>Maps Eigenschaften</a:t>
-            </a:r>
-          </a:p>
-        </p:txBody>
-      </p:sp>
-      <p:grpSp>
-        <p:nvGrpSpPr>
-          <p:cNvPr id="2059" name="Group 2058">
-            <a:extLst>
-              <a:ext uri="{FF2B5EF4-FFF2-40B4-BE49-F238E27FC236}">
-                <a16:creationId xmlns:a16="http://schemas.microsoft.com/office/drawing/2014/main" id="{87D5C43B-983C-CD03-D581-AFD3991ACE9A}"/>
-              </a:ext>
-              <a:ext uri="{C183D7F6-B498-43B3-948B-1728B52AA6E4}">
-                <adec:decorative xmlns:adec="http://schemas.microsoft.com/office/drawing/2017/decorative" val="1"/>
-              </a:ext>
-            </a:extLst>
-          </p:cNvPr>
-          <p:cNvGrpSpPr>
-            <a:grpSpLocks noGrp="1" noUngrp="1" noRot="1" noChangeAspect="1" noMove="1" noResize="1"/>
-          </p:cNvGrpSpPr>
-          <p:nvPr>
-            <p:extLst>
-              <p:ext uri="{386F3935-93C4-4BCD-93E2-E3B085C9AB24}">
-                <p16:designElem xmlns:p16="http://schemas.microsoft.com/office/powerpoint/2015/main" val="1"/>
-              </p:ext>
-            </p:extLst>
-          </p:nvPr>
-        </p:nvGrpSpPr>
-        <p:grpSpPr>
-          <a:xfrm>
-            <a:off x="-1" y="1998368"/>
-            <a:ext cx="8771274" cy="782176"/>
-            <a:chOff x="-2" y="1998368"/>
-            <a:chExt cx="11695083" cy="782176"/>
-          </a:xfrm>
-        </p:grpSpPr>
-        <p:sp>
-          <p:nvSpPr>
-            <p:cNvPr id="2060" name="Rectangle 2059">
-              <a:extLst>
-                <a:ext uri="{FF2B5EF4-FFF2-40B4-BE49-F238E27FC236}">
-                  <a16:creationId xmlns:a16="http://schemas.microsoft.com/office/drawing/2014/main" id="{684B53A0-F78A-B158-551A-317242B87B5F}"/>
-                </a:ext>
-                <a:ext uri="{C183D7F6-B498-43B3-948B-1728B52AA6E4}">
-                  <adec:decorative xmlns:adec="http://schemas.microsoft.com/office/drawing/2017/decorative" val="1"/>
-                </a:ext>
-              </a:extLst>
-            </p:cNvPr>
-            <p:cNvSpPr/>
-            <p:nvPr>
-              <p:extLst>
-                <p:ext uri="{386F3935-93C4-4BCD-93E2-E3B085C9AB24}">
-                  <p16:designElem xmlns:p16="http://schemas.microsoft.com/office/powerpoint/2015/main" val="1"/>
-                </p:ext>
-              </p:extLst>
-            </p:nvPr>
-          </p:nvSpPr>
-          <p:spPr>
-            <a:xfrm rot="5400000">
-              <a:off x="11228040" y="2313027"/>
-              <a:ext cx="781700" cy="152382"/>
-            </a:xfrm>
-            <a:prstGeom prst="rect">
-              <a:avLst/>
-            </a:prstGeom>
-            <a:solidFill>
-              <a:schemeClr val="accent4"/>
-            </a:solidFill>
-            <a:ln>
-              <a:noFill/>
-            </a:ln>
-          </p:spPr>
-          <p:style>
-            <a:lnRef idx="2">
-              <a:schemeClr val="accent1">
-                <a:shade val="50000"/>
-              </a:schemeClr>
-            </a:lnRef>
-            <a:fillRef idx="1">
-              <a:schemeClr val="accent1"/>
-            </a:fillRef>
-            <a:effectRef idx="0">
-              <a:schemeClr val="accent1"/>
-            </a:effectRef>
-            <a:fontRef idx="minor">
-              <a:schemeClr val="lt1"/>
-            </a:fontRef>
-          </p:style>
-          <p:txBody>
-            <a:bodyPr rtlCol="0" anchor="ctr"/>
-            <a:lstStyle/>
-            <a:p>
-              <a:pPr algn="ctr"/>
-              <a:endParaRPr lang="en-US"/>
-            </a:p>
-          </p:txBody>
-        </p:sp>
-        <p:sp>
-          <p:nvSpPr>
-            <p:cNvPr id="2061" name="Rectangle 2060">
-              <a:extLst>
-                <a:ext uri="{FF2B5EF4-FFF2-40B4-BE49-F238E27FC236}">
-                  <a16:creationId xmlns:a16="http://schemas.microsoft.com/office/drawing/2014/main" id="{2D887804-3785-DB50-0179-D457655D4576}"/>
-                </a:ext>
-                <a:ext uri="{C183D7F6-B498-43B3-948B-1728B52AA6E4}">
-                  <adec:decorative xmlns:adec="http://schemas.microsoft.com/office/drawing/2017/decorative" val="1"/>
-                </a:ext>
-              </a:extLst>
-            </p:cNvPr>
-            <p:cNvSpPr/>
-            <p:nvPr>
-              <p:extLst>
-                <p:ext uri="{386F3935-93C4-4BCD-93E2-E3B085C9AB24}">
-                  <p16:designElem xmlns:p16="http://schemas.microsoft.com/office/powerpoint/2015/main" val="1"/>
-                </p:ext>
-              </p:extLst>
-            </p:nvPr>
-          </p:nvSpPr>
-          <p:spPr>
-            <a:xfrm flipH="1" flipV="1">
-              <a:off x="-2" y="1998845"/>
-              <a:ext cx="11454595" cy="781699"/>
-            </a:xfrm>
-            <a:prstGeom prst="rect">
-              <a:avLst/>
-            </a:prstGeom>
-            <a:solidFill>
-              <a:schemeClr val="accent4"/>
-            </a:solidFill>
-            <a:ln>
-              <a:noFill/>
-            </a:ln>
-          </p:spPr>
-          <p:style>
-            <a:lnRef idx="2">
-              <a:schemeClr val="accent1">
-                <a:shade val="50000"/>
-              </a:schemeClr>
-            </a:lnRef>
-            <a:fillRef idx="1">
-              <a:schemeClr val="accent1"/>
-            </a:fillRef>
-            <a:effectRef idx="0">
-              <a:schemeClr val="accent1"/>
-            </a:effectRef>
-            <a:fontRef idx="minor">
-              <a:schemeClr val="lt1"/>
-            </a:fontRef>
-          </p:style>
-          <p:txBody>
-            <a:bodyPr rtlCol="0" anchor="ctr"/>
-            <a:lstStyle/>
-            <a:p>
-              <a:pPr algn="ctr"/>
-              <a:endParaRPr lang="en-US"/>
-            </a:p>
-          </p:txBody>
-        </p:sp>
-      </p:grpSp>
-      <p:sp>
-        <p:nvSpPr>
-          <p:cNvPr id="2063" name="Rectangle 2062">
-            <a:extLst>
-              <a:ext uri="{FF2B5EF4-FFF2-40B4-BE49-F238E27FC236}">
-                <a16:creationId xmlns:a16="http://schemas.microsoft.com/office/drawing/2014/main" id="{2A809A91-C8A4-CF93-32BC-064223DC5095}"/>
-              </a:ext>
-              <a:ext uri="{C183D7F6-B498-43B3-948B-1728B52AA6E4}">
-                <adec:decorative xmlns:adec="http://schemas.microsoft.com/office/drawing/2017/decorative" val="1"/>
-              </a:ext>
-            </a:extLst>
-          </p:cNvPr>
-          <p:cNvSpPr>
-            <a:spLocks noGrp="1" noRot="1" noChangeAspect="1" noMove="1" noResize="1" noEditPoints="1" noAdjustHandles="1" noChangeArrowheads="1" noChangeShapeType="1" noTextEdit="1"/>
-          </p:cNvSpPr>
-          <p:nvPr>
-            <p:extLst>
-              <p:ext uri="{386F3935-93C4-4BCD-93E2-E3B085C9AB24}">
-                <p16:designElem xmlns:p16="http://schemas.microsoft.com/office/powerpoint/2015/main" val="1"/>
-              </p:ext>
-            </p:extLst>
-          </p:nvPr>
-        </p:nvSpPr>
-        <p:spPr>
-          <a:xfrm>
-            <a:off x="0" y="2203079"/>
-            <a:ext cx="8537521" cy="4147845"/>
-          </a:xfrm>
-          <a:prstGeom prst="rect">
-            <a:avLst/>
-          </a:prstGeom>
-          <a:solidFill>
-            <a:schemeClr val="bg1"/>
-          </a:solidFill>
-          <a:ln>
-            <a:noFill/>
-          </a:ln>
-          <a:effectLst>
-            <a:outerShdw blurRad="139700" dist="127000" dir="5400000" algn="t" rotWithShape="0">
-              <a:prstClr val="black">
-                <a:alpha val="15000"/>
-              </a:prstClr>
-            </a:outerShdw>
-          </a:effectLst>
-        </p:spPr>
-        <p:style>
-          <a:lnRef idx="2">
-            <a:schemeClr val="accent1">
-              <a:shade val="50000"/>
-            </a:schemeClr>
-          </a:lnRef>
-          <a:fillRef idx="1">
-            <a:schemeClr val="accent1"/>
-          </a:fillRef>
-          <a:effectRef idx="0">
-            <a:schemeClr val="accent1"/>
-          </a:effectRef>
-          <a:fontRef idx="minor">
-            <a:schemeClr val="lt1"/>
-          </a:fontRef>
-        </p:style>
-        <p:txBody>
-          <a:bodyPr rtlCol="0" anchor="ctr"/>
-          <a:lstStyle/>
-          <a:p>
-            <a:pPr algn="ctr"/>
-            <a:endParaRPr lang="en-US"/>
-          </a:p>
-        </p:txBody>
-      </p:sp>
-      <p:sp>
-        <p:nvSpPr>
-          <p:cNvPr id="4" name="Inhaltsplatzhalter 3">
-            <a:extLst>
-              <a:ext uri="{FF2B5EF4-FFF2-40B4-BE49-F238E27FC236}">
-                <a16:creationId xmlns:a16="http://schemas.microsoft.com/office/drawing/2014/main" id="{21EC2F82-2079-BEE9-A04D-EC18AE7FE18B}"/>
-              </a:ext>
-            </a:extLst>
-          </p:cNvPr>
-          <p:cNvSpPr>
-            <a:spLocks noGrp="1"/>
-          </p:cNvSpPr>
-          <p:nvPr>
-            <p:ph idx="1"/>
-          </p:nvPr>
-        </p:nvSpPr>
-        <p:spPr>
-          <a:xfrm>
-            <a:off x="595245" y="2599509"/>
-            <a:ext cx="7607751" cy="3435531"/>
-          </a:xfrm>
-        </p:spPr>
-        <p:txBody>
-          <a:bodyPr anchor="ctr">
-            <a:normAutofit/>
-          </a:bodyPr>
-          <a:lstStyle/>
-          <a:p>
-            <a:r>
-              <a:rPr lang="de-CH" sz="2100" dirty="0"/>
-              <a:t>Key – Value – </a:t>
-            </a:r>
-            <a:r>
-              <a:rPr lang="de-CH" sz="2100" dirty="0" err="1"/>
-              <a:t>Structure</a:t>
-            </a:r>
-            <a:endParaRPr lang="de-CH" sz="2100" dirty="0"/>
-          </a:p>
-          <a:p>
-            <a:r>
-              <a:rPr lang="de-CH" sz="2100" dirty="0"/>
-              <a:t>Dynamische Grösse</a:t>
-            </a:r>
-          </a:p>
-          <a:p>
-            <a:r>
-              <a:rPr lang="de-CH" sz="2100" dirty="0"/>
-              <a:t>Reihenfolge ist nicht garantiert</a:t>
-            </a:r>
-          </a:p>
-          <a:p>
-            <a:r>
-              <a:rPr lang="de-CH" sz="2100" dirty="0"/>
-              <a:t>Standardwert ist </a:t>
-            </a:r>
-            <a:r>
-              <a:rPr lang="de-CH" sz="2100" dirty="0" err="1"/>
-              <a:t>nil</a:t>
-            </a:r>
-            <a:endParaRPr lang="de-CH" sz="2100" dirty="0"/>
-          </a:p>
-          <a:p>
-            <a:r>
-              <a:rPr lang="de-CH" sz="2100" dirty="0"/>
-              <a:t>«</a:t>
-            </a:r>
-            <a:r>
-              <a:rPr lang="de-CH" sz="2100" dirty="0" err="1"/>
-              <a:t>range</a:t>
-            </a:r>
-            <a:r>
-              <a:rPr lang="de-CH" sz="2100" dirty="0"/>
-              <a:t>» für Iteration</a:t>
-            </a:r>
-          </a:p>
-        </p:txBody>
-      </p:sp>
-      <p:pic>
-        <p:nvPicPr>
-          <p:cNvPr id="2052" name="Picture 4" descr="Learning Golang in 24 hours | Kislay Verma">
-            <a:extLst>
-              <a:ext uri="{FF2B5EF4-FFF2-40B4-BE49-F238E27FC236}">
-                <a16:creationId xmlns:a16="http://schemas.microsoft.com/office/drawing/2014/main" id="{2C12124C-3544-1E99-1B06-67D6E38CFAF8}"/>
-              </a:ext>
-            </a:extLst>
-          </p:cNvPr>
-          <p:cNvPicPr>
-            <a:picLocks noChangeAspect="1" noChangeArrowheads="1"/>
-          </p:cNvPicPr>
-          <p:nvPr/>
-        </p:nvPicPr>
-        <p:blipFill>
-          <a:blip r:embed="rId2">
-            <a:extLst>
-              <a:ext uri="{28A0092B-C50C-407E-A947-70E740481C1C}">
-                <a14:useLocalDpi xmlns:a14="http://schemas.microsoft.com/office/drawing/2010/main" val="0"/>
-              </a:ext>
-            </a:extLst>
-          </a:blip>
-          <a:srcRect/>
-          <a:stretch>
-            <a:fillRect/>
-          </a:stretch>
-        </p:blipFill>
-        <p:spPr bwMode="auto">
-          <a:xfrm>
-            <a:off x="7955280" y="0"/>
-            <a:ext cx="1116418" cy="1369399"/>
-          </a:xfrm>
-          <a:prstGeom prst="rect">
-            <a:avLst/>
-          </a:prstGeom>
-          <a:noFill/>
-          <a:extLst>
-            <a:ext uri="{909E8E84-426E-40DD-AFC4-6F175D3DCCD1}">
-              <a14:hiddenFill xmlns:a14="http://schemas.microsoft.com/office/drawing/2010/main">
-                <a:solidFill>
-                  <a:srgbClr val="FFFFFF"/>
-                </a:solidFill>
-              </a14:hiddenFill>
-            </a:ext>
-          </a:extLst>
-        </p:spPr>
-      </p:pic>
-    </p:spTree>
-    <p:extLst>
-      <p:ext uri="{BB962C8B-B14F-4D97-AF65-F5344CB8AC3E}">
-        <p14:creationId xmlns:p14="http://schemas.microsoft.com/office/powerpoint/2010/main" val="1655206865"/>
-      </p:ext>
-    </p:extLst>
-  </p:cSld>
-  <p:clrMapOvr>
-    <a:masterClrMapping/>
-  </p:clrMapOvr>
-</p:sld>
-</file>
-
-<file path=ppt/slides/slide9.xml><?xml version="1.0" encoding="utf-8"?>
-<p:sld xmlns:a="http://schemas.openxmlformats.org/drawingml/2006/main" xmlns:r="http://schemas.openxmlformats.org/officeDocument/2006/relationships" xmlns:p="http://schemas.openxmlformats.org/presentationml/2006/main">
-  <p:cSld>
-    <p:bg>
-      <p:bgPr>
-        <a:solidFill>
-          <a:schemeClr val="bg1"/>
-        </a:solidFill>
-        <a:effectLst/>
-      </p:bgPr>
-    </p:bg>
-    <p:spTree>
-      <p:nvGrpSpPr>
-        <p:cNvPr id="1" name="">
-          <a:extLst>
-            <a:ext uri="{FF2B5EF4-FFF2-40B4-BE49-F238E27FC236}">
-              <a16:creationId xmlns:a16="http://schemas.microsoft.com/office/drawing/2014/main" id="{1422B429-924E-38BF-0BC7-8AB83FA47097}"/>
-            </a:ext>
-          </a:extLst>
-        </p:cNvPr>
-        <p:cNvGrpSpPr/>
-        <p:nvPr/>
-      </p:nvGrpSpPr>
-      <p:grpSpPr>
-        <a:xfrm>
-          <a:off x="0" y="0"/>
-          <a:ext cx="0" cy="0"/>
-          <a:chOff x="0" y="0"/>
-          <a:chExt cx="0" cy="0"/>
-        </a:xfrm>
-      </p:grpSpPr>
-      <p:sp useBgFill="1">
-        <p:nvSpPr>
-          <p:cNvPr id="2057" name="Rectangle 2056">
-            <a:extLst>
-              <a:ext uri="{FF2B5EF4-FFF2-40B4-BE49-F238E27FC236}">
-                <a16:creationId xmlns:a16="http://schemas.microsoft.com/office/drawing/2014/main" id="{7402BCCD-8498-F895-FB49-3A6814D953FC}"/>
-              </a:ext>
-              <a:ext uri="{C183D7F6-B498-43B3-948B-1728B52AA6E4}">
-                <adec:decorative xmlns:adec="http://schemas.microsoft.com/office/drawing/2017/decorative" val="1"/>
-              </a:ext>
-            </a:extLst>
-          </p:cNvPr>
-          <p:cNvSpPr>
-            <a:spLocks noGrp="1" noRot="1" noChangeAspect="1" noMove="1" noResize="1" noEditPoints="1" noAdjustHandles="1" noChangeArrowheads="1" noChangeShapeType="1" noTextEdit="1"/>
-          </p:cNvSpPr>
-          <p:nvPr>
-            <p:extLst>
-              <p:ext uri="{386F3935-93C4-4BCD-93E2-E3B085C9AB24}">
-                <p16:designElem xmlns:p16="http://schemas.microsoft.com/office/powerpoint/2015/main" val="1"/>
-              </p:ext>
-            </p:extLst>
-          </p:nvPr>
-        </p:nvSpPr>
-        <p:spPr>
-          <a:xfrm>
-            <a:off x="0" y="0"/>
-            <a:ext cx="9143999" cy="6857365"/>
-          </a:xfrm>
-          <a:prstGeom prst="rect">
-            <a:avLst/>
-          </a:prstGeom>
-          <a:ln>
-            <a:noFill/>
-          </a:ln>
-        </p:spPr>
-        <p:style>
-          <a:lnRef idx="2">
-            <a:schemeClr val="accent1">
-              <a:shade val="50000"/>
-            </a:schemeClr>
-          </a:lnRef>
-          <a:fillRef idx="1">
-            <a:schemeClr val="accent1"/>
-          </a:fillRef>
-          <a:effectRef idx="0">
-            <a:schemeClr val="accent1"/>
-          </a:effectRef>
-          <a:fontRef idx="minor">
-            <a:schemeClr val="lt1"/>
-          </a:fontRef>
-        </p:style>
-        <p:txBody>
-          <a:bodyPr rtlCol="0" anchor="ctr"/>
-          <a:lstStyle/>
-          <a:p>
-            <a:pPr algn="ctr"/>
-            <a:endParaRPr lang="en-US"/>
-          </a:p>
-        </p:txBody>
-      </p:sp>
-      <p:sp>
-        <p:nvSpPr>
-          <p:cNvPr id="2" name="Titel 1">
-            <a:extLst>
-              <a:ext uri="{FF2B5EF4-FFF2-40B4-BE49-F238E27FC236}">
-                <a16:creationId xmlns:a16="http://schemas.microsoft.com/office/drawing/2014/main" id="{37AD8B81-93FE-CB35-DFBF-BA8F6C5E60FD}"/>
-              </a:ext>
-            </a:extLst>
-          </p:cNvPr>
-          <p:cNvSpPr>
-            <a:spLocks noGrp="1"/>
-          </p:cNvSpPr>
-          <p:nvPr>
-            <p:ph type="title"/>
-          </p:nvPr>
-        </p:nvSpPr>
-        <p:spPr>
-          <a:xfrm>
-            <a:off x="606478" y="386930"/>
-            <a:ext cx="6927525" cy="1188950"/>
-          </a:xfrm>
-        </p:spPr>
-        <p:txBody>
-          <a:bodyPr anchor="b">
-            <a:normAutofit/>
-          </a:bodyPr>
-          <a:lstStyle/>
-          <a:p>
-            <a:r>
-              <a:rPr lang="de-CH" sz="4700" dirty="0"/>
-              <a:t>Maps Code Beispiele</a:t>
-            </a:r>
-          </a:p>
-        </p:txBody>
-      </p:sp>
-      <p:grpSp>
-        <p:nvGrpSpPr>
-          <p:cNvPr id="2059" name="Group 2058">
-            <a:extLst>
-              <a:ext uri="{FF2B5EF4-FFF2-40B4-BE49-F238E27FC236}">
-                <a16:creationId xmlns:a16="http://schemas.microsoft.com/office/drawing/2014/main" id="{DE216921-7EE9-EFE6-44AD-A3B756E86DC1}"/>
-              </a:ext>
-              <a:ext uri="{C183D7F6-B498-43B3-948B-1728B52AA6E4}">
-                <adec:decorative xmlns:adec="http://schemas.microsoft.com/office/drawing/2017/decorative" val="1"/>
-              </a:ext>
-            </a:extLst>
-          </p:cNvPr>
-          <p:cNvGrpSpPr>
-            <a:grpSpLocks noGrp="1" noUngrp="1" noRot="1" noChangeAspect="1" noMove="1" noResize="1"/>
-          </p:cNvGrpSpPr>
-          <p:nvPr>
-            <p:extLst>
-              <p:ext uri="{386F3935-93C4-4BCD-93E2-E3B085C9AB24}">
-                <p16:designElem xmlns:p16="http://schemas.microsoft.com/office/powerpoint/2015/main" val="1"/>
-              </p:ext>
-            </p:extLst>
-          </p:nvPr>
-        </p:nvGrpSpPr>
-        <p:grpSpPr>
-          <a:xfrm>
-            <a:off x="-1" y="1998368"/>
-            <a:ext cx="8771274" cy="782176"/>
-            <a:chOff x="-2" y="1998368"/>
-            <a:chExt cx="11695083" cy="782176"/>
-          </a:xfrm>
-        </p:grpSpPr>
-        <p:sp>
-          <p:nvSpPr>
-            <p:cNvPr id="2060" name="Rectangle 2059">
-              <a:extLst>
-                <a:ext uri="{FF2B5EF4-FFF2-40B4-BE49-F238E27FC236}">
-                  <a16:creationId xmlns:a16="http://schemas.microsoft.com/office/drawing/2014/main" id="{3835E63B-DABD-FA75-AE20-E2F8F53925E9}"/>
-                </a:ext>
-                <a:ext uri="{C183D7F6-B498-43B3-948B-1728B52AA6E4}">
-                  <adec:decorative xmlns:adec="http://schemas.microsoft.com/office/drawing/2017/decorative" val="1"/>
-                </a:ext>
-              </a:extLst>
-            </p:cNvPr>
-            <p:cNvSpPr/>
-            <p:nvPr>
-              <p:extLst>
-                <p:ext uri="{386F3935-93C4-4BCD-93E2-E3B085C9AB24}">
-                  <p16:designElem xmlns:p16="http://schemas.microsoft.com/office/powerpoint/2015/main" val="1"/>
-                </p:ext>
-              </p:extLst>
-            </p:nvPr>
-          </p:nvSpPr>
-          <p:spPr>
-            <a:xfrm rot="5400000">
-              <a:off x="11228040" y="2313027"/>
-              <a:ext cx="781700" cy="152382"/>
-            </a:xfrm>
-            <a:prstGeom prst="rect">
-              <a:avLst/>
-            </a:prstGeom>
-            <a:solidFill>
-              <a:schemeClr val="accent4"/>
-            </a:solidFill>
-            <a:ln>
-              <a:noFill/>
-            </a:ln>
-          </p:spPr>
-          <p:style>
-            <a:lnRef idx="2">
-              <a:schemeClr val="accent1">
-                <a:shade val="50000"/>
-              </a:schemeClr>
-            </a:lnRef>
-            <a:fillRef idx="1">
-              <a:schemeClr val="accent1"/>
-            </a:fillRef>
-            <a:effectRef idx="0">
-              <a:schemeClr val="accent1"/>
-            </a:effectRef>
-            <a:fontRef idx="minor">
-              <a:schemeClr val="lt1"/>
-            </a:fontRef>
-          </p:style>
-          <p:txBody>
-            <a:bodyPr rtlCol="0" anchor="ctr"/>
-            <a:lstStyle/>
-            <a:p>
-              <a:pPr algn="ctr"/>
-              <a:endParaRPr lang="en-US"/>
-            </a:p>
-          </p:txBody>
-        </p:sp>
-        <p:sp>
-          <p:nvSpPr>
-            <p:cNvPr id="2061" name="Rectangle 2060">
-              <a:extLst>
-                <a:ext uri="{FF2B5EF4-FFF2-40B4-BE49-F238E27FC236}">
-                  <a16:creationId xmlns:a16="http://schemas.microsoft.com/office/drawing/2014/main" id="{3B6EA3F6-276C-754D-03DB-3A255433B2A9}"/>
-                </a:ext>
-                <a:ext uri="{C183D7F6-B498-43B3-948B-1728B52AA6E4}">
-                  <adec:decorative xmlns:adec="http://schemas.microsoft.com/office/drawing/2017/decorative" val="1"/>
-                </a:ext>
-              </a:extLst>
-            </p:cNvPr>
-            <p:cNvSpPr/>
-            <p:nvPr>
-              <p:extLst>
-                <p:ext uri="{386F3935-93C4-4BCD-93E2-E3B085C9AB24}">
-                  <p16:designElem xmlns:p16="http://schemas.microsoft.com/office/powerpoint/2015/main" val="1"/>
-                </p:ext>
-              </p:extLst>
-            </p:nvPr>
-          </p:nvSpPr>
-          <p:spPr>
-            <a:xfrm flipH="1" flipV="1">
-              <a:off x="-2" y="1998845"/>
-              <a:ext cx="11454595" cy="781699"/>
-            </a:xfrm>
-            <a:prstGeom prst="rect">
-              <a:avLst/>
-            </a:prstGeom>
-            <a:solidFill>
-              <a:schemeClr val="accent4"/>
-            </a:solidFill>
-            <a:ln>
-              <a:noFill/>
-            </a:ln>
-          </p:spPr>
-          <p:style>
-            <a:lnRef idx="2">
-              <a:schemeClr val="accent1">
-                <a:shade val="50000"/>
-              </a:schemeClr>
-            </a:lnRef>
-            <a:fillRef idx="1">
-              <a:schemeClr val="accent1"/>
-            </a:fillRef>
-            <a:effectRef idx="0">
-              <a:schemeClr val="accent1"/>
-            </a:effectRef>
-            <a:fontRef idx="minor">
-              <a:schemeClr val="lt1"/>
-            </a:fontRef>
-          </p:style>
-          <p:txBody>
-            <a:bodyPr rtlCol="0" anchor="ctr"/>
-            <a:lstStyle/>
-            <a:p>
-              <a:pPr algn="ctr"/>
-              <a:endParaRPr lang="en-US"/>
-            </a:p>
-          </p:txBody>
-        </p:sp>
-      </p:grpSp>
-      <p:sp>
-        <p:nvSpPr>
-          <p:cNvPr id="2063" name="Rectangle 2062">
-            <a:extLst>
-              <a:ext uri="{FF2B5EF4-FFF2-40B4-BE49-F238E27FC236}">
-                <a16:creationId xmlns:a16="http://schemas.microsoft.com/office/drawing/2014/main" id="{82F5968E-22DD-92BC-BF02-61C6E2E954CC}"/>
-              </a:ext>
-              <a:ext uri="{C183D7F6-B498-43B3-948B-1728B52AA6E4}">
-                <adec:decorative xmlns:adec="http://schemas.microsoft.com/office/drawing/2017/decorative" val="1"/>
-              </a:ext>
-            </a:extLst>
-          </p:cNvPr>
-          <p:cNvSpPr>
-            <a:spLocks noGrp="1" noRot="1" noChangeAspect="1" noMove="1" noResize="1" noEditPoints="1" noAdjustHandles="1" noChangeArrowheads="1" noChangeShapeType="1" noTextEdit="1"/>
-          </p:cNvSpPr>
-          <p:nvPr>
-            <p:extLst>
-              <p:ext uri="{386F3935-93C4-4BCD-93E2-E3B085C9AB24}">
-                <p16:designElem xmlns:p16="http://schemas.microsoft.com/office/powerpoint/2015/main" val="1"/>
-              </p:ext>
-            </p:extLst>
-          </p:nvPr>
-        </p:nvSpPr>
-        <p:spPr>
-          <a:xfrm>
-            <a:off x="0" y="2203079"/>
-            <a:ext cx="8537521" cy="4147845"/>
-          </a:xfrm>
-          <a:prstGeom prst="rect">
-            <a:avLst/>
-          </a:prstGeom>
-          <a:solidFill>
-            <a:schemeClr val="bg1"/>
-          </a:solidFill>
-          <a:ln>
-            <a:noFill/>
-          </a:ln>
-          <a:effectLst>
-            <a:outerShdw blurRad="139700" dist="127000" dir="5400000" algn="t" rotWithShape="0">
-              <a:prstClr val="black">
-                <a:alpha val="15000"/>
-              </a:prstClr>
-            </a:outerShdw>
-          </a:effectLst>
-        </p:spPr>
-        <p:style>
-          <a:lnRef idx="2">
-            <a:schemeClr val="accent1">
-              <a:shade val="50000"/>
-            </a:schemeClr>
-          </a:lnRef>
-          <a:fillRef idx="1">
-            <a:schemeClr val="accent1"/>
-          </a:fillRef>
-          <a:effectRef idx="0">
-            <a:schemeClr val="accent1"/>
-          </a:effectRef>
-          <a:fontRef idx="minor">
-            <a:schemeClr val="lt1"/>
-          </a:fontRef>
-        </p:style>
-        <p:txBody>
-          <a:bodyPr rtlCol="0" anchor="ctr"/>
-          <a:lstStyle/>
-          <a:p>
-            <a:pPr algn="ctr"/>
-            <a:endParaRPr lang="en-US"/>
-          </a:p>
-        </p:txBody>
-      </p:sp>
-      <p:pic>
-        <p:nvPicPr>
-          <p:cNvPr id="5" name="Content Placeholder 4">
-            <a:extLst>
-              <a:ext uri="{FF2B5EF4-FFF2-40B4-BE49-F238E27FC236}">
-                <a16:creationId xmlns:a16="http://schemas.microsoft.com/office/drawing/2014/main" id="{C124BCC5-BC45-8F4A-453A-D063416C41D6}"/>
-              </a:ext>
-            </a:extLst>
-          </p:cNvPr>
-          <p:cNvPicPr>
-            <a:picLocks noGrp="1" noChangeAspect="1"/>
-          </p:cNvPicPr>
-          <p:nvPr>
-            <p:ph idx="1"/>
-          </p:nvPr>
-        </p:nvPicPr>
-        <p:blipFill>
-          <a:blip r:embed="rId2"/>
-          <a:stretch>
-            <a:fillRect/>
-          </a:stretch>
-        </p:blipFill>
-        <p:spPr>
-          <a:xfrm>
-            <a:off x="79103" y="2340989"/>
-            <a:ext cx="7454900" cy="2438400"/>
-          </a:xfrm>
-          <a:prstGeom prst="rect">
-            <a:avLst/>
-          </a:prstGeom>
-        </p:spPr>
-      </p:pic>
-      <p:pic>
-        <p:nvPicPr>
-          <p:cNvPr id="2052" name="Picture 4" descr="Learning Golang in 24 hours | Kislay Verma">
-            <a:extLst>
-              <a:ext uri="{FF2B5EF4-FFF2-40B4-BE49-F238E27FC236}">
-                <a16:creationId xmlns:a16="http://schemas.microsoft.com/office/drawing/2014/main" id="{A49211B5-1149-9CBB-4972-43D7DB5A037F}"/>
+                <a16:creationId xmlns:a16="http://schemas.microsoft.com/office/drawing/2014/main" id="{A8087192-3510-87CA-F664-740FC29E1E81}"/>
               </a:ext>
             </a:extLst>
           </p:cNvPr>
@@ -25746,8 +27083,8 @@
         </p:blipFill>
         <p:spPr bwMode="auto">
           <a:xfrm>
-            <a:off x="7955280" y="0"/>
-            <a:ext cx="1116418" cy="1369399"/>
+            <a:off x="7534003" y="221439"/>
+            <a:ext cx="1445390" cy="1188950"/>
           </a:xfrm>
           <a:prstGeom prst="rect">
             <a:avLst/>
@@ -25764,40 +27101,10 @@
           </a:extLst>
         </p:spPr>
       </p:pic>
-      <p:pic>
-        <p:nvPicPr>
-          <p:cNvPr id="6" name="Picture 5">
-            <a:extLst>
-              <a:ext uri="{FF2B5EF4-FFF2-40B4-BE49-F238E27FC236}">
-                <a16:creationId xmlns:a16="http://schemas.microsoft.com/office/drawing/2014/main" id="{6B8505F5-DDE7-A0BA-C31D-E4A3E7D20CE4}"/>
-              </a:ext>
-            </a:extLst>
-          </p:cNvPr>
-          <p:cNvPicPr>
-            <a:picLocks noChangeAspect="1"/>
-          </p:cNvPicPr>
-          <p:nvPr/>
-        </p:nvPicPr>
-        <p:blipFill>
-          <a:blip r:embed="rId4"/>
-          <a:stretch>
-            <a:fillRect/>
-          </a:stretch>
-        </p:blipFill>
-        <p:spPr>
-          <a:xfrm>
-            <a:off x="79103" y="5209556"/>
-            <a:ext cx="5346700" cy="711200"/>
-          </a:xfrm>
-          <a:prstGeom prst="rect">
-            <a:avLst/>
-          </a:prstGeom>
-        </p:spPr>
-      </p:pic>
     </p:spTree>
     <p:extLst>
       <p:ext uri="{BB962C8B-B14F-4D97-AF65-F5344CB8AC3E}">
-        <p14:creationId xmlns:p14="http://schemas.microsoft.com/office/powerpoint/2010/main" val="3427786389"/>
+        <p14:creationId xmlns:p14="http://schemas.microsoft.com/office/powerpoint/2010/main" val="3128220194"/>
       </p:ext>
     </p:extLst>
   </p:cSld>

--- a/presentation/GO-Präsi.pptx
+++ b/presentation/GO-Präsi.pptx
@@ -5,7 +5,7 @@
     <p:sldMasterId id="2147483648" r:id="rId1"/>
   </p:sldMasterIdLst>
   <p:notesMasterIdLst>
-    <p:notesMasterId r:id="rId23"/>
+    <p:notesMasterId r:id="rId21"/>
   </p:notesMasterIdLst>
   <p:sldIdLst>
     <p:sldId id="256" r:id="rId2"/>
@@ -13,22 +13,20 @@
     <p:sldId id="258" r:id="rId4"/>
     <p:sldId id="259" r:id="rId5"/>
     <p:sldId id="272" r:id="rId6"/>
-    <p:sldId id="262" r:id="rId7"/>
-    <p:sldId id="280" r:id="rId8"/>
-    <p:sldId id="279" r:id="rId9"/>
-    <p:sldId id="274" r:id="rId10"/>
-    <p:sldId id="273" r:id="rId11"/>
-    <p:sldId id="276" r:id="rId12"/>
-    <p:sldId id="266" r:id="rId13"/>
-    <p:sldId id="277" r:id="rId14"/>
-    <p:sldId id="281" r:id="rId15"/>
-    <p:sldId id="278" r:id="rId16"/>
-    <p:sldId id="260" r:id="rId17"/>
-    <p:sldId id="267" r:id="rId18"/>
-    <p:sldId id="268" r:id="rId19"/>
-    <p:sldId id="269" r:id="rId20"/>
-    <p:sldId id="270" r:id="rId21"/>
-    <p:sldId id="271" r:id="rId22"/>
+    <p:sldId id="280" r:id="rId7"/>
+    <p:sldId id="274" r:id="rId8"/>
+    <p:sldId id="273" r:id="rId9"/>
+    <p:sldId id="276" r:id="rId10"/>
+    <p:sldId id="266" r:id="rId11"/>
+    <p:sldId id="277" r:id="rId12"/>
+    <p:sldId id="281" r:id="rId13"/>
+    <p:sldId id="278" r:id="rId14"/>
+    <p:sldId id="260" r:id="rId15"/>
+    <p:sldId id="267" r:id="rId16"/>
+    <p:sldId id="268" r:id="rId17"/>
+    <p:sldId id="269" r:id="rId18"/>
+    <p:sldId id="270" r:id="rId19"/>
+    <p:sldId id="271" r:id="rId20"/>
   </p:sldIdLst>
   <p:sldSz cx="9144000" cy="6858000" type="screen4x3"/>
   <p:notesSz cx="6858000" cy="9144000"/>
@@ -3132,9 +3130,9 @@
     <dgm:cxn modelId="{AE86C032-8682-4BF1-BB68-6ADD0BB41A54}" type="presOf" srcId="{1AB3C50A-FCBF-4AEF-8D4D-858CFA132352}" destId="{983E5E44-A04E-4C45-A005-9093A3A3B4CB}" srcOrd="0" destOrd="0" presId="urn:microsoft.com/office/officeart/2008/layout/LinedList"/>
     <dgm:cxn modelId="{9F6C3140-939F-4D3D-B0B7-B516E250A006}" type="presOf" srcId="{34C133A9-4E63-474C-93DD-32EDE76F4D16}" destId="{E478383E-DAE8-4801-A304-9A3B4EF375BF}" srcOrd="0" destOrd="0" presId="urn:microsoft.com/office/officeart/2008/layout/LinedList"/>
     <dgm:cxn modelId="{88749E44-69B6-44A7-84E1-1FCE1F2B1FA3}" srcId="{A53334CF-783B-42FC-B557-FFF66E2E05D2}" destId="{CC8160C3-CBEA-4B2C-A4FC-ADB710CB47EF}" srcOrd="1" destOrd="0" parTransId="{6C195E6E-746B-4A1A-B6A2-0D8E1F3C96F3}" sibTransId="{03BB51D0-D42A-486F-91B9-A792572A8A53}"/>
+    <dgm:cxn modelId="{FC356D67-8C98-4512-9C59-5C82B1CE4E88}" srcId="{0FEA5DDF-8CA7-4CF6-8462-91985CBA858E}" destId="{00FCB9CF-8E88-4656-B329-0EF4CD576DB1}" srcOrd="1" destOrd="0" parTransId="{9CC6512F-47BA-481F-A700-1714B90A213B}" sibTransId="{2426879B-88A3-42A4-8EDF-1BA13727DBB9}"/>
     <dgm:cxn modelId="{73FD3553-7C9A-4430-B54F-6EEDA45EBDF9}" type="presOf" srcId="{CC8160C3-CBEA-4B2C-A4FC-ADB710CB47EF}" destId="{53FC0197-4AFD-407F-8768-2842A6B8D732}" srcOrd="0" destOrd="0" presId="urn:microsoft.com/office/officeart/2008/layout/LinedList"/>
     <dgm:cxn modelId="{F43D4F56-65EA-49BB-849E-6F31E2BDE7F9}" type="presOf" srcId="{6D31FA9B-5825-44D6-A7B7-A7E13CF76391}" destId="{9A6315B2-11EA-415B-AEF6-96A923313A4F}" srcOrd="0" destOrd="0" presId="urn:microsoft.com/office/officeart/2008/layout/LinedList"/>
-    <dgm:cxn modelId="{FC356D67-8C98-4512-9C59-5C82B1CE4E88}" srcId="{0FEA5DDF-8CA7-4CF6-8462-91985CBA858E}" destId="{00FCB9CF-8E88-4656-B329-0EF4CD576DB1}" srcOrd="1" destOrd="0" parTransId="{9CC6512F-47BA-481F-A700-1714B90A213B}" sibTransId="{2426879B-88A3-42A4-8EDF-1BA13727DBB9}"/>
     <dgm:cxn modelId="{C5292181-7D3D-42D3-9D04-BE4E6F830736}" srcId="{0FEA5DDF-8CA7-4CF6-8462-91985CBA858E}" destId="{34C133A9-4E63-474C-93DD-32EDE76F4D16}" srcOrd="0" destOrd="0" parTransId="{1997A60F-C4B1-47EF-89EF-A6A6777F3A3D}" sibTransId="{4B2380FF-F43D-4B58-9915-DF12CA02B093}"/>
     <dgm:cxn modelId="{71545983-048A-44B1-B54D-4D6E803E9FD3}" srcId="{94581A3B-ABA8-42E0-9F65-99AE66091771}" destId="{0FEA5DDF-8CA7-4CF6-8462-91985CBA858E}" srcOrd="0" destOrd="0" parTransId="{3A254884-79B9-4FED-893D-1A4FCEBD01A6}" sibTransId="{75CDBFEE-6D15-45F7-8507-73DA1B0A12EC}"/>
     <dgm:cxn modelId="{C0EEDA90-DFDB-4338-B792-6668EFAB71DD}" type="presOf" srcId="{424F5155-6842-428C-8550-8AF1A35C714E}" destId="{2DEF67C1-3561-45C4-A1E3-82FE8B53EBE0}" srcOrd="0" destOrd="0" presId="urn:microsoft.com/office/officeart/2008/layout/LinedList"/>
@@ -4283,11 +4281,11 @@
     <dgm:cxn modelId="{6E0EDF32-D016-4BF3-812B-5934D4D47E86}" srcId="{51ADB69E-CEEF-44BF-B03A-EB79CD9E8062}" destId="{BC4AB904-5D13-426C-89D9-40D36AE51705}" srcOrd="4" destOrd="0" parTransId="{280B05C2-E5AF-456A-BE28-4991504969A6}" sibTransId="{49D1F00D-37F1-439F-ADFF-6F9663F5E7E7}"/>
     <dgm:cxn modelId="{80845E34-250A-4AB4-BE3E-D84544F5203D}" type="presOf" srcId="{44DC462A-0AC9-4248-A8AA-10B02822AAED}" destId="{4F178F7E-E77E-4653-9CB2-309E78EB0CD7}" srcOrd="0" destOrd="0" presId="urn:microsoft.com/office/officeart/2008/layout/LinedList"/>
     <dgm:cxn modelId="{5C1C6D40-C7E6-40C5-AA08-2545D93119F2}" type="presOf" srcId="{F5C01579-7F57-4979-A7F0-69FC1B3A98FC}" destId="{55A47832-5E60-409E-927E-D470B0ACEFC1}" srcOrd="0" destOrd="0" presId="urn:microsoft.com/office/officeart/2008/layout/LinedList"/>
-    <dgm:cxn modelId="{4B4B9D53-D3B2-49CA-835A-749A3CC976F2}" type="presOf" srcId="{32600481-437B-4F55-AD2F-74639178C1B2}" destId="{1483427B-D1AE-476D-B17F-92275D42378B}" srcOrd="0" destOrd="0" presId="urn:microsoft.com/office/officeart/2008/layout/LinedList"/>
-    <dgm:cxn modelId="{AE15B853-8753-40C4-8D0C-0FD4B2ECA1C9}" srcId="{51ADB69E-CEEF-44BF-B03A-EB79CD9E8062}" destId="{BC531E73-28AB-48EC-A683-6689A3A9F2E5}" srcOrd="3" destOrd="0" parTransId="{58229E09-91CB-4695-B79F-40352661C885}" sibTransId="{ABC83B8E-F8CA-416C-AD4F-302D0C50E9E1}"/>
     <dgm:cxn modelId="{40C6FC62-E4DD-4E15-A468-AF1D42FD8E4D}" srcId="{51ADB69E-CEEF-44BF-B03A-EB79CD9E8062}" destId="{2FD59555-E9ED-4235-8884-22DE78453B97}" srcOrd="2" destOrd="0" parTransId="{CDB05BB7-CBF1-4A2B-ACFB-6E9AE7429FE2}" sibTransId="{351019C0-5EFD-4D89-905D-87785A34320C}"/>
     <dgm:cxn modelId="{2218B76A-0FDD-4388-B3EE-A23B117172D0}" type="presOf" srcId="{7CA9E791-5EAA-44E6-BF77-78B5E304431C}" destId="{711FA85E-2EA5-4AC4-AB5F-520E841BC4CF}" srcOrd="0" destOrd="0" presId="urn:microsoft.com/office/officeart/2008/layout/LinedList"/>
     <dgm:cxn modelId="{FBB1F26E-B37A-44BD-8F43-FED90C4ADC9D}" srcId="{51ADB69E-CEEF-44BF-B03A-EB79CD9E8062}" destId="{5567816E-A4CC-4260-B4D8-5B271B459497}" srcOrd="1" destOrd="0" parTransId="{61D58984-0199-4010-B407-C31DA36D102E}" sibTransId="{339B5629-E286-4296-8D70-05CC90E2A637}"/>
+    <dgm:cxn modelId="{4B4B9D53-D3B2-49CA-835A-749A3CC976F2}" type="presOf" srcId="{32600481-437B-4F55-AD2F-74639178C1B2}" destId="{1483427B-D1AE-476D-B17F-92275D42378B}" srcOrd="0" destOrd="0" presId="urn:microsoft.com/office/officeart/2008/layout/LinedList"/>
+    <dgm:cxn modelId="{AE15B853-8753-40C4-8D0C-0FD4B2ECA1C9}" srcId="{51ADB69E-CEEF-44BF-B03A-EB79CD9E8062}" destId="{BC531E73-28AB-48EC-A683-6689A3A9F2E5}" srcOrd="3" destOrd="0" parTransId="{58229E09-91CB-4695-B79F-40352661C885}" sibTransId="{ABC83B8E-F8CA-416C-AD4F-302D0C50E9E1}"/>
     <dgm:cxn modelId="{A83C7876-5493-426E-BE7D-603439AA657F}" type="presOf" srcId="{2FD59555-E9ED-4235-8884-22DE78453B97}" destId="{7EB087D0-006C-4F5A-981C-F7DEBC3A3B82}" srcOrd="0" destOrd="0" presId="urn:microsoft.com/office/officeart/2008/layout/LinedList"/>
     <dgm:cxn modelId="{75BC2A7A-6F7A-4AF3-AEAC-81E93D417B61}" srcId="{1F197BB0-DC43-462E-A2C0-15EF4FC38EDE}" destId="{51ADB69E-CEEF-44BF-B03A-EB79CD9E8062}" srcOrd="2" destOrd="0" parTransId="{59381924-B3E3-4C94-B1AF-92710EF8B717}" sibTransId="{7FFF01D8-DFA5-4FB3-86B1-9F93E448664D}"/>
     <dgm:cxn modelId="{C04A617B-3783-4CC0-B13B-78B74796C23F}" srcId="{B225895E-D4C5-4180-A1B7-0E99C9B8EB4F}" destId="{1B011FFA-D01F-4553-A34C-B812C48BF077}" srcOrd="3" destOrd="0" parTransId="{760CD6D8-8390-4F94-A776-9F9DEFF52FD6}" sibTransId="{01A5218A-3C5B-4A44-91EF-BA9AB4F839B7}"/>
@@ -12754,7 +12752,7 @@
           <a:p>
             <a:fld id="{D9EF2C90-E8EE-43CD-8D96-4E8A72565517}" type="datetimeFigureOut">
               <a:rPr lang="de-CH" smtClean="0"/>
-              <a:t>20.05.26</a:t>
+              <a:t>20.05.2026</a:t>
             </a:fld>
             <a:endParaRPr lang="de-CH"/>
           </a:p>
@@ -12913,7 +12911,7 @@
           <a:p>
             <a:fld id="{62945742-DB6B-4CE6-B846-92E01489719F}" type="slidenum">
               <a:rPr lang="de-CH" smtClean="0"/>
-              <a:t>‹#›</a:t>
+              <a:t>‹Nr.›</a:t>
             </a:fld>
             <a:endParaRPr lang="de-CH"/>
           </a:p>
@@ -13805,7 +13803,7 @@
           <a:p>
             <a:fld id="{62945742-DB6B-4CE6-B846-92E01489719F}" type="slidenum">
               <a:rPr lang="de-CH" smtClean="0"/>
-              <a:t>7</a:t>
+              <a:t>6</a:t>
             </a:fld>
             <a:endParaRPr lang="de-CH"/>
           </a:p>
@@ -13965,7 +13963,7 @@
           <a:p>
             <a:fld id="{62945742-DB6B-4CE6-B846-92E01489719F}" type="slidenum">
               <a:rPr lang="de-CH" smtClean="0"/>
-              <a:t>10</a:t>
+              <a:t>8</a:t>
             </a:fld>
             <a:endParaRPr lang="de-CH"/>
           </a:p>
@@ -14049,7 +14047,7 @@
           <a:p>
             <a:fld id="{62945742-DB6B-4CE6-B846-92E01489719F}" type="slidenum">
               <a:rPr lang="de-CH" smtClean="0"/>
-              <a:t>12</a:t>
+              <a:t>10</a:t>
             </a:fld>
             <a:endParaRPr lang="de-CH"/>
           </a:p>
@@ -14133,7 +14131,7 @@
           <a:p>
             <a:fld id="{62945742-DB6B-4CE6-B846-92E01489719F}" type="slidenum">
               <a:rPr lang="de-CH" smtClean="0"/>
-              <a:t>17</a:t>
+              <a:t>15</a:t>
             </a:fld>
             <a:endParaRPr lang="de-CH"/>
           </a:p>
@@ -14331,7 +14329,7 @@
           <a:p>
             <a:fld id="{5BCAD085-E8A6-8845-BD4E-CB4CCA059FC4}" type="datetimeFigureOut">
               <a:rPr lang="en-US" smtClean="0"/>
-              <a:t>5/20/26</a:t>
+              <a:t>5/20/2026</a:t>
             </a:fld>
             <a:endParaRPr lang="en-US"/>
           </a:p>
@@ -14373,7 +14371,7 @@
           <a:p>
             <a:fld id="{C1FF6DA9-008F-8B48-92A6-B652298478BF}" type="slidenum">
               <a:rPr lang="en-US" smtClean="0"/>
-              <a:t>‹#›</a:t>
+              <a:t>‹Nr.›</a:t>
             </a:fld>
             <a:endParaRPr lang="en-US"/>
           </a:p>
@@ -14499,7 +14497,7 @@
           <a:p>
             <a:fld id="{5BCAD085-E8A6-8845-BD4E-CB4CCA059FC4}" type="datetimeFigureOut">
               <a:rPr lang="en-US" smtClean="0"/>
-              <a:t>5/20/26</a:t>
+              <a:t>5/20/2026</a:t>
             </a:fld>
             <a:endParaRPr lang="en-US"/>
           </a:p>
@@ -14541,7 +14539,7 @@
           <a:p>
             <a:fld id="{C1FF6DA9-008F-8B48-92A6-B652298478BF}" type="slidenum">
               <a:rPr lang="en-US" smtClean="0"/>
-              <a:t>‹#›</a:t>
+              <a:t>‹Nr.›</a:t>
             </a:fld>
             <a:endParaRPr lang="en-US"/>
           </a:p>
@@ -14677,7 +14675,7 @@
           <a:p>
             <a:fld id="{5BCAD085-E8A6-8845-BD4E-CB4CCA059FC4}" type="datetimeFigureOut">
               <a:rPr lang="en-US" smtClean="0"/>
-              <a:t>5/20/26</a:t>
+              <a:t>5/20/2026</a:t>
             </a:fld>
             <a:endParaRPr lang="en-US"/>
           </a:p>
@@ -14719,7 +14717,7 @@
           <a:p>
             <a:fld id="{C1FF6DA9-008F-8B48-92A6-B652298478BF}" type="slidenum">
               <a:rPr lang="en-US" smtClean="0"/>
-              <a:t>‹#›</a:t>
+              <a:t>‹Nr.›</a:t>
             </a:fld>
             <a:endParaRPr lang="en-US"/>
           </a:p>
@@ -14845,7 +14843,7 @@
           <a:p>
             <a:fld id="{5BCAD085-E8A6-8845-BD4E-CB4CCA059FC4}" type="datetimeFigureOut">
               <a:rPr lang="en-US" smtClean="0"/>
-              <a:t>5/20/26</a:t>
+              <a:t>5/20/2026</a:t>
             </a:fld>
             <a:endParaRPr lang="en-US"/>
           </a:p>
@@ -14887,7 +14885,7 @@
           <a:p>
             <a:fld id="{C1FF6DA9-008F-8B48-92A6-B652298478BF}" type="slidenum">
               <a:rPr lang="en-US" smtClean="0"/>
-              <a:t>‹#›</a:t>
+              <a:t>‹Nr.›</a:t>
             </a:fld>
             <a:endParaRPr lang="en-US"/>
           </a:p>
@@ -15090,7 +15088,7 @@
           <a:p>
             <a:fld id="{5BCAD085-E8A6-8845-BD4E-CB4CCA059FC4}" type="datetimeFigureOut">
               <a:rPr lang="en-US" smtClean="0"/>
-              <a:t>5/20/26</a:t>
+              <a:t>5/20/2026</a:t>
             </a:fld>
             <a:endParaRPr lang="en-US"/>
           </a:p>
@@ -15132,7 +15130,7 @@
           <a:p>
             <a:fld id="{C1FF6DA9-008F-8B48-92A6-B652298478BF}" type="slidenum">
               <a:rPr lang="en-US" smtClean="0"/>
-              <a:t>‹#›</a:t>
+              <a:t>‹Nr.›</a:t>
             </a:fld>
             <a:endParaRPr lang="en-US"/>
           </a:p>
@@ -15375,7 +15373,7 @@
           <a:p>
             <a:fld id="{5BCAD085-E8A6-8845-BD4E-CB4CCA059FC4}" type="datetimeFigureOut">
               <a:rPr lang="en-US" smtClean="0"/>
-              <a:t>5/20/26</a:t>
+              <a:t>5/20/2026</a:t>
             </a:fld>
             <a:endParaRPr lang="en-US"/>
           </a:p>
@@ -15417,7 +15415,7 @@
           <a:p>
             <a:fld id="{C1FF6DA9-008F-8B48-92A6-B652298478BF}" type="slidenum">
               <a:rPr lang="en-US" smtClean="0"/>
-              <a:t>‹#›</a:t>
+              <a:t>‹Nr.›</a:t>
             </a:fld>
             <a:endParaRPr lang="en-US"/>
           </a:p>
@@ -15794,7 +15792,7 @@
           <a:p>
             <a:fld id="{5BCAD085-E8A6-8845-BD4E-CB4CCA059FC4}" type="datetimeFigureOut">
               <a:rPr lang="en-US" smtClean="0"/>
-              <a:t>5/20/26</a:t>
+              <a:t>5/20/2026</a:t>
             </a:fld>
             <a:endParaRPr lang="en-US"/>
           </a:p>
@@ -15836,7 +15834,7 @@
           <a:p>
             <a:fld id="{C1FF6DA9-008F-8B48-92A6-B652298478BF}" type="slidenum">
               <a:rPr lang="en-US" smtClean="0"/>
-              <a:t>‹#›</a:t>
+              <a:t>‹Nr.›</a:t>
             </a:fld>
             <a:endParaRPr lang="en-US"/>
           </a:p>
@@ -15911,7 +15909,7 @@
           <a:p>
             <a:fld id="{5BCAD085-E8A6-8845-BD4E-CB4CCA059FC4}" type="datetimeFigureOut">
               <a:rPr lang="en-US" smtClean="0"/>
-              <a:t>5/20/26</a:t>
+              <a:t>5/20/2026</a:t>
             </a:fld>
             <a:endParaRPr lang="en-US"/>
           </a:p>
@@ -15953,7 +15951,7 @@
           <a:p>
             <a:fld id="{C1FF6DA9-008F-8B48-92A6-B652298478BF}" type="slidenum">
               <a:rPr lang="en-US" smtClean="0"/>
-              <a:t>‹#›</a:t>
+              <a:t>‹Nr.›</a:t>
             </a:fld>
             <a:endParaRPr lang="en-US"/>
           </a:p>
@@ -16006,7 +16004,7 @@
           <a:p>
             <a:fld id="{5BCAD085-E8A6-8845-BD4E-CB4CCA059FC4}" type="datetimeFigureOut">
               <a:rPr lang="en-US" smtClean="0"/>
-              <a:t>5/20/26</a:t>
+              <a:t>5/20/2026</a:t>
             </a:fld>
             <a:endParaRPr lang="en-US"/>
           </a:p>
@@ -16048,7 +16046,7 @@
           <a:p>
             <a:fld id="{C1FF6DA9-008F-8B48-92A6-B652298478BF}" type="slidenum">
               <a:rPr lang="en-US" smtClean="0"/>
-              <a:t>‹#›</a:t>
+              <a:t>‹Nr.›</a:t>
             </a:fld>
             <a:endParaRPr lang="en-US"/>
           </a:p>
@@ -16281,7 +16279,7 @@
           <a:p>
             <a:fld id="{5BCAD085-E8A6-8845-BD4E-CB4CCA059FC4}" type="datetimeFigureOut">
               <a:rPr lang="en-US" smtClean="0"/>
-              <a:t>5/20/26</a:t>
+              <a:t>5/20/2026</a:t>
             </a:fld>
             <a:endParaRPr lang="en-US"/>
           </a:p>
@@ -16323,7 +16321,7 @@
           <a:p>
             <a:fld id="{C1FF6DA9-008F-8B48-92A6-B652298478BF}" type="slidenum">
               <a:rPr lang="en-US" smtClean="0"/>
-              <a:t>‹#›</a:t>
+              <a:t>‹Nr.›</a:t>
             </a:fld>
             <a:endParaRPr lang="en-US"/>
           </a:p>
@@ -16533,7 +16531,7 @@
           <a:p>
             <a:fld id="{5BCAD085-E8A6-8845-BD4E-CB4CCA059FC4}" type="datetimeFigureOut">
               <a:rPr lang="en-US" smtClean="0"/>
-              <a:t>5/20/26</a:t>
+              <a:t>5/20/2026</a:t>
             </a:fld>
             <a:endParaRPr lang="en-US"/>
           </a:p>
@@ -16575,7 +16573,7 @@
           <a:p>
             <a:fld id="{C1FF6DA9-008F-8B48-92A6-B652298478BF}" type="slidenum">
               <a:rPr lang="en-US" smtClean="0"/>
-              <a:t>‹#›</a:t>
+              <a:t>‹Nr.›</a:t>
             </a:fld>
             <a:endParaRPr lang="en-US"/>
           </a:p>
@@ -16744,7 +16742,7 @@
           <a:p>
             <a:fld id="{5BCAD085-E8A6-8845-BD4E-CB4CCA059FC4}" type="datetimeFigureOut">
               <a:rPr lang="en-US" smtClean="0"/>
-              <a:t>5/20/26</a:t>
+              <a:t>5/20/2026</a:t>
             </a:fld>
             <a:endParaRPr lang="en-US"/>
           </a:p>
@@ -16822,7 +16820,7 @@
           <a:p>
             <a:fld id="{C1FF6DA9-008F-8B48-92A6-B652298478BF}" type="slidenum">
               <a:rPr lang="en-US" smtClean="0"/>
-              <a:t>‹#›</a:t>
+              <a:t>‹Nr.›</a:t>
             </a:fld>
             <a:endParaRPr lang="en-US"/>
           </a:p>
@@ -17728,960 +17726,6 @@
         <p:cNvPr id="1" name="">
           <a:extLst>
             <a:ext uri="{FF2B5EF4-FFF2-40B4-BE49-F238E27FC236}">
-              <a16:creationId xmlns:a16="http://schemas.microsoft.com/office/drawing/2014/main" id="{870D3697-1D78-4CC0-4F13-58412528479B}"/>
-            </a:ext>
-          </a:extLst>
-        </p:cNvPr>
-        <p:cNvGrpSpPr/>
-        <p:nvPr/>
-      </p:nvGrpSpPr>
-      <p:grpSpPr>
-        <a:xfrm>
-          <a:off x="0" y="0"/>
-          <a:ext cx="0" cy="0"/>
-          <a:chOff x="0" y="0"/>
-          <a:chExt cx="0" cy="0"/>
-        </a:xfrm>
-      </p:grpSpPr>
-      <p:sp useBgFill="1">
-        <p:nvSpPr>
-          <p:cNvPr id="2057" name="Rectangle 2056">
-            <a:extLst>
-              <a:ext uri="{FF2B5EF4-FFF2-40B4-BE49-F238E27FC236}">
-                <a16:creationId xmlns:a16="http://schemas.microsoft.com/office/drawing/2014/main" id="{5A373F65-2C02-EFA5-13AA-9A31C2292C05}"/>
-              </a:ext>
-              <a:ext uri="{C183D7F6-B498-43B3-948B-1728B52AA6E4}">
-                <adec:decorative xmlns:adec="http://schemas.microsoft.com/office/drawing/2017/decorative" val="1"/>
-              </a:ext>
-            </a:extLst>
-          </p:cNvPr>
-          <p:cNvSpPr>
-            <a:spLocks noGrp="1" noRot="1" noChangeAspect="1" noMove="1" noResize="1" noEditPoints="1" noAdjustHandles="1" noChangeArrowheads="1" noChangeShapeType="1" noTextEdit="1"/>
-          </p:cNvSpPr>
-          <p:nvPr>
-            <p:extLst>
-              <p:ext uri="{386F3935-93C4-4BCD-93E2-E3B085C9AB24}">
-                <p16:designElem xmlns:p16="http://schemas.microsoft.com/office/powerpoint/2015/main" val="1"/>
-              </p:ext>
-            </p:extLst>
-          </p:nvPr>
-        </p:nvSpPr>
-        <p:spPr>
-          <a:xfrm>
-            <a:off x="0" y="0"/>
-            <a:ext cx="9143999" cy="6857365"/>
-          </a:xfrm>
-          <a:prstGeom prst="rect">
-            <a:avLst/>
-          </a:prstGeom>
-          <a:ln>
-            <a:noFill/>
-          </a:ln>
-        </p:spPr>
-        <p:style>
-          <a:lnRef idx="2">
-            <a:schemeClr val="accent1">
-              <a:shade val="50000"/>
-            </a:schemeClr>
-          </a:lnRef>
-          <a:fillRef idx="1">
-            <a:schemeClr val="accent1"/>
-          </a:fillRef>
-          <a:effectRef idx="0">
-            <a:schemeClr val="accent1"/>
-          </a:effectRef>
-          <a:fontRef idx="minor">
-            <a:schemeClr val="lt1"/>
-          </a:fontRef>
-        </p:style>
-        <p:txBody>
-          <a:bodyPr rtlCol="0" anchor="ctr"/>
-          <a:lstStyle/>
-          <a:p>
-            <a:pPr algn="ctr"/>
-            <a:endParaRPr lang="en-US"/>
-          </a:p>
-        </p:txBody>
-      </p:sp>
-      <p:sp>
-        <p:nvSpPr>
-          <p:cNvPr id="2" name="Titel 1">
-            <a:extLst>
-              <a:ext uri="{FF2B5EF4-FFF2-40B4-BE49-F238E27FC236}">
-                <a16:creationId xmlns:a16="http://schemas.microsoft.com/office/drawing/2014/main" id="{CD1BDE69-E2DE-724F-472B-FD80F7617AEB}"/>
-              </a:ext>
-            </a:extLst>
-          </p:cNvPr>
-          <p:cNvSpPr>
-            <a:spLocks noGrp="1"/>
-          </p:cNvSpPr>
-          <p:nvPr>
-            <p:ph type="title"/>
-          </p:nvPr>
-        </p:nvSpPr>
-        <p:spPr>
-          <a:xfrm>
-            <a:off x="606478" y="386930"/>
-            <a:ext cx="6927525" cy="1188950"/>
-          </a:xfrm>
-        </p:spPr>
-        <p:txBody>
-          <a:bodyPr anchor="b">
-            <a:normAutofit/>
-          </a:bodyPr>
-          <a:lstStyle/>
-          <a:p>
-            <a:r>
-              <a:rPr lang="de-CH" sz="4700" dirty="0"/>
-              <a:t>Maps Eigenschaften</a:t>
-            </a:r>
-          </a:p>
-        </p:txBody>
-      </p:sp>
-      <p:grpSp>
-        <p:nvGrpSpPr>
-          <p:cNvPr id="2059" name="Group 2058">
-            <a:extLst>
-              <a:ext uri="{FF2B5EF4-FFF2-40B4-BE49-F238E27FC236}">
-                <a16:creationId xmlns:a16="http://schemas.microsoft.com/office/drawing/2014/main" id="{87D5C43B-983C-CD03-D581-AFD3991ACE9A}"/>
-              </a:ext>
-              <a:ext uri="{C183D7F6-B498-43B3-948B-1728B52AA6E4}">
-                <adec:decorative xmlns:adec="http://schemas.microsoft.com/office/drawing/2017/decorative" val="1"/>
-              </a:ext>
-            </a:extLst>
-          </p:cNvPr>
-          <p:cNvGrpSpPr>
-            <a:grpSpLocks noGrp="1" noUngrp="1" noRot="1" noChangeAspect="1" noMove="1" noResize="1"/>
-          </p:cNvGrpSpPr>
-          <p:nvPr>
-            <p:extLst>
-              <p:ext uri="{386F3935-93C4-4BCD-93E2-E3B085C9AB24}">
-                <p16:designElem xmlns:p16="http://schemas.microsoft.com/office/powerpoint/2015/main" val="1"/>
-              </p:ext>
-            </p:extLst>
-          </p:nvPr>
-        </p:nvGrpSpPr>
-        <p:grpSpPr>
-          <a:xfrm>
-            <a:off x="-1" y="1998368"/>
-            <a:ext cx="8771274" cy="782176"/>
-            <a:chOff x="-2" y="1998368"/>
-            <a:chExt cx="11695083" cy="782176"/>
-          </a:xfrm>
-        </p:grpSpPr>
-        <p:sp>
-          <p:nvSpPr>
-            <p:cNvPr id="2060" name="Rectangle 2059">
-              <a:extLst>
-                <a:ext uri="{FF2B5EF4-FFF2-40B4-BE49-F238E27FC236}">
-                  <a16:creationId xmlns:a16="http://schemas.microsoft.com/office/drawing/2014/main" id="{684B53A0-F78A-B158-551A-317242B87B5F}"/>
-                </a:ext>
-                <a:ext uri="{C183D7F6-B498-43B3-948B-1728B52AA6E4}">
-                  <adec:decorative xmlns:adec="http://schemas.microsoft.com/office/drawing/2017/decorative" val="1"/>
-                </a:ext>
-              </a:extLst>
-            </p:cNvPr>
-            <p:cNvSpPr/>
-            <p:nvPr>
-              <p:extLst>
-                <p:ext uri="{386F3935-93C4-4BCD-93E2-E3B085C9AB24}">
-                  <p16:designElem xmlns:p16="http://schemas.microsoft.com/office/powerpoint/2015/main" val="1"/>
-                </p:ext>
-              </p:extLst>
-            </p:nvPr>
-          </p:nvSpPr>
-          <p:spPr>
-            <a:xfrm rot="5400000">
-              <a:off x="11228040" y="2313027"/>
-              <a:ext cx="781700" cy="152382"/>
-            </a:xfrm>
-            <a:prstGeom prst="rect">
-              <a:avLst/>
-            </a:prstGeom>
-            <a:solidFill>
-              <a:schemeClr val="accent4"/>
-            </a:solidFill>
-            <a:ln>
-              <a:noFill/>
-            </a:ln>
-          </p:spPr>
-          <p:style>
-            <a:lnRef idx="2">
-              <a:schemeClr val="accent1">
-                <a:shade val="50000"/>
-              </a:schemeClr>
-            </a:lnRef>
-            <a:fillRef idx="1">
-              <a:schemeClr val="accent1"/>
-            </a:fillRef>
-            <a:effectRef idx="0">
-              <a:schemeClr val="accent1"/>
-            </a:effectRef>
-            <a:fontRef idx="minor">
-              <a:schemeClr val="lt1"/>
-            </a:fontRef>
-          </p:style>
-          <p:txBody>
-            <a:bodyPr rtlCol="0" anchor="ctr"/>
-            <a:lstStyle/>
-            <a:p>
-              <a:pPr algn="ctr"/>
-              <a:endParaRPr lang="en-US"/>
-            </a:p>
-          </p:txBody>
-        </p:sp>
-        <p:sp>
-          <p:nvSpPr>
-            <p:cNvPr id="2061" name="Rectangle 2060">
-              <a:extLst>
-                <a:ext uri="{FF2B5EF4-FFF2-40B4-BE49-F238E27FC236}">
-                  <a16:creationId xmlns:a16="http://schemas.microsoft.com/office/drawing/2014/main" id="{2D887804-3785-DB50-0179-D457655D4576}"/>
-                </a:ext>
-                <a:ext uri="{C183D7F6-B498-43B3-948B-1728B52AA6E4}">
-                  <adec:decorative xmlns:adec="http://schemas.microsoft.com/office/drawing/2017/decorative" val="1"/>
-                </a:ext>
-              </a:extLst>
-            </p:cNvPr>
-            <p:cNvSpPr/>
-            <p:nvPr>
-              <p:extLst>
-                <p:ext uri="{386F3935-93C4-4BCD-93E2-E3B085C9AB24}">
-                  <p16:designElem xmlns:p16="http://schemas.microsoft.com/office/powerpoint/2015/main" val="1"/>
-                </p:ext>
-              </p:extLst>
-            </p:nvPr>
-          </p:nvSpPr>
-          <p:spPr>
-            <a:xfrm flipH="1" flipV="1">
-              <a:off x="-2" y="1998845"/>
-              <a:ext cx="11454595" cy="781699"/>
-            </a:xfrm>
-            <a:prstGeom prst="rect">
-              <a:avLst/>
-            </a:prstGeom>
-            <a:solidFill>
-              <a:schemeClr val="accent4"/>
-            </a:solidFill>
-            <a:ln>
-              <a:noFill/>
-            </a:ln>
-          </p:spPr>
-          <p:style>
-            <a:lnRef idx="2">
-              <a:schemeClr val="accent1">
-                <a:shade val="50000"/>
-              </a:schemeClr>
-            </a:lnRef>
-            <a:fillRef idx="1">
-              <a:schemeClr val="accent1"/>
-            </a:fillRef>
-            <a:effectRef idx="0">
-              <a:schemeClr val="accent1"/>
-            </a:effectRef>
-            <a:fontRef idx="minor">
-              <a:schemeClr val="lt1"/>
-            </a:fontRef>
-          </p:style>
-          <p:txBody>
-            <a:bodyPr rtlCol="0" anchor="ctr"/>
-            <a:lstStyle/>
-            <a:p>
-              <a:pPr algn="ctr"/>
-              <a:endParaRPr lang="en-US"/>
-            </a:p>
-          </p:txBody>
-        </p:sp>
-      </p:grpSp>
-      <p:sp>
-        <p:nvSpPr>
-          <p:cNvPr id="2063" name="Rectangle 2062">
-            <a:extLst>
-              <a:ext uri="{FF2B5EF4-FFF2-40B4-BE49-F238E27FC236}">
-                <a16:creationId xmlns:a16="http://schemas.microsoft.com/office/drawing/2014/main" id="{2A809A91-C8A4-CF93-32BC-064223DC5095}"/>
-              </a:ext>
-              <a:ext uri="{C183D7F6-B498-43B3-948B-1728B52AA6E4}">
-                <adec:decorative xmlns:adec="http://schemas.microsoft.com/office/drawing/2017/decorative" val="1"/>
-              </a:ext>
-            </a:extLst>
-          </p:cNvPr>
-          <p:cNvSpPr>
-            <a:spLocks noGrp="1" noRot="1" noChangeAspect="1" noMove="1" noResize="1" noEditPoints="1" noAdjustHandles="1" noChangeArrowheads="1" noChangeShapeType="1" noTextEdit="1"/>
-          </p:cNvSpPr>
-          <p:nvPr>
-            <p:extLst>
-              <p:ext uri="{386F3935-93C4-4BCD-93E2-E3B085C9AB24}">
-                <p16:designElem xmlns:p16="http://schemas.microsoft.com/office/powerpoint/2015/main" val="1"/>
-              </p:ext>
-            </p:extLst>
-          </p:nvPr>
-        </p:nvSpPr>
-        <p:spPr>
-          <a:xfrm>
-            <a:off x="0" y="2203079"/>
-            <a:ext cx="8537521" cy="4147845"/>
-          </a:xfrm>
-          <a:prstGeom prst="rect">
-            <a:avLst/>
-          </a:prstGeom>
-          <a:solidFill>
-            <a:schemeClr val="bg1"/>
-          </a:solidFill>
-          <a:ln>
-            <a:noFill/>
-          </a:ln>
-          <a:effectLst>
-            <a:outerShdw blurRad="139700" dist="127000" dir="5400000" algn="t" rotWithShape="0">
-              <a:prstClr val="black">
-                <a:alpha val="15000"/>
-              </a:prstClr>
-            </a:outerShdw>
-          </a:effectLst>
-        </p:spPr>
-        <p:style>
-          <a:lnRef idx="2">
-            <a:schemeClr val="accent1">
-              <a:shade val="50000"/>
-            </a:schemeClr>
-          </a:lnRef>
-          <a:fillRef idx="1">
-            <a:schemeClr val="accent1"/>
-          </a:fillRef>
-          <a:effectRef idx="0">
-            <a:schemeClr val="accent1"/>
-          </a:effectRef>
-          <a:fontRef idx="minor">
-            <a:schemeClr val="lt1"/>
-          </a:fontRef>
-        </p:style>
-        <p:txBody>
-          <a:bodyPr rtlCol="0" anchor="ctr"/>
-          <a:lstStyle/>
-          <a:p>
-            <a:pPr algn="ctr"/>
-            <a:endParaRPr lang="en-US"/>
-          </a:p>
-        </p:txBody>
-      </p:sp>
-      <p:sp>
-        <p:nvSpPr>
-          <p:cNvPr id="4" name="Inhaltsplatzhalter 3">
-            <a:extLst>
-              <a:ext uri="{FF2B5EF4-FFF2-40B4-BE49-F238E27FC236}">
-                <a16:creationId xmlns:a16="http://schemas.microsoft.com/office/drawing/2014/main" id="{21EC2F82-2079-BEE9-A04D-EC18AE7FE18B}"/>
-              </a:ext>
-            </a:extLst>
-          </p:cNvPr>
-          <p:cNvSpPr>
-            <a:spLocks noGrp="1"/>
-          </p:cNvSpPr>
-          <p:nvPr>
-            <p:ph idx="1"/>
-          </p:nvPr>
-        </p:nvSpPr>
-        <p:spPr>
-          <a:xfrm>
-            <a:off x="595245" y="2599509"/>
-            <a:ext cx="7607751" cy="3435531"/>
-          </a:xfrm>
-        </p:spPr>
-        <p:txBody>
-          <a:bodyPr anchor="ctr">
-            <a:normAutofit/>
-          </a:bodyPr>
-          <a:lstStyle/>
-          <a:p>
-            <a:r>
-              <a:rPr lang="de-CH" sz="2100" dirty="0"/>
-              <a:t>Key – Value</a:t>
-            </a:r>
-          </a:p>
-          <a:p>
-            <a:r>
-              <a:rPr lang="de-CH" sz="2100" dirty="0"/>
-              <a:t>Dynamische Grösse</a:t>
-            </a:r>
-          </a:p>
-          <a:p>
-            <a:r>
-              <a:rPr lang="de-CH" sz="2100" dirty="0"/>
-              <a:t>Reihenfolge ist nicht garantiert</a:t>
-            </a:r>
-          </a:p>
-          <a:p>
-            <a:r>
-              <a:rPr lang="de-CH" sz="2100" dirty="0"/>
-              <a:t>Standardwert ist </a:t>
-            </a:r>
-            <a:r>
-              <a:rPr lang="de-CH" sz="2100" dirty="0" err="1"/>
-              <a:t>nil</a:t>
-            </a:r>
-            <a:endParaRPr lang="de-CH" sz="2100" dirty="0"/>
-          </a:p>
-          <a:p>
-            <a:r>
-              <a:rPr lang="de-CH" sz="2100" dirty="0"/>
-              <a:t>«</a:t>
-            </a:r>
-            <a:r>
-              <a:rPr lang="de-CH" sz="2100" dirty="0" err="1"/>
-              <a:t>range</a:t>
-            </a:r>
-            <a:r>
-              <a:rPr lang="de-CH" sz="2100" dirty="0"/>
-              <a:t>» für Iteration</a:t>
-            </a:r>
-          </a:p>
-        </p:txBody>
-      </p:sp>
-      <p:pic>
-        <p:nvPicPr>
-          <p:cNvPr id="5122" name="Picture 2" descr="Principles of map type in GO | Golang for all">
-            <a:extLst>
-              <a:ext uri="{FF2B5EF4-FFF2-40B4-BE49-F238E27FC236}">
-                <a16:creationId xmlns:a16="http://schemas.microsoft.com/office/drawing/2014/main" id="{69F9ACEF-2D5B-86F1-8B14-5A58AEDD975F}"/>
-              </a:ext>
-            </a:extLst>
-          </p:cNvPr>
-          <p:cNvPicPr>
-            <a:picLocks noChangeAspect="1" noChangeArrowheads="1"/>
-          </p:cNvPicPr>
-          <p:nvPr/>
-        </p:nvPicPr>
-        <p:blipFill>
-          <a:blip r:embed="rId3">
-            <a:extLst>
-              <a:ext uri="{28A0092B-C50C-407E-A947-70E740481C1C}">
-                <a14:useLocalDpi xmlns:a14="http://schemas.microsoft.com/office/drawing/2010/main" val="0"/>
-              </a:ext>
-            </a:extLst>
-          </a:blip>
-          <a:srcRect/>
-          <a:stretch>
-            <a:fillRect/>
-          </a:stretch>
-        </p:blipFill>
-        <p:spPr bwMode="auto">
-          <a:xfrm flipH="1">
-            <a:off x="7917460" y="262271"/>
-            <a:ext cx="1056904" cy="1416469"/>
-          </a:xfrm>
-          <a:prstGeom prst="rect">
-            <a:avLst/>
-          </a:prstGeom>
-          <a:noFill/>
-          <a:extLst>
-            <a:ext uri="{909E8E84-426E-40DD-AFC4-6F175D3DCCD1}">
-              <a14:hiddenFill xmlns:a14="http://schemas.microsoft.com/office/drawing/2010/main">
-                <a:solidFill>
-                  <a:srgbClr val="FFFFFF"/>
-                </a:solidFill>
-              </a14:hiddenFill>
-            </a:ext>
-          </a:extLst>
-        </p:spPr>
-      </p:pic>
-    </p:spTree>
-    <p:extLst>
-      <p:ext uri="{BB962C8B-B14F-4D97-AF65-F5344CB8AC3E}">
-        <p14:creationId xmlns:p14="http://schemas.microsoft.com/office/powerpoint/2010/main" val="1655206865"/>
-      </p:ext>
-    </p:extLst>
-  </p:cSld>
-  <p:clrMapOvr>
-    <a:masterClrMapping/>
-  </p:clrMapOvr>
-</p:sld>
-</file>
-
-<file path=ppt/slides/slide11.xml><?xml version="1.0" encoding="utf-8"?>
-<p:sld xmlns:a="http://schemas.openxmlformats.org/drawingml/2006/main" xmlns:r="http://schemas.openxmlformats.org/officeDocument/2006/relationships" xmlns:p="http://schemas.openxmlformats.org/presentationml/2006/main">
-  <p:cSld>
-    <p:bg>
-      <p:bgPr>
-        <a:solidFill>
-          <a:schemeClr val="bg1"/>
-        </a:solidFill>
-        <a:effectLst/>
-      </p:bgPr>
-    </p:bg>
-    <p:spTree>
-      <p:nvGrpSpPr>
-        <p:cNvPr id="1" name="">
-          <a:extLst>
-            <a:ext uri="{FF2B5EF4-FFF2-40B4-BE49-F238E27FC236}">
-              <a16:creationId xmlns:a16="http://schemas.microsoft.com/office/drawing/2014/main" id="{1422B429-924E-38BF-0BC7-8AB83FA47097}"/>
-            </a:ext>
-          </a:extLst>
-        </p:cNvPr>
-        <p:cNvGrpSpPr/>
-        <p:nvPr/>
-      </p:nvGrpSpPr>
-      <p:grpSpPr>
-        <a:xfrm>
-          <a:off x="0" y="0"/>
-          <a:ext cx="0" cy="0"/>
-          <a:chOff x="0" y="0"/>
-          <a:chExt cx="0" cy="0"/>
-        </a:xfrm>
-      </p:grpSpPr>
-      <p:sp useBgFill="1">
-        <p:nvSpPr>
-          <p:cNvPr id="2057" name="Rectangle 2056">
-            <a:extLst>
-              <a:ext uri="{FF2B5EF4-FFF2-40B4-BE49-F238E27FC236}">
-                <a16:creationId xmlns:a16="http://schemas.microsoft.com/office/drawing/2014/main" id="{7402BCCD-8498-F895-FB49-3A6814D953FC}"/>
-              </a:ext>
-              <a:ext uri="{C183D7F6-B498-43B3-948B-1728B52AA6E4}">
-                <adec:decorative xmlns:adec="http://schemas.microsoft.com/office/drawing/2017/decorative" val="1"/>
-              </a:ext>
-            </a:extLst>
-          </p:cNvPr>
-          <p:cNvSpPr>
-            <a:spLocks noGrp="1" noRot="1" noChangeAspect="1" noMove="1" noResize="1" noEditPoints="1" noAdjustHandles="1" noChangeArrowheads="1" noChangeShapeType="1" noTextEdit="1"/>
-          </p:cNvSpPr>
-          <p:nvPr>
-            <p:extLst>
-              <p:ext uri="{386F3935-93C4-4BCD-93E2-E3B085C9AB24}">
-                <p16:designElem xmlns:p16="http://schemas.microsoft.com/office/powerpoint/2015/main" val="1"/>
-              </p:ext>
-            </p:extLst>
-          </p:nvPr>
-        </p:nvSpPr>
-        <p:spPr>
-          <a:xfrm>
-            <a:off x="0" y="0"/>
-            <a:ext cx="9143999" cy="6857365"/>
-          </a:xfrm>
-          <a:prstGeom prst="rect">
-            <a:avLst/>
-          </a:prstGeom>
-          <a:ln>
-            <a:noFill/>
-          </a:ln>
-        </p:spPr>
-        <p:style>
-          <a:lnRef idx="2">
-            <a:schemeClr val="accent1">
-              <a:shade val="50000"/>
-            </a:schemeClr>
-          </a:lnRef>
-          <a:fillRef idx="1">
-            <a:schemeClr val="accent1"/>
-          </a:fillRef>
-          <a:effectRef idx="0">
-            <a:schemeClr val="accent1"/>
-          </a:effectRef>
-          <a:fontRef idx="minor">
-            <a:schemeClr val="lt1"/>
-          </a:fontRef>
-        </p:style>
-        <p:txBody>
-          <a:bodyPr rtlCol="0" anchor="ctr"/>
-          <a:lstStyle/>
-          <a:p>
-            <a:pPr algn="ctr"/>
-            <a:endParaRPr lang="en-US"/>
-          </a:p>
-        </p:txBody>
-      </p:sp>
-      <p:sp>
-        <p:nvSpPr>
-          <p:cNvPr id="2" name="Titel 1">
-            <a:extLst>
-              <a:ext uri="{FF2B5EF4-FFF2-40B4-BE49-F238E27FC236}">
-                <a16:creationId xmlns:a16="http://schemas.microsoft.com/office/drawing/2014/main" id="{37AD8B81-93FE-CB35-DFBF-BA8F6C5E60FD}"/>
-              </a:ext>
-            </a:extLst>
-          </p:cNvPr>
-          <p:cNvSpPr>
-            <a:spLocks noGrp="1"/>
-          </p:cNvSpPr>
-          <p:nvPr>
-            <p:ph type="title"/>
-          </p:nvPr>
-        </p:nvSpPr>
-        <p:spPr>
-          <a:xfrm>
-            <a:off x="606478" y="386930"/>
-            <a:ext cx="6927525" cy="1188950"/>
-          </a:xfrm>
-        </p:spPr>
-        <p:txBody>
-          <a:bodyPr anchor="b">
-            <a:normAutofit/>
-          </a:bodyPr>
-          <a:lstStyle/>
-          <a:p>
-            <a:r>
-              <a:rPr lang="de-CH" sz="4700" dirty="0"/>
-              <a:t>Maps Code Beispiele</a:t>
-            </a:r>
-          </a:p>
-        </p:txBody>
-      </p:sp>
-      <p:grpSp>
-        <p:nvGrpSpPr>
-          <p:cNvPr id="2059" name="Group 2058">
-            <a:extLst>
-              <a:ext uri="{FF2B5EF4-FFF2-40B4-BE49-F238E27FC236}">
-                <a16:creationId xmlns:a16="http://schemas.microsoft.com/office/drawing/2014/main" id="{DE216921-7EE9-EFE6-44AD-A3B756E86DC1}"/>
-              </a:ext>
-              <a:ext uri="{C183D7F6-B498-43B3-948B-1728B52AA6E4}">
-                <adec:decorative xmlns:adec="http://schemas.microsoft.com/office/drawing/2017/decorative" val="1"/>
-              </a:ext>
-            </a:extLst>
-          </p:cNvPr>
-          <p:cNvGrpSpPr>
-            <a:grpSpLocks noGrp="1" noUngrp="1" noRot="1" noChangeAspect="1" noMove="1" noResize="1"/>
-          </p:cNvGrpSpPr>
-          <p:nvPr>
-            <p:extLst>
-              <p:ext uri="{386F3935-93C4-4BCD-93E2-E3B085C9AB24}">
-                <p16:designElem xmlns:p16="http://schemas.microsoft.com/office/powerpoint/2015/main" val="1"/>
-              </p:ext>
-            </p:extLst>
-          </p:nvPr>
-        </p:nvGrpSpPr>
-        <p:grpSpPr>
-          <a:xfrm>
-            <a:off x="-1" y="1998368"/>
-            <a:ext cx="8771274" cy="782176"/>
-            <a:chOff x="-2" y="1998368"/>
-            <a:chExt cx="11695083" cy="782176"/>
-          </a:xfrm>
-        </p:grpSpPr>
-        <p:sp>
-          <p:nvSpPr>
-            <p:cNvPr id="2060" name="Rectangle 2059">
-              <a:extLst>
-                <a:ext uri="{FF2B5EF4-FFF2-40B4-BE49-F238E27FC236}">
-                  <a16:creationId xmlns:a16="http://schemas.microsoft.com/office/drawing/2014/main" id="{3835E63B-DABD-FA75-AE20-E2F8F53925E9}"/>
-                </a:ext>
-                <a:ext uri="{C183D7F6-B498-43B3-948B-1728B52AA6E4}">
-                  <adec:decorative xmlns:adec="http://schemas.microsoft.com/office/drawing/2017/decorative" val="1"/>
-                </a:ext>
-              </a:extLst>
-            </p:cNvPr>
-            <p:cNvSpPr/>
-            <p:nvPr>
-              <p:extLst>
-                <p:ext uri="{386F3935-93C4-4BCD-93E2-E3B085C9AB24}">
-                  <p16:designElem xmlns:p16="http://schemas.microsoft.com/office/powerpoint/2015/main" val="1"/>
-                </p:ext>
-              </p:extLst>
-            </p:nvPr>
-          </p:nvSpPr>
-          <p:spPr>
-            <a:xfrm rot="5400000">
-              <a:off x="11228040" y="2313027"/>
-              <a:ext cx="781700" cy="152382"/>
-            </a:xfrm>
-            <a:prstGeom prst="rect">
-              <a:avLst/>
-            </a:prstGeom>
-            <a:solidFill>
-              <a:schemeClr val="accent4"/>
-            </a:solidFill>
-            <a:ln>
-              <a:noFill/>
-            </a:ln>
-          </p:spPr>
-          <p:style>
-            <a:lnRef idx="2">
-              <a:schemeClr val="accent1">
-                <a:shade val="50000"/>
-              </a:schemeClr>
-            </a:lnRef>
-            <a:fillRef idx="1">
-              <a:schemeClr val="accent1"/>
-            </a:fillRef>
-            <a:effectRef idx="0">
-              <a:schemeClr val="accent1"/>
-            </a:effectRef>
-            <a:fontRef idx="minor">
-              <a:schemeClr val="lt1"/>
-            </a:fontRef>
-          </p:style>
-          <p:txBody>
-            <a:bodyPr rtlCol="0" anchor="ctr"/>
-            <a:lstStyle/>
-            <a:p>
-              <a:pPr algn="ctr"/>
-              <a:endParaRPr lang="en-US"/>
-            </a:p>
-          </p:txBody>
-        </p:sp>
-        <p:sp>
-          <p:nvSpPr>
-            <p:cNvPr id="2061" name="Rectangle 2060">
-              <a:extLst>
-                <a:ext uri="{FF2B5EF4-FFF2-40B4-BE49-F238E27FC236}">
-                  <a16:creationId xmlns:a16="http://schemas.microsoft.com/office/drawing/2014/main" id="{3B6EA3F6-276C-754D-03DB-3A255433B2A9}"/>
-                </a:ext>
-                <a:ext uri="{C183D7F6-B498-43B3-948B-1728B52AA6E4}">
-                  <adec:decorative xmlns:adec="http://schemas.microsoft.com/office/drawing/2017/decorative" val="1"/>
-                </a:ext>
-              </a:extLst>
-            </p:cNvPr>
-            <p:cNvSpPr/>
-            <p:nvPr>
-              <p:extLst>
-                <p:ext uri="{386F3935-93C4-4BCD-93E2-E3B085C9AB24}">
-                  <p16:designElem xmlns:p16="http://schemas.microsoft.com/office/powerpoint/2015/main" val="1"/>
-                </p:ext>
-              </p:extLst>
-            </p:nvPr>
-          </p:nvSpPr>
-          <p:spPr>
-            <a:xfrm flipH="1" flipV="1">
-              <a:off x="-2" y="1998845"/>
-              <a:ext cx="11454595" cy="781699"/>
-            </a:xfrm>
-            <a:prstGeom prst="rect">
-              <a:avLst/>
-            </a:prstGeom>
-            <a:solidFill>
-              <a:schemeClr val="accent4"/>
-            </a:solidFill>
-            <a:ln>
-              <a:noFill/>
-            </a:ln>
-          </p:spPr>
-          <p:style>
-            <a:lnRef idx="2">
-              <a:schemeClr val="accent1">
-                <a:shade val="50000"/>
-              </a:schemeClr>
-            </a:lnRef>
-            <a:fillRef idx="1">
-              <a:schemeClr val="accent1"/>
-            </a:fillRef>
-            <a:effectRef idx="0">
-              <a:schemeClr val="accent1"/>
-            </a:effectRef>
-            <a:fontRef idx="minor">
-              <a:schemeClr val="lt1"/>
-            </a:fontRef>
-          </p:style>
-          <p:txBody>
-            <a:bodyPr rtlCol="0" anchor="ctr"/>
-            <a:lstStyle/>
-            <a:p>
-              <a:pPr algn="ctr"/>
-              <a:endParaRPr lang="en-US"/>
-            </a:p>
-          </p:txBody>
-        </p:sp>
-      </p:grpSp>
-      <p:sp>
-        <p:nvSpPr>
-          <p:cNvPr id="2063" name="Rectangle 2062">
-            <a:extLst>
-              <a:ext uri="{FF2B5EF4-FFF2-40B4-BE49-F238E27FC236}">
-                <a16:creationId xmlns:a16="http://schemas.microsoft.com/office/drawing/2014/main" id="{82F5968E-22DD-92BC-BF02-61C6E2E954CC}"/>
-              </a:ext>
-              <a:ext uri="{C183D7F6-B498-43B3-948B-1728B52AA6E4}">
-                <adec:decorative xmlns:adec="http://schemas.microsoft.com/office/drawing/2017/decorative" val="1"/>
-              </a:ext>
-            </a:extLst>
-          </p:cNvPr>
-          <p:cNvSpPr>
-            <a:spLocks noGrp="1" noRot="1" noChangeAspect="1" noMove="1" noResize="1" noEditPoints="1" noAdjustHandles="1" noChangeArrowheads="1" noChangeShapeType="1" noTextEdit="1"/>
-          </p:cNvSpPr>
-          <p:nvPr>
-            <p:extLst>
-              <p:ext uri="{386F3935-93C4-4BCD-93E2-E3B085C9AB24}">
-                <p16:designElem xmlns:p16="http://schemas.microsoft.com/office/powerpoint/2015/main" val="1"/>
-              </p:ext>
-            </p:extLst>
-          </p:nvPr>
-        </p:nvSpPr>
-        <p:spPr>
-          <a:xfrm>
-            <a:off x="0" y="2203079"/>
-            <a:ext cx="8537521" cy="4147845"/>
-          </a:xfrm>
-          <a:prstGeom prst="rect">
-            <a:avLst/>
-          </a:prstGeom>
-          <a:solidFill>
-            <a:schemeClr val="bg1"/>
-          </a:solidFill>
-          <a:ln>
-            <a:noFill/>
-          </a:ln>
-          <a:effectLst>
-            <a:outerShdw blurRad="139700" dist="127000" dir="5400000" algn="t" rotWithShape="0">
-              <a:prstClr val="black">
-                <a:alpha val="15000"/>
-              </a:prstClr>
-            </a:outerShdw>
-          </a:effectLst>
-        </p:spPr>
-        <p:style>
-          <a:lnRef idx="2">
-            <a:schemeClr val="accent1">
-              <a:shade val="50000"/>
-            </a:schemeClr>
-          </a:lnRef>
-          <a:fillRef idx="1">
-            <a:schemeClr val="accent1"/>
-          </a:fillRef>
-          <a:effectRef idx="0">
-            <a:schemeClr val="accent1"/>
-          </a:effectRef>
-          <a:fontRef idx="minor">
-            <a:schemeClr val="lt1"/>
-          </a:fontRef>
-        </p:style>
-        <p:txBody>
-          <a:bodyPr rtlCol="0" anchor="ctr"/>
-          <a:lstStyle/>
-          <a:p>
-            <a:pPr algn="ctr"/>
-            <a:endParaRPr lang="en-US"/>
-          </a:p>
-        </p:txBody>
-      </p:sp>
-      <p:pic>
-        <p:nvPicPr>
-          <p:cNvPr id="5" name="Content Placeholder 4">
-            <a:extLst>
-              <a:ext uri="{FF2B5EF4-FFF2-40B4-BE49-F238E27FC236}">
-                <a16:creationId xmlns:a16="http://schemas.microsoft.com/office/drawing/2014/main" id="{C124BCC5-BC45-8F4A-453A-D063416C41D6}"/>
-              </a:ext>
-            </a:extLst>
-          </p:cNvPr>
-          <p:cNvPicPr>
-            <a:picLocks noGrp="1" noChangeAspect="1"/>
-          </p:cNvPicPr>
-          <p:nvPr>
-            <p:ph idx="1"/>
-          </p:nvPr>
-        </p:nvPicPr>
-        <p:blipFill>
-          <a:blip r:embed="rId2"/>
-          <a:stretch>
-            <a:fillRect/>
-          </a:stretch>
-        </p:blipFill>
-        <p:spPr>
-          <a:xfrm>
-            <a:off x="79103" y="2340989"/>
-            <a:ext cx="7454900" cy="2438400"/>
-          </a:xfrm>
-          <a:prstGeom prst="rect">
-            <a:avLst/>
-          </a:prstGeom>
-        </p:spPr>
-      </p:pic>
-      <p:pic>
-        <p:nvPicPr>
-          <p:cNvPr id="6" name="Picture 5">
-            <a:extLst>
-              <a:ext uri="{FF2B5EF4-FFF2-40B4-BE49-F238E27FC236}">
-                <a16:creationId xmlns:a16="http://schemas.microsoft.com/office/drawing/2014/main" id="{6B8505F5-DDE7-A0BA-C31D-E4A3E7D20CE4}"/>
-              </a:ext>
-            </a:extLst>
-          </p:cNvPr>
-          <p:cNvPicPr>
-            <a:picLocks noChangeAspect="1"/>
-          </p:cNvPicPr>
-          <p:nvPr/>
-        </p:nvPicPr>
-        <p:blipFill>
-          <a:blip r:embed="rId3"/>
-          <a:stretch>
-            <a:fillRect/>
-          </a:stretch>
-        </p:blipFill>
-        <p:spPr>
-          <a:xfrm>
-            <a:off x="79103" y="5209556"/>
-            <a:ext cx="5346700" cy="711200"/>
-          </a:xfrm>
-          <a:prstGeom prst="rect">
-            <a:avLst/>
-          </a:prstGeom>
-        </p:spPr>
-      </p:pic>
-      <p:pic>
-        <p:nvPicPr>
-          <p:cNvPr id="3" name="Picture 2" descr="Principles of map type in GO | Golang for all">
-            <a:extLst>
-              <a:ext uri="{FF2B5EF4-FFF2-40B4-BE49-F238E27FC236}">
-                <a16:creationId xmlns:a16="http://schemas.microsoft.com/office/drawing/2014/main" id="{7D01E7C5-2454-E971-939B-A66EC48F7983}"/>
-              </a:ext>
-            </a:extLst>
-          </p:cNvPr>
-          <p:cNvPicPr>
-            <a:picLocks noChangeAspect="1" noChangeArrowheads="1"/>
-          </p:cNvPicPr>
-          <p:nvPr/>
-        </p:nvPicPr>
-        <p:blipFill>
-          <a:blip r:embed="rId4">
-            <a:extLst>
-              <a:ext uri="{28A0092B-C50C-407E-A947-70E740481C1C}">
-                <a14:useLocalDpi xmlns:a14="http://schemas.microsoft.com/office/drawing/2010/main" val="0"/>
-              </a:ext>
-            </a:extLst>
-          </a:blip>
-          <a:srcRect/>
-          <a:stretch>
-            <a:fillRect/>
-          </a:stretch>
-        </p:blipFill>
-        <p:spPr bwMode="auto">
-          <a:xfrm flipH="1">
-            <a:off x="7917460" y="262271"/>
-            <a:ext cx="1056904" cy="1416469"/>
-          </a:xfrm>
-          <a:prstGeom prst="rect">
-            <a:avLst/>
-          </a:prstGeom>
-          <a:noFill/>
-          <a:extLst>
-            <a:ext uri="{909E8E84-426E-40DD-AFC4-6F175D3DCCD1}">
-              <a14:hiddenFill xmlns:a14="http://schemas.microsoft.com/office/drawing/2010/main">
-                <a:solidFill>
-                  <a:srgbClr val="FFFFFF"/>
-                </a:solidFill>
-              </a14:hiddenFill>
-            </a:ext>
-          </a:extLst>
-        </p:spPr>
-      </p:pic>
-    </p:spTree>
-    <p:extLst>
-      <p:ext uri="{BB962C8B-B14F-4D97-AF65-F5344CB8AC3E}">
-        <p14:creationId xmlns:p14="http://schemas.microsoft.com/office/powerpoint/2010/main" val="3427786389"/>
-      </p:ext>
-    </p:extLst>
-  </p:cSld>
-  <p:clrMapOvr>
-    <a:masterClrMapping/>
-  </p:clrMapOvr>
-</p:sld>
-</file>
-
-<file path=ppt/slides/slide12.xml><?xml version="1.0" encoding="utf-8"?>
-<p:sld xmlns:a="http://schemas.openxmlformats.org/drawingml/2006/main" xmlns:r="http://schemas.openxmlformats.org/officeDocument/2006/relationships" xmlns:p="http://schemas.openxmlformats.org/presentationml/2006/main">
-  <p:cSld>
-    <p:bg>
-      <p:bgPr>
-        <a:solidFill>
-          <a:schemeClr val="bg1"/>
-        </a:solidFill>
-        <a:effectLst/>
-      </p:bgPr>
-    </p:bg>
-    <p:spTree>
-      <p:nvGrpSpPr>
-        <p:cNvPr id="1" name="">
-          <a:extLst>
-            <a:ext uri="{FF2B5EF4-FFF2-40B4-BE49-F238E27FC236}">
               <a16:creationId xmlns:a16="http://schemas.microsoft.com/office/drawing/2014/main" id="{889522E0-8191-FC52-5CFD-F2A33A7437F8}"/>
             </a:ext>
           </a:extLst>
@@ -19008,7 +18052,7 @@
 </p:sld>
 </file>
 
-<file path=ppt/slides/slide13.xml><?xml version="1.0" encoding="utf-8"?>
+<file path=ppt/slides/slide11.xml><?xml version="1.0" encoding="utf-8"?>
 <p:sld xmlns:a="http://schemas.openxmlformats.org/drawingml/2006/main" xmlns:r="http://schemas.openxmlformats.org/officeDocument/2006/relationships" xmlns:p="http://schemas.openxmlformats.org/presentationml/2006/main">
   <p:cSld>
     <p:bg>
@@ -19518,7 +18562,7 @@
 </p:sld>
 </file>
 
-<file path=ppt/slides/slide14.xml><?xml version="1.0" encoding="utf-8"?>
+<file path=ppt/slides/slide12.xml><?xml version="1.0" encoding="utf-8"?>
 <p:sld xmlns:a="http://schemas.openxmlformats.org/drawingml/2006/main" xmlns:r="http://schemas.openxmlformats.org/officeDocument/2006/relationships" xmlns:p="http://schemas.openxmlformats.org/presentationml/2006/main">
   <p:cSld>
     <p:bg>
@@ -19963,7 +19007,7 @@
 </p:sld>
 </file>
 
-<file path=ppt/slides/slide15.xml><?xml version="1.0" encoding="utf-8"?>
+<file path=ppt/slides/slide13.xml><?xml version="1.0" encoding="utf-8"?>
 <p:sld xmlns:a="http://schemas.openxmlformats.org/drawingml/2006/main" xmlns:r="http://schemas.openxmlformats.org/officeDocument/2006/relationships" xmlns:p="http://schemas.openxmlformats.org/presentationml/2006/main">
   <p:cSld>
     <p:bg>
@@ -20696,7 +19740,7 @@
 </p:sld>
 </file>
 
-<file path=ppt/slides/slide16.xml><?xml version="1.0" encoding="utf-8"?>
+<file path=ppt/slides/slide14.xml><?xml version="1.0" encoding="utf-8"?>
 <p:sld xmlns:a="http://schemas.openxmlformats.org/drawingml/2006/main" xmlns:r="http://schemas.openxmlformats.org/officeDocument/2006/relationships" xmlns:p="http://schemas.openxmlformats.org/presentationml/2006/main">
   <p:cSld>
     <p:bg>
@@ -21136,7 +20180,7 @@
 </p:sld>
 </file>
 
-<file path=ppt/slides/slide17.xml><?xml version="1.0" encoding="utf-8"?>
+<file path=ppt/slides/slide15.xml><?xml version="1.0" encoding="utf-8"?>
 <p:sld xmlns:a="http://schemas.openxmlformats.org/drawingml/2006/main" xmlns:r="http://schemas.openxmlformats.org/officeDocument/2006/relationships" xmlns:p="http://schemas.openxmlformats.org/presentationml/2006/main">
   <p:cSld>
     <p:bg>
@@ -21420,7 +20464,7 @@
 </p:sld>
 </file>
 
-<file path=ppt/slides/slide18.xml><?xml version="1.0" encoding="utf-8"?>
+<file path=ppt/slides/slide16.xml><?xml version="1.0" encoding="utf-8"?>
 <p:sld xmlns:a="http://schemas.openxmlformats.org/drawingml/2006/main" xmlns:r="http://schemas.openxmlformats.org/officeDocument/2006/relationships" xmlns:p="http://schemas.openxmlformats.org/presentationml/2006/main">
   <p:cSld>
     <p:bg>
@@ -21902,7 +20946,7 @@
 </p:sld>
 </file>
 
-<file path=ppt/slides/slide19.xml><?xml version="1.0" encoding="utf-8"?>
+<file path=ppt/slides/slide17.xml><?xml version="1.0" encoding="utf-8"?>
 <p:sld xmlns:a="http://schemas.openxmlformats.org/drawingml/2006/main" xmlns:r="http://schemas.openxmlformats.org/officeDocument/2006/relationships" xmlns:p="http://schemas.openxmlformats.org/presentationml/2006/main">
   <p:cSld>
     <p:bg>
@@ -22298,520 +21342,7 @@
 </p:sld>
 </file>
 
-<file path=ppt/slides/slide2.xml><?xml version="1.0" encoding="utf-8"?>
-<p:sld xmlns:a="http://schemas.openxmlformats.org/drawingml/2006/main" xmlns:r="http://schemas.openxmlformats.org/officeDocument/2006/relationships" xmlns:p="http://schemas.openxmlformats.org/presentationml/2006/main">
-  <p:cSld>
-    <p:bg>
-      <p:bgPr>
-        <a:solidFill>
-          <a:schemeClr val="bg1"/>
-        </a:solidFill>
-        <a:effectLst/>
-      </p:bgPr>
-    </p:bg>
-    <p:spTree>
-      <p:nvGrpSpPr>
-        <p:cNvPr id="1" name=""/>
-        <p:cNvGrpSpPr/>
-        <p:nvPr/>
-      </p:nvGrpSpPr>
-      <p:grpSpPr>
-        <a:xfrm>
-          <a:off x="0" y="0"/>
-          <a:ext cx="0" cy="0"/>
-          <a:chOff x="0" y="0"/>
-          <a:chExt cx="0" cy="0"/>
-        </a:xfrm>
-      </p:grpSpPr>
-      <p:sp useBgFill="1">
-        <p:nvSpPr>
-          <p:cNvPr id="2068" name="Rectangle 2067">
-            <a:extLst>
-              <a:ext uri="{FF2B5EF4-FFF2-40B4-BE49-F238E27FC236}">
-                <a16:creationId xmlns:a16="http://schemas.microsoft.com/office/drawing/2014/main" id="{3AD318CC-E2A8-4E27-9548-A047A78999B1}"/>
-              </a:ext>
-              <a:ext uri="{C183D7F6-B498-43B3-948B-1728B52AA6E4}">
-                <adec:decorative xmlns:adec="http://schemas.microsoft.com/office/drawing/2017/decorative" val="1"/>
-              </a:ext>
-            </a:extLst>
-          </p:cNvPr>
-          <p:cNvSpPr>
-            <a:spLocks noGrp="1" noRot="1" noChangeAspect="1" noMove="1" noResize="1" noEditPoints="1" noAdjustHandles="1" noChangeArrowheads="1" noChangeShapeType="1" noTextEdit="1"/>
-          </p:cNvSpPr>
-          <p:nvPr>
-            <p:extLst>
-              <p:ext uri="{386F3935-93C4-4BCD-93E2-E3B085C9AB24}">
-                <p16:designElem xmlns:p16="http://schemas.microsoft.com/office/powerpoint/2015/main" val="1"/>
-              </p:ext>
-            </p:extLst>
-          </p:nvPr>
-        </p:nvSpPr>
-        <p:spPr>
-          <a:xfrm>
-            <a:off x="0" y="0"/>
-            <a:ext cx="9143999" cy="6857365"/>
-          </a:xfrm>
-          <a:prstGeom prst="rect">
-            <a:avLst/>
-          </a:prstGeom>
-          <a:ln>
-            <a:noFill/>
-          </a:ln>
-        </p:spPr>
-        <p:style>
-          <a:lnRef idx="2">
-            <a:schemeClr val="accent1">
-              <a:shade val="50000"/>
-            </a:schemeClr>
-          </a:lnRef>
-          <a:fillRef idx="1">
-            <a:schemeClr val="accent1"/>
-          </a:fillRef>
-          <a:effectRef idx="0">
-            <a:schemeClr val="accent1"/>
-          </a:effectRef>
-          <a:fontRef idx="minor">
-            <a:schemeClr val="lt1"/>
-          </a:fontRef>
-        </p:style>
-        <p:txBody>
-          <a:bodyPr rtlCol="0" anchor="ctr"/>
-          <a:lstStyle/>
-          <a:p>
-            <a:pPr algn="ctr"/>
-            <a:endParaRPr lang="en-US"/>
-          </a:p>
-        </p:txBody>
-      </p:sp>
-      <p:sp>
-        <p:nvSpPr>
-          <p:cNvPr id="2" name="Titel 1">
-            <a:extLst>
-              <a:ext uri="{FF2B5EF4-FFF2-40B4-BE49-F238E27FC236}">
-                <a16:creationId xmlns:a16="http://schemas.microsoft.com/office/drawing/2014/main" id="{710A1EB6-AD89-4B38-B328-726CF9C21286}"/>
-              </a:ext>
-            </a:extLst>
-          </p:cNvPr>
-          <p:cNvSpPr>
-            <a:spLocks noGrp="1"/>
-          </p:cNvSpPr>
-          <p:nvPr>
-            <p:ph type="title"/>
-          </p:nvPr>
-        </p:nvSpPr>
-        <p:spPr>
-          <a:xfrm>
-            <a:off x="483798" y="1463040"/>
-            <a:ext cx="2847230" cy="2690949"/>
-          </a:xfrm>
-        </p:spPr>
-        <p:txBody>
-          <a:bodyPr anchor="t">
-            <a:normAutofit/>
-          </a:bodyPr>
-          <a:lstStyle/>
-          <a:p>
-            <a:r>
-              <a:rPr lang="de-CH" sz="4200"/>
-              <a:t>Vision</a:t>
-            </a:r>
-          </a:p>
-        </p:txBody>
-      </p:sp>
-      <p:grpSp>
-        <p:nvGrpSpPr>
-          <p:cNvPr id="2070" name="Group 2069">
-            <a:extLst>
-              <a:ext uri="{FF2B5EF4-FFF2-40B4-BE49-F238E27FC236}">
-                <a16:creationId xmlns:a16="http://schemas.microsoft.com/office/drawing/2014/main" id="{B14B560F-9DD7-4302-A60B-EBD3EF59B073}"/>
-              </a:ext>
-              <a:ext uri="{C183D7F6-B498-43B3-948B-1728B52AA6E4}">
-                <adec:decorative xmlns:adec="http://schemas.microsoft.com/office/drawing/2017/decorative" val="1"/>
-              </a:ext>
-            </a:extLst>
-          </p:cNvPr>
-          <p:cNvGrpSpPr>
-            <a:grpSpLocks noGrp="1" noUngrp="1" noRot="1" noChangeAspect="1" noMove="1" noResize="1"/>
-          </p:cNvGrpSpPr>
-          <p:nvPr>
-            <p:extLst>
-              <p:ext uri="{386F3935-93C4-4BCD-93E2-E3B085C9AB24}">
-                <p16:designElem xmlns:p16="http://schemas.microsoft.com/office/powerpoint/2015/main" val="1"/>
-              </p:ext>
-            </p:extLst>
-          </p:nvPr>
-        </p:nvGrpSpPr>
-        <p:grpSpPr>
-          <a:xfrm>
-            <a:off x="157250" y="4415246"/>
-            <a:ext cx="8986749" cy="2087795"/>
-            <a:chOff x="143163" y="5763486"/>
-            <a:chExt cx="11982332" cy="739555"/>
-          </a:xfrm>
-        </p:grpSpPr>
-        <p:sp>
-          <p:nvSpPr>
-            <p:cNvPr id="2071" name="Rectangle 2070">
-              <a:extLst>
-                <a:ext uri="{FF2B5EF4-FFF2-40B4-BE49-F238E27FC236}">
-                  <a16:creationId xmlns:a16="http://schemas.microsoft.com/office/drawing/2014/main" id="{3A9A4357-BD1D-4622-A4FE-766E6AB8DE84}"/>
-                </a:ext>
-                <a:ext uri="{C183D7F6-B498-43B3-948B-1728B52AA6E4}">
-                  <adec:decorative xmlns:adec="http://schemas.microsoft.com/office/drawing/2017/decorative" val="1"/>
-                </a:ext>
-              </a:extLst>
-            </p:cNvPr>
-            <p:cNvSpPr/>
-            <p:nvPr>
-              <p:extLst>
-                <p:ext uri="{386F3935-93C4-4BCD-93E2-E3B085C9AB24}">
-                  <p16:designElem xmlns:p16="http://schemas.microsoft.com/office/powerpoint/2015/main" val="1"/>
-                </p:ext>
-              </p:extLst>
-            </p:nvPr>
-          </p:nvSpPr>
-          <p:spPr>
-            <a:xfrm flipH="1" flipV="1">
-              <a:off x="357444" y="5763486"/>
-              <a:ext cx="11768051" cy="739555"/>
-            </a:xfrm>
-            <a:prstGeom prst="rect">
-              <a:avLst/>
-            </a:prstGeom>
-            <a:solidFill>
-              <a:schemeClr val="accent4"/>
-            </a:solidFill>
-            <a:ln>
-              <a:noFill/>
-            </a:ln>
-          </p:spPr>
-          <p:style>
-            <a:lnRef idx="2">
-              <a:schemeClr val="accent1">
-                <a:shade val="50000"/>
-              </a:schemeClr>
-            </a:lnRef>
-            <a:fillRef idx="1">
-              <a:schemeClr val="accent1"/>
-            </a:fillRef>
-            <a:effectRef idx="0">
-              <a:schemeClr val="accent1"/>
-            </a:effectRef>
-            <a:fontRef idx="minor">
-              <a:schemeClr val="lt1"/>
-            </a:fontRef>
-          </p:style>
-          <p:txBody>
-            <a:bodyPr rtlCol="0" anchor="ctr"/>
-            <a:lstStyle/>
-            <a:p>
-              <a:pPr algn="ctr"/>
-              <a:endParaRPr lang="en-US"/>
-            </a:p>
-          </p:txBody>
-        </p:sp>
-        <p:cxnSp>
-          <p:nvCxnSpPr>
-            <p:cNvPr id="2072" name="Straight Connector 2071">
-              <a:extLst>
-                <a:ext uri="{FF2B5EF4-FFF2-40B4-BE49-F238E27FC236}">
-                  <a16:creationId xmlns:a16="http://schemas.microsoft.com/office/drawing/2014/main" id="{C21D6966-343E-49AC-A026-D2497E0C3CA1}"/>
-                </a:ext>
-                <a:ext uri="{C183D7F6-B498-43B3-948B-1728B52AA6E4}">
-                  <adec:decorative xmlns:adec="http://schemas.microsoft.com/office/drawing/2017/decorative" val="1"/>
-                </a:ext>
-              </a:extLst>
-            </p:cNvPr>
-            <p:cNvCxnSpPr>
-              <a:cxnSpLocks/>
-            </p:cNvCxnSpPr>
-            <p:nvPr>
-              <p:extLst>
-                <p:ext uri="{386F3935-93C4-4BCD-93E2-E3B085C9AB24}">
-                  <p16:designElem xmlns:p16="http://schemas.microsoft.com/office/powerpoint/2015/main" val="1"/>
-                </p:ext>
-              </p:extLst>
-            </p:nvPr>
-          </p:nvCxnSpPr>
-          <p:spPr>
-            <a:xfrm flipH="1">
-              <a:off x="143163" y="5763486"/>
-              <a:ext cx="1" cy="739555"/>
-            </a:xfrm>
-            <a:prstGeom prst="line">
-              <a:avLst/>
-            </a:prstGeom>
-            <a:ln w="177800">
-              <a:solidFill>
-                <a:schemeClr val="accent4"/>
-              </a:solidFill>
-            </a:ln>
-          </p:spPr>
-          <p:style>
-            <a:lnRef idx="1">
-              <a:schemeClr val="accent1"/>
-            </a:lnRef>
-            <a:fillRef idx="0">
-              <a:schemeClr val="accent1"/>
-            </a:fillRef>
-            <a:effectRef idx="0">
-              <a:schemeClr val="accent1"/>
-            </a:effectRef>
-            <a:fontRef idx="minor">
-              <a:schemeClr val="tx1"/>
-            </a:fontRef>
-          </p:style>
-        </p:cxnSp>
-      </p:grpSp>
-      <p:sp>
-        <p:nvSpPr>
-          <p:cNvPr id="2074" name="Rectangle 2073">
-            <a:extLst>
-              <a:ext uri="{FF2B5EF4-FFF2-40B4-BE49-F238E27FC236}">
-                <a16:creationId xmlns:a16="http://schemas.microsoft.com/office/drawing/2014/main" id="{2C1BBA94-3F40-40AA-8BB9-E69E25E537C1}"/>
-              </a:ext>
-              <a:ext uri="{C183D7F6-B498-43B3-948B-1728B52AA6E4}">
-                <adec:decorative xmlns:adec="http://schemas.microsoft.com/office/drawing/2017/decorative" val="1"/>
-              </a:ext>
-            </a:extLst>
-          </p:cNvPr>
-          <p:cNvSpPr>
-            <a:spLocks noGrp="1" noRot="1" noChangeAspect="1" noMove="1" noResize="1" noEditPoints="1" noAdjustHandles="1" noChangeArrowheads="1" noChangeShapeType="1" noTextEdit="1"/>
-          </p:cNvSpPr>
-          <p:nvPr>
-            <p:extLst>
-              <p:ext uri="{386F3935-93C4-4BCD-93E2-E3B085C9AB24}">
-                <p16:designElem xmlns:p16="http://schemas.microsoft.com/office/powerpoint/2015/main" val="1"/>
-              </p:ext>
-            </p:extLst>
-          </p:nvPr>
-        </p:nvSpPr>
-        <p:spPr>
-          <a:xfrm>
-            <a:off x="3850279" y="587829"/>
-            <a:ext cx="4878975" cy="5682342"/>
-          </a:xfrm>
-          <a:prstGeom prst="rect">
-            <a:avLst/>
-          </a:prstGeom>
-          <a:solidFill>
-            <a:schemeClr val="bg1"/>
-          </a:solidFill>
-          <a:ln>
-            <a:noFill/>
-          </a:ln>
-          <a:effectLst>
-            <a:outerShdw blurRad="139700" dist="127000" dir="5400000" algn="t" rotWithShape="0">
-              <a:prstClr val="black">
-                <a:alpha val="15000"/>
-              </a:prstClr>
-            </a:outerShdw>
-          </a:effectLst>
-        </p:spPr>
-        <p:style>
-          <a:lnRef idx="2">
-            <a:schemeClr val="accent1">
-              <a:shade val="50000"/>
-            </a:schemeClr>
-          </a:lnRef>
-          <a:fillRef idx="1">
-            <a:schemeClr val="accent1"/>
-          </a:fillRef>
-          <a:effectRef idx="0">
-            <a:schemeClr val="accent1"/>
-          </a:effectRef>
-          <a:fontRef idx="minor">
-            <a:schemeClr val="lt1"/>
-          </a:fontRef>
-        </p:style>
-        <p:txBody>
-          <a:bodyPr rtlCol="0" anchor="ctr"/>
-          <a:lstStyle/>
-          <a:p>
-            <a:pPr algn="ctr"/>
-            <a:endParaRPr lang="en-US"/>
-          </a:p>
-        </p:txBody>
-      </p:sp>
-      <p:sp>
-        <p:nvSpPr>
-          <p:cNvPr id="4" name="Inhaltsplatzhalter 3">
-            <a:extLst>
-              <a:ext uri="{FF2B5EF4-FFF2-40B4-BE49-F238E27FC236}">
-                <a16:creationId xmlns:a16="http://schemas.microsoft.com/office/drawing/2014/main" id="{3EDAB6A7-60DE-D475-B6EF-B1A6D39349F1}"/>
-              </a:ext>
-            </a:extLst>
-          </p:cNvPr>
-          <p:cNvSpPr>
-            <a:spLocks noGrp="1"/>
-          </p:cNvSpPr>
-          <p:nvPr>
-            <p:ph idx="1"/>
-          </p:nvPr>
-        </p:nvSpPr>
-        <p:spPr>
-          <a:xfrm>
-            <a:off x="4242163" y="1463039"/>
-            <a:ext cx="4245132" cy="4300447"/>
-          </a:xfrm>
-        </p:spPr>
-        <p:txBody>
-          <a:bodyPr anchor="t">
-            <a:normAutofit/>
-          </a:bodyPr>
-          <a:lstStyle/>
-          <a:p>
-            <a:pPr marL="0" indent="0">
-              <a:buNone/>
-            </a:pPr>
-            <a:r>
-              <a:rPr lang="de-CH" sz="1900" b="1" dirty="0"/>
-              <a:t>Kernidee</a:t>
-            </a:r>
-          </a:p>
-          <a:p>
-            <a:pPr>
-              <a:buFont typeface="Wingdings" panose="05000000000000000000" pitchFamily="2" charset="2"/>
-              <a:buChar char="Ø"/>
-            </a:pPr>
-            <a:r>
-              <a:rPr lang="de-CH" sz="1900" dirty="0"/>
-              <a:t>Grosse Systeme bei Google wurden immer komplexer, </a:t>
-            </a:r>
-            <a:r>
-              <a:rPr lang="de-CH" sz="1900" dirty="0" err="1"/>
-              <a:t>Builds</a:t>
-            </a:r>
-            <a:r>
-              <a:rPr lang="de-CH" sz="1900" dirty="0"/>
-              <a:t> dauerten lange und viele Sprachen waren zu kompliziert oder zu ineffizient </a:t>
-            </a:r>
-            <a:r>
-              <a:rPr lang="de-CH" sz="1900" dirty="0">
-                <a:sym typeface="Wingdings" panose="05000000000000000000" pitchFamily="2" charset="2"/>
-              </a:rPr>
-              <a:t> </a:t>
-            </a:r>
-            <a:r>
-              <a:rPr lang="de-CH" sz="1900" b="1" dirty="0">
-                <a:sym typeface="Wingdings" panose="05000000000000000000" pitchFamily="2" charset="2"/>
-              </a:rPr>
-              <a:t>Go sollte die Mitte treffen</a:t>
-            </a:r>
-            <a:endParaRPr lang="de-CH" sz="1900" dirty="0"/>
-          </a:p>
-          <a:p>
-            <a:pPr marL="0" indent="0">
-              <a:buNone/>
-            </a:pPr>
-            <a:r>
-              <a:rPr lang="de-CH" sz="1900" b="1" dirty="0"/>
-              <a:t>Die wichtigsten Prinzipien der Go-Vision</a:t>
-            </a:r>
-          </a:p>
-          <a:p>
-            <a:pPr>
-              <a:buFont typeface="Wingdings" panose="05000000000000000000" pitchFamily="2" charset="2"/>
-              <a:buChar char="Ø"/>
-            </a:pPr>
-            <a:r>
-              <a:rPr lang="de-CH" sz="1900" dirty="0"/>
-              <a:t>Einfachheit über alles</a:t>
-            </a:r>
-          </a:p>
-          <a:p>
-            <a:pPr>
-              <a:buFont typeface="Wingdings" panose="05000000000000000000" pitchFamily="2" charset="2"/>
-              <a:buChar char="Ø"/>
-            </a:pPr>
-            <a:r>
-              <a:rPr lang="de-CH" sz="1900" dirty="0"/>
-              <a:t>Schnelligkeit</a:t>
-            </a:r>
-          </a:p>
-          <a:p>
-            <a:pPr>
-              <a:buFont typeface="Wingdings" panose="05000000000000000000" pitchFamily="2" charset="2"/>
-              <a:buChar char="Ø"/>
-            </a:pPr>
-            <a:r>
-              <a:rPr lang="de-CH" sz="1900" dirty="0"/>
-              <a:t>Eingebaute Nebenläufigkeit</a:t>
-            </a:r>
-          </a:p>
-          <a:p>
-            <a:pPr>
-              <a:buFont typeface="Wingdings" panose="05000000000000000000" pitchFamily="2" charset="2"/>
-              <a:buChar char="Ø"/>
-            </a:pPr>
-            <a:r>
-              <a:rPr lang="de-CH" sz="1900" dirty="0"/>
-              <a:t>Starke Standardbibliothek</a:t>
-            </a:r>
-          </a:p>
-        </p:txBody>
-      </p:sp>
-      <p:pic>
-        <p:nvPicPr>
-          <p:cNvPr id="2052" name="Picture 4" descr="Learning Golang in 24 hours | Kislay Verma">
-            <a:extLst>
-              <a:ext uri="{FF2B5EF4-FFF2-40B4-BE49-F238E27FC236}">
-                <a16:creationId xmlns:a16="http://schemas.microsoft.com/office/drawing/2014/main" id="{E5CF7752-C6D5-F45E-36E9-7DBD67F25235}"/>
-              </a:ext>
-            </a:extLst>
-          </p:cNvPr>
-          <p:cNvPicPr>
-            <a:picLocks noChangeAspect="1" noChangeArrowheads="1"/>
-          </p:cNvPicPr>
-          <p:nvPr/>
-        </p:nvPicPr>
-        <p:blipFill>
-          <a:blip r:embed="rId3">
-            <a:extLst>
-              <a:ext uri="{28A0092B-C50C-407E-A947-70E740481C1C}">
-                <a14:useLocalDpi xmlns:a14="http://schemas.microsoft.com/office/drawing/2010/main" val="0"/>
-              </a:ext>
-            </a:extLst>
-          </a:blip>
-          <a:srcRect/>
-          <a:stretch>
-            <a:fillRect/>
-          </a:stretch>
-        </p:blipFill>
-        <p:spPr bwMode="auto">
-          <a:xfrm>
-            <a:off x="7955280" y="0"/>
-            <a:ext cx="1116418" cy="1369399"/>
-          </a:xfrm>
-          <a:prstGeom prst="rect">
-            <a:avLst/>
-          </a:prstGeom>
-          <a:noFill/>
-          <a:extLst>
-            <a:ext uri="{909E8E84-426E-40DD-AFC4-6F175D3DCCD1}">
-              <a14:hiddenFill xmlns:a14="http://schemas.microsoft.com/office/drawing/2010/main">
-                <a:solidFill>
-                  <a:srgbClr val="FFFFFF"/>
-                </a:solidFill>
-              </a14:hiddenFill>
-            </a:ext>
-          </a:extLst>
-        </p:spPr>
-      </p:pic>
-    </p:spTree>
-    <p:extLst>
-      <p:ext uri="{BB962C8B-B14F-4D97-AF65-F5344CB8AC3E}">
-        <p14:creationId xmlns:p14="http://schemas.microsoft.com/office/powerpoint/2010/main" val="848672094"/>
-      </p:ext>
-    </p:extLst>
-  </p:cSld>
-  <p:clrMapOvr>
-    <a:masterClrMapping/>
-  </p:clrMapOvr>
-</p:sld>
-</file>
-
-<file path=ppt/slides/slide20.xml><?xml version="1.0" encoding="utf-8"?>
+<file path=ppt/slides/slide18.xml><?xml version="1.0" encoding="utf-8"?>
 <p:sld xmlns:a="http://schemas.openxmlformats.org/drawingml/2006/main" xmlns:r="http://schemas.openxmlformats.org/officeDocument/2006/relationships" xmlns:p="http://schemas.openxmlformats.org/presentationml/2006/main">
   <p:cSld>
     <p:bg>
@@ -23286,7 +21817,7 @@
 </p:sld>
 </file>
 
-<file path=ppt/slides/slide21.xml><?xml version="1.0" encoding="utf-8"?>
+<file path=ppt/slides/slide19.xml><?xml version="1.0" encoding="utf-8"?>
 <p:sld xmlns:a="http://schemas.openxmlformats.org/drawingml/2006/main" xmlns:r="http://schemas.openxmlformats.org/officeDocument/2006/relationships" xmlns:p="http://schemas.openxmlformats.org/presentationml/2006/main">
   <p:cSld>
     <p:bg>
@@ -23721,6 +22252,519 @@
     <p:extLst>
       <p:ext uri="{BB962C8B-B14F-4D97-AF65-F5344CB8AC3E}">
         <p14:creationId xmlns:p14="http://schemas.microsoft.com/office/powerpoint/2010/main" val="2803096092"/>
+      </p:ext>
+    </p:extLst>
+  </p:cSld>
+  <p:clrMapOvr>
+    <a:masterClrMapping/>
+  </p:clrMapOvr>
+</p:sld>
+</file>
+
+<file path=ppt/slides/slide2.xml><?xml version="1.0" encoding="utf-8"?>
+<p:sld xmlns:a="http://schemas.openxmlformats.org/drawingml/2006/main" xmlns:r="http://schemas.openxmlformats.org/officeDocument/2006/relationships" xmlns:p="http://schemas.openxmlformats.org/presentationml/2006/main">
+  <p:cSld>
+    <p:bg>
+      <p:bgPr>
+        <a:solidFill>
+          <a:schemeClr val="bg1"/>
+        </a:solidFill>
+        <a:effectLst/>
+      </p:bgPr>
+    </p:bg>
+    <p:spTree>
+      <p:nvGrpSpPr>
+        <p:cNvPr id="1" name=""/>
+        <p:cNvGrpSpPr/>
+        <p:nvPr/>
+      </p:nvGrpSpPr>
+      <p:grpSpPr>
+        <a:xfrm>
+          <a:off x="0" y="0"/>
+          <a:ext cx="0" cy="0"/>
+          <a:chOff x="0" y="0"/>
+          <a:chExt cx="0" cy="0"/>
+        </a:xfrm>
+      </p:grpSpPr>
+      <p:sp useBgFill="1">
+        <p:nvSpPr>
+          <p:cNvPr id="2068" name="Rectangle 2067">
+            <a:extLst>
+              <a:ext uri="{FF2B5EF4-FFF2-40B4-BE49-F238E27FC236}">
+                <a16:creationId xmlns:a16="http://schemas.microsoft.com/office/drawing/2014/main" id="{3AD318CC-E2A8-4E27-9548-A047A78999B1}"/>
+              </a:ext>
+              <a:ext uri="{C183D7F6-B498-43B3-948B-1728B52AA6E4}">
+                <adec:decorative xmlns:adec="http://schemas.microsoft.com/office/drawing/2017/decorative" val="1"/>
+              </a:ext>
+            </a:extLst>
+          </p:cNvPr>
+          <p:cNvSpPr>
+            <a:spLocks noGrp="1" noRot="1" noChangeAspect="1" noMove="1" noResize="1" noEditPoints="1" noAdjustHandles="1" noChangeArrowheads="1" noChangeShapeType="1" noTextEdit="1"/>
+          </p:cNvSpPr>
+          <p:nvPr>
+            <p:extLst>
+              <p:ext uri="{386F3935-93C4-4BCD-93E2-E3B085C9AB24}">
+                <p16:designElem xmlns:p16="http://schemas.microsoft.com/office/powerpoint/2015/main" val="1"/>
+              </p:ext>
+            </p:extLst>
+          </p:nvPr>
+        </p:nvSpPr>
+        <p:spPr>
+          <a:xfrm>
+            <a:off x="0" y="0"/>
+            <a:ext cx="9143999" cy="6857365"/>
+          </a:xfrm>
+          <a:prstGeom prst="rect">
+            <a:avLst/>
+          </a:prstGeom>
+          <a:ln>
+            <a:noFill/>
+          </a:ln>
+        </p:spPr>
+        <p:style>
+          <a:lnRef idx="2">
+            <a:schemeClr val="accent1">
+              <a:shade val="50000"/>
+            </a:schemeClr>
+          </a:lnRef>
+          <a:fillRef idx="1">
+            <a:schemeClr val="accent1"/>
+          </a:fillRef>
+          <a:effectRef idx="0">
+            <a:schemeClr val="accent1"/>
+          </a:effectRef>
+          <a:fontRef idx="minor">
+            <a:schemeClr val="lt1"/>
+          </a:fontRef>
+        </p:style>
+        <p:txBody>
+          <a:bodyPr rtlCol="0" anchor="ctr"/>
+          <a:lstStyle/>
+          <a:p>
+            <a:pPr algn="ctr"/>
+            <a:endParaRPr lang="en-US"/>
+          </a:p>
+        </p:txBody>
+      </p:sp>
+      <p:sp>
+        <p:nvSpPr>
+          <p:cNvPr id="2" name="Titel 1">
+            <a:extLst>
+              <a:ext uri="{FF2B5EF4-FFF2-40B4-BE49-F238E27FC236}">
+                <a16:creationId xmlns:a16="http://schemas.microsoft.com/office/drawing/2014/main" id="{710A1EB6-AD89-4B38-B328-726CF9C21286}"/>
+              </a:ext>
+            </a:extLst>
+          </p:cNvPr>
+          <p:cNvSpPr>
+            <a:spLocks noGrp="1"/>
+          </p:cNvSpPr>
+          <p:nvPr>
+            <p:ph type="title"/>
+          </p:nvPr>
+        </p:nvSpPr>
+        <p:spPr>
+          <a:xfrm>
+            <a:off x="483798" y="1463040"/>
+            <a:ext cx="2847230" cy="2690949"/>
+          </a:xfrm>
+        </p:spPr>
+        <p:txBody>
+          <a:bodyPr anchor="t">
+            <a:normAutofit/>
+          </a:bodyPr>
+          <a:lstStyle/>
+          <a:p>
+            <a:r>
+              <a:rPr lang="de-CH" sz="4200"/>
+              <a:t>Vision</a:t>
+            </a:r>
+          </a:p>
+        </p:txBody>
+      </p:sp>
+      <p:grpSp>
+        <p:nvGrpSpPr>
+          <p:cNvPr id="2070" name="Group 2069">
+            <a:extLst>
+              <a:ext uri="{FF2B5EF4-FFF2-40B4-BE49-F238E27FC236}">
+                <a16:creationId xmlns:a16="http://schemas.microsoft.com/office/drawing/2014/main" id="{B14B560F-9DD7-4302-A60B-EBD3EF59B073}"/>
+              </a:ext>
+              <a:ext uri="{C183D7F6-B498-43B3-948B-1728B52AA6E4}">
+                <adec:decorative xmlns:adec="http://schemas.microsoft.com/office/drawing/2017/decorative" val="1"/>
+              </a:ext>
+            </a:extLst>
+          </p:cNvPr>
+          <p:cNvGrpSpPr>
+            <a:grpSpLocks noGrp="1" noUngrp="1" noRot="1" noChangeAspect="1" noMove="1" noResize="1"/>
+          </p:cNvGrpSpPr>
+          <p:nvPr>
+            <p:extLst>
+              <p:ext uri="{386F3935-93C4-4BCD-93E2-E3B085C9AB24}">
+                <p16:designElem xmlns:p16="http://schemas.microsoft.com/office/powerpoint/2015/main" val="1"/>
+              </p:ext>
+            </p:extLst>
+          </p:nvPr>
+        </p:nvGrpSpPr>
+        <p:grpSpPr>
+          <a:xfrm>
+            <a:off x="157250" y="4415246"/>
+            <a:ext cx="8986749" cy="2087795"/>
+            <a:chOff x="143163" y="5763486"/>
+            <a:chExt cx="11982332" cy="739555"/>
+          </a:xfrm>
+        </p:grpSpPr>
+        <p:sp>
+          <p:nvSpPr>
+            <p:cNvPr id="2071" name="Rectangle 2070">
+              <a:extLst>
+                <a:ext uri="{FF2B5EF4-FFF2-40B4-BE49-F238E27FC236}">
+                  <a16:creationId xmlns:a16="http://schemas.microsoft.com/office/drawing/2014/main" id="{3A9A4357-BD1D-4622-A4FE-766E6AB8DE84}"/>
+                </a:ext>
+                <a:ext uri="{C183D7F6-B498-43B3-948B-1728B52AA6E4}">
+                  <adec:decorative xmlns:adec="http://schemas.microsoft.com/office/drawing/2017/decorative" val="1"/>
+                </a:ext>
+              </a:extLst>
+            </p:cNvPr>
+            <p:cNvSpPr/>
+            <p:nvPr>
+              <p:extLst>
+                <p:ext uri="{386F3935-93C4-4BCD-93E2-E3B085C9AB24}">
+                  <p16:designElem xmlns:p16="http://schemas.microsoft.com/office/powerpoint/2015/main" val="1"/>
+                </p:ext>
+              </p:extLst>
+            </p:nvPr>
+          </p:nvSpPr>
+          <p:spPr>
+            <a:xfrm flipH="1" flipV="1">
+              <a:off x="357444" y="5763486"/>
+              <a:ext cx="11768051" cy="739555"/>
+            </a:xfrm>
+            <a:prstGeom prst="rect">
+              <a:avLst/>
+            </a:prstGeom>
+            <a:solidFill>
+              <a:schemeClr val="accent4"/>
+            </a:solidFill>
+            <a:ln>
+              <a:noFill/>
+            </a:ln>
+          </p:spPr>
+          <p:style>
+            <a:lnRef idx="2">
+              <a:schemeClr val="accent1">
+                <a:shade val="50000"/>
+              </a:schemeClr>
+            </a:lnRef>
+            <a:fillRef idx="1">
+              <a:schemeClr val="accent1"/>
+            </a:fillRef>
+            <a:effectRef idx="0">
+              <a:schemeClr val="accent1"/>
+            </a:effectRef>
+            <a:fontRef idx="minor">
+              <a:schemeClr val="lt1"/>
+            </a:fontRef>
+          </p:style>
+          <p:txBody>
+            <a:bodyPr rtlCol="0" anchor="ctr"/>
+            <a:lstStyle/>
+            <a:p>
+              <a:pPr algn="ctr"/>
+              <a:endParaRPr lang="en-US"/>
+            </a:p>
+          </p:txBody>
+        </p:sp>
+        <p:cxnSp>
+          <p:nvCxnSpPr>
+            <p:cNvPr id="2072" name="Straight Connector 2071">
+              <a:extLst>
+                <a:ext uri="{FF2B5EF4-FFF2-40B4-BE49-F238E27FC236}">
+                  <a16:creationId xmlns:a16="http://schemas.microsoft.com/office/drawing/2014/main" id="{C21D6966-343E-49AC-A026-D2497E0C3CA1}"/>
+                </a:ext>
+                <a:ext uri="{C183D7F6-B498-43B3-948B-1728B52AA6E4}">
+                  <adec:decorative xmlns:adec="http://schemas.microsoft.com/office/drawing/2017/decorative" val="1"/>
+                </a:ext>
+              </a:extLst>
+            </p:cNvPr>
+            <p:cNvCxnSpPr>
+              <a:cxnSpLocks/>
+            </p:cNvCxnSpPr>
+            <p:nvPr>
+              <p:extLst>
+                <p:ext uri="{386F3935-93C4-4BCD-93E2-E3B085C9AB24}">
+                  <p16:designElem xmlns:p16="http://schemas.microsoft.com/office/powerpoint/2015/main" val="1"/>
+                </p:ext>
+              </p:extLst>
+            </p:nvPr>
+          </p:nvCxnSpPr>
+          <p:spPr>
+            <a:xfrm flipH="1">
+              <a:off x="143163" y="5763486"/>
+              <a:ext cx="1" cy="739555"/>
+            </a:xfrm>
+            <a:prstGeom prst="line">
+              <a:avLst/>
+            </a:prstGeom>
+            <a:ln w="177800">
+              <a:solidFill>
+                <a:schemeClr val="accent4"/>
+              </a:solidFill>
+            </a:ln>
+          </p:spPr>
+          <p:style>
+            <a:lnRef idx="1">
+              <a:schemeClr val="accent1"/>
+            </a:lnRef>
+            <a:fillRef idx="0">
+              <a:schemeClr val="accent1"/>
+            </a:fillRef>
+            <a:effectRef idx="0">
+              <a:schemeClr val="accent1"/>
+            </a:effectRef>
+            <a:fontRef idx="minor">
+              <a:schemeClr val="tx1"/>
+            </a:fontRef>
+          </p:style>
+        </p:cxnSp>
+      </p:grpSp>
+      <p:sp>
+        <p:nvSpPr>
+          <p:cNvPr id="2074" name="Rectangle 2073">
+            <a:extLst>
+              <a:ext uri="{FF2B5EF4-FFF2-40B4-BE49-F238E27FC236}">
+                <a16:creationId xmlns:a16="http://schemas.microsoft.com/office/drawing/2014/main" id="{2C1BBA94-3F40-40AA-8BB9-E69E25E537C1}"/>
+              </a:ext>
+              <a:ext uri="{C183D7F6-B498-43B3-948B-1728B52AA6E4}">
+                <adec:decorative xmlns:adec="http://schemas.microsoft.com/office/drawing/2017/decorative" val="1"/>
+              </a:ext>
+            </a:extLst>
+          </p:cNvPr>
+          <p:cNvSpPr>
+            <a:spLocks noGrp="1" noRot="1" noChangeAspect="1" noMove="1" noResize="1" noEditPoints="1" noAdjustHandles="1" noChangeArrowheads="1" noChangeShapeType="1" noTextEdit="1"/>
+          </p:cNvSpPr>
+          <p:nvPr>
+            <p:extLst>
+              <p:ext uri="{386F3935-93C4-4BCD-93E2-E3B085C9AB24}">
+                <p16:designElem xmlns:p16="http://schemas.microsoft.com/office/powerpoint/2015/main" val="1"/>
+              </p:ext>
+            </p:extLst>
+          </p:nvPr>
+        </p:nvSpPr>
+        <p:spPr>
+          <a:xfrm>
+            <a:off x="3850279" y="587829"/>
+            <a:ext cx="4878975" cy="5682342"/>
+          </a:xfrm>
+          <a:prstGeom prst="rect">
+            <a:avLst/>
+          </a:prstGeom>
+          <a:solidFill>
+            <a:schemeClr val="bg1"/>
+          </a:solidFill>
+          <a:ln>
+            <a:noFill/>
+          </a:ln>
+          <a:effectLst>
+            <a:outerShdw blurRad="139700" dist="127000" dir="5400000" algn="t" rotWithShape="0">
+              <a:prstClr val="black">
+                <a:alpha val="15000"/>
+              </a:prstClr>
+            </a:outerShdw>
+          </a:effectLst>
+        </p:spPr>
+        <p:style>
+          <a:lnRef idx="2">
+            <a:schemeClr val="accent1">
+              <a:shade val="50000"/>
+            </a:schemeClr>
+          </a:lnRef>
+          <a:fillRef idx="1">
+            <a:schemeClr val="accent1"/>
+          </a:fillRef>
+          <a:effectRef idx="0">
+            <a:schemeClr val="accent1"/>
+          </a:effectRef>
+          <a:fontRef idx="minor">
+            <a:schemeClr val="lt1"/>
+          </a:fontRef>
+        </p:style>
+        <p:txBody>
+          <a:bodyPr rtlCol="0" anchor="ctr"/>
+          <a:lstStyle/>
+          <a:p>
+            <a:pPr algn="ctr"/>
+            <a:endParaRPr lang="en-US"/>
+          </a:p>
+        </p:txBody>
+      </p:sp>
+      <p:sp>
+        <p:nvSpPr>
+          <p:cNvPr id="4" name="Inhaltsplatzhalter 3">
+            <a:extLst>
+              <a:ext uri="{FF2B5EF4-FFF2-40B4-BE49-F238E27FC236}">
+                <a16:creationId xmlns:a16="http://schemas.microsoft.com/office/drawing/2014/main" id="{3EDAB6A7-60DE-D475-B6EF-B1A6D39349F1}"/>
+              </a:ext>
+            </a:extLst>
+          </p:cNvPr>
+          <p:cNvSpPr>
+            <a:spLocks noGrp="1"/>
+          </p:cNvSpPr>
+          <p:nvPr>
+            <p:ph idx="1"/>
+          </p:nvPr>
+        </p:nvSpPr>
+        <p:spPr>
+          <a:xfrm>
+            <a:off x="4242163" y="1463039"/>
+            <a:ext cx="4245132" cy="4300447"/>
+          </a:xfrm>
+        </p:spPr>
+        <p:txBody>
+          <a:bodyPr anchor="t">
+            <a:normAutofit/>
+          </a:bodyPr>
+          <a:lstStyle/>
+          <a:p>
+            <a:pPr marL="0" indent="0">
+              <a:buNone/>
+            </a:pPr>
+            <a:r>
+              <a:rPr lang="de-CH" sz="1900" b="1" dirty="0"/>
+              <a:t>Kernidee</a:t>
+            </a:r>
+          </a:p>
+          <a:p>
+            <a:pPr>
+              <a:buFont typeface="Wingdings" panose="05000000000000000000" pitchFamily="2" charset="2"/>
+              <a:buChar char="Ø"/>
+            </a:pPr>
+            <a:r>
+              <a:rPr lang="de-CH" sz="1900" dirty="0"/>
+              <a:t>Grosse Systeme bei Google wurden immer komplexer, </a:t>
+            </a:r>
+            <a:r>
+              <a:rPr lang="de-CH" sz="1900" dirty="0" err="1"/>
+              <a:t>Builds</a:t>
+            </a:r>
+            <a:r>
+              <a:rPr lang="de-CH" sz="1900" dirty="0"/>
+              <a:t> dauerten lange und viele Sprachen waren zu kompliziert oder zu ineffizient </a:t>
+            </a:r>
+            <a:r>
+              <a:rPr lang="de-CH" sz="1900" dirty="0">
+                <a:sym typeface="Wingdings" panose="05000000000000000000" pitchFamily="2" charset="2"/>
+              </a:rPr>
+              <a:t> </a:t>
+            </a:r>
+            <a:r>
+              <a:rPr lang="de-CH" sz="1900" b="1" dirty="0">
+                <a:sym typeface="Wingdings" panose="05000000000000000000" pitchFamily="2" charset="2"/>
+              </a:rPr>
+              <a:t>Go sollte die Mitte treffen</a:t>
+            </a:r>
+            <a:endParaRPr lang="de-CH" sz="1900" dirty="0"/>
+          </a:p>
+          <a:p>
+            <a:pPr marL="0" indent="0">
+              <a:buNone/>
+            </a:pPr>
+            <a:r>
+              <a:rPr lang="de-CH" sz="1900" b="1" dirty="0"/>
+              <a:t>Die wichtigsten Prinzipien der Go-Vision</a:t>
+            </a:r>
+          </a:p>
+          <a:p>
+            <a:pPr>
+              <a:buFont typeface="Wingdings" panose="05000000000000000000" pitchFamily="2" charset="2"/>
+              <a:buChar char="Ø"/>
+            </a:pPr>
+            <a:r>
+              <a:rPr lang="de-CH" sz="1900" dirty="0"/>
+              <a:t>Einfachheit über alles</a:t>
+            </a:r>
+          </a:p>
+          <a:p>
+            <a:pPr>
+              <a:buFont typeface="Wingdings" panose="05000000000000000000" pitchFamily="2" charset="2"/>
+              <a:buChar char="Ø"/>
+            </a:pPr>
+            <a:r>
+              <a:rPr lang="de-CH" sz="1900" dirty="0"/>
+              <a:t>Schnelligkeit</a:t>
+            </a:r>
+          </a:p>
+          <a:p>
+            <a:pPr>
+              <a:buFont typeface="Wingdings" panose="05000000000000000000" pitchFamily="2" charset="2"/>
+              <a:buChar char="Ø"/>
+            </a:pPr>
+            <a:r>
+              <a:rPr lang="de-CH" sz="1900" dirty="0"/>
+              <a:t>Eingebaute Nebenläufigkeit</a:t>
+            </a:r>
+          </a:p>
+          <a:p>
+            <a:pPr>
+              <a:buFont typeface="Wingdings" panose="05000000000000000000" pitchFamily="2" charset="2"/>
+              <a:buChar char="Ø"/>
+            </a:pPr>
+            <a:r>
+              <a:rPr lang="de-CH" sz="1900" dirty="0"/>
+              <a:t>Starke Standardbibliothek</a:t>
+            </a:r>
+          </a:p>
+        </p:txBody>
+      </p:sp>
+      <p:pic>
+        <p:nvPicPr>
+          <p:cNvPr id="2052" name="Picture 4" descr="Learning Golang in 24 hours | Kislay Verma">
+            <a:extLst>
+              <a:ext uri="{FF2B5EF4-FFF2-40B4-BE49-F238E27FC236}">
+                <a16:creationId xmlns:a16="http://schemas.microsoft.com/office/drawing/2014/main" id="{E5CF7752-C6D5-F45E-36E9-7DBD67F25235}"/>
+              </a:ext>
+            </a:extLst>
+          </p:cNvPr>
+          <p:cNvPicPr>
+            <a:picLocks noChangeAspect="1" noChangeArrowheads="1"/>
+          </p:cNvPicPr>
+          <p:nvPr/>
+        </p:nvPicPr>
+        <p:blipFill>
+          <a:blip r:embed="rId3">
+            <a:extLst>
+              <a:ext uri="{28A0092B-C50C-407E-A947-70E740481C1C}">
+                <a14:useLocalDpi xmlns:a14="http://schemas.microsoft.com/office/drawing/2010/main" val="0"/>
+              </a:ext>
+            </a:extLst>
+          </a:blip>
+          <a:srcRect/>
+          <a:stretch>
+            <a:fillRect/>
+          </a:stretch>
+        </p:blipFill>
+        <p:spPr bwMode="auto">
+          <a:xfrm>
+            <a:off x="7955280" y="0"/>
+            <a:ext cx="1116418" cy="1369399"/>
+          </a:xfrm>
+          <a:prstGeom prst="rect">
+            <a:avLst/>
+          </a:prstGeom>
+          <a:noFill/>
+          <a:extLst>
+            <a:ext uri="{909E8E84-426E-40DD-AFC4-6F175D3DCCD1}">
+              <a14:hiddenFill xmlns:a14="http://schemas.microsoft.com/office/drawing/2010/main">
+                <a:solidFill>
+                  <a:srgbClr val="FFFFFF"/>
+                </a:solidFill>
+              </a14:hiddenFill>
+            </a:ext>
+          </a:extLst>
+        </p:spPr>
+      </p:pic>
+    </p:spTree>
+    <p:extLst>
+      <p:ext uri="{BB962C8B-B14F-4D97-AF65-F5344CB8AC3E}">
+        <p14:creationId xmlns:p14="http://schemas.microsoft.com/office/powerpoint/2010/main" val="848672094"/>
       </p:ext>
     </p:extLst>
   </p:cSld>
@@ -25103,511 +24147,6 @@
         <p:cNvPr id="1" name="">
           <a:extLst>
             <a:ext uri="{FF2B5EF4-FFF2-40B4-BE49-F238E27FC236}">
-              <a16:creationId xmlns:a16="http://schemas.microsoft.com/office/drawing/2014/main" id="{BBE05C74-0309-E9FD-5BB5-9CD218AB3872}"/>
-            </a:ext>
-          </a:extLst>
-        </p:cNvPr>
-        <p:cNvGrpSpPr/>
-        <p:nvPr/>
-      </p:nvGrpSpPr>
-      <p:grpSpPr>
-        <a:xfrm>
-          <a:off x="0" y="0"/>
-          <a:ext cx="0" cy="0"/>
-          <a:chOff x="0" y="0"/>
-          <a:chExt cx="0" cy="0"/>
-        </a:xfrm>
-      </p:grpSpPr>
-      <p:sp useBgFill="1">
-        <p:nvSpPr>
-          <p:cNvPr id="2057" name="Rectangle 2056">
-            <a:extLst>
-              <a:ext uri="{FF2B5EF4-FFF2-40B4-BE49-F238E27FC236}">
-                <a16:creationId xmlns:a16="http://schemas.microsoft.com/office/drawing/2014/main" id="{25DE42EF-F1ED-C755-0515-FB15CA5D2BB7}"/>
-              </a:ext>
-              <a:ext uri="{C183D7F6-B498-43B3-948B-1728B52AA6E4}">
-                <adec:decorative xmlns:adec="http://schemas.microsoft.com/office/drawing/2017/decorative" val="1"/>
-              </a:ext>
-            </a:extLst>
-          </p:cNvPr>
-          <p:cNvSpPr>
-            <a:spLocks noGrp="1" noRot="1" noChangeAspect="1" noMove="1" noResize="1" noEditPoints="1" noAdjustHandles="1" noChangeArrowheads="1" noChangeShapeType="1" noTextEdit="1"/>
-          </p:cNvSpPr>
-          <p:nvPr>
-            <p:extLst>
-              <p:ext uri="{386F3935-93C4-4BCD-93E2-E3B085C9AB24}">
-                <p16:designElem xmlns:p16="http://schemas.microsoft.com/office/powerpoint/2015/main" val="1"/>
-              </p:ext>
-            </p:extLst>
-          </p:nvPr>
-        </p:nvSpPr>
-        <p:spPr>
-          <a:xfrm>
-            <a:off x="0" y="0"/>
-            <a:ext cx="9143999" cy="6857365"/>
-          </a:xfrm>
-          <a:prstGeom prst="rect">
-            <a:avLst/>
-          </a:prstGeom>
-          <a:ln>
-            <a:noFill/>
-          </a:ln>
-        </p:spPr>
-        <p:style>
-          <a:lnRef idx="2">
-            <a:schemeClr val="accent1">
-              <a:shade val="50000"/>
-            </a:schemeClr>
-          </a:lnRef>
-          <a:fillRef idx="1">
-            <a:schemeClr val="accent1"/>
-          </a:fillRef>
-          <a:effectRef idx="0">
-            <a:schemeClr val="accent1"/>
-          </a:effectRef>
-          <a:fontRef idx="minor">
-            <a:schemeClr val="lt1"/>
-          </a:fontRef>
-        </p:style>
-        <p:txBody>
-          <a:bodyPr rtlCol="0" anchor="ctr"/>
-          <a:lstStyle/>
-          <a:p>
-            <a:pPr algn="ctr"/>
-            <a:endParaRPr lang="en-US"/>
-          </a:p>
-        </p:txBody>
-      </p:sp>
-      <p:sp>
-        <p:nvSpPr>
-          <p:cNvPr id="2" name="Titel 1">
-            <a:extLst>
-              <a:ext uri="{FF2B5EF4-FFF2-40B4-BE49-F238E27FC236}">
-                <a16:creationId xmlns:a16="http://schemas.microsoft.com/office/drawing/2014/main" id="{845F18AE-7B36-4E5A-4271-A153AACF3521}"/>
-              </a:ext>
-            </a:extLst>
-          </p:cNvPr>
-          <p:cNvSpPr>
-            <a:spLocks noGrp="1"/>
-          </p:cNvSpPr>
-          <p:nvPr>
-            <p:ph type="title"/>
-          </p:nvPr>
-        </p:nvSpPr>
-        <p:spPr>
-          <a:xfrm>
-            <a:off x="606478" y="386930"/>
-            <a:ext cx="6927525" cy="1188950"/>
-          </a:xfrm>
-        </p:spPr>
-        <p:txBody>
-          <a:bodyPr anchor="b">
-            <a:normAutofit/>
-          </a:bodyPr>
-          <a:lstStyle/>
-          <a:p>
-            <a:r>
-              <a:rPr lang="de-CH" sz="4700" dirty="0"/>
-              <a:t>Slices Eigenschaften</a:t>
-            </a:r>
-          </a:p>
-        </p:txBody>
-      </p:sp>
-      <p:grpSp>
-        <p:nvGrpSpPr>
-          <p:cNvPr id="2059" name="Group 2058">
-            <a:extLst>
-              <a:ext uri="{FF2B5EF4-FFF2-40B4-BE49-F238E27FC236}">
-                <a16:creationId xmlns:a16="http://schemas.microsoft.com/office/drawing/2014/main" id="{97E5279D-C277-929F-BFEF-8B0BC352A60F}"/>
-              </a:ext>
-              <a:ext uri="{C183D7F6-B498-43B3-948B-1728B52AA6E4}">
-                <adec:decorative xmlns:adec="http://schemas.microsoft.com/office/drawing/2017/decorative" val="1"/>
-              </a:ext>
-            </a:extLst>
-          </p:cNvPr>
-          <p:cNvGrpSpPr>
-            <a:grpSpLocks noGrp="1" noUngrp="1" noRot="1" noChangeAspect="1" noMove="1" noResize="1"/>
-          </p:cNvGrpSpPr>
-          <p:nvPr>
-            <p:extLst>
-              <p:ext uri="{386F3935-93C4-4BCD-93E2-E3B085C9AB24}">
-                <p16:designElem xmlns:p16="http://schemas.microsoft.com/office/powerpoint/2015/main" val="1"/>
-              </p:ext>
-            </p:extLst>
-          </p:nvPr>
-        </p:nvGrpSpPr>
-        <p:grpSpPr>
-          <a:xfrm>
-            <a:off x="-1" y="1998368"/>
-            <a:ext cx="8771274" cy="782176"/>
-            <a:chOff x="-2" y="1998368"/>
-            <a:chExt cx="11695083" cy="782176"/>
-          </a:xfrm>
-        </p:grpSpPr>
-        <p:sp>
-          <p:nvSpPr>
-            <p:cNvPr id="2060" name="Rectangle 2059">
-              <a:extLst>
-                <a:ext uri="{FF2B5EF4-FFF2-40B4-BE49-F238E27FC236}">
-                  <a16:creationId xmlns:a16="http://schemas.microsoft.com/office/drawing/2014/main" id="{62E1A584-70EA-32E5-D99F-934E31B384C1}"/>
-                </a:ext>
-                <a:ext uri="{C183D7F6-B498-43B3-948B-1728B52AA6E4}">
-                  <adec:decorative xmlns:adec="http://schemas.microsoft.com/office/drawing/2017/decorative" val="1"/>
-                </a:ext>
-              </a:extLst>
-            </p:cNvPr>
-            <p:cNvSpPr/>
-            <p:nvPr>
-              <p:extLst>
-                <p:ext uri="{386F3935-93C4-4BCD-93E2-E3B085C9AB24}">
-                  <p16:designElem xmlns:p16="http://schemas.microsoft.com/office/powerpoint/2015/main" val="1"/>
-                </p:ext>
-              </p:extLst>
-            </p:nvPr>
-          </p:nvSpPr>
-          <p:spPr>
-            <a:xfrm rot="5400000">
-              <a:off x="11228040" y="2313027"/>
-              <a:ext cx="781700" cy="152382"/>
-            </a:xfrm>
-            <a:prstGeom prst="rect">
-              <a:avLst/>
-            </a:prstGeom>
-            <a:solidFill>
-              <a:schemeClr val="accent4"/>
-            </a:solidFill>
-            <a:ln>
-              <a:noFill/>
-            </a:ln>
-          </p:spPr>
-          <p:style>
-            <a:lnRef idx="2">
-              <a:schemeClr val="accent1">
-                <a:shade val="50000"/>
-              </a:schemeClr>
-            </a:lnRef>
-            <a:fillRef idx="1">
-              <a:schemeClr val="accent1"/>
-            </a:fillRef>
-            <a:effectRef idx="0">
-              <a:schemeClr val="accent1"/>
-            </a:effectRef>
-            <a:fontRef idx="minor">
-              <a:schemeClr val="lt1"/>
-            </a:fontRef>
-          </p:style>
-          <p:txBody>
-            <a:bodyPr rtlCol="0" anchor="ctr"/>
-            <a:lstStyle/>
-            <a:p>
-              <a:pPr algn="ctr"/>
-              <a:endParaRPr lang="en-US"/>
-            </a:p>
-          </p:txBody>
-        </p:sp>
-        <p:sp>
-          <p:nvSpPr>
-            <p:cNvPr id="2061" name="Rectangle 2060">
-              <a:extLst>
-                <a:ext uri="{FF2B5EF4-FFF2-40B4-BE49-F238E27FC236}">
-                  <a16:creationId xmlns:a16="http://schemas.microsoft.com/office/drawing/2014/main" id="{56FE89CA-9208-A58D-2B17-675FB124E58C}"/>
-                </a:ext>
-                <a:ext uri="{C183D7F6-B498-43B3-948B-1728B52AA6E4}">
-                  <adec:decorative xmlns:adec="http://schemas.microsoft.com/office/drawing/2017/decorative" val="1"/>
-                </a:ext>
-              </a:extLst>
-            </p:cNvPr>
-            <p:cNvSpPr/>
-            <p:nvPr>
-              <p:extLst>
-                <p:ext uri="{386F3935-93C4-4BCD-93E2-E3B085C9AB24}">
-                  <p16:designElem xmlns:p16="http://schemas.microsoft.com/office/powerpoint/2015/main" val="1"/>
-                </p:ext>
-              </p:extLst>
-            </p:nvPr>
-          </p:nvSpPr>
-          <p:spPr>
-            <a:xfrm flipH="1" flipV="1">
-              <a:off x="-2" y="1998845"/>
-              <a:ext cx="11454595" cy="781699"/>
-            </a:xfrm>
-            <a:prstGeom prst="rect">
-              <a:avLst/>
-            </a:prstGeom>
-            <a:solidFill>
-              <a:schemeClr val="accent4"/>
-            </a:solidFill>
-            <a:ln>
-              <a:noFill/>
-            </a:ln>
-          </p:spPr>
-          <p:style>
-            <a:lnRef idx="2">
-              <a:schemeClr val="accent1">
-                <a:shade val="50000"/>
-              </a:schemeClr>
-            </a:lnRef>
-            <a:fillRef idx="1">
-              <a:schemeClr val="accent1"/>
-            </a:fillRef>
-            <a:effectRef idx="0">
-              <a:schemeClr val="accent1"/>
-            </a:effectRef>
-            <a:fontRef idx="minor">
-              <a:schemeClr val="lt1"/>
-            </a:fontRef>
-          </p:style>
-          <p:txBody>
-            <a:bodyPr rtlCol="0" anchor="ctr"/>
-            <a:lstStyle/>
-            <a:p>
-              <a:pPr algn="ctr"/>
-              <a:endParaRPr lang="en-US"/>
-            </a:p>
-          </p:txBody>
-        </p:sp>
-      </p:grpSp>
-      <p:sp>
-        <p:nvSpPr>
-          <p:cNvPr id="2063" name="Rectangle 2062">
-            <a:extLst>
-              <a:ext uri="{FF2B5EF4-FFF2-40B4-BE49-F238E27FC236}">
-                <a16:creationId xmlns:a16="http://schemas.microsoft.com/office/drawing/2014/main" id="{DCF0B119-896F-D73B-ED68-68D9713B9F76}"/>
-              </a:ext>
-              <a:ext uri="{C183D7F6-B498-43B3-948B-1728B52AA6E4}">
-                <adec:decorative xmlns:adec="http://schemas.microsoft.com/office/drawing/2017/decorative" val="1"/>
-              </a:ext>
-            </a:extLst>
-          </p:cNvPr>
-          <p:cNvSpPr>
-            <a:spLocks noGrp="1" noRot="1" noChangeAspect="1" noMove="1" noResize="1" noEditPoints="1" noAdjustHandles="1" noChangeArrowheads="1" noChangeShapeType="1" noTextEdit="1"/>
-          </p:cNvSpPr>
-          <p:nvPr>
-            <p:extLst>
-              <p:ext uri="{386F3935-93C4-4BCD-93E2-E3B085C9AB24}">
-                <p16:designElem xmlns:p16="http://schemas.microsoft.com/office/powerpoint/2015/main" val="1"/>
-              </p:ext>
-            </p:extLst>
-          </p:nvPr>
-        </p:nvSpPr>
-        <p:spPr>
-          <a:xfrm>
-            <a:off x="0" y="2203079"/>
-            <a:ext cx="8537521" cy="4147845"/>
-          </a:xfrm>
-          <a:prstGeom prst="rect">
-            <a:avLst/>
-          </a:prstGeom>
-          <a:solidFill>
-            <a:schemeClr val="bg1"/>
-          </a:solidFill>
-          <a:ln>
-            <a:noFill/>
-          </a:ln>
-          <a:effectLst>
-            <a:outerShdw blurRad="139700" dist="127000" dir="5400000" algn="t" rotWithShape="0">
-              <a:prstClr val="black">
-                <a:alpha val="15000"/>
-              </a:prstClr>
-            </a:outerShdw>
-          </a:effectLst>
-        </p:spPr>
-        <p:style>
-          <a:lnRef idx="2">
-            <a:schemeClr val="accent1">
-              <a:shade val="50000"/>
-            </a:schemeClr>
-          </a:lnRef>
-          <a:fillRef idx="1">
-            <a:schemeClr val="accent1"/>
-          </a:fillRef>
-          <a:effectRef idx="0">
-            <a:schemeClr val="accent1"/>
-          </a:effectRef>
-          <a:fontRef idx="minor">
-            <a:schemeClr val="lt1"/>
-          </a:fontRef>
-        </p:style>
-        <p:txBody>
-          <a:bodyPr rtlCol="0" anchor="ctr"/>
-          <a:lstStyle/>
-          <a:p>
-            <a:pPr algn="ctr"/>
-            <a:endParaRPr lang="en-US"/>
-          </a:p>
-        </p:txBody>
-      </p:sp>
-      <p:sp>
-        <p:nvSpPr>
-          <p:cNvPr id="4" name="Inhaltsplatzhalter 3">
-            <a:extLst>
-              <a:ext uri="{FF2B5EF4-FFF2-40B4-BE49-F238E27FC236}">
-                <a16:creationId xmlns:a16="http://schemas.microsoft.com/office/drawing/2014/main" id="{9519CC08-B738-BE4A-BAC9-1A02A44E0580}"/>
-              </a:ext>
-            </a:extLst>
-          </p:cNvPr>
-          <p:cNvSpPr>
-            <a:spLocks noGrp="1"/>
-          </p:cNvSpPr>
-          <p:nvPr>
-            <p:ph idx="1"/>
-          </p:nvPr>
-        </p:nvSpPr>
-        <p:spPr>
-          <a:xfrm>
-            <a:off x="595245" y="2599509"/>
-            <a:ext cx="7607751" cy="3435531"/>
-          </a:xfrm>
-        </p:spPr>
-        <p:txBody>
-          <a:bodyPr anchor="ctr">
-            <a:normAutofit/>
-          </a:bodyPr>
-          <a:lstStyle/>
-          <a:p>
-            <a:r>
-              <a:rPr lang="de-CH" sz="2100" dirty="0"/>
-              <a:t>Basieren auf Arrays, referenzieren denselben Speicherbereich, können Teilbereiche darstellen.</a:t>
-            </a:r>
-          </a:p>
-          <a:p>
-            <a:r>
-              <a:rPr lang="de-CH" sz="2100" dirty="0"/>
-              <a:t>Dynamische Grösse, können wachsen (</a:t>
-            </a:r>
-            <a:r>
-              <a:rPr lang="de-CH" sz="2100" dirty="0" err="1"/>
-              <a:t>append</a:t>
-            </a:r>
-            <a:r>
-              <a:rPr lang="de-CH" sz="2100" dirty="0"/>
-              <a:t>), haben «</a:t>
-            </a:r>
-            <a:r>
-              <a:rPr lang="de-CH" sz="2100" dirty="0" err="1"/>
-              <a:t>length</a:t>
-            </a:r>
-            <a:r>
-              <a:rPr lang="de-CH" sz="2100" dirty="0"/>
-              <a:t>» und «</a:t>
-            </a:r>
-            <a:r>
-              <a:rPr lang="de-CH" sz="2100" dirty="0" err="1"/>
-              <a:t>capacity</a:t>
-            </a:r>
-            <a:r>
-              <a:rPr lang="de-CH" sz="2100" dirty="0"/>
-              <a:t>».</a:t>
-            </a:r>
-          </a:p>
-          <a:p>
-            <a:r>
-              <a:rPr lang="de-CH" sz="2100" dirty="0"/>
-              <a:t>Standardwert </a:t>
-            </a:r>
-            <a:r>
-              <a:rPr lang="de-CH" sz="2100" dirty="0" err="1"/>
-              <a:t>nil</a:t>
-            </a:r>
-            <a:r>
-              <a:rPr lang="de-CH" sz="2100" dirty="0"/>
-              <a:t>, Zugriff über Index, unterstützen </a:t>
-            </a:r>
-            <a:r>
-              <a:rPr lang="de-CH" sz="2100" dirty="0" err="1"/>
-              <a:t>Slicing</a:t>
-            </a:r>
-            <a:r>
-              <a:rPr lang="de-CH" sz="2100" dirty="0"/>
-              <a:t> [</a:t>
-            </a:r>
-            <a:r>
-              <a:rPr lang="de-CH" sz="2100" dirty="0" err="1"/>
-              <a:t>a:b</a:t>
-            </a:r>
-            <a:r>
-              <a:rPr lang="de-CH" sz="2100" dirty="0"/>
-              <a:t>], sehr effizient für Listen.</a:t>
-            </a:r>
-          </a:p>
-        </p:txBody>
-      </p:sp>
-      <p:pic>
-        <p:nvPicPr>
-          <p:cNvPr id="1026" name="Picture 2" descr="Principles of slice type in GO | Golang for all">
-            <a:extLst>
-              <a:ext uri="{FF2B5EF4-FFF2-40B4-BE49-F238E27FC236}">
-                <a16:creationId xmlns:a16="http://schemas.microsoft.com/office/drawing/2014/main" id="{B4F2CCEA-925D-3908-AE0C-8B699D168762}"/>
-              </a:ext>
-            </a:extLst>
-          </p:cNvPr>
-          <p:cNvPicPr>
-            <a:picLocks noChangeAspect="1" noChangeArrowheads="1"/>
-          </p:cNvPicPr>
-          <p:nvPr/>
-        </p:nvPicPr>
-        <p:blipFill>
-          <a:blip r:embed="rId2">
-            <a:extLst>
-              <a:ext uri="{28A0092B-C50C-407E-A947-70E740481C1C}">
-                <a14:useLocalDpi xmlns:a14="http://schemas.microsoft.com/office/drawing/2010/main" val="0"/>
-              </a:ext>
-            </a:extLst>
-          </a:blip>
-          <a:srcRect/>
-          <a:stretch>
-            <a:fillRect/>
-          </a:stretch>
-        </p:blipFill>
-        <p:spPr bwMode="auto">
-          <a:xfrm>
-            <a:off x="7534003" y="221439"/>
-            <a:ext cx="1445390" cy="1188950"/>
-          </a:xfrm>
-          <a:prstGeom prst="rect">
-            <a:avLst/>
-          </a:prstGeom>
-          <a:noFill/>
-          <a:extLst>
-            <a:ext uri="{909E8E84-426E-40DD-AFC4-6F175D3DCCD1}">
-              <a14:hiddenFill xmlns:a14="http://schemas.microsoft.com/office/drawing/2010/main">
-                <a:solidFill>
-                  <a:srgbClr val="FFFFFF"/>
-                </a:solidFill>
-              </a14:hiddenFill>
-            </a:ext>
-          </a:extLst>
-        </p:spPr>
-      </p:pic>
-    </p:spTree>
-    <p:extLst>
-      <p:ext uri="{BB962C8B-B14F-4D97-AF65-F5344CB8AC3E}">
-        <p14:creationId xmlns:p14="http://schemas.microsoft.com/office/powerpoint/2010/main" val="4055002409"/>
-      </p:ext>
-    </p:extLst>
-  </p:cSld>
-  <p:clrMapOvr>
-    <a:masterClrMapping/>
-  </p:clrMapOvr>
-</p:sld>
-</file>
-
-<file path=ppt/slides/slide7.xml><?xml version="1.0" encoding="utf-8"?>
-<p:sld xmlns:a="http://schemas.openxmlformats.org/drawingml/2006/main" xmlns:r="http://schemas.openxmlformats.org/officeDocument/2006/relationships" xmlns:p="http://schemas.openxmlformats.org/presentationml/2006/main">
-  <p:cSld>
-    <p:bg>
-      <p:bgPr>
-        <a:solidFill>
-          <a:schemeClr val="bg1"/>
-        </a:solidFill>
-        <a:effectLst/>
-      </p:bgPr>
-    </p:bg>
-    <p:spTree>
-      <p:nvGrpSpPr>
-        <p:cNvPr id="1" name="">
-          <a:extLst>
-            <a:ext uri="{FF2B5EF4-FFF2-40B4-BE49-F238E27FC236}">
               <a16:creationId xmlns:a16="http://schemas.microsoft.com/office/drawing/2014/main" id="{5D3B384C-9801-C0A4-02CB-5E14482724AE}"/>
             </a:ext>
           </a:extLst>
@@ -26097,543 +24636,7 @@
 </p:sld>
 </file>
 
-<file path=ppt/slides/slide8.xml><?xml version="1.0" encoding="utf-8"?>
-<p:sld xmlns:a="http://schemas.openxmlformats.org/drawingml/2006/main" xmlns:r="http://schemas.openxmlformats.org/officeDocument/2006/relationships" xmlns:p="http://schemas.openxmlformats.org/presentationml/2006/main" show="0">
-  <p:cSld>
-    <p:bg>
-      <p:bgPr>
-        <a:solidFill>
-          <a:schemeClr val="bg1"/>
-        </a:solidFill>
-        <a:effectLst/>
-      </p:bgPr>
-    </p:bg>
-    <p:spTree>
-      <p:nvGrpSpPr>
-        <p:cNvPr id="1" name="">
-          <a:extLst>
-            <a:ext uri="{FF2B5EF4-FFF2-40B4-BE49-F238E27FC236}">
-              <a16:creationId xmlns:a16="http://schemas.microsoft.com/office/drawing/2014/main" id="{78C51EE0-DE3C-09D3-4399-272B11D2C136}"/>
-            </a:ext>
-          </a:extLst>
-        </p:cNvPr>
-        <p:cNvGrpSpPr/>
-        <p:nvPr/>
-      </p:nvGrpSpPr>
-      <p:grpSpPr>
-        <a:xfrm>
-          <a:off x="0" y="0"/>
-          <a:ext cx="0" cy="0"/>
-          <a:chOff x="0" y="0"/>
-          <a:chExt cx="0" cy="0"/>
-        </a:xfrm>
-      </p:grpSpPr>
-      <p:sp useBgFill="1">
-        <p:nvSpPr>
-          <p:cNvPr id="2057" name="Rectangle 2056">
-            <a:extLst>
-              <a:ext uri="{FF2B5EF4-FFF2-40B4-BE49-F238E27FC236}">
-                <a16:creationId xmlns:a16="http://schemas.microsoft.com/office/drawing/2014/main" id="{31FEB667-0DDC-70B8-BE24-954F7ACAE624}"/>
-              </a:ext>
-              <a:ext uri="{C183D7F6-B498-43B3-948B-1728B52AA6E4}">
-                <adec:decorative xmlns:adec="http://schemas.microsoft.com/office/drawing/2017/decorative" val="1"/>
-              </a:ext>
-            </a:extLst>
-          </p:cNvPr>
-          <p:cNvSpPr>
-            <a:spLocks noGrp="1" noRot="1" noChangeAspect="1" noMove="1" noResize="1" noEditPoints="1" noAdjustHandles="1" noChangeArrowheads="1" noChangeShapeType="1" noTextEdit="1"/>
-          </p:cNvSpPr>
-          <p:nvPr>
-            <p:extLst>
-              <p:ext uri="{386F3935-93C4-4BCD-93E2-E3B085C9AB24}">
-                <p16:designElem xmlns:p16="http://schemas.microsoft.com/office/powerpoint/2015/main" val="1"/>
-              </p:ext>
-            </p:extLst>
-          </p:nvPr>
-        </p:nvSpPr>
-        <p:spPr>
-          <a:xfrm>
-            <a:off x="0" y="0"/>
-            <a:ext cx="9143999" cy="6857365"/>
-          </a:xfrm>
-          <a:prstGeom prst="rect">
-            <a:avLst/>
-          </a:prstGeom>
-          <a:ln>
-            <a:noFill/>
-          </a:ln>
-        </p:spPr>
-        <p:style>
-          <a:lnRef idx="2">
-            <a:schemeClr val="accent1">
-              <a:shade val="50000"/>
-            </a:schemeClr>
-          </a:lnRef>
-          <a:fillRef idx="1">
-            <a:schemeClr val="accent1"/>
-          </a:fillRef>
-          <a:effectRef idx="0">
-            <a:schemeClr val="accent1"/>
-          </a:effectRef>
-          <a:fontRef idx="minor">
-            <a:schemeClr val="lt1"/>
-          </a:fontRef>
-        </p:style>
-        <p:txBody>
-          <a:bodyPr rtlCol="0" anchor="ctr"/>
-          <a:lstStyle/>
-          <a:p>
-            <a:pPr algn="ctr"/>
-            <a:endParaRPr lang="en-US"/>
-          </a:p>
-        </p:txBody>
-      </p:sp>
-      <p:sp>
-        <p:nvSpPr>
-          <p:cNvPr id="2" name="Titel 1">
-            <a:extLst>
-              <a:ext uri="{FF2B5EF4-FFF2-40B4-BE49-F238E27FC236}">
-                <a16:creationId xmlns:a16="http://schemas.microsoft.com/office/drawing/2014/main" id="{EDE91F9F-ECF5-9218-4269-2298FF224051}"/>
-              </a:ext>
-            </a:extLst>
-          </p:cNvPr>
-          <p:cNvSpPr>
-            <a:spLocks noGrp="1"/>
-          </p:cNvSpPr>
-          <p:nvPr>
-            <p:ph type="title"/>
-          </p:nvPr>
-        </p:nvSpPr>
-        <p:spPr>
-          <a:xfrm>
-            <a:off x="606478" y="386930"/>
-            <a:ext cx="6927525" cy="1188950"/>
-          </a:xfrm>
-        </p:spPr>
-        <p:txBody>
-          <a:bodyPr anchor="b">
-            <a:normAutofit/>
-          </a:bodyPr>
-          <a:lstStyle/>
-          <a:p>
-            <a:r>
-              <a:rPr lang="de-CH" sz="4700" dirty="0"/>
-              <a:t>Slices Eigenschaften</a:t>
-            </a:r>
-          </a:p>
-        </p:txBody>
-      </p:sp>
-      <p:grpSp>
-        <p:nvGrpSpPr>
-          <p:cNvPr id="2059" name="Group 2058">
-            <a:extLst>
-              <a:ext uri="{FF2B5EF4-FFF2-40B4-BE49-F238E27FC236}">
-                <a16:creationId xmlns:a16="http://schemas.microsoft.com/office/drawing/2014/main" id="{A6B2CAB1-A2B5-EAD0-44E6-C61B3D7D6F08}"/>
-              </a:ext>
-              <a:ext uri="{C183D7F6-B498-43B3-948B-1728B52AA6E4}">
-                <adec:decorative xmlns:adec="http://schemas.microsoft.com/office/drawing/2017/decorative" val="1"/>
-              </a:ext>
-            </a:extLst>
-          </p:cNvPr>
-          <p:cNvGrpSpPr>
-            <a:grpSpLocks noGrp="1" noUngrp="1" noRot="1" noChangeAspect="1" noMove="1" noResize="1"/>
-          </p:cNvGrpSpPr>
-          <p:nvPr>
-            <p:extLst>
-              <p:ext uri="{386F3935-93C4-4BCD-93E2-E3B085C9AB24}">
-                <p16:designElem xmlns:p16="http://schemas.microsoft.com/office/powerpoint/2015/main" val="1"/>
-              </p:ext>
-            </p:extLst>
-          </p:nvPr>
-        </p:nvGrpSpPr>
-        <p:grpSpPr>
-          <a:xfrm>
-            <a:off x="-1" y="1998368"/>
-            <a:ext cx="8771274" cy="782176"/>
-            <a:chOff x="-2" y="1998368"/>
-            <a:chExt cx="11695083" cy="782176"/>
-          </a:xfrm>
-        </p:grpSpPr>
-        <p:sp>
-          <p:nvSpPr>
-            <p:cNvPr id="2060" name="Rectangle 2059">
-              <a:extLst>
-                <a:ext uri="{FF2B5EF4-FFF2-40B4-BE49-F238E27FC236}">
-                  <a16:creationId xmlns:a16="http://schemas.microsoft.com/office/drawing/2014/main" id="{BAAFEA31-D42E-FDC6-783C-FADC6C16E1D4}"/>
-                </a:ext>
-                <a:ext uri="{C183D7F6-B498-43B3-948B-1728B52AA6E4}">
-                  <adec:decorative xmlns:adec="http://schemas.microsoft.com/office/drawing/2017/decorative" val="1"/>
-                </a:ext>
-              </a:extLst>
-            </p:cNvPr>
-            <p:cNvSpPr/>
-            <p:nvPr>
-              <p:extLst>
-                <p:ext uri="{386F3935-93C4-4BCD-93E2-E3B085C9AB24}">
-                  <p16:designElem xmlns:p16="http://schemas.microsoft.com/office/powerpoint/2015/main" val="1"/>
-                </p:ext>
-              </p:extLst>
-            </p:nvPr>
-          </p:nvSpPr>
-          <p:spPr>
-            <a:xfrm rot="5400000">
-              <a:off x="11228040" y="2313027"/>
-              <a:ext cx="781700" cy="152382"/>
-            </a:xfrm>
-            <a:prstGeom prst="rect">
-              <a:avLst/>
-            </a:prstGeom>
-            <a:solidFill>
-              <a:schemeClr val="accent4"/>
-            </a:solidFill>
-            <a:ln>
-              <a:noFill/>
-            </a:ln>
-          </p:spPr>
-          <p:style>
-            <a:lnRef idx="2">
-              <a:schemeClr val="accent1">
-                <a:shade val="50000"/>
-              </a:schemeClr>
-            </a:lnRef>
-            <a:fillRef idx="1">
-              <a:schemeClr val="accent1"/>
-            </a:fillRef>
-            <a:effectRef idx="0">
-              <a:schemeClr val="accent1"/>
-            </a:effectRef>
-            <a:fontRef idx="minor">
-              <a:schemeClr val="lt1"/>
-            </a:fontRef>
-          </p:style>
-          <p:txBody>
-            <a:bodyPr rtlCol="0" anchor="ctr"/>
-            <a:lstStyle/>
-            <a:p>
-              <a:pPr algn="ctr"/>
-              <a:endParaRPr lang="en-US"/>
-            </a:p>
-          </p:txBody>
-        </p:sp>
-        <p:sp>
-          <p:nvSpPr>
-            <p:cNvPr id="2061" name="Rectangle 2060">
-              <a:extLst>
-                <a:ext uri="{FF2B5EF4-FFF2-40B4-BE49-F238E27FC236}">
-                  <a16:creationId xmlns:a16="http://schemas.microsoft.com/office/drawing/2014/main" id="{C44D276E-2145-2EBF-F656-A3611304354D}"/>
-                </a:ext>
-                <a:ext uri="{C183D7F6-B498-43B3-948B-1728B52AA6E4}">
-                  <adec:decorative xmlns:adec="http://schemas.microsoft.com/office/drawing/2017/decorative" val="1"/>
-                </a:ext>
-              </a:extLst>
-            </p:cNvPr>
-            <p:cNvSpPr/>
-            <p:nvPr>
-              <p:extLst>
-                <p:ext uri="{386F3935-93C4-4BCD-93E2-E3B085C9AB24}">
-                  <p16:designElem xmlns:p16="http://schemas.microsoft.com/office/powerpoint/2015/main" val="1"/>
-                </p:ext>
-              </p:extLst>
-            </p:nvPr>
-          </p:nvSpPr>
-          <p:spPr>
-            <a:xfrm flipH="1" flipV="1">
-              <a:off x="-2" y="1998845"/>
-              <a:ext cx="11454595" cy="781699"/>
-            </a:xfrm>
-            <a:prstGeom prst="rect">
-              <a:avLst/>
-            </a:prstGeom>
-            <a:solidFill>
-              <a:schemeClr val="accent4"/>
-            </a:solidFill>
-            <a:ln>
-              <a:noFill/>
-            </a:ln>
-          </p:spPr>
-          <p:style>
-            <a:lnRef idx="2">
-              <a:schemeClr val="accent1">
-                <a:shade val="50000"/>
-              </a:schemeClr>
-            </a:lnRef>
-            <a:fillRef idx="1">
-              <a:schemeClr val="accent1"/>
-            </a:fillRef>
-            <a:effectRef idx="0">
-              <a:schemeClr val="accent1"/>
-            </a:effectRef>
-            <a:fontRef idx="minor">
-              <a:schemeClr val="lt1"/>
-            </a:fontRef>
-          </p:style>
-          <p:txBody>
-            <a:bodyPr rtlCol="0" anchor="ctr"/>
-            <a:lstStyle/>
-            <a:p>
-              <a:pPr algn="ctr"/>
-              <a:endParaRPr lang="en-US"/>
-            </a:p>
-          </p:txBody>
-        </p:sp>
-      </p:grpSp>
-      <p:sp>
-        <p:nvSpPr>
-          <p:cNvPr id="2063" name="Rectangle 2062">
-            <a:extLst>
-              <a:ext uri="{FF2B5EF4-FFF2-40B4-BE49-F238E27FC236}">
-                <a16:creationId xmlns:a16="http://schemas.microsoft.com/office/drawing/2014/main" id="{F311CBA3-E2C9-6F58-DF7E-5507EDCD84DB}"/>
-              </a:ext>
-              <a:ext uri="{C183D7F6-B498-43B3-948B-1728B52AA6E4}">
-                <adec:decorative xmlns:adec="http://schemas.microsoft.com/office/drawing/2017/decorative" val="1"/>
-              </a:ext>
-            </a:extLst>
-          </p:cNvPr>
-          <p:cNvSpPr>
-            <a:spLocks noGrp="1" noRot="1" noChangeAspect="1" noMove="1" noResize="1" noEditPoints="1" noAdjustHandles="1" noChangeArrowheads="1" noChangeShapeType="1" noTextEdit="1"/>
-          </p:cNvSpPr>
-          <p:nvPr>
-            <p:extLst>
-              <p:ext uri="{386F3935-93C4-4BCD-93E2-E3B085C9AB24}">
-                <p16:designElem xmlns:p16="http://schemas.microsoft.com/office/powerpoint/2015/main" val="1"/>
-              </p:ext>
-            </p:extLst>
-          </p:nvPr>
-        </p:nvSpPr>
-        <p:spPr>
-          <a:xfrm>
-            <a:off x="0" y="2203079"/>
-            <a:ext cx="8537521" cy="4147845"/>
-          </a:xfrm>
-          <a:prstGeom prst="rect">
-            <a:avLst/>
-          </a:prstGeom>
-          <a:solidFill>
-            <a:schemeClr val="bg1"/>
-          </a:solidFill>
-          <a:ln>
-            <a:noFill/>
-          </a:ln>
-          <a:effectLst>
-            <a:outerShdw blurRad="139700" dist="127000" dir="5400000" algn="t" rotWithShape="0">
-              <a:prstClr val="black">
-                <a:alpha val="15000"/>
-              </a:prstClr>
-            </a:outerShdw>
-          </a:effectLst>
-        </p:spPr>
-        <p:style>
-          <a:lnRef idx="2">
-            <a:schemeClr val="accent1">
-              <a:shade val="50000"/>
-            </a:schemeClr>
-          </a:lnRef>
-          <a:fillRef idx="1">
-            <a:schemeClr val="accent1"/>
-          </a:fillRef>
-          <a:effectRef idx="0">
-            <a:schemeClr val="accent1"/>
-          </a:effectRef>
-          <a:fontRef idx="minor">
-            <a:schemeClr val="lt1"/>
-          </a:fontRef>
-        </p:style>
-        <p:txBody>
-          <a:bodyPr rtlCol="0" anchor="ctr"/>
-          <a:lstStyle/>
-          <a:p>
-            <a:pPr algn="ctr"/>
-            <a:endParaRPr lang="en-US"/>
-          </a:p>
-        </p:txBody>
-      </p:sp>
-      <p:sp>
-        <p:nvSpPr>
-          <p:cNvPr id="4" name="Inhaltsplatzhalter 3">
-            <a:extLst>
-              <a:ext uri="{FF2B5EF4-FFF2-40B4-BE49-F238E27FC236}">
-                <a16:creationId xmlns:a16="http://schemas.microsoft.com/office/drawing/2014/main" id="{805D1BB3-1F49-9819-9A1B-9D2CF438CFC6}"/>
-              </a:ext>
-            </a:extLst>
-          </p:cNvPr>
-          <p:cNvSpPr>
-            <a:spLocks noGrp="1"/>
-          </p:cNvSpPr>
-          <p:nvPr>
-            <p:ph idx="1"/>
-          </p:nvPr>
-        </p:nvSpPr>
-        <p:spPr>
-          <a:xfrm>
-            <a:off x="595245" y="2599509"/>
-            <a:ext cx="7607751" cy="3435531"/>
-          </a:xfrm>
-        </p:spPr>
-        <p:txBody>
-          <a:bodyPr anchor="ctr">
-            <a:normAutofit fontScale="92500" lnSpcReduction="10000"/>
-          </a:bodyPr>
-          <a:lstStyle/>
-          <a:p>
-            <a:r>
-              <a:rPr lang="de-CH" sz="2100" dirty="0"/>
-              <a:t>Dynamische Grösse</a:t>
-            </a:r>
-          </a:p>
-          <a:p>
-            <a:r>
-              <a:rPr lang="de-CH" sz="2100" dirty="0"/>
-              <a:t>Basieren auf Arrays</a:t>
-            </a:r>
-          </a:p>
-          <a:p>
-            <a:r>
-              <a:rPr lang="de-CH" sz="2100" dirty="0"/>
-              <a:t>Können wachsen</a:t>
-            </a:r>
-          </a:p>
-          <a:p>
-            <a:r>
-              <a:rPr lang="de-CH" sz="2100" dirty="0"/>
-              <a:t>Referenzieren denselben Speicherbereich</a:t>
-            </a:r>
-          </a:p>
-          <a:p>
-            <a:r>
-              <a:rPr lang="de-CH" sz="2100" dirty="0"/>
-              <a:t>Haben «</a:t>
-            </a:r>
-            <a:r>
-              <a:rPr lang="de-CH" sz="2100" dirty="0" err="1"/>
-              <a:t>length</a:t>
-            </a:r>
-            <a:r>
-              <a:rPr lang="de-CH" sz="2100" dirty="0"/>
-              <a:t>» und «</a:t>
-            </a:r>
-            <a:r>
-              <a:rPr lang="de-CH" sz="2100" dirty="0" err="1"/>
-              <a:t>capacity</a:t>
-            </a:r>
-            <a:r>
-              <a:rPr lang="de-CH" sz="2100" dirty="0"/>
-              <a:t>»</a:t>
-            </a:r>
-          </a:p>
-          <a:p>
-            <a:r>
-              <a:rPr lang="de-CH" sz="2100" dirty="0"/>
-              <a:t>Sehr effizient für Listen</a:t>
-            </a:r>
-          </a:p>
-          <a:p>
-            <a:r>
-              <a:rPr lang="de-CH" sz="2100" dirty="0"/>
-              <a:t>Können Teilbereiche eines Arrays darstellen</a:t>
-            </a:r>
-          </a:p>
-          <a:p>
-            <a:r>
-              <a:rPr lang="de-CH" sz="2100" dirty="0"/>
-              <a:t>Standardwert ist </a:t>
-            </a:r>
-            <a:r>
-              <a:rPr lang="de-CH" sz="2100" dirty="0" err="1"/>
-              <a:t>nil</a:t>
-            </a:r>
-            <a:endParaRPr lang="de-CH" sz="2100" dirty="0"/>
-          </a:p>
-          <a:p>
-            <a:r>
-              <a:rPr lang="de-CH" sz="2100" dirty="0"/>
-              <a:t>Zugriff über Index (slice[i])</a:t>
-            </a:r>
-          </a:p>
-          <a:p>
-            <a:r>
-              <a:rPr lang="de-CH" sz="2100" dirty="0"/>
-              <a:t>Unterstützen </a:t>
-            </a:r>
-            <a:r>
-              <a:rPr lang="de-CH" sz="2100" dirty="0" err="1"/>
-              <a:t>Slicing</a:t>
-            </a:r>
-            <a:r>
-              <a:rPr lang="de-CH" sz="2100" dirty="0"/>
-              <a:t> (slice[</a:t>
-            </a:r>
-            <a:r>
-              <a:rPr lang="de-CH" sz="2100" dirty="0" err="1"/>
-              <a:t>a:b</a:t>
-            </a:r>
-            <a:r>
-              <a:rPr lang="de-CH" sz="2100" dirty="0"/>
-              <a:t>])</a:t>
-            </a:r>
-          </a:p>
-        </p:txBody>
-      </p:sp>
-      <p:pic>
-        <p:nvPicPr>
-          <p:cNvPr id="2052" name="Picture 4" descr="Learning Golang in 24 hours | Kislay Verma">
-            <a:extLst>
-              <a:ext uri="{FF2B5EF4-FFF2-40B4-BE49-F238E27FC236}">
-                <a16:creationId xmlns:a16="http://schemas.microsoft.com/office/drawing/2014/main" id="{3DD8A027-9783-9022-5D59-C165F283AEF6}"/>
-              </a:ext>
-            </a:extLst>
-          </p:cNvPr>
-          <p:cNvPicPr>
-            <a:picLocks noChangeAspect="1" noChangeArrowheads="1"/>
-          </p:cNvPicPr>
-          <p:nvPr/>
-        </p:nvPicPr>
-        <p:blipFill>
-          <a:blip r:embed="rId2">
-            <a:extLst>
-              <a:ext uri="{28A0092B-C50C-407E-A947-70E740481C1C}">
-                <a14:useLocalDpi xmlns:a14="http://schemas.microsoft.com/office/drawing/2010/main" val="0"/>
-              </a:ext>
-            </a:extLst>
-          </a:blip>
-          <a:srcRect/>
-          <a:stretch>
-            <a:fillRect/>
-          </a:stretch>
-        </p:blipFill>
-        <p:spPr bwMode="auto">
-          <a:xfrm>
-            <a:off x="7955280" y="0"/>
-            <a:ext cx="1116418" cy="1369399"/>
-          </a:xfrm>
-          <a:prstGeom prst="rect">
-            <a:avLst/>
-          </a:prstGeom>
-          <a:noFill/>
-          <a:extLst>
-            <a:ext uri="{909E8E84-426E-40DD-AFC4-6F175D3DCCD1}">
-              <a14:hiddenFill xmlns:a14="http://schemas.microsoft.com/office/drawing/2010/main">
-                <a:solidFill>
-                  <a:srgbClr val="FFFFFF"/>
-                </a:solidFill>
-              </a14:hiddenFill>
-            </a:ext>
-          </a:extLst>
-        </p:spPr>
-      </p:pic>
-    </p:spTree>
-    <p:extLst>
-      <p:ext uri="{BB962C8B-B14F-4D97-AF65-F5344CB8AC3E}">
-        <p14:creationId xmlns:p14="http://schemas.microsoft.com/office/powerpoint/2010/main" val="3282272350"/>
-      </p:ext>
-    </p:extLst>
-  </p:cSld>
-  <p:clrMapOvr>
-    <a:masterClrMapping/>
-  </p:clrMapOvr>
-</p:sld>
-</file>
-
-<file path=ppt/slides/slide9.xml><?xml version="1.0" encoding="utf-8"?>
+<file path=ppt/slides/slide7.xml><?xml version="1.0" encoding="utf-8"?>
 <p:sld xmlns:a="http://schemas.openxmlformats.org/drawingml/2006/main" xmlns:r="http://schemas.openxmlformats.org/officeDocument/2006/relationships" xmlns:p="http://schemas.openxmlformats.org/presentationml/2006/main">
   <p:cSld>
     <p:bg>
@@ -27105,6 +25108,960 @@
     <p:extLst>
       <p:ext uri="{BB962C8B-B14F-4D97-AF65-F5344CB8AC3E}">
         <p14:creationId xmlns:p14="http://schemas.microsoft.com/office/powerpoint/2010/main" val="3128220194"/>
+      </p:ext>
+    </p:extLst>
+  </p:cSld>
+  <p:clrMapOvr>
+    <a:masterClrMapping/>
+  </p:clrMapOvr>
+</p:sld>
+</file>
+
+<file path=ppt/slides/slide8.xml><?xml version="1.0" encoding="utf-8"?>
+<p:sld xmlns:a="http://schemas.openxmlformats.org/drawingml/2006/main" xmlns:r="http://schemas.openxmlformats.org/officeDocument/2006/relationships" xmlns:p="http://schemas.openxmlformats.org/presentationml/2006/main">
+  <p:cSld>
+    <p:bg>
+      <p:bgPr>
+        <a:solidFill>
+          <a:schemeClr val="bg1"/>
+        </a:solidFill>
+        <a:effectLst/>
+      </p:bgPr>
+    </p:bg>
+    <p:spTree>
+      <p:nvGrpSpPr>
+        <p:cNvPr id="1" name="">
+          <a:extLst>
+            <a:ext uri="{FF2B5EF4-FFF2-40B4-BE49-F238E27FC236}">
+              <a16:creationId xmlns:a16="http://schemas.microsoft.com/office/drawing/2014/main" id="{870D3697-1D78-4CC0-4F13-58412528479B}"/>
+            </a:ext>
+          </a:extLst>
+        </p:cNvPr>
+        <p:cNvGrpSpPr/>
+        <p:nvPr/>
+      </p:nvGrpSpPr>
+      <p:grpSpPr>
+        <a:xfrm>
+          <a:off x="0" y="0"/>
+          <a:ext cx="0" cy="0"/>
+          <a:chOff x="0" y="0"/>
+          <a:chExt cx="0" cy="0"/>
+        </a:xfrm>
+      </p:grpSpPr>
+      <p:sp useBgFill="1">
+        <p:nvSpPr>
+          <p:cNvPr id="2057" name="Rectangle 2056">
+            <a:extLst>
+              <a:ext uri="{FF2B5EF4-FFF2-40B4-BE49-F238E27FC236}">
+                <a16:creationId xmlns:a16="http://schemas.microsoft.com/office/drawing/2014/main" id="{5A373F65-2C02-EFA5-13AA-9A31C2292C05}"/>
+              </a:ext>
+              <a:ext uri="{C183D7F6-B498-43B3-948B-1728B52AA6E4}">
+                <adec:decorative xmlns:adec="http://schemas.microsoft.com/office/drawing/2017/decorative" val="1"/>
+              </a:ext>
+            </a:extLst>
+          </p:cNvPr>
+          <p:cNvSpPr>
+            <a:spLocks noGrp="1" noRot="1" noChangeAspect="1" noMove="1" noResize="1" noEditPoints="1" noAdjustHandles="1" noChangeArrowheads="1" noChangeShapeType="1" noTextEdit="1"/>
+          </p:cNvSpPr>
+          <p:nvPr>
+            <p:extLst>
+              <p:ext uri="{386F3935-93C4-4BCD-93E2-E3B085C9AB24}">
+                <p16:designElem xmlns:p16="http://schemas.microsoft.com/office/powerpoint/2015/main" val="1"/>
+              </p:ext>
+            </p:extLst>
+          </p:nvPr>
+        </p:nvSpPr>
+        <p:spPr>
+          <a:xfrm>
+            <a:off x="0" y="0"/>
+            <a:ext cx="9143999" cy="6857365"/>
+          </a:xfrm>
+          <a:prstGeom prst="rect">
+            <a:avLst/>
+          </a:prstGeom>
+          <a:ln>
+            <a:noFill/>
+          </a:ln>
+        </p:spPr>
+        <p:style>
+          <a:lnRef idx="2">
+            <a:schemeClr val="accent1">
+              <a:shade val="50000"/>
+            </a:schemeClr>
+          </a:lnRef>
+          <a:fillRef idx="1">
+            <a:schemeClr val="accent1"/>
+          </a:fillRef>
+          <a:effectRef idx="0">
+            <a:schemeClr val="accent1"/>
+          </a:effectRef>
+          <a:fontRef idx="minor">
+            <a:schemeClr val="lt1"/>
+          </a:fontRef>
+        </p:style>
+        <p:txBody>
+          <a:bodyPr rtlCol="0" anchor="ctr"/>
+          <a:lstStyle/>
+          <a:p>
+            <a:pPr algn="ctr"/>
+            <a:endParaRPr lang="en-US"/>
+          </a:p>
+        </p:txBody>
+      </p:sp>
+      <p:sp>
+        <p:nvSpPr>
+          <p:cNvPr id="2" name="Titel 1">
+            <a:extLst>
+              <a:ext uri="{FF2B5EF4-FFF2-40B4-BE49-F238E27FC236}">
+                <a16:creationId xmlns:a16="http://schemas.microsoft.com/office/drawing/2014/main" id="{CD1BDE69-E2DE-724F-472B-FD80F7617AEB}"/>
+              </a:ext>
+            </a:extLst>
+          </p:cNvPr>
+          <p:cNvSpPr>
+            <a:spLocks noGrp="1"/>
+          </p:cNvSpPr>
+          <p:nvPr>
+            <p:ph type="title"/>
+          </p:nvPr>
+        </p:nvSpPr>
+        <p:spPr>
+          <a:xfrm>
+            <a:off x="606478" y="386930"/>
+            <a:ext cx="6927525" cy="1188950"/>
+          </a:xfrm>
+        </p:spPr>
+        <p:txBody>
+          <a:bodyPr anchor="b">
+            <a:normAutofit/>
+          </a:bodyPr>
+          <a:lstStyle/>
+          <a:p>
+            <a:r>
+              <a:rPr lang="de-CH" sz="4700" dirty="0"/>
+              <a:t>Maps Eigenschaften</a:t>
+            </a:r>
+          </a:p>
+        </p:txBody>
+      </p:sp>
+      <p:grpSp>
+        <p:nvGrpSpPr>
+          <p:cNvPr id="2059" name="Group 2058">
+            <a:extLst>
+              <a:ext uri="{FF2B5EF4-FFF2-40B4-BE49-F238E27FC236}">
+                <a16:creationId xmlns:a16="http://schemas.microsoft.com/office/drawing/2014/main" id="{87D5C43B-983C-CD03-D581-AFD3991ACE9A}"/>
+              </a:ext>
+              <a:ext uri="{C183D7F6-B498-43B3-948B-1728B52AA6E4}">
+                <adec:decorative xmlns:adec="http://schemas.microsoft.com/office/drawing/2017/decorative" val="1"/>
+              </a:ext>
+            </a:extLst>
+          </p:cNvPr>
+          <p:cNvGrpSpPr>
+            <a:grpSpLocks noGrp="1" noUngrp="1" noRot="1" noChangeAspect="1" noMove="1" noResize="1"/>
+          </p:cNvGrpSpPr>
+          <p:nvPr>
+            <p:extLst>
+              <p:ext uri="{386F3935-93C4-4BCD-93E2-E3B085C9AB24}">
+                <p16:designElem xmlns:p16="http://schemas.microsoft.com/office/powerpoint/2015/main" val="1"/>
+              </p:ext>
+            </p:extLst>
+          </p:nvPr>
+        </p:nvGrpSpPr>
+        <p:grpSpPr>
+          <a:xfrm>
+            <a:off x="-1" y="1998368"/>
+            <a:ext cx="8771274" cy="782176"/>
+            <a:chOff x="-2" y="1998368"/>
+            <a:chExt cx="11695083" cy="782176"/>
+          </a:xfrm>
+        </p:grpSpPr>
+        <p:sp>
+          <p:nvSpPr>
+            <p:cNvPr id="2060" name="Rectangle 2059">
+              <a:extLst>
+                <a:ext uri="{FF2B5EF4-FFF2-40B4-BE49-F238E27FC236}">
+                  <a16:creationId xmlns:a16="http://schemas.microsoft.com/office/drawing/2014/main" id="{684B53A0-F78A-B158-551A-317242B87B5F}"/>
+                </a:ext>
+                <a:ext uri="{C183D7F6-B498-43B3-948B-1728B52AA6E4}">
+                  <adec:decorative xmlns:adec="http://schemas.microsoft.com/office/drawing/2017/decorative" val="1"/>
+                </a:ext>
+              </a:extLst>
+            </p:cNvPr>
+            <p:cNvSpPr/>
+            <p:nvPr>
+              <p:extLst>
+                <p:ext uri="{386F3935-93C4-4BCD-93E2-E3B085C9AB24}">
+                  <p16:designElem xmlns:p16="http://schemas.microsoft.com/office/powerpoint/2015/main" val="1"/>
+                </p:ext>
+              </p:extLst>
+            </p:nvPr>
+          </p:nvSpPr>
+          <p:spPr>
+            <a:xfrm rot="5400000">
+              <a:off x="11228040" y="2313027"/>
+              <a:ext cx="781700" cy="152382"/>
+            </a:xfrm>
+            <a:prstGeom prst="rect">
+              <a:avLst/>
+            </a:prstGeom>
+            <a:solidFill>
+              <a:schemeClr val="accent4"/>
+            </a:solidFill>
+            <a:ln>
+              <a:noFill/>
+            </a:ln>
+          </p:spPr>
+          <p:style>
+            <a:lnRef idx="2">
+              <a:schemeClr val="accent1">
+                <a:shade val="50000"/>
+              </a:schemeClr>
+            </a:lnRef>
+            <a:fillRef idx="1">
+              <a:schemeClr val="accent1"/>
+            </a:fillRef>
+            <a:effectRef idx="0">
+              <a:schemeClr val="accent1"/>
+            </a:effectRef>
+            <a:fontRef idx="minor">
+              <a:schemeClr val="lt1"/>
+            </a:fontRef>
+          </p:style>
+          <p:txBody>
+            <a:bodyPr rtlCol="0" anchor="ctr"/>
+            <a:lstStyle/>
+            <a:p>
+              <a:pPr algn="ctr"/>
+              <a:endParaRPr lang="en-US"/>
+            </a:p>
+          </p:txBody>
+        </p:sp>
+        <p:sp>
+          <p:nvSpPr>
+            <p:cNvPr id="2061" name="Rectangle 2060">
+              <a:extLst>
+                <a:ext uri="{FF2B5EF4-FFF2-40B4-BE49-F238E27FC236}">
+                  <a16:creationId xmlns:a16="http://schemas.microsoft.com/office/drawing/2014/main" id="{2D887804-3785-DB50-0179-D457655D4576}"/>
+                </a:ext>
+                <a:ext uri="{C183D7F6-B498-43B3-948B-1728B52AA6E4}">
+                  <adec:decorative xmlns:adec="http://schemas.microsoft.com/office/drawing/2017/decorative" val="1"/>
+                </a:ext>
+              </a:extLst>
+            </p:cNvPr>
+            <p:cNvSpPr/>
+            <p:nvPr>
+              <p:extLst>
+                <p:ext uri="{386F3935-93C4-4BCD-93E2-E3B085C9AB24}">
+                  <p16:designElem xmlns:p16="http://schemas.microsoft.com/office/powerpoint/2015/main" val="1"/>
+                </p:ext>
+              </p:extLst>
+            </p:nvPr>
+          </p:nvSpPr>
+          <p:spPr>
+            <a:xfrm flipH="1" flipV="1">
+              <a:off x="-2" y="1998845"/>
+              <a:ext cx="11454595" cy="781699"/>
+            </a:xfrm>
+            <a:prstGeom prst="rect">
+              <a:avLst/>
+            </a:prstGeom>
+            <a:solidFill>
+              <a:schemeClr val="accent4"/>
+            </a:solidFill>
+            <a:ln>
+              <a:noFill/>
+            </a:ln>
+          </p:spPr>
+          <p:style>
+            <a:lnRef idx="2">
+              <a:schemeClr val="accent1">
+                <a:shade val="50000"/>
+              </a:schemeClr>
+            </a:lnRef>
+            <a:fillRef idx="1">
+              <a:schemeClr val="accent1"/>
+            </a:fillRef>
+            <a:effectRef idx="0">
+              <a:schemeClr val="accent1"/>
+            </a:effectRef>
+            <a:fontRef idx="minor">
+              <a:schemeClr val="lt1"/>
+            </a:fontRef>
+          </p:style>
+          <p:txBody>
+            <a:bodyPr rtlCol="0" anchor="ctr"/>
+            <a:lstStyle/>
+            <a:p>
+              <a:pPr algn="ctr"/>
+              <a:endParaRPr lang="en-US"/>
+            </a:p>
+          </p:txBody>
+        </p:sp>
+      </p:grpSp>
+      <p:sp>
+        <p:nvSpPr>
+          <p:cNvPr id="2063" name="Rectangle 2062">
+            <a:extLst>
+              <a:ext uri="{FF2B5EF4-FFF2-40B4-BE49-F238E27FC236}">
+                <a16:creationId xmlns:a16="http://schemas.microsoft.com/office/drawing/2014/main" id="{2A809A91-C8A4-CF93-32BC-064223DC5095}"/>
+              </a:ext>
+              <a:ext uri="{C183D7F6-B498-43B3-948B-1728B52AA6E4}">
+                <adec:decorative xmlns:adec="http://schemas.microsoft.com/office/drawing/2017/decorative" val="1"/>
+              </a:ext>
+            </a:extLst>
+          </p:cNvPr>
+          <p:cNvSpPr>
+            <a:spLocks noGrp="1" noRot="1" noChangeAspect="1" noMove="1" noResize="1" noEditPoints="1" noAdjustHandles="1" noChangeArrowheads="1" noChangeShapeType="1" noTextEdit="1"/>
+          </p:cNvSpPr>
+          <p:nvPr>
+            <p:extLst>
+              <p:ext uri="{386F3935-93C4-4BCD-93E2-E3B085C9AB24}">
+                <p16:designElem xmlns:p16="http://schemas.microsoft.com/office/powerpoint/2015/main" val="1"/>
+              </p:ext>
+            </p:extLst>
+          </p:nvPr>
+        </p:nvSpPr>
+        <p:spPr>
+          <a:xfrm>
+            <a:off x="0" y="2203079"/>
+            <a:ext cx="8537521" cy="4147845"/>
+          </a:xfrm>
+          <a:prstGeom prst="rect">
+            <a:avLst/>
+          </a:prstGeom>
+          <a:solidFill>
+            <a:schemeClr val="bg1"/>
+          </a:solidFill>
+          <a:ln>
+            <a:noFill/>
+          </a:ln>
+          <a:effectLst>
+            <a:outerShdw blurRad="139700" dist="127000" dir="5400000" algn="t" rotWithShape="0">
+              <a:prstClr val="black">
+                <a:alpha val="15000"/>
+              </a:prstClr>
+            </a:outerShdw>
+          </a:effectLst>
+        </p:spPr>
+        <p:style>
+          <a:lnRef idx="2">
+            <a:schemeClr val="accent1">
+              <a:shade val="50000"/>
+            </a:schemeClr>
+          </a:lnRef>
+          <a:fillRef idx="1">
+            <a:schemeClr val="accent1"/>
+          </a:fillRef>
+          <a:effectRef idx="0">
+            <a:schemeClr val="accent1"/>
+          </a:effectRef>
+          <a:fontRef idx="minor">
+            <a:schemeClr val="lt1"/>
+          </a:fontRef>
+        </p:style>
+        <p:txBody>
+          <a:bodyPr rtlCol="0" anchor="ctr"/>
+          <a:lstStyle/>
+          <a:p>
+            <a:pPr algn="ctr"/>
+            <a:endParaRPr lang="en-US"/>
+          </a:p>
+        </p:txBody>
+      </p:sp>
+      <p:sp>
+        <p:nvSpPr>
+          <p:cNvPr id="4" name="Inhaltsplatzhalter 3">
+            <a:extLst>
+              <a:ext uri="{FF2B5EF4-FFF2-40B4-BE49-F238E27FC236}">
+                <a16:creationId xmlns:a16="http://schemas.microsoft.com/office/drawing/2014/main" id="{21EC2F82-2079-BEE9-A04D-EC18AE7FE18B}"/>
+              </a:ext>
+            </a:extLst>
+          </p:cNvPr>
+          <p:cNvSpPr>
+            <a:spLocks noGrp="1"/>
+          </p:cNvSpPr>
+          <p:nvPr>
+            <p:ph idx="1"/>
+          </p:nvPr>
+        </p:nvSpPr>
+        <p:spPr>
+          <a:xfrm>
+            <a:off x="595245" y="2599509"/>
+            <a:ext cx="7607751" cy="3435531"/>
+          </a:xfrm>
+        </p:spPr>
+        <p:txBody>
+          <a:bodyPr anchor="ctr">
+            <a:normAutofit/>
+          </a:bodyPr>
+          <a:lstStyle/>
+          <a:p>
+            <a:r>
+              <a:rPr lang="de-CH" sz="2100" dirty="0"/>
+              <a:t>Key – Value</a:t>
+            </a:r>
+          </a:p>
+          <a:p>
+            <a:r>
+              <a:rPr lang="de-CH" sz="2100" dirty="0"/>
+              <a:t>Dynamische Grösse</a:t>
+            </a:r>
+          </a:p>
+          <a:p>
+            <a:r>
+              <a:rPr lang="de-CH" sz="2100" dirty="0"/>
+              <a:t>Reihenfolge ist nicht garantiert</a:t>
+            </a:r>
+          </a:p>
+          <a:p>
+            <a:r>
+              <a:rPr lang="de-CH" sz="2100" dirty="0"/>
+              <a:t>Standardwert ist </a:t>
+            </a:r>
+            <a:r>
+              <a:rPr lang="de-CH" sz="2100" dirty="0" err="1"/>
+              <a:t>nil</a:t>
+            </a:r>
+            <a:endParaRPr lang="de-CH" sz="2100" dirty="0"/>
+          </a:p>
+          <a:p>
+            <a:r>
+              <a:rPr lang="de-CH" sz="2100" dirty="0"/>
+              <a:t>«</a:t>
+            </a:r>
+            <a:r>
+              <a:rPr lang="de-CH" sz="2100" dirty="0" err="1"/>
+              <a:t>range</a:t>
+            </a:r>
+            <a:r>
+              <a:rPr lang="de-CH" sz="2100" dirty="0"/>
+              <a:t>» für Iteration</a:t>
+            </a:r>
+          </a:p>
+        </p:txBody>
+      </p:sp>
+      <p:pic>
+        <p:nvPicPr>
+          <p:cNvPr id="5122" name="Picture 2" descr="Principles of map type in GO | Golang for all">
+            <a:extLst>
+              <a:ext uri="{FF2B5EF4-FFF2-40B4-BE49-F238E27FC236}">
+                <a16:creationId xmlns:a16="http://schemas.microsoft.com/office/drawing/2014/main" id="{69F9ACEF-2D5B-86F1-8B14-5A58AEDD975F}"/>
+              </a:ext>
+            </a:extLst>
+          </p:cNvPr>
+          <p:cNvPicPr>
+            <a:picLocks noChangeAspect="1" noChangeArrowheads="1"/>
+          </p:cNvPicPr>
+          <p:nvPr/>
+        </p:nvPicPr>
+        <p:blipFill>
+          <a:blip r:embed="rId3">
+            <a:extLst>
+              <a:ext uri="{28A0092B-C50C-407E-A947-70E740481C1C}">
+                <a14:useLocalDpi xmlns:a14="http://schemas.microsoft.com/office/drawing/2010/main" val="0"/>
+              </a:ext>
+            </a:extLst>
+          </a:blip>
+          <a:srcRect/>
+          <a:stretch>
+            <a:fillRect/>
+          </a:stretch>
+        </p:blipFill>
+        <p:spPr bwMode="auto">
+          <a:xfrm flipH="1">
+            <a:off x="7917460" y="262271"/>
+            <a:ext cx="1056904" cy="1416469"/>
+          </a:xfrm>
+          <a:prstGeom prst="rect">
+            <a:avLst/>
+          </a:prstGeom>
+          <a:noFill/>
+          <a:extLst>
+            <a:ext uri="{909E8E84-426E-40DD-AFC4-6F175D3DCCD1}">
+              <a14:hiddenFill xmlns:a14="http://schemas.microsoft.com/office/drawing/2010/main">
+                <a:solidFill>
+                  <a:srgbClr val="FFFFFF"/>
+                </a:solidFill>
+              </a14:hiddenFill>
+            </a:ext>
+          </a:extLst>
+        </p:spPr>
+      </p:pic>
+    </p:spTree>
+    <p:extLst>
+      <p:ext uri="{BB962C8B-B14F-4D97-AF65-F5344CB8AC3E}">
+        <p14:creationId xmlns:p14="http://schemas.microsoft.com/office/powerpoint/2010/main" val="1655206865"/>
+      </p:ext>
+    </p:extLst>
+  </p:cSld>
+  <p:clrMapOvr>
+    <a:masterClrMapping/>
+  </p:clrMapOvr>
+</p:sld>
+</file>
+
+<file path=ppt/slides/slide9.xml><?xml version="1.0" encoding="utf-8"?>
+<p:sld xmlns:a="http://schemas.openxmlformats.org/drawingml/2006/main" xmlns:r="http://schemas.openxmlformats.org/officeDocument/2006/relationships" xmlns:p="http://schemas.openxmlformats.org/presentationml/2006/main">
+  <p:cSld>
+    <p:bg>
+      <p:bgPr>
+        <a:solidFill>
+          <a:schemeClr val="bg1"/>
+        </a:solidFill>
+        <a:effectLst/>
+      </p:bgPr>
+    </p:bg>
+    <p:spTree>
+      <p:nvGrpSpPr>
+        <p:cNvPr id="1" name="">
+          <a:extLst>
+            <a:ext uri="{FF2B5EF4-FFF2-40B4-BE49-F238E27FC236}">
+              <a16:creationId xmlns:a16="http://schemas.microsoft.com/office/drawing/2014/main" id="{1422B429-924E-38BF-0BC7-8AB83FA47097}"/>
+            </a:ext>
+          </a:extLst>
+        </p:cNvPr>
+        <p:cNvGrpSpPr/>
+        <p:nvPr/>
+      </p:nvGrpSpPr>
+      <p:grpSpPr>
+        <a:xfrm>
+          <a:off x="0" y="0"/>
+          <a:ext cx="0" cy="0"/>
+          <a:chOff x="0" y="0"/>
+          <a:chExt cx="0" cy="0"/>
+        </a:xfrm>
+      </p:grpSpPr>
+      <p:sp useBgFill="1">
+        <p:nvSpPr>
+          <p:cNvPr id="2057" name="Rectangle 2056">
+            <a:extLst>
+              <a:ext uri="{FF2B5EF4-FFF2-40B4-BE49-F238E27FC236}">
+                <a16:creationId xmlns:a16="http://schemas.microsoft.com/office/drawing/2014/main" id="{7402BCCD-8498-F895-FB49-3A6814D953FC}"/>
+              </a:ext>
+              <a:ext uri="{C183D7F6-B498-43B3-948B-1728B52AA6E4}">
+                <adec:decorative xmlns:adec="http://schemas.microsoft.com/office/drawing/2017/decorative" val="1"/>
+              </a:ext>
+            </a:extLst>
+          </p:cNvPr>
+          <p:cNvSpPr>
+            <a:spLocks noGrp="1" noRot="1" noChangeAspect="1" noMove="1" noResize="1" noEditPoints="1" noAdjustHandles="1" noChangeArrowheads="1" noChangeShapeType="1" noTextEdit="1"/>
+          </p:cNvSpPr>
+          <p:nvPr>
+            <p:extLst>
+              <p:ext uri="{386F3935-93C4-4BCD-93E2-E3B085C9AB24}">
+                <p16:designElem xmlns:p16="http://schemas.microsoft.com/office/powerpoint/2015/main" val="1"/>
+              </p:ext>
+            </p:extLst>
+          </p:nvPr>
+        </p:nvSpPr>
+        <p:spPr>
+          <a:xfrm>
+            <a:off x="0" y="0"/>
+            <a:ext cx="9143999" cy="6857365"/>
+          </a:xfrm>
+          <a:prstGeom prst="rect">
+            <a:avLst/>
+          </a:prstGeom>
+          <a:ln>
+            <a:noFill/>
+          </a:ln>
+        </p:spPr>
+        <p:style>
+          <a:lnRef idx="2">
+            <a:schemeClr val="accent1">
+              <a:shade val="50000"/>
+            </a:schemeClr>
+          </a:lnRef>
+          <a:fillRef idx="1">
+            <a:schemeClr val="accent1"/>
+          </a:fillRef>
+          <a:effectRef idx="0">
+            <a:schemeClr val="accent1"/>
+          </a:effectRef>
+          <a:fontRef idx="minor">
+            <a:schemeClr val="lt1"/>
+          </a:fontRef>
+        </p:style>
+        <p:txBody>
+          <a:bodyPr rtlCol="0" anchor="ctr"/>
+          <a:lstStyle/>
+          <a:p>
+            <a:pPr algn="ctr"/>
+            <a:endParaRPr lang="en-US"/>
+          </a:p>
+        </p:txBody>
+      </p:sp>
+      <p:sp>
+        <p:nvSpPr>
+          <p:cNvPr id="2" name="Titel 1">
+            <a:extLst>
+              <a:ext uri="{FF2B5EF4-FFF2-40B4-BE49-F238E27FC236}">
+                <a16:creationId xmlns:a16="http://schemas.microsoft.com/office/drawing/2014/main" id="{37AD8B81-93FE-CB35-DFBF-BA8F6C5E60FD}"/>
+              </a:ext>
+            </a:extLst>
+          </p:cNvPr>
+          <p:cNvSpPr>
+            <a:spLocks noGrp="1"/>
+          </p:cNvSpPr>
+          <p:nvPr>
+            <p:ph type="title"/>
+          </p:nvPr>
+        </p:nvSpPr>
+        <p:spPr>
+          <a:xfrm>
+            <a:off x="606478" y="386930"/>
+            <a:ext cx="6927525" cy="1188950"/>
+          </a:xfrm>
+        </p:spPr>
+        <p:txBody>
+          <a:bodyPr anchor="b">
+            <a:normAutofit/>
+          </a:bodyPr>
+          <a:lstStyle/>
+          <a:p>
+            <a:r>
+              <a:rPr lang="de-CH" sz="4700" dirty="0"/>
+              <a:t>Maps Code Beispiele</a:t>
+            </a:r>
+          </a:p>
+        </p:txBody>
+      </p:sp>
+      <p:grpSp>
+        <p:nvGrpSpPr>
+          <p:cNvPr id="2059" name="Group 2058">
+            <a:extLst>
+              <a:ext uri="{FF2B5EF4-FFF2-40B4-BE49-F238E27FC236}">
+                <a16:creationId xmlns:a16="http://schemas.microsoft.com/office/drawing/2014/main" id="{DE216921-7EE9-EFE6-44AD-A3B756E86DC1}"/>
+              </a:ext>
+              <a:ext uri="{C183D7F6-B498-43B3-948B-1728B52AA6E4}">
+                <adec:decorative xmlns:adec="http://schemas.microsoft.com/office/drawing/2017/decorative" val="1"/>
+              </a:ext>
+            </a:extLst>
+          </p:cNvPr>
+          <p:cNvGrpSpPr>
+            <a:grpSpLocks noGrp="1" noUngrp="1" noRot="1" noChangeAspect="1" noMove="1" noResize="1"/>
+          </p:cNvGrpSpPr>
+          <p:nvPr>
+            <p:extLst>
+              <p:ext uri="{386F3935-93C4-4BCD-93E2-E3B085C9AB24}">
+                <p16:designElem xmlns:p16="http://schemas.microsoft.com/office/powerpoint/2015/main" val="1"/>
+              </p:ext>
+            </p:extLst>
+          </p:nvPr>
+        </p:nvGrpSpPr>
+        <p:grpSpPr>
+          <a:xfrm>
+            <a:off x="-1" y="1998368"/>
+            <a:ext cx="8771274" cy="782176"/>
+            <a:chOff x="-2" y="1998368"/>
+            <a:chExt cx="11695083" cy="782176"/>
+          </a:xfrm>
+        </p:grpSpPr>
+        <p:sp>
+          <p:nvSpPr>
+            <p:cNvPr id="2060" name="Rectangle 2059">
+              <a:extLst>
+                <a:ext uri="{FF2B5EF4-FFF2-40B4-BE49-F238E27FC236}">
+                  <a16:creationId xmlns:a16="http://schemas.microsoft.com/office/drawing/2014/main" id="{3835E63B-DABD-FA75-AE20-E2F8F53925E9}"/>
+                </a:ext>
+                <a:ext uri="{C183D7F6-B498-43B3-948B-1728B52AA6E4}">
+                  <adec:decorative xmlns:adec="http://schemas.microsoft.com/office/drawing/2017/decorative" val="1"/>
+                </a:ext>
+              </a:extLst>
+            </p:cNvPr>
+            <p:cNvSpPr/>
+            <p:nvPr>
+              <p:extLst>
+                <p:ext uri="{386F3935-93C4-4BCD-93E2-E3B085C9AB24}">
+                  <p16:designElem xmlns:p16="http://schemas.microsoft.com/office/powerpoint/2015/main" val="1"/>
+                </p:ext>
+              </p:extLst>
+            </p:nvPr>
+          </p:nvSpPr>
+          <p:spPr>
+            <a:xfrm rot="5400000">
+              <a:off x="11228040" y="2313027"/>
+              <a:ext cx="781700" cy="152382"/>
+            </a:xfrm>
+            <a:prstGeom prst="rect">
+              <a:avLst/>
+            </a:prstGeom>
+            <a:solidFill>
+              <a:schemeClr val="accent4"/>
+            </a:solidFill>
+            <a:ln>
+              <a:noFill/>
+            </a:ln>
+          </p:spPr>
+          <p:style>
+            <a:lnRef idx="2">
+              <a:schemeClr val="accent1">
+                <a:shade val="50000"/>
+              </a:schemeClr>
+            </a:lnRef>
+            <a:fillRef idx="1">
+              <a:schemeClr val="accent1"/>
+            </a:fillRef>
+            <a:effectRef idx="0">
+              <a:schemeClr val="accent1"/>
+            </a:effectRef>
+            <a:fontRef idx="minor">
+              <a:schemeClr val="lt1"/>
+            </a:fontRef>
+          </p:style>
+          <p:txBody>
+            <a:bodyPr rtlCol="0" anchor="ctr"/>
+            <a:lstStyle/>
+            <a:p>
+              <a:pPr algn="ctr"/>
+              <a:endParaRPr lang="en-US"/>
+            </a:p>
+          </p:txBody>
+        </p:sp>
+        <p:sp>
+          <p:nvSpPr>
+            <p:cNvPr id="2061" name="Rectangle 2060">
+              <a:extLst>
+                <a:ext uri="{FF2B5EF4-FFF2-40B4-BE49-F238E27FC236}">
+                  <a16:creationId xmlns:a16="http://schemas.microsoft.com/office/drawing/2014/main" id="{3B6EA3F6-276C-754D-03DB-3A255433B2A9}"/>
+                </a:ext>
+                <a:ext uri="{C183D7F6-B498-43B3-948B-1728B52AA6E4}">
+                  <adec:decorative xmlns:adec="http://schemas.microsoft.com/office/drawing/2017/decorative" val="1"/>
+                </a:ext>
+              </a:extLst>
+            </p:cNvPr>
+            <p:cNvSpPr/>
+            <p:nvPr>
+              <p:extLst>
+                <p:ext uri="{386F3935-93C4-4BCD-93E2-E3B085C9AB24}">
+                  <p16:designElem xmlns:p16="http://schemas.microsoft.com/office/powerpoint/2015/main" val="1"/>
+                </p:ext>
+              </p:extLst>
+            </p:nvPr>
+          </p:nvSpPr>
+          <p:spPr>
+            <a:xfrm flipH="1" flipV="1">
+              <a:off x="-2" y="1998845"/>
+              <a:ext cx="11454595" cy="781699"/>
+            </a:xfrm>
+            <a:prstGeom prst="rect">
+              <a:avLst/>
+            </a:prstGeom>
+            <a:solidFill>
+              <a:schemeClr val="accent4"/>
+            </a:solidFill>
+            <a:ln>
+              <a:noFill/>
+            </a:ln>
+          </p:spPr>
+          <p:style>
+            <a:lnRef idx="2">
+              <a:schemeClr val="accent1">
+                <a:shade val="50000"/>
+              </a:schemeClr>
+            </a:lnRef>
+            <a:fillRef idx="1">
+              <a:schemeClr val="accent1"/>
+            </a:fillRef>
+            <a:effectRef idx="0">
+              <a:schemeClr val="accent1"/>
+            </a:effectRef>
+            <a:fontRef idx="minor">
+              <a:schemeClr val="lt1"/>
+            </a:fontRef>
+          </p:style>
+          <p:txBody>
+            <a:bodyPr rtlCol="0" anchor="ctr"/>
+            <a:lstStyle/>
+            <a:p>
+              <a:pPr algn="ctr"/>
+              <a:endParaRPr lang="en-US"/>
+            </a:p>
+          </p:txBody>
+        </p:sp>
+      </p:grpSp>
+      <p:sp>
+        <p:nvSpPr>
+          <p:cNvPr id="2063" name="Rectangle 2062">
+            <a:extLst>
+              <a:ext uri="{FF2B5EF4-FFF2-40B4-BE49-F238E27FC236}">
+                <a16:creationId xmlns:a16="http://schemas.microsoft.com/office/drawing/2014/main" id="{82F5968E-22DD-92BC-BF02-61C6E2E954CC}"/>
+              </a:ext>
+              <a:ext uri="{C183D7F6-B498-43B3-948B-1728B52AA6E4}">
+                <adec:decorative xmlns:adec="http://schemas.microsoft.com/office/drawing/2017/decorative" val="1"/>
+              </a:ext>
+            </a:extLst>
+          </p:cNvPr>
+          <p:cNvSpPr>
+            <a:spLocks noGrp="1" noRot="1" noChangeAspect="1" noMove="1" noResize="1" noEditPoints="1" noAdjustHandles="1" noChangeArrowheads="1" noChangeShapeType="1" noTextEdit="1"/>
+          </p:cNvSpPr>
+          <p:nvPr>
+            <p:extLst>
+              <p:ext uri="{386F3935-93C4-4BCD-93E2-E3B085C9AB24}">
+                <p16:designElem xmlns:p16="http://schemas.microsoft.com/office/powerpoint/2015/main" val="1"/>
+              </p:ext>
+            </p:extLst>
+          </p:nvPr>
+        </p:nvSpPr>
+        <p:spPr>
+          <a:xfrm>
+            <a:off x="0" y="2203079"/>
+            <a:ext cx="8537521" cy="4147845"/>
+          </a:xfrm>
+          <a:prstGeom prst="rect">
+            <a:avLst/>
+          </a:prstGeom>
+          <a:solidFill>
+            <a:schemeClr val="bg1"/>
+          </a:solidFill>
+          <a:ln>
+            <a:noFill/>
+          </a:ln>
+          <a:effectLst>
+            <a:outerShdw blurRad="139700" dist="127000" dir="5400000" algn="t" rotWithShape="0">
+              <a:prstClr val="black">
+                <a:alpha val="15000"/>
+              </a:prstClr>
+            </a:outerShdw>
+          </a:effectLst>
+        </p:spPr>
+        <p:style>
+          <a:lnRef idx="2">
+            <a:schemeClr val="accent1">
+              <a:shade val="50000"/>
+            </a:schemeClr>
+          </a:lnRef>
+          <a:fillRef idx="1">
+            <a:schemeClr val="accent1"/>
+          </a:fillRef>
+          <a:effectRef idx="0">
+            <a:schemeClr val="accent1"/>
+          </a:effectRef>
+          <a:fontRef idx="minor">
+            <a:schemeClr val="lt1"/>
+          </a:fontRef>
+        </p:style>
+        <p:txBody>
+          <a:bodyPr rtlCol="0" anchor="ctr"/>
+          <a:lstStyle/>
+          <a:p>
+            <a:pPr algn="ctr"/>
+            <a:endParaRPr lang="en-US"/>
+          </a:p>
+        </p:txBody>
+      </p:sp>
+      <p:pic>
+        <p:nvPicPr>
+          <p:cNvPr id="5" name="Content Placeholder 4">
+            <a:extLst>
+              <a:ext uri="{FF2B5EF4-FFF2-40B4-BE49-F238E27FC236}">
+                <a16:creationId xmlns:a16="http://schemas.microsoft.com/office/drawing/2014/main" id="{C124BCC5-BC45-8F4A-453A-D063416C41D6}"/>
+              </a:ext>
+            </a:extLst>
+          </p:cNvPr>
+          <p:cNvPicPr>
+            <a:picLocks noGrp="1" noChangeAspect="1"/>
+          </p:cNvPicPr>
+          <p:nvPr>
+            <p:ph idx="1"/>
+          </p:nvPr>
+        </p:nvPicPr>
+        <p:blipFill>
+          <a:blip r:embed="rId2"/>
+          <a:stretch>
+            <a:fillRect/>
+          </a:stretch>
+        </p:blipFill>
+        <p:spPr>
+          <a:xfrm>
+            <a:off x="79103" y="2340989"/>
+            <a:ext cx="7454900" cy="2438400"/>
+          </a:xfrm>
+          <a:prstGeom prst="rect">
+            <a:avLst/>
+          </a:prstGeom>
+        </p:spPr>
+      </p:pic>
+      <p:pic>
+        <p:nvPicPr>
+          <p:cNvPr id="6" name="Picture 5">
+            <a:extLst>
+              <a:ext uri="{FF2B5EF4-FFF2-40B4-BE49-F238E27FC236}">
+                <a16:creationId xmlns:a16="http://schemas.microsoft.com/office/drawing/2014/main" id="{6B8505F5-DDE7-A0BA-C31D-E4A3E7D20CE4}"/>
+              </a:ext>
+            </a:extLst>
+          </p:cNvPr>
+          <p:cNvPicPr>
+            <a:picLocks noChangeAspect="1"/>
+          </p:cNvPicPr>
+          <p:nvPr/>
+        </p:nvPicPr>
+        <p:blipFill>
+          <a:blip r:embed="rId3"/>
+          <a:stretch>
+            <a:fillRect/>
+          </a:stretch>
+        </p:blipFill>
+        <p:spPr>
+          <a:xfrm>
+            <a:off x="79103" y="5209556"/>
+            <a:ext cx="5346700" cy="711200"/>
+          </a:xfrm>
+          <a:prstGeom prst="rect">
+            <a:avLst/>
+          </a:prstGeom>
+        </p:spPr>
+      </p:pic>
+      <p:pic>
+        <p:nvPicPr>
+          <p:cNvPr id="3" name="Picture 2" descr="Principles of map type in GO | Golang for all">
+            <a:extLst>
+              <a:ext uri="{FF2B5EF4-FFF2-40B4-BE49-F238E27FC236}">
+                <a16:creationId xmlns:a16="http://schemas.microsoft.com/office/drawing/2014/main" id="{7D01E7C5-2454-E971-939B-A66EC48F7983}"/>
+              </a:ext>
+            </a:extLst>
+          </p:cNvPr>
+          <p:cNvPicPr>
+            <a:picLocks noChangeAspect="1" noChangeArrowheads="1"/>
+          </p:cNvPicPr>
+          <p:nvPr/>
+        </p:nvPicPr>
+        <p:blipFill>
+          <a:blip r:embed="rId4">
+            <a:extLst>
+              <a:ext uri="{28A0092B-C50C-407E-A947-70E740481C1C}">
+                <a14:useLocalDpi xmlns:a14="http://schemas.microsoft.com/office/drawing/2010/main" val="0"/>
+              </a:ext>
+            </a:extLst>
+          </a:blip>
+          <a:srcRect/>
+          <a:stretch>
+            <a:fillRect/>
+          </a:stretch>
+        </p:blipFill>
+        <p:spPr bwMode="auto">
+          <a:xfrm flipH="1">
+            <a:off x="7917460" y="262271"/>
+            <a:ext cx="1056904" cy="1416469"/>
+          </a:xfrm>
+          <a:prstGeom prst="rect">
+            <a:avLst/>
+          </a:prstGeom>
+          <a:noFill/>
+          <a:extLst>
+            <a:ext uri="{909E8E84-426E-40DD-AFC4-6F175D3DCCD1}">
+              <a14:hiddenFill xmlns:a14="http://schemas.microsoft.com/office/drawing/2010/main">
+                <a:solidFill>
+                  <a:srgbClr val="FFFFFF"/>
+                </a:solidFill>
+              </a14:hiddenFill>
+            </a:ext>
+          </a:extLst>
+        </p:spPr>
+      </p:pic>
+    </p:spTree>
+    <p:extLst>
+      <p:ext uri="{BB962C8B-B14F-4D97-AF65-F5344CB8AC3E}">
+        <p14:creationId xmlns:p14="http://schemas.microsoft.com/office/powerpoint/2010/main" val="3427786389"/>
       </p:ext>
     </p:extLst>
   </p:cSld>
